--- a/CAPSTONE_DELIVERABLES/Snipper_Tool_Reality_vs_Official_Paris_UPDATED.pptx
+++ b/CAPSTONE_DELIVERABLES/Snipper_Tool_Reality_vs_Official_Paris_UPDATED.pptx
@@ -5,33 +5,32 @@
     <p:sldMasterId id="2147483648" r:id="rId1"/>
   </p:sldMasterIdLst>
   <p:sldIdLst>
-    <p:sldId id="256" r:id="rId7"/>
-    <p:sldId id="257" r:id="rId8"/>
-    <p:sldId id="258" r:id="rId9"/>
-    <p:sldId id="259" r:id="rId10"/>
-    <p:sldId id="260" r:id="rId11"/>
-    <p:sldId id="261" r:id="rId12"/>
-    <p:sldId id="262" r:id="rId13"/>
-    <p:sldId id="263" r:id="rId14"/>
-    <p:sldId id="264" r:id="rId15"/>
-    <p:sldId id="265" r:id="rId16"/>
-    <p:sldId id="266" r:id="rId17"/>
-    <p:sldId id="267" r:id="rId18"/>
-    <p:sldId id="268" r:id="rId19"/>
-    <p:sldId id="269" r:id="rId20"/>
-    <p:sldId id="270" r:id="rId21"/>
-    <p:sldId id="271" r:id="rId22"/>
-    <p:sldId id="272" r:id="rId23"/>
-    <p:sldId id="273" r:id="rId24"/>
-    <p:sldId id="274" r:id="rId25"/>
-    <p:sldId id="275" r:id="rId26"/>
-    <p:sldId id="276" r:id="rId27"/>
-    <p:sldId id="277" r:id="rId28"/>
-    <p:sldId id="278" r:id="rId29"/>
-    <p:sldId id="279" r:id="rId30"/>
-    <p:sldId id="280" r:id="rId31"/>
-    <p:sldId id="281" r:id="rId32"/>
-    <p:sldId id="282" r:id="rId33"/>
+    <p:sldId id="256" r:id="rId2"/>
+    <p:sldId id="257" r:id="rId3"/>
+    <p:sldId id="258" r:id="rId4"/>
+    <p:sldId id="259" r:id="rId5"/>
+    <p:sldId id="260" r:id="rId6"/>
+    <p:sldId id="261" r:id="rId7"/>
+    <p:sldId id="262" r:id="rId8"/>
+    <p:sldId id="263" r:id="rId9"/>
+    <p:sldId id="264" r:id="rId10"/>
+    <p:sldId id="265" r:id="rId11"/>
+    <p:sldId id="266" r:id="rId12"/>
+    <p:sldId id="267" r:id="rId13"/>
+    <p:sldId id="268" r:id="rId14"/>
+    <p:sldId id="269" r:id="rId15"/>
+    <p:sldId id="270" r:id="rId16"/>
+    <p:sldId id="271" r:id="rId17"/>
+    <p:sldId id="272" r:id="rId18"/>
+    <p:sldId id="273" r:id="rId19"/>
+    <p:sldId id="274" r:id="rId20"/>
+    <p:sldId id="275" r:id="rId21"/>
+    <p:sldId id="276" r:id="rId22"/>
+    <p:sldId id="277" r:id="rId23"/>
+    <p:sldId id="278" r:id="rId24"/>
+    <p:sldId id="279" r:id="rId25"/>
+    <p:sldId id="280" r:id="rId26"/>
+    <p:sldId id="282" r:id="rId27"/>
   </p:sldIdLst>
   <p:sldSz cx="9144000" cy="6858000" type="screen4x3"/>
   <p:notesSz cx="6858000" cy="9144000"/>
@@ -130,6 +129,22 @@
       </a:defRPr>
     </a:lvl9pPr>
   </p:defaultTextStyle>
+  <p:extLst>
+    <p:ext uri="{EFAFB233-063F-42B5-8137-9DF3F51BA10A}">
+      <p15:sldGuideLst xmlns:p15="http://schemas.microsoft.com/office/powerpoint/2012/main">
+        <p15:guide id="1" orient="horz" pos="2160">
+          <p15:clr>
+            <a:srgbClr val="A4A3A4"/>
+          </p15:clr>
+        </p15:guide>
+        <p15:guide id="2" pos="2880">
+          <p15:clr>
+            <a:srgbClr val="A4A3A4"/>
+          </p15:clr>
+        </p15:guide>
+      </p15:sldGuideLst>
+    </p:ext>
+  </p:extLst>
 </p:presentation>
 </file>
 
@@ -171,10 +186,9 @@
           <a:lstStyle/>
           <a:p>
             <a:r>
-              <a:rPr lang="en-US" smtClean="0"/>
+              <a:rPr lang="en-US"/>
               <a:t>Click to edit Master title style</a:t>
             </a:r>
-            <a:endParaRPr lang="en-US"/>
           </a:p>
         </p:txBody>
       </p:sp>
@@ -290,10 +304,9 @@
           </a:lstStyle>
           <a:p>
             <a:r>
-              <a:rPr lang="en-US" smtClean="0"/>
+              <a:rPr lang="en-US"/>
               <a:t>Click to edit Master subtitle style</a:t>
             </a:r>
-            <a:endParaRPr lang="en-US"/>
           </a:p>
         </p:txBody>
       </p:sp>
@@ -314,7 +327,7 @@
           <a:p>
             <a:fld id="{5BCAD085-E8A6-8845-BD4E-CB4CCA059FC4}" type="datetimeFigureOut">
               <a:rPr lang="en-US" smtClean="0"/>
-              <a:t>1/27/13</a:t>
+              <a:t>28-Apr-26</a:t>
             </a:fld>
             <a:endParaRPr lang="en-US"/>
           </a:p>
@@ -408,10 +421,9 @@
           <a:lstStyle/>
           <a:p>
             <a:r>
-              <a:rPr lang="en-US" smtClean="0"/>
+              <a:rPr lang="en-US"/>
               <a:t>Click to edit Master title style</a:t>
             </a:r>
-            <a:endParaRPr lang="en-US"/>
           </a:p>
         </p:txBody>
       </p:sp>
@@ -432,38 +444,37 @@
           <a:p>
             <a:pPr lvl="0"/>
             <a:r>
-              <a:rPr lang="en-US" smtClean="0"/>
+              <a:rPr lang="en-US"/>
               <a:t>Click to edit Master text styles</a:t>
             </a:r>
           </a:p>
           <a:p>
             <a:pPr lvl="1"/>
             <a:r>
-              <a:rPr lang="en-US" smtClean="0"/>
+              <a:rPr lang="en-US"/>
               <a:t>Second level</a:t>
             </a:r>
           </a:p>
           <a:p>
             <a:pPr lvl="2"/>
             <a:r>
-              <a:rPr lang="en-US" smtClean="0"/>
+              <a:rPr lang="en-US"/>
               <a:t>Third level</a:t>
             </a:r>
           </a:p>
           <a:p>
             <a:pPr lvl="3"/>
             <a:r>
-              <a:rPr lang="en-US" smtClean="0"/>
+              <a:rPr lang="en-US"/>
               <a:t>Fourth level</a:t>
             </a:r>
           </a:p>
           <a:p>
             <a:pPr lvl="4"/>
             <a:r>
-              <a:rPr lang="en-US" smtClean="0"/>
+              <a:rPr lang="en-US"/>
               <a:t>Fifth level</a:t>
             </a:r>
-            <a:endParaRPr lang="en-US"/>
           </a:p>
         </p:txBody>
       </p:sp>
@@ -484,7 +495,7 @@
           <a:p>
             <a:fld id="{5BCAD085-E8A6-8845-BD4E-CB4CCA059FC4}" type="datetimeFigureOut">
               <a:rPr lang="en-US" smtClean="0"/>
-              <a:t>1/27/13</a:t>
+              <a:t>28-Apr-26</a:t>
             </a:fld>
             <a:endParaRPr lang="en-US"/>
           </a:p>
@@ -583,10 +594,9 @@
           <a:lstStyle/>
           <a:p>
             <a:r>
-              <a:rPr lang="en-US" smtClean="0"/>
+              <a:rPr lang="en-US"/>
               <a:t>Click to edit Master title style</a:t>
             </a:r>
-            <a:endParaRPr lang="en-US"/>
           </a:p>
         </p:txBody>
       </p:sp>
@@ -612,38 +622,37 @@
           <a:p>
             <a:pPr lvl="0"/>
             <a:r>
-              <a:rPr lang="en-US" smtClean="0"/>
+              <a:rPr lang="en-US"/>
               <a:t>Click to edit Master text styles</a:t>
             </a:r>
           </a:p>
           <a:p>
             <a:pPr lvl="1"/>
             <a:r>
-              <a:rPr lang="en-US" smtClean="0"/>
+              <a:rPr lang="en-US"/>
               <a:t>Second level</a:t>
             </a:r>
           </a:p>
           <a:p>
             <a:pPr lvl="2"/>
             <a:r>
-              <a:rPr lang="en-US" smtClean="0"/>
+              <a:rPr lang="en-US"/>
               <a:t>Third level</a:t>
             </a:r>
           </a:p>
           <a:p>
             <a:pPr lvl="3"/>
             <a:r>
-              <a:rPr lang="en-US" smtClean="0"/>
+              <a:rPr lang="en-US"/>
               <a:t>Fourth level</a:t>
             </a:r>
           </a:p>
           <a:p>
             <a:pPr lvl="4"/>
             <a:r>
-              <a:rPr lang="en-US" smtClean="0"/>
+              <a:rPr lang="en-US"/>
               <a:t>Fifth level</a:t>
             </a:r>
-            <a:endParaRPr lang="en-US"/>
           </a:p>
         </p:txBody>
       </p:sp>
@@ -664,7 +673,7 @@
           <a:p>
             <a:fld id="{5BCAD085-E8A6-8845-BD4E-CB4CCA059FC4}" type="datetimeFigureOut">
               <a:rPr lang="en-US" smtClean="0"/>
-              <a:t>1/27/13</a:t>
+              <a:t>28-Apr-26</a:t>
             </a:fld>
             <a:endParaRPr lang="en-US"/>
           </a:p>
@@ -758,10 +767,9 @@
           <a:lstStyle/>
           <a:p>
             <a:r>
-              <a:rPr lang="en-US" smtClean="0"/>
+              <a:rPr lang="en-US"/>
               <a:t>Click to edit Master title style</a:t>
             </a:r>
-            <a:endParaRPr lang="en-US"/>
           </a:p>
         </p:txBody>
       </p:sp>
@@ -782,38 +790,37 @@
           <a:p>
             <a:pPr lvl="0"/>
             <a:r>
-              <a:rPr lang="en-US" smtClean="0"/>
+              <a:rPr lang="en-US"/>
               <a:t>Click to edit Master text styles</a:t>
             </a:r>
           </a:p>
           <a:p>
             <a:pPr lvl="1"/>
             <a:r>
-              <a:rPr lang="en-US" smtClean="0"/>
+              <a:rPr lang="en-US"/>
               <a:t>Second level</a:t>
             </a:r>
           </a:p>
           <a:p>
             <a:pPr lvl="2"/>
             <a:r>
-              <a:rPr lang="en-US" smtClean="0"/>
+              <a:rPr lang="en-US"/>
               <a:t>Third level</a:t>
             </a:r>
           </a:p>
           <a:p>
             <a:pPr lvl="3"/>
             <a:r>
-              <a:rPr lang="en-US" smtClean="0"/>
+              <a:rPr lang="en-US"/>
               <a:t>Fourth level</a:t>
             </a:r>
           </a:p>
           <a:p>
             <a:pPr lvl="4"/>
             <a:r>
-              <a:rPr lang="en-US" smtClean="0"/>
+              <a:rPr lang="en-US"/>
               <a:t>Fifth level</a:t>
             </a:r>
-            <a:endParaRPr lang="en-US"/>
           </a:p>
         </p:txBody>
       </p:sp>
@@ -834,7 +841,7 @@
           <a:p>
             <a:fld id="{5BCAD085-E8A6-8845-BD4E-CB4CCA059FC4}" type="datetimeFigureOut">
               <a:rPr lang="en-US" smtClean="0"/>
-              <a:t>1/27/13</a:t>
+              <a:t>28-Apr-26</a:t>
             </a:fld>
             <a:endParaRPr lang="en-US"/>
           </a:p>
@@ -937,10 +944,9 @@
           </a:lstStyle>
           <a:p>
             <a:r>
-              <a:rPr lang="en-US" smtClean="0"/>
+              <a:rPr lang="en-US"/>
               <a:t>Click to edit Master title style</a:t>
             </a:r>
-            <a:endParaRPr lang="en-US"/>
           </a:p>
         </p:txBody>
       </p:sp>
@@ -1057,7 +1063,7 @@
           <a:p>
             <a:pPr lvl="0"/>
             <a:r>
-              <a:rPr lang="en-US" smtClean="0"/>
+              <a:rPr lang="en-US"/>
               <a:t>Click to edit Master text styles</a:t>
             </a:r>
           </a:p>
@@ -1080,7 +1086,7 @@
           <a:p>
             <a:fld id="{5BCAD085-E8A6-8845-BD4E-CB4CCA059FC4}" type="datetimeFigureOut">
               <a:rPr lang="en-US" smtClean="0"/>
-              <a:t>1/27/13</a:t>
+              <a:t>28-Apr-26</a:t>
             </a:fld>
             <a:endParaRPr lang="en-US"/>
           </a:p>
@@ -1174,10 +1180,9 @@
           <a:lstStyle/>
           <a:p>
             <a:r>
-              <a:rPr lang="en-US" smtClean="0"/>
+              <a:rPr lang="en-US"/>
               <a:t>Click to edit Master title style</a:t>
             </a:r>
-            <a:endParaRPr lang="en-US"/>
           </a:p>
         </p:txBody>
       </p:sp>
@@ -1231,38 +1236,37 @@
           <a:p>
             <a:pPr lvl="0"/>
             <a:r>
-              <a:rPr lang="en-US" smtClean="0"/>
+              <a:rPr lang="en-US"/>
               <a:t>Click to edit Master text styles</a:t>
             </a:r>
           </a:p>
           <a:p>
             <a:pPr lvl="1"/>
             <a:r>
-              <a:rPr lang="en-US" smtClean="0"/>
+              <a:rPr lang="en-US"/>
               <a:t>Second level</a:t>
             </a:r>
           </a:p>
           <a:p>
             <a:pPr lvl="2"/>
             <a:r>
-              <a:rPr lang="en-US" smtClean="0"/>
+              <a:rPr lang="en-US"/>
               <a:t>Third level</a:t>
             </a:r>
           </a:p>
           <a:p>
             <a:pPr lvl="3"/>
             <a:r>
-              <a:rPr lang="en-US" smtClean="0"/>
+              <a:rPr lang="en-US"/>
               <a:t>Fourth level</a:t>
             </a:r>
           </a:p>
           <a:p>
             <a:pPr lvl="4"/>
             <a:r>
-              <a:rPr lang="en-US" smtClean="0"/>
+              <a:rPr lang="en-US"/>
               <a:t>Fifth level</a:t>
             </a:r>
-            <a:endParaRPr lang="en-US"/>
           </a:p>
         </p:txBody>
       </p:sp>
@@ -1316,38 +1320,37 @@
           <a:p>
             <a:pPr lvl="0"/>
             <a:r>
-              <a:rPr lang="en-US" smtClean="0"/>
+              <a:rPr lang="en-US"/>
               <a:t>Click to edit Master text styles</a:t>
             </a:r>
           </a:p>
           <a:p>
             <a:pPr lvl="1"/>
             <a:r>
-              <a:rPr lang="en-US" smtClean="0"/>
+              <a:rPr lang="en-US"/>
               <a:t>Second level</a:t>
             </a:r>
           </a:p>
           <a:p>
             <a:pPr lvl="2"/>
             <a:r>
-              <a:rPr lang="en-US" smtClean="0"/>
+              <a:rPr lang="en-US"/>
               <a:t>Third level</a:t>
             </a:r>
           </a:p>
           <a:p>
             <a:pPr lvl="3"/>
             <a:r>
-              <a:rPr lang="en-US" smtClean="0"/>
+              <a:rPr lang="en-US"/>
               <a:t>Fourth level</a:t>
             </a:r>
           </a:p>
           <a:p>
             <a:pPr lvl="4"/>
             <a:r>
-              <a:rPr lang="en-US" smtClean="0"/>
+              <a:rPr lang="en-US"/>
               <a:t>Fifth level</a:t>
             </a:r>
-            <a:endParaRPr lang="en-US"/>
           </a:p>
         </p:txBody>
       </p:sp>
@@ -1368,7 +1371,7 @@
           <a:p>
             <a:fld id="{5BCAD085-E8A6-8845-BD4E-CB4CCA059FC4}" type="datetimeFigureOut">
               <a:rPr lang="en-US" smtClean="0"/>
-              <a:t>1/27/13</a:t>
+              <a:t>28-Apr-26</a:t>
             </a:fld>
             <a:endParaRPr lang="en-US"/>
           </a:p>
@@ -1466,10 +1469,9 @@
           </a:lstStyle>
           <a:p>
             <a:r>
-              <a:rPr lang="en-US" smtClean="0"/>
+              <a:rPr lang="en-US"/>
               <a:t>Click to edit Master title style</a:t>
             </a:r>
-            <a:endParaRPr lang="en-US"/>
           </a:p>
         </p:txBody>
       </p:sp>
@@ -1532,7 +1534,7 @@
           <a:p>
             <a:pPr lvl="0"/>
             <a:r>
-              <a:rPr lang="en-US" smtClean="0"/>
+              <a:rPr lang="en-US"/>
               <a:t>Click to edit Master text styles</a:t>
             </a:r>
           </a:p>
@@ -1588,38 +1590,37 @@
           <a:p>
             <a:pPr lvl="0"/>
             <a:r>
-              <a:rPr lang="en-US" smtClean="0"/>
+              <a:rPr lang="en-US"/>
               <a:t>Click to edit Master text styles</a:t>
             </a:r>
           </a:p>
           <a:p>
             <a:pPr lvl="1"/>
             <a:r>
-              <a:rPr lang="en-US" smtClean="0"/>
+              <a:rPr lang="en-US"/>
               <a:t>Second level</a:t>
             </a:r>
           </a:p>
           <a:p>
             <a:pPr lvl="2"/>
             <a:r>
-              <a:rPr lang="en-US" smtClean="0"/>
+              <a:rPr lang="en-US"/>
               <a:t>Third level</a:t>
             </a:r>
           </a:p>
           <a:p>
             <a:pPr lvl="3"/>
             <a:r>
-              <a:rPr lang="en-US" smtClean="0"/>
+              <a:rPr lang="en-US"/>
               <a:t>Fourth level</a:t>
             </a:r>
           </a:p>
           <a:p>
             <a:pPr lvl="4"/>
             <a:r>
-              <a:rPr lang="en-US" smtClean="0"/>
+              <a:rPr lang="en-US"/>
               <a:t>Fifth level</a:t>
             </a:r>
-            <a:endParaRPr lang="en-US"/>
           </a:p>
         </p:txBody>
       </p:sp>
@@ -1682,7 +1683,7 @@
           <a:p>
             <a:pPr lvl="0"/>
             <a:r>
-              <a:rPr lang="en-US" smtClean="0"/>
+              <a:rPr lang="en-US"/>
               <a:t>Click to edit Master text styles</a:t>
             </a:r>
           </a:p>
@@ -1738,38 +1739,37 @@
           <a:p>
             <a:pPr lvl="0"/>
             <a:r>
-              <a:rPr lang="en-US" smtClean="0"/>
+              <a:rPr lang="en-US"/>
               <a:t>Click to edit Master text styles</a:t>
             </a:r>
           </a:p>
           <a:p>
             <a:pPr lvl="1"/>
             <a:r>
-              <a:rPr lang="en-US" smtClean="0"/>
+              <a:rPr lang="en-US"/>
               <a:t>Second level</a:t>
             </a:r>
           </a:p>
           <a:p>
             <a:pPr lvl="2"/>
             <a:r>
-              <a:rPr lang="en-US" smtClean="0"/>
+              <a:rPr lang="en-US"/>
               <a:t>Third level</a:t>
             </a:r>
           </a:p>
           <a:p>
             <a:pPr lvl="3"/>
             <a:r>
-              <a:rPr lang="en-US" smtClean="0"/>
+              <a:rPr lang="en-US"/>
               <a:t>Fourth level</a:t>
             </a:r>
           </a:p>
           <a:p>
             <a:pPr lvl="4"/>
             <a:r>
-              <a:rPr lang="en-US" smtClean="0"/>
+              <a:rPr lang="en-US"/>
               <a:t>Fifth level</a:t>
             </a:r>
-            <a:endParaRPr lang="en-US"/>
           </a:p>
         </p:txBody>
       </p:sp>
@@ -1790,7 +1790,7 @@
           <a:p>
             <a:fld id="{5BCAD085-E8A6-8845-BD4E-CB4CCA059FC4}" type="datetimeFigureOut">
               <a:rPr lang="en-US" smtClean="0"/>
-              <a:t>1/27/13</a:t>
+              <a:t>28-Apr-26</a:t>
             </a:fld>
             <a:endParaRPr lang="en-US"/>
           </a:p>
@@ -1884,10 +1884,9 @@
           <a:lstStyle/>
           <a:p>
             <a:r>
-              <a:rPr lang="en-US" smtClean="0"/>
+              <a:rPr lang="en-US"/>
               <a:t>Click to edit Master title style</a:t>
             </a:r>
-            <a:endParaRPr lang="en-US"/>
           </a:p>
         </p:txBody>
       </p:sp>
@@ -1908,7 +1907,7 @@
           <a:p>
             <a:fld id="{5BCAD085-E8A6-8845-BD4E-CB4CCA059FC4}" type="datetimeFigureOut">
               <a:rPr lang="en-US" smtClean="0"/>
-              <a:t>1/27/13</a:t>
+              <a:t>28-Apr-26</a:t>
             </a:fld>
             <a:endParaRPr lang="en-US"/>
           </a:p>
@@ -2003,7 +2002,7 @@
           <a:p>
             <a:fld id="{5BCAD085-E8A6-8845-BD4E-CB4CCA059FC4}" type="datetimeFigureOut">
               <a:rPr lang="en-US" smtClean="0"/>
-              <a:t>1/27/13</a:t>
+              <a:t>28-Apr-26</a:t>
             </a:fld>
             <a:endParaRPr lang="en-US"/>
           </a:p>
@@ -2106,10 +2105,9 @@
           </a:lstStyle>
           <a:p>
             <a:r>
-              <a:rPr lang="en-US" smtClean="0"/>
+              <a:rPr lang="en-US"/>
               <a:t>Click to edit Master title style</a:t>
             </a:r>
-            <a:endParaRPr lang="en-US"/>
           </a:p>
         </p:txBody>
       </p:sp>
@@ -2163,38 +2161,37 @@
           <a:p>
             <a:pPr lvl="0"/>
             <a:r>
-              <a:rPr lang="en-US" smtClean="0"/>
+              <a:rPr lang="en-US"/>
               <a:t>Click to edit Master text styles</a:t>
             </a:r>
           </a:p>
           <a:p>
             <a:pPr lvl="1"/>
             <a:r>
-              <a:rPr lang="en-US" smtClean="0"/>
+              <a:rPr lang="en-US"/>
               <a:t>Second level</a:t>
             </a:r>
           </a:p>
           <a:p>
             <a:pPr lvl="2"/>
             <a:r>
-              <a:rPr lang="en-US" smtClean="0"/>
+              <a:rPr lang="en-US"/>
               <a:t>Third level</a:t>
             </a:r>
           </a:p>
           <a:p>
             <a:pPr lvl="3"/>
             <a:r>
-              <a:rPr lang="en-US" smtClean="0"/>
+              <a:rPr lang="en-US"/>
               <a:t>Fourth level</a:t>
             </a:r>
           </a:p>
           <a:p>
             <a:pPr lvl="4"/>
             <a:r>
-              <a:rPr lang="en-US" smtClean="0"/>
+              <a:rPr lang="en-US"/>
               <a:t>Fifth level</a:t>
             </a:r>
-            <a:endParaRPr lang="en-US"/>
           </a:p>
         </p:txBody>
       </p:sp>
@@ -2257,7 +2254,7 @@
           <a:p>
             <a:pPr lvl="0"/>
             <a:r>
-              <a:rPr lang="en-US" smtClean="0"/>
+              <a:rPr lang="en-US"/>
               <a:t>Click to edit Master text styles</a:t>
             </a:r>
           </a:p>
@@ -2280,7 +2277,7 @@
           <a:p>
             <a:fld id="{5BCAD085-E8A6-8845-BD4E-CB4CCA059FC4}" type="datetimeFigureOut">
               <a:rPr lang="en-US" smtClean="0"/>
-              <a:t>1/27/13</a:t>
+              <a:t>28-Apr-26</a:t>
             </a:fld>
             <a:endParaRPr lang="en-US"/>
           </a:p>
@@ -2383,10 +2380,9 @@
           </a:lstStyle>
           <a:p>
             <a:r>
-              <a:rPr lang="en-US" smtClean="0"/>
+              <a:rPr lang="en-US"/>
               <a:t>Click to edit Master title style</a:t>
             </a:r>
-            <a:endParaRPr lang="en-US"/>
           </a:p>
         </p:txBody>
       </p:sp>
@@ -2510,7 +2506,7 @@
           <a:p>
             <a:pPr lvl="0"/>
             <a:r>
-              <a:rPr lang="en-US" smtClean="0"/>
+              <a:rPr lang="en-US"/>
               <a:t>Click to edit Master text styles</a:t>
             </a:r>
           </a:p>
@@ -2533,7 +2529,7 @@
           <a:p>
             <a:fld id="{5BCAD085-E8A6-8845-BD4E-CB4CCA059FC4}" type="datetimeFigureOut">
               <a:rPr lang="en-US" smtClean="0"/>
-              <a:t>1/27/13</a:t>
+              <a:t>28-Apr-26</a:t>
             </a:fld>
             <a:endParaRPr lang="en-US"/>
           </a:p>
@@ -2642,10 +2638,9 @@
           <a:lstStyle/>
           <a:p>
             <a:r>
-              <a:rPr lang="en-US" smtClean="0"/>
+              <a:rPr lang="en-US"/>
               <a:t>Click to edit Master title style</a:t>
             </a:r>
-            <a:endParaRPr lang="en-US"/>
           </a:p>
         </p:txBody>
       </p:sp>
@@ -2676,38 +2671,37 @@
           <a:p>
             <a:pPr lvl="0"/>
             <a:r>
-              <a:rPr lang="en-US" smtClean="0"/>
+              <a:rPr lang="en-US"/>
               <a:t>Click to edit Master text styles</a:t>
             </a:r>
           </a:p>
           <a:p>
             <a:pPr lvl="1"/>
             <a:r>
-              <a:rPr lang="en-US" smtClean="0"/>
+              <a:rPr lang="en-US"/>
               <a:t>Second level</a:t>
             </a:r>
           </a:p>
           <a:p>
             <a:pPr lvl="2"/>
             <a:r>
-              <a:rPr lang="en-US" smtClean="0"/>
+              <a:rPr lang="en-US"/>
               <a:t>Third level</a:t>
             </a:r>
           </a:p>
           <a:p>
             <a:pPr lvl="3"/>
             <a:r>
-              <a:rPr lang="en-US" smtClean="0"/>
+              <a:rPr lang="en-US"/>
               <a:t>Fourth level</a:t>
             </a:r>
           </a:p>
           <a:p>
             <a:pPr lvl="4"/>
             <a:r>
-              <a:rPr lang="en-US" smtClean="0"/>
+              <a:rPr lang="en-US"/>
               <a:t>Fifth level</a:t>
             </a:r>
-            <a:endParaRPr lang="en-US"/>
           </a:p>
         </p:txBody>
       </p:sp>
@@ -2746,7 +2740,7 @@
           <a:p>
             <a:fld id="{5BCAD085-E8A6-8845-BD4E-CB4CCA059FC4}" type="datetimeFigureOut">
               <a:rPr lang="en-US" smtClean="0"/>
-              <a:t>1/27/13</a:t>
+              <a:t>28-Apr-26</a:t>
             </a:fld>
             <a:endParaRPr lang="en-US"/>
           </a:p>
@@ -3105,7 +3099,7 @@
 </file>
 
 <file path=ppt/slides/slide1.xml><?xml version="1.0" encoding="utf-8"?>
-<p:sld xmlns:a="http://schemas.openxmlformats.org/drawingml/2006/main" xmlns:p="http://schemas.openxmlformats.org/presentationml/2006/main" xmlns:r="http://schemas.openxmlformats.org/officeDocument/2006/relationships">
+<p:sld xmlns:a="http://schemas.openxmlformats.org/drawingml/2006/main" xmlns:r="http://schemas.openxmlformats.org/officeDocument/2006/relationships" xmlns:p="http://schemas.openxmlformats.org/presentationml/2006/main">
   <p:cSld>
     <p:bg>
       <p:bgPr>
@@ -3121,7 +3115,14 @@
         <p:cNvGrpSpPr/>
         <p:nvPr/>
       </p:nvGrpSpPr>
-      <p:grpSpPr/>
+      <p:grpSpPr>
+        <a:xfrm>
+          <a:off x="0" y="0"/>
+          <a:ext cx="0" cy="0"/>
+          <a:chOff x="0" y="0"/>
+          <a:chExt cx="0" cy="0"/>
+        </a:xfrm>
+      </p:grpSpPr>
       <p:sp>
         <p:nvSpPr>
           <p:cNvPr id="2" name="TextBox 1"/>
@@ -3166,7 +3167,7 @@
         <p:spPr>
           <a:xfrm>
             <a:off x="457200" y="3840480"/>
-            <a:ext cx="8229600" cy="1828800"/>
+            <a:ext cx="8229600" cy="1200329"/>
           </a:xfrm>
           <a:prstGeom prst="rect">
             <a:avLst/>
@@ -3187,6 +3188,7 @@
               </a:defRPr>
             </a:pPr>
             <a:r>
+              <a:rPr sz="3600" dirty="0"/>
               <a:t>How Official Inflation Statistics Hide the True Cost of Living in Paris</a:t>
             </a:r>
           </a:p>
@@ -3201,7 +3203,7 @@
 </file>
 
 <file path=ppt/slides/slide10.xml><?xml version="1.0" encoding="utf-8"?>
-<p:sld xmlns:a="http://schemas.openxmlformats.org/drawingml/2006/main" xmlns:p="http://schemas.openxmlformats.org/presentationml/2006/main" xmlns:r="http://schemas.openxmlformats.org/officeDocument/2006/relationships">
+<p:sld xmlns:a="http://schemas.openxmlformats.org/drawingml/2006/main" xmlns:r="http://schemas.openxmlformats.org/officeDocument/2006/relationships" xmlns:p="http://schemas.openxmlformats.org/presentationml/2006/main">
   <p:cSld>
     <p:bg>
       <p:bgPr>
@@ -3217,7 +3219,14 @@
         <p:cNvGrpSpPr/>
         <p:nvPr/>
       </p:nvGrpSpPr>
-      <p:grpSpPr/>
+      <p:grpSpPr>
+        <a:xfrm>
+          <a:off x="0" y="0"/>
+          <a:ext cx="0" cy="0"/>
+          <a:chOff x="0" y="0"/>
+          <a:chExt cx="0" cy="0"/>
+        </a:xfrm>
+      </p:grpSpPr>
       <p:sp>
         <p:nvSpPr>
           <p:cNvPr id="2" name="TextBox 1"/>
@@ -3226,7 +3235,7 @@
         </p:nvSpPr>
         <p:spPr>
           <a:xfrm>
-            <a:off x="914400" y="2286000"/>
+            <a:off x="914400" y="1207008"/>
             <a:ext cx="7315200" cy="2286000"/>
           </a:xfrm>
           <a:prstGeom prst="rect">
@@ -3248,54 +3257,29 @@
               </a:defRPr>
             </a:pPr>
             <a:r>
+              <a:rPr dirty="0"/>
               <a:t>Babies don't exist in official inflation baskets.</a:t>
             </a:r>
-            <a:br/>
-            <a:r>
+            <a:br>
+              <a:rPr dirty="0"/>
+            </a:br>
+            <a:r>
+              <a:rPr dirty="0"/>
               <a:t>Neither do allergy sufferers.</a:t>
             </a:r>
-            <a:br/>
-            <a:r>
+            <a:br>
+              <a:rPr dirty="0"/>
+            </a:br>
+            <a:r>
+              <a:rPr dirty="0"/>
               <a:t>Or single parents managing dietary needs.</a:t>
             </a:r>
-            <a:br/>
-            <a:r>
+            <a:br>
+              <a:rPr dirty="0"/>
+            </a:br>
+            <a:r>
+              <a:rPr dirty="0"/>
               <a:t>Statistical invisibility = institutional indifference.</a:t>
-            </a:r>
-          </a:p>
-        </p:txBody>
-      </p:sp>
-      <p:sp>
-        <p:nvSpPr>
-          <p:cNvPr id="3" name="TextBox 2"/>
-          <p:cNvSpPr txBox="1"/>
-          <p:nvPr/>
-        </p:nvSpPr>
-        <p:spPr>
-          <a:xfrm>
-            <a:off x="914400" y="4754880"/>
-            <a:ext cx="7315200" cy="914400"/>
-          </a:xfrm>
-          <a:prstGeom prst="rect">
-            <a:avLst/>
-          </a:prstGeom>
-          <a:noFill/>
-        </p:spPr>
-        <p:txBody>
-          <a:bodyPr wrap="none">
-            <a:spAutoFit/>
-          </a:bodyPr>
-          <a:lstStyle/>
-          <a:p>
-            <a:pPr algn="ctr">
-              <a:defRPr sz="2000">
-                <a:solidFill>
-                  <a:srgbClr val="FFFFFF"/>
-                </a:solidFill>
-              </a:defRPr>
-            </a:pPr>
-            <a:r>
-              <a:t>CREATIVE INSIGHT #1: The Erased Family Reality</a:t>
             </a:r>
           </a:p>
         </p:txBody>
@@ -3309,7 +3293,7 @@
 </file>
 
 <file path=ppt/slides/slide11.xml><?xml version="1.0" encoding="utf-8"?>
-<p:sld xmlns:a="http://schemas.openxmlformats.org/drawingml/2006/main" xmlns:p="http://schemas.openxmlformats.org/presentationml/2006/main" xmlns:r="http://schemas.openxmlformats.org/officeDocument/2006/relationships">
+<p:sld xmlns:a="http://schemas.openxmlformats.org/drawingml/2006/main" xmlns:r="http://schemas.openxmlformats.org/officeDocument/2006/relationships" xmlns:p="http://schemas.openxmlformats.org/presentationml/2006/main">
   <p:cSld>
     <p:bg>
       <p:bgPr>
@@ -3325,7 +3309,14 @@
         <p:cNvGrpSpPr/>
         <p:nvPr/>
       </p:nvGrpSpPr>
-      <p:grpSpPr/>
+      <p:grpSpPr>
+        <a:xfrm>
+          <a:off x="0" y="0"/>
+          <a:ext cx="0" cy="0"/>
+          <a:chOff x="0" y="0"/>
+          <a:chExt cx="0" cy="0"/>
+        </a:xfrm>
+      </p:grpSpPr>
       <p:sp>
         <p:nvSpPr>
           <p:cNvPr id="2" name="Rectangle 1"/>
@@ -3402,8 +3393,8 @@
         </p:blipFill>
         <p:spPr>
           <a:xfrm>
-            <a:off x="457200" y="1188720"/>
-            <a:ext cx="14255407" cy="4754880"/>
+            <a:off x="391213" y="1864149"/>
+            <a:ext cx="8153618" cy="2719633"/>
           </a:xfrm>
           <a:prstGeom prst="rect">
             <a:avLst/>
@@ -3419,7 +3410,7 @@
 </file>
 
 <file path=ppt/slides/slide12.xml><?xml version="1.0" encoding="utf-8"?>
-<p:sld xmlns:a="http://schemas.openxmlformats.org/drawingml/2006/main" xmlns:p="http://schemas.openxmlformats.org/presentationml/2006/main" xmlns:r="http://schemas.openxmlformats.org/officeDocument/2006/relationships">
+<p:sld xmlns:a="http://schemas.openxmlformats.org/drawingml/2006/main" xmlns:r="http://schemas.openxmlformats.org/officeDocument/2006/relationships" xmlns:p="http://schemas.openxmlformats.org/presentationml/2006/main">
   <p:cSld>
     <p:bg>
       <p:bgPr>
@@ -3435,7 +3426,14 @@
         <p:cNvGrpSpPr/>
         <p:nvPr/>
       </p:nvGrpSpPr>
-      <p:grpSpPr/>
+      <p:grpSpPr>
+        <a:xfrm>
+          <a:off x="0" y="0"/>
+          <a:ext cx="0" cy="0"/>
+          <a:chOff x="0" y="0"/>
+          <a:chExt cx="0" cy="0"/>
+        </a:xfrm>
+      </p:grpSpPr>
       <p:sp>
         <p:nvSpPr>
           <p:cNvPr id="2" name="Rectangle 1"/>
@@ -3512,8 +3510,8 @@
         </p:blipFill>
         <p:spPr>
           <a:xfrm>
-            <a:off x="457200" y="1188720"/>
-            <a:ext cx="9055829" cy="4846320"/>
+            <a:off x="457201" y="1335307"/>
+            <a:ext cx="7824546" cy="4187386"/>
           </a:xfrm>
           <a:prstGeom prst="rect">
             <a:avLst/>
@@ -3529,7 +3527,7 @@
 </file>
 
 <file path=ppt/slides/slide13.xml><?xml version="1.0" encoding="utf-8"?>
-<p:sld xmlns:a="http://schemas.openxmlformats.org/drawingml/2006/main" xmlns:p="http://schemas.openxmlformats.org/presentationml/2006/main" xmlns:r="http://schemas.openxmlformats.org/officeDocument/2006/relationships">
+<p:sld xmlns:a="http://schemas.openxmlformats.org/drawingml/2006/main" xmlns:r="http://schemas.openxmlformats.org/officeDocument/2006/relationships" xmlns:p="http://schemas.openxmlformats.org/presentationml/2006/main">
   <p:cSld>
     <p:bg>
       <p:bgPr>
@@ -3545,7 +3543,14 @@
         <p:cNvGrpSpPr/>
         <p:nvPr/>
       </p:nvGrpSpPr>
-      <p:grpSpPr/>
+      <p:grpSpPr>
+        <a:xfrm>
+          <a:off x="0" y="0"/>
+          <a:ext cx="0" cy="0"/>
+          <a:chOff x="0" y="0"/>
+          <a:chExt cx="0" cy="0"/>
+        </a:xfrm>
+      </p:grpSpPr>
       <p:sp>
         <p:nvSpPr>
           <p:cNvPr id="2" name="TextBox 1"/>
@@ -3576,54 +3581,29 @@
               </a:defRPr>
             </a:pPr>
             <a:r>
+              <a:rPr dirty="0"/>
               <a:t>The poor eat cheap and get sick.</a:t>
             </a:r>
-            <a:br/>
-            <a:r>
+            <a:br>
+              <a:rPr dirty="0"/>
+            </a:br>
+            <a:r>
+              <a:rPr dirty="0"/>
               <a:t>The sick can't afford healthcare.</a:t>
             </a:r>
-            <a:br/>
-            <a:r>
+            <a:br>
+              <a:rPr dirty="0"/>
+            </a:br>
+            <a:r>
+              <a:rPr dirty="0"/>
               <a:t>Healthcare costs break the budget.</a:t>
             </a:r>
-            <a:br/>
-            <a:r>
+            <a:br>
+              <a:rPr dirty="0"/>
+            </a:br>
+            <a:r>
+              <a:rPr dirty="0"/>
               <a:t>Food affordability creates a poverty trap.</a:t>
-            </a:r>
-          </a:p>
-        </p:txBody>
-      </p:sp>
-      <p:sp>
-        <p:nvSpPr>
-          <p:cNvPr id="3" name="TextBox 2"/>
-          <p:cNvSpPr txBox="1"/>
-          <p:nvPr/>
-        </p:nvSpPr>
-        <p:spPr>
-          <a:xfrm>
-            <a:off x="914400" y="4754880"/>
-            <a:ext cx="7315200" cy="914400"/>
-          </a:xfrm>
-          <a:prstGeom prst="rect">
-            <a:avLst/>
-          </a:prstGeom>
-          <a:noFill/>
-        </p:spPr>
-        <p:txBody>
-          <a:bodyPr wrap="none">
-            <a:spAutoFit/>
-          </a:bodyPr>
-          <a:lstStyle/>
-          <a:p>
-            <a:pPr algn="ctr">
-              <a:defRPr sz="2000">
-                <a:solidFill>
-                  <a:srgbClr val="FFFFFF"/>
-                </a:solidFill>
-              </a:defRPr>
-            </a:pPr>
-            <a:r>
-              <a:t>CREATIVE INSIGHT #2: The Poverty Health Trap</a:t>
             </a:r>
           </a:p>
         </p:txBody>
@@ -3637,7 +3617,7 @@
 </file>
 
 <file path=ppt/slides/slide14.xml><?xml version="1.0" encoding="utf-8"?>
-<p:sld xmlns:a="http://schemas.openxmlformats.org/drawingml/2006/main" xmlns:p="http://schemas.openxmlformats.org/presentationml/2006/main" xmlns:r="http://schemas.openxmlformats.org/officeDocument/2006/relationships">
+<p:sld xmlns:a="http://schemas.openxmlformats.org/drawingml/2006/main" xmlns:r="http://schemas.openxmlformats.org/officeDocument/2006/relationships" xmlns:p="http://schemas.openxmlformats.org/presentationml/2006/main">
   <p:cSld>
     <p:bg>
       <p:bgPr>
@@ -3653,7 +3633,14 @@
         <p:cNvGrpSpPr/>
         <p:nvPr/>
       </p:nvGrpSpPr>
-      <p:grpSpPr/>
+      <p:grpSpPr>
+        <a:xfrm>
+          <a:off x="0" y="0"/>
+          <a:ext cx="0" cy="0"/>
+          <a:chOff x="0" y="0"/>
+          <a:chExt cx="0" cy="0"/>
+        </a:xfrm>
+      </p:grpSpPr>
       <p:sp>
         <p:nvSpPr>
           <p:cNvPr id="2" name="Rectangle 1"/>
@@ -3803,6 +3790,7 @@
                 </a:solidFill>
               </a:defRPr>
             </a:pPr>
+            <a:endParaRPr/>
           </a:p>
           <a:p>
             <a:pPr>
@@ -3890,6 +3878,7 @@
                 </a:solidFill>
               </a:defRPr>
             </a:pPr>
+            <a:endParaRPr/>
           </a:p>
           <a:p>
             <a:pPr>
@@ -3974,7 +3963,7 @@
 </file>
 
 <file path=ppt/slides/slide15.xml><?xml version="1.0" encoding="utf-8"?>
-<p:sld xmlns:a="http://schemas.openxmlformats.org/drawingml/2006/main" xmlns:p="http://schemas.openxmlformats.org/presentationml/2006/main" xmlns:r="http://schemas.openxmlformats.org/officeDocument/2006/relationships">
+<p:sld xmlns:a="http://schemas.openxmlformats.org/drawingml/2006/main" xmlns:r="http://schemas.openxmlformats.org/officeDocument/2006/relationships" xmlns:p="http://schemas.openxmlformats.org/presentationml/2006/main">
   <p:cSld>
     <p:bg>
       <p:bgPr>
@@ -3990,7 +3979,14 @@
         <p:cNvGrpSpPr/>
         <p:nvPr/>
       </p:nvGrpSpPr>
-      <p:grpSpPr/>
+      <p:grpSpPr>
+        <a:xfrm>
+          <a:off x="0" y="0"/>
+          <a:ext cx="0" cy="0"/>
+          <a:chOff x="0" y="0"/>
+          <a:chExt cx="0" cy="0"/>
+        </a:xfrm>
+      </p:grpSpPr>
       <p:sp>
         <p:nvSpPr>
           <p:cNvPr id="2" name="Rectangle 1"/>
@@ -4084,7 +4080,7 @@
 </file>
 
 <file path=ppt/slides/slide16.xml><?xml version="1.0" encoding="utf-8"?>
-<p:sld xmlns:a="http://schemas.openxmlformats.org/drawingml/2006/main" xmlns:p="http://schemas.openxmlformats.org/presentationml/2006/main" xmlns:r="http://schemas.openxmlformats.org/officeDocument/2006/relationships">
+<p:sld xmlns:a="http://schemas.openxmlformats.org/drawingml/2006/main" xmlns:r="http://schemas.openxmlformats.org/officeDocument/2006/relationships" xmlns:p="http://schemas.openxmlformats.org/presentationml/2006/main">
   <p:cSld>
     <p:bg>
       <p:bgPr>
@@ -4100,7 +4096,14 @@
         <p:cNvGrpSpPr/>
         <p:nvPr/>
       </p:nvGrpSpPr>
-      <p:grpSpPr/>
+      <p:grpSpPr>
+        <a:xfrm>
+          <a:off x="0" y="0"/>
+          <a:ext cx="0" cy="0"/>
+          <a:chOff x="0" y="0"/>
+          <a:chExt cx="0" cy="0"/>
+        </a:xfrm>
+      </p:grpSpPr>
       <p:sp>
         <p:nvSpPr>
           <p:cNvPr id="2" name="Rectangle 1"/>
@@ -4194,7 +4197,7 @@
 </file>
 
 <file path=ppt/slides/slide17.xml><?xml version="1.0" encoding="utf-8"?>
-<p:sld xmlns:a="http://schemas.openxmlformats.org/drawingml/2006/main" xmlns:p="http://schemas.openxmlformats.org/presentationml/2006/main" xmlns:r="http://schemas.openxmlformats.org/officeDocument/2006/relationships">
+<p:sld xmlns:a="http://schemas.openxmlformats.org/drawingml/2006/main" xmlns:r="http://schemas.openxmlformats.org/officeDocument/2006/relationships" xmlns:p="http://schemas.openxmlformats.org/presentationml/2006/main">
   <p:cSld>
     <p:bg>
       <p:bgPr>
@@ -4210,7 +4213,1105 @@
         <p:cNvGrpSpPr/>
         <p:nvPr/>
       </p:nvGrpSpPr>
-      <p:grpSpPr/>
+      <p:grpSpPr>
+        <a:xfrm>
+          <a:off x="0" y="0"/>
+          <a:ext cx="0" cy="0"/>
+          <a:chOff x="0" y="0"/>
+          <a:chExt cx="0" cy="0"/>
+        </a:xfrm>
+      </p:grpSpPr>
+      <p:sp>
+        <p:nvSpPr>
+          <p:cNvPr id="2" name="Rectangle 1"/>
+          <p:cNvSpPr/>
+          <p:nvPr/>
+        </p:nvSpPr>
+        <p:spPr>
+          <a:xfrm>
+            <a:off x="0" y="0"/>
+            <a:ext cx="9144000" cy="1188720"/>
+          </a:xfrm>
+          <a:prstGeom prst="rect">
+            <a:avLst/>
+          </a:prstGeom>
+          <a:solidFill>
+            <a:srgbClr val="1F4E79"/>
+          </a:solidFill>
+          <a:ln>
+            <a:solidFill>
+              <a:srgbClr val="1F4E79"/>
+            </a:solidFill>
+          </a:ln>
+        </p:spPr>
+        <p:style>
+          <a:lnRef idx="1">
+            <a:schemeClr val="accent1"/>
+          </a:lnRef>
+          <a:fillRef idx="3">
+            <a:schemeClr val="accent1"/>
+          </a:fillRef>
+          <a:effectRef idx="2">
+            <a:schemeClr val="accent1"/>
+          </a:effectRef>
+          <a:fontRef idx="minor">
+            <a:schemeClr val="lt1"/>
+          </a:fontRef>
+        </p:style>
+        <p:txBody>
+          <a:bodyPr rtlCol="0" anchor="ctr"/>
+          <a:lstStyle/>
+          <a:p>
+            <a:pPr algn="ctr">
+              <a:spcBef>
+                <a:spcPts val="1200"/>
+              </a:spcBef>
+              <a:spcAft>
+                <a:spcPts val="1200"/>
+              </a:spcAft>
+              <a:defRPr sz="4400" b="1">
+                <a:solidFill>
+                  <a:srgbClr val="FFFFFF"/>
+                </a:solidFill>
+              </a:defRPr>
+            </a:pPr>
+            <a:r>
+              <a:t>The Household Composition Multiplier Crisis</a:t>
+            </a:r>
+          </a:p>
+        </p:txBody>
+      </p:sp>
+      <p:sp>
+        <p:nvSpPr>
+          <p:cNvPr id="3" name="TextBox 2"/>
+          <p:cNvSpPr txBox="1"/>
+          <p:nvPr/>
+        </p:nvSpPr>
+        <p:spPr>
+          <a:xfrm>
+            <a:off x="731520" y="1188720"/>
+            <a:ext cx="7680960" cy="5888792"/>
+          </a:xfrm>
+          <a:prstGeom prst="rect">
+            <a:avLst/>
+          </a:prstGeom>
+          <a:noFill/>
+        </p:spPr>
+        <p:txBody>
+          <a:bodyPr wrap="square">
+            <a:spAutoFit/>
+          </a:bodyPr>
+          <a:lstStyle/>
+          <a:p>
+            <a:pPr>
+              <a:spcBef>
+                <a:spcPts val="600"/>
+              </a:spcBef>
+              <a:spcAft>
+                <a:spcPts val="800"/>
+              </a:spcAft>
+              <a:defRPr sz="2000">
+                <a:solidFill>
+                  <a:srgbClr val="333333"/>
+                </a:solidFill>
+              </a:defRPr>
+            </a:pPr>
+            <a:r>
+              <a:rPr dirty="0"/>
+              <a:t>SMIC WORKER (21,000 EUR/year = 1,750 EUR/month):</a:t>
+            </a:r>
+          </a:p>
+          <a:p>
+            <a:pPr>
+              <a:spcBef>
+                <a:spcPts val="600"/>
+              </a:spcBef>
+              <a:spcAft>
+                <a:spcPts val="800"/>
+              </a:spcAft>
+              <a:defRPr sz="2000">
+                <a:solidFill>
+                  <a:srgbClr val="333333"/>
+                </a:solidFill>
+              </a:defRPr>
+            </a:pPr>
+            <a:r>
+              <a:rPr dirty="0"/>
+              <a:t>  • Base (2 adults + 1 child): 17.4% of income (MANAGEABLE)</a:t>
+            </a:r>
+          </a:p>
+          <a:p>
+            <a:pPr>
+              <a:spcBef>
+                <a:spcPts val="600"/>
+              </a:spcBef>
+              <a:spcAft>
+                <a:spcPts val="800"/>
+              </a:spcAft>
+              <a:defRPr sz="2000">
+                <a:solidFill>
+                  <a:srgbClr val="333333"/>
+                </a:solidFill>
+              </a:defRPr>
+            </a:pPr>
+            <a:r>
+              <a:rPr dirty="0"/>
+              <a:t>  • +1 Teenager: 33.8% of income (IMPOSSIBLE - NO MONEY FOR HOUSING)</a:t>
+            </a:r>
+          </a:p>
+          <a:p>
+            <a:pPr>
+              <a:spcBef>
+                <a:spcPts val="600"/>
+              </a:spcBef>
+              <a:spcAft>
+                <a:spcPts val="800"/>
+              </a:spcAft>
+              <a:defRPr sz="2000">
+                <a:solidFill>
+                  <a:srgbClr val="333333"/>
+                </a:solidFill>
+              </a:defRPr>
+            </a:pPr>
+            <a:r>
+              <a:rPr dirty="0"/>
+              <a:t>  • +1 Senior: 36.4% of income (CATASTROPHIC)</a:t>
+            </a:r>
+          </a:p>
+          <a:p>
+            <a:pPr>
+              <a:spcBef>
+                <a:spcPts val="600"/>
+              </a:spcBef>
+              <a:spcAft>
+                <a:spcPts val="800"/>
+              </a:spcAft>
+              <a:defRPr sz="2000">
+                <a:solidFill>
+                  <a:srgbClr val="333333"/>
+                </a:solidFill>
+              </a:defRPr>
+            </a:pPr>
+            <a:r>
+              <a:rPr dirty="0"/>
+              <a:t>MEDIAN PARIS (42,000 EUR/year):</a:t>
+            </a:r>
+          </a:p>
+          <a:p>
+            <a:pPr>
+              <a:spcBef>
+                <a:spcPts val="600"/>
+              </a:spcBef>
+              <a:spcAft>
+                <a:spcPts val="800"/>
+              </a:spcAft>
+              <a:defRPr sz="2000">
+                <a:solidFill>
+                  <a:srgbClr val="333333"/>
+                </a:solidFill>
+              </a:defRPr>
+            </a:pPr>
+            <a:r>
+              <a:rPr dirty="0"/>
+              <a:t>  • Base: 8.7% of income (EXCELLENT)</a:t>
+            </a:r>
+          </a:p>
+          <a:p>
+            <a:pPr>
+              <a:spcBef>
+                <a:spcPts val="600"/>
+              </a:spcBef>
+              <a:spcAft>
+                <a:spcPts val="800"/>
+              </a:spcAft>
+              <a:defRPr sz="2000">
+                <a:solidFill>
+                  <a:srgbClr val="333333"/>
+                </a:solidFill>
+              </a:defRPr>
+            </a:pPr>
+            <a:r>
+              <a:rPr dirty="0"/>
+              <a:t>  • +1 Teenager: 16.9% of income (MANAGEABLE)</a:t>
+            </a:r>
+          </a:p>
+          <a:p>
+            <a:pPr>
+              <a:spcBef>
+                <a:spcPts val="600"/>
+              </a:spcBef>
+              <a:spcAft>
+                <a:spcPts val="800"/>
+              </a:spcAft>
+              <a:defRPr sz="2000">
+                <a:solidFill>
+                  <a:srgbClr val="333333"/>
+                </a:solidFill>
+              </a:defRPr>
+            </a:pPr>
+            <a:r>
+              <a:rPr dirty="0"/>
+              <a:t>  • +1 Senior: 18.2% of income (DIFFICULT BUT POSSIBLE)</a:t>
+            </a:r>
+          </a:p>
+          <a:p>
+            <a:pPr>
+              <a:spcBef>
+                <a:spcPts val="600"/>
+              </a:spcBef>
+              <a:spcAft>
+                <a:spcPts val="800"/>
+              </a:spcAft>
+              <a:defRPr sz="2000">
+                <a:solidFill>
+                  <a:srgbClr val="333333"/>
+                </a:solidFill>
+              </a:defRPr>
+            </a:pPr>
+            <a:r>
+              <a:rPr dirty="0"/>
+              <a:t>THE CRUEL REALITY:</a:t>
+            </a:r>
+          </a:p>
+          <a:p>
+            <a:pPr>
+              <a:spcBef>
+                <a:spcPts val="600"/>
+              </a:spcBef>
+              <a:spcAft>
+                <a:spcPts val="800"/>
+              </a:spcAft>
+              <a:defRPr sz="2000">
+                <a:solidFill>
+                  <a:srgbClr val="333333"/>
+                </a:solidFill>
+              </a:defRPr>
+            </a:pPr>
+            <a:r>
+              <a:rPr dirty="0"/>
+              <a:t>Families don't control their composition. They have children, care for aging</a:t>
+            </a:r>
+            <a:r>
+              <a:rPr lang="en-US" dirty="0"/>
+              <a:t> </a:t>
+            </a:r>
+            <a:r>
+              <a:rPr dirty="0"/>
+              <a:t>parents. Yet affordability multiplies with each family member.</a:t>
+            </a:r>
+          </a:p>
+          <a:p>
+            <a:pPr>
+              <a:spcBef>
+                <a:spcPts val="600"/>
+              </a:spcBef>
+              <a:spcAft>
+                <a:spcPts val="800"/>
+              </a:spcAft>
+              <a:defRPr sz="2000">
+                <a:solidFill>
+                  <a:srgbClr val="333333"/>
+                </a:solidFill>
+              </a:defRPr>
+            </a:pPr>
+            <a:r>
+              <a:rPr dirty="0"/>
+              <a:t>Below 35k income: Growing families become impossible families.</a:t>
+            </a:r>
+          </a:p>
+        </p:txBody>
+      </p:sp>
+    </p:spTree>
+  </p:cSld>
+  <p:clrMapOvr>
+    <a:masterClrMapping/>
+  </p:clrMapOvr>
+</p:sld>
+</file>
+
+<file path=ppt/slides/slide18.xml><?xml version="1.0" encoding="utf-8"?>
+<p:sld xmlns:a="http://schemas.openxmlformats.org/drawingml/2006/main" xmlns:r="http://schemas.openxmlformats.org/officeDocument/2006/relationships" xmlns:p="http://schemas.openxmlformats.org/presentationml/2006/main">
+  <p:cSld>
+    <p:bg>
+      <p:bgPr>
+        <a:solidFill>
+          <a:srgbClr val="FFFFFF"/>
+        </a:solidFill>
+        <a:effectLst/>
+      </p:bgPr>
+    </p:bg>
+    <p:spTree>
+      <p:nvGrpSpPr>
+        <p:cNvPr id="1" name=""/>
+        <p:cNvGrpSpPr/>
+        <p:nvPr/>
+      </p:nvGrpSpPr>
+      <p:grpSpPr>
+        <a:xfrm>
+          <a:off x="0" y="0"/>
+          <a:ext cx="0" cy="0"/>
+          <a:chOff x="0" y="0"/>
+          <a:chExt cx="0" cy="0"/>
+        </a:xfrm>
+      </p:grpSpPr>
+      <p:sp>
+        <p:nvSpPr>
+          <p:cNvPr id="2" name="Rectangle 1"/>
+          <p:cNvSpPr/>
+          <p:nvPr/>
+        </p:nvSpPr>
+        <p:spPr>
+          <a:xfrm>
+            <a:off x="0" y="0"/>
+            <a:ext cx="9144000" cy="1188720"/>
+          </a:xfrm>
+          <a:prstGeom prst="rect">
+            <a:avLst/>
+          </a:prstGeom>
+          <a:solidFill>
+            <a:srgbClr val="1F4E79"/>
+          </a:solidFill>
+          <a:ln>
+            <a:solidFill>
+              <a:srgbClr val="1F4E79"/>
+            </a:solidFill>
+          </a:ln>
+        </p:spPr>
+        <p:style>
+          <a:lnRef idx="1">
+            <a:schemeClr val="accent1"/>
+          </a:lnRef>
+          <a:fillRef idx="3">
+            <a:schemeClr val="accent1"/>
+          </a:fillRef>
+          <a:effectRef idx="2">
+            <a:schemeClr val="accent1"/>
+          </a:effectRef>
+          <a:fontRef idx="minor">
+            <a:schemeClr val="lt1"/>
+          </a:fontRef>
+        </p:style>
+        <p:txBody>
+          <a:bodyPr rtlCol="0" anchor="ctr"/>
+          <a:lstStyle/>
+          <a:p>
+            <a:pPr algn="ctr">
+              <a:spcBef>
+                <a:spcPts val="1200"/>
+              </a:spcBef>
+              <a:spcAft>
+                <a:spcPts val="1200"/>
+              </a:spcAft>
+              <a:defRPr sz="4400" b="1">
+                <a:solidFill>
+                  <a:srgbClr val="FFFFFF"/>
+                </a:solidFill>
+              </a:defRPr>
+            </a:pPr>
+            <a:r>
+              <a:rPr dirty="0"/>
+              <a:t>The Invisibility Crisis: Who Official Statistics Erase</a:t>
+            </a:r>
+          </a:p>
+        </p:txBody>
+      </p:sp>
+      <p:sp>
+        <p:nvSpPr>
+          <p:cNvPr id="3" name="TextBox 2"/>
+          <p:cNvSpPr txBox="1"/>
+          <p:nvPr/>
+        </p:nvSpPr>
+        <p:spPr>
+          <a:xfrm>
+            <a:off x="731520" y="1188720"/>
+            <a:ext cx="7680960" cy="5212080"/>
+          </a:xfrm>
+          <a:prstGeom prst="rect">
+            <a:avLst/>
+          </a:prstGeom>
+          <a:noFill/>
+        </p:spPr>
+        <p:txBody>
+          <a:bodyPr wrap="square">
+            <a:spAutoFit/>
+          </a:bodyPr>
+          <a:lstStyle/>
+          <a:p>
+            <a:pPr>
+              <a:spcBef>
+                <a:spcPts val="600"/>
+              </a:spcBef>
+              <a:spcAft>
+                <a:spcPts val="800"/>
+              </a:spcAft>
+              <a:defRPr sz="2000">
+                <a:solidFill>
+                  <a:srgbClr val="333333"/>
+                </a:solidFill>
+              </a:defRPr>
+            </a:pPr>
+            <a:r>
+              <a:rPr dirty="0"/>
+              <a:t>SENIORS: Specialized dietary needs (soft foods, health management)</a:t>
+            </a:r>
+          </a:p>
+          <a:p>
+            <a:pPr>
+              <a:spcBef>
+                <a:spcPts val="600"/>
+              </a:spcBef>
+              <a:spcAft>
+                <a:spcPts val="800"/>
+              </a:spcAft>
+              <a:defRPr sz="2000">
+                <a:solidFill>
+                  <a:srgbClr val="333333"/>
+                </a:solidFill>
+              </a:defRPr>
+            </a:pPr>
+            <a:r>
+              <a:rPr dirty="0"/>
+              <a:t>  • €334/month more than baseline, but counted as 'standard adult'</a:t>
+            </a:r>
+          </a:p>
+          <a:p>
+            <a:pPr>
+              <a:spcBef>
+                <a:spcPts val="600"/>
+              </a:spcBef>
+              <a:spcAft>
+                <a:spcPts val="800"/>
+              </a:spcAft>
+              <a:defRPr sz="2000">
+                <a:solidFill>
+                  <a:srgbClr val="333333"/>
+                </a:solidFill>
+              </a:defRPr>
+            </a:pPr>
+            <a:r>
+              <a:rPr dirty="0"/>
+              <a:t>  • Elderly people disappear from policy view</a:t>
+            </a:r>
+          </a:p>
+          <a:p>
+            <a:pPr>
+              <a:spcBef>
+                <a:spcPts val="600"/>
+              </a:spcBef>
+              <a:spcAft>
+                <a:spcPts val="800"/>
+              </a:spcAft>
+              <a:defRPr sz="2000">
+                <a:solidFill>
+                  <a:srgbClr val="333333"/>
+                </a:solidFill>
+              </a:defRPr>
+            </a:pPr>
+            <a:endParaRPr dirty="0"/>
+          </a:p>
+          <a:p>
+            <a:pPr>
+              <a:spcBef>
+                <a:spcPts val="600"/>
+              </a:spcBef>
+              <a:spcAft>
+                <a:spcPts val="800"/>
+              </a:spcAft>
+              <a:defRPr sz="2000">
+                <a:solidFill>
+                  <a:srgbClr val="333333"/>
+                </a:solidFill>
+              </a:defRPr>
+            </a:pPr>
+            <a:r>
+              <a:rPr dirty="0"/>
+              <a:t>TEENAGERS: Abrupt appetite transition (110% cost jump at age 13)</a:t>
+            </a:r>
+          </a:p>
+          <a:p>
+            <a:pPr>
+              <a:spcBef>
+                <a:spcPts val="600"/>
+              </a:spcBef>
+              <a:spcAft>
+                <a:spcPts val="800"/>
+              </a:spcAft>
+              <a:defRPr sz="2000">
+                <a:solidFill>
+                  <a:srgbClr val="333333"/>
+                </a:solidFill>
+              </a:defRPr>
+            </a:pPr>
+            <a:r>
+              <a:rPr dirty="0"/>
+              <a:t>  • Malnutrition risk precisely when growth is critical</a:t>
+            </a:r>
+          </a:p>
+          <a:p>
+            <a:pPr>
+              <a:spcBef>
+                <a:spcPts val="600"/>
+              </a:spcBef>
+              <a:spcAft>
+                <a:spcPts val="800"/>
+              </a:spcAft>
+              <a:defRPr sz="2000">
+                <a:solidFill>
+                  <a:srgbClr val="333333"/>
+                </a:solidFill>
+              </a:defRPr>
+            </a:pPr>
+            <a:r>
+              <a:rPr dirty="0"/>
+              <a:t>  • Not child-cost, not adult-cost—uncounted gap</a:t>
+            </a:r>
+          </a:p>
+          <a:p>
+            <a:pPr>
+              <a:spcBef>
+                <a:spcPts val="600"/>
+              </a:spcBef>
+              <a:spcAft>
+                <a:spcPts val="800"/>
+              </a:spcAft>
+              <a:defRPr sz="2000">
+                <a:solidFill>
+                  <a:srgbClr val="333333"/>
+                </a:solidFill>
+              </a:defRPr>
+            </a:pPr>
+            <a:endParaRPr dirty="0"/>
+          </a:p>
+          <a:p>
+            <a:pPr>
+              <a:spcBef>
+                <a:spcPts val="600"/>
+              </a:spcBef>
+              <a:spcAft>
+                <a:spcPts val="800"/>
+              </a:spcAft>
+              <a:defRPr sz="2000">
+                <a:solidFill>
+                  <a:srgbClr val="333333"/>
+                </a:solidFill>
+              </a:defRPr>
+            </a:pPr>
+            <a:r>
+              <a:rPr dirty="0"/>
+              <a:t>THE SANDWICH GENERATION: Supporting both elderly AND children</a:t>
+            </a:r>
+          </a:p>
+          <a:p>
+            <a:pPr>
+              <a:spcBef>
+                <a:spcPts val="600"/>
+              </a:spcBef>
+              <a:spcAft>
+                <a:spcPts val="800"/>
+              </a:spcAft>
+              <a:defRPr sz="2000">
+                <a:solidFill>
+                  <a:srgbClr val="333333"/>
+                </a:solidFill>
+              </a:defRPr>
+            </a:pPr>
+            <a:r>
+              <a:rPr dirty="0"/>
+              <a:t>  • 45-year-old: Parent +€334, Child +€304 = household multiplied</a:t>
+            </a:r>
+          </a:p>
+          <a:p>
+            <a:pPr>
+              <a:spcBef>
+                <a:spcPts val="600"/>
+              </a:spcBef>
+              <a:spcAft>
+                <a:spcPts val="800"/>
+              </a:spcAft>
+              <a:defRPr sz="2000">
+                <a:solidFill>
+                  <a:srgbClr val="333333"/>
+                </a:solidFill>
+              </a:defRPr>
+            </a:pPr>
+            <a:r>
+              <a:rPr dirty="0"/>
+              <a:t>  • €941/month food costs (27% of median income)</a:t>
+            </a:r>
+          </a:p>
+          <a:p>
+            <a:pPr>
+              <a:spcBef>
+                <a:spcPts val="600"/>
+              </a:spcBef>
+              <a:spcAft>
+                <a:spcPts val="800"/>
+              </a:spcAft>
+              <a:defRPr sz="2000">
+                <a:solidFill>
+                  <a:srgbClr val="333333"/>
+                </a:solidFill>
+              </a:defRPr>
+            </a:pPr>
+            <a:r>
+              <a:rPr dirty="0"/>
+              <a:t>  • Silent burden. Invisible in statistics. Breaking quietly.</a:t>
+            </a:r>
+          </a:p>
+        </p:txBody>
+      </p:sp>
+    </p:spTree>
+  </p:cSld>
+  <p:clrMapOvr>
+    <a:masterClrMapping/>
+  </p:clrMapOvr>
+</p:sld>
+</file>
+
+<file path=ppt/slides/slide19.xml><?xml version="1.0" encoding="utf-8"?>
+<p:sld xmlns:a="http://schemas.openxmlformats.org/drawingml/2006/main" xmlns:r="http://schemas.openxmlformats.org/officeDocument/2006/relationships" xmlns:p="http://schemas.openxmlformats.org/presentationml/2006/main">
+  <p:cSld>
+    <p:bg>
+      <p:bgPr>
+        <a:solidFill>
+          <a:srgbClr val="1F4E79"/>
+        </a:solidFill>
+        <a:effectLst/>
+      </p:bgPr>
+    </p:bg>
+    <p:spTree>
+      <p:nvGrpSpPr>
+        <p:cNvPr id="1" name=""/>
+        <p:cNvGrpSpPr/>
+        <p:nvPr/>
+      </p:nvGrpSpPr>
+      <p:grpSpPr>
+        <a:xfrm>
+          <a:off x="0" y="0"/>
+          <a:ext cx="0" cy="0"/>
+          <a:chOff x="0" y="0"/>
+          <a:chExt cx="0" cy="0"/>
+        </a:xfrm>
+      </p:grpSpPr>
+      <p:sp>
+        <p:nvSpPr>
+          <p:cNvPr id="2" name="TextBox 1"/>
+          <p:cNvSpPr txBox="1"/>
+          <p:nvPr/>
+        </p:nvSpPr>
+        <p:spPr>
+          <a:xfrm>
+            <a:off x="914400" y="2286000"/>
+            <a:ext cx="7315200" cy="2123658"/>
+          </a:xfrm>
+          <a:prstGeom prst="rect">
+            <a:avLst/>
+          </a:prstGeom>
+          <a:noFill/>
+        </p:spPr>
+        <p:txBody>
+          <a:bodyPr wrap="square">
+            <a:spAutoFit/>
+          </a:bodyPr>
+          <a:lstStyle/>
+          <a:p>
+            <a:pPr algn="ctr">
+              <a:defRPr sz="3200" b="1" i="1">
+                <a:solidFill>
+                  <a:srgbClr val="ED7D31"/>
+                </a:solidFill>
+              </a:defRPr>
+            </a:pPr>
+            <a:r>
+              <a:rPr dirty="0"/>
+              <a:t>What gets priced out of reach doesn't get born.</a:t>
+            </a:r>
+            <a:br>
+              <a:rPr dirty="0"/>
+            </a:br>
+            <a:r>
+              <a:rPr dirty="0"/>
+              <a:t>Food affordability is </a:t>
+            </a:r>
+            <a:r>
+              <a:rPr sz="3600" dirty="0"/>
+              <a:t>not</a:t>
+            </a:r>
+            <a:r>
+              <a:rPr dirty="0"/>
+              <a:t> just poverty.</a:t>
+            </a:r>
+            <a:br>
+              <a:rPr dirty="0"/>
+            </a:br>
+            <a:r>
+              <a:rPr dirty="0"/>
+              <a:t>It's a demographic determinant.</a:t>
+            </a:r>
+          </a:p>
+        </p:txBody>
+      </p:sp>
+      <p:sp>
+        <p:nvSpPr>
+          <p:cNvPr id="3" name="TextBox 2"/>
+          <p:cNvSpPr txBox="1"/>
+          <p:nvPr/>
+        </p:nvSpPr>
+        <p:spPr>
+          <a:xfrm>
+            <a:off x="914400" y="4754880"/>
+            <a:ext cx="7315200" cy="914400"/>
+          </a:xfrm>
+          <a:prstGeom prst="rect">
+            <a:avLst/>
+          </a:prstGeom>
+          <a:noFill/>
+        </p:spPr>
+        <p:txBody>
+          <a:bodyPr wrap="none">
+            <a:spAutoFit/>
+          </a:bodyPr>
+          <a:lstStyle/>
+          <a:p>
+            <a:pPr algn="ctr">
+              <a:defRPr sz="2000">
+                <a:solidFill>
+                  <a:srgbClr val="FFFFFF"/>
+                </a:solidFill>
+              </a:defRPr>
+            </a:pPr>
+            <a:r>
+              <a:t>THE HIDDEN CONSEQUENCE: Why Birth Rates Are Collapsing</a:t>
+            </a:r>
+          </a:p>
+        </p:txBody>
+      </p:sp>
+    </p:spTree>
+  </p:cSld>
+  <p:clrMapOvr>
+    <a:masterClrMapping/>
+  </p:clrMapOvr>
+</p:sld>
+</file>
+
+<file path=ppt/slides/slide2.xml><?xml version="1.0" encoding="utf-8"?>
+<p:sld xmlns:a="http://schemas.openxmlformats.org/drawingml/2006/main" xmlns:r="http://schemas.openxmlformats.org/officeDocument/2006/relationships" xmlns:p="http://schemas.openxmlformats.org/presentationml/2006/main">
+  <p:cSld>
+    <p:bg>
+      <p:bgPr>
+        <a:solidFill>
+          <a:srgbClr val="FFFFFF"/>
+        </a:solidFill>
+        <a:effectLst/>
+      </p:bgPr>
+    </p:bg>
+    <p:spTree>
+      <p:nvGrpSpPr>
+        <p:cNvPr id="1" name=""/>
+        <p:cNvGrpSpPr/>
+        <p:nvPr/>
+      </p:nvGrpSpPr>
+      <p:grpSpPr>
+        <a:xfrm>
+          <a:off x="0" y="0"/>
+          <a:ext cx="0" cy="0"/>
+          <a:chOff x="0" y="0"/>
+          <a:chExt cx="0" cy="0"/>
+        </a:xfrm>
+      </p:grpSpPr>
+      <p:sp>
+        <p:nvSpPr>
+          <p:cNvPr id="2" name="Rectangle 1"/>
+          <p:cNvSpPr/>
+          <p:nvPr/>
+        </p:nvSpPr>
+        <p:spPr>
+          <a:xfrm>
+            <a:off x="0" y="0"/>
+            <a:ext cx="9144000" cy="1188720"/>
+          </a:xfrm>
+          <a:prstGeom prst="rect">
+            <a:avLst/>
+          </a:prstGeom>
+          <a:solidFill>
+            <a:srgbClr val="1F4E79"/>
+          </a:solidFill>
+          <a:ln>
+            <a:solidFill>
+              <a:srgbClr val="1F4E79"/>
+            </a:solidFill>
+          </a:ln>
+        </p:spPr>
+        <p:style>
+          <a:lnRef idx="1">
+            <a:schemeClr val="accent1"/>
+          </a:lnRef>
+          <a:fillRef idx="3">
+            <a:schemeClr val="accent1"/>
+          </a:fillRef>
+          <a:effectRef idx="2">
+            <a:schemeClr val="accent1"/>
+          </a:effectRef>
+          <a:fontRef idx="minor">
+            <a:schemeClr val="lt1"/>
+          </a:fontRef>
+        </p:style>
+        <p:txBody>
+          <a:bodyPr rtlCol="0" anchor="ctr"/>
+          <a:lstStyle/>
+          <a:p>
+            <a:pPr algn="ctr">
+              <a:spcBef>
+                <a:spcPts val="1200"/>
+              </a:spcBef>
+              <a:spcAft>
+                <a:spcPts val="1200"/>
+              </a:spcAft>
+              <a:defRPr sz="4400" b="1">
+                <a:solidFill>
+                  <a:srgbClr val="FFFFFF"/>
+                </a:solidFill>
+              </a:defRPr>
+            </a:pPr>
+            <a:r>
+              <a:rPr dirty="0"/>
+              <a:t>The Problem: Official Baskets are Incomplete</a:t>
+            </a:r>
+          </a:p>
+        </p:txBody>
+      </p:sp>
+      <p:sp>
+        <p:nvSpPr>
+          <p:cNvPr id="3" name="TextBox 2"/>
+          <p:cNvSpPr txBox="1"/>
+          <p:nvPr/>
+        </p:nvSpPr>
+        <p:spPr>
+          <a:xfrm>
+            <a:off x="731520" y="1188720"/>
+            <a:ext cx="7680960" cy="5212080"/>
+          </a:xfrm>
+          <a:prstGeom prst="rect">
+            <a:avLst/>
+          </a:prstGeom>
+          <a:noFill/>
+        </p:spPr>
+        <p:txBody>
+          <a:bodyPr wrap="square">
+            <a:spAutoFit/>
+          </a:bodyPr>
+          <a:lstStyle/>
+          <a:p>
+            <a:pPr>
+              <a:spcBef>
+                <a:spcPts val="600"/>
+              </a:spcBef>
+              <a:spcAft>
+                <a:spcPts val="800"/>
+              </a:spcAft>
+              <a:defRPr sz="2000">
+                <a:solidFill>
+                  <a:srgbClr val="333333"/>
+                </a:solidFill>
+              </a:defRPr>
+            </a:pPr>
+            <a:r>
+              <a:t>INSEE reports inflation based on a MINIMAL BASKET of emblematic products:</a:t>
+            </a:r>
+          </a:p>
+          <a:p>
+            <a:pPr>
+              <a:spcBef>
+                <a:spcPts val="600"/>
+              </a:spcBef>
+              <a:spcAft>
+                <a:spcPts val="800"/>
+              </a:spcAft>
+              <a:defRPr sz="2000">
+                <a:solidFill>
+                  <a:srgbClr val="333333"/>
+                </a:solidFill>
+              </a:defRPr>
+            </a:pPr>
+            <a:r>
+              <a:t>  • Milk, bread, eggs, cheese, butter, pasta...</a:t>
+            </a:r>
+          </a:p>
+          <a:p>
+            <a:pPr>
+              <a:spcBef>
+                <a:spcPts val="600"/>
+              </a:spcBef>
+              <a:spcAft>
+                <a:spcPts val="800"/>
+              </a:spcAft>
+              <a:defRPr sz="2000">
+                <a:solidFill>
+                  <a:srgbClr val="333333"/>
+                </a:solidFill>
+              </a:defRPr>
+            </a:pPr>
+            <a:endParaRPr/>
+          </a:p>
+          <a:p>
+            <a:pPr>
+              <a:spcBef>
+                <a:spcPts val="600"/>
+              </a:spcBef>
+              <a:spcAft>
+                <a:spcPts val="800"/>
+              </a:spcAft>
+              <a:defRPr sz="2000">
+                <a:solidFill>
+                  <a:srgbClr val="333333"/>
+                </a:solidFill>
+              </a:defRPr>
+            </a:pPr>
+            <a:r>
+              <a:t>But official baskets IGNORE the complementary items families actually need:</a:t>
+            </a:r>
+          </a:p>
+          <a:p>
+            <a:pPr>
+              <a:spcBef>
+                <a:spcPts val="600"/>
+              </a:spcBef>
+              <a:spcAft>
+                <a:spcPts val="800"/>
+              </a:spcAft>
+              <a:defRPr sz="2000">
+                <a:solidFill>
+                  <a:srgbClr val="333333"/>
+                </a:solidFill>
+              </a:defRPr>
+            </a:pPr>
+            <a:r>
+              <a:t>  • Different milk types (lactose-free, baby formula)</a:t>
+            </a:r>
+          </a:p>
+          <a:p>
+            <a:pPr>
+              <a:spcBef>
+                <a:spcPts val="600"/>
+              </a:spcBef>
+              <a:spcAft>
+                <a:spcPts val="800"/>
+              </a:spcAft>
+              <a:defRPr sz="2000">
+                <a:solidFill>
+                  <a:srgbClr val="333333"/>
+                </a:solidFill>
+              </a:defRPr>
+            </a:pPr>
+            <a:r>
+              <a:t>  • Items that complete meals (sauces, oils, spices)</a:t>
+            </a:r>
+          </a:p>
+          <a:p>
+            <a:pPr>
+              <a:spcBef>
+                <a:spcPts val="600"/>
+              </a:spcBef>
+              <a:spcAft>
+                <a:spcPts val="800"/>
+              </a:spcAft>
+              <a:defRPr sz="2000">
+                <a:solidFill>
+                  <a:srgbClr val="333333"/>
+                </a:solidFill>
+              </a:defRPr>
+            </a:pPr>
+            <a:r>
+              <a:t>  • Baby essentials (diapers, creams)</a:t>
+            </a:r>
+          </a:p>
+          <a:p>
+            <a:pPr>
+              <a:spcBef>
+                <a:spcPts val="600"/>
+              </a:spcBef>
+              <a:spcAft>
+                <a:spcPts val="800"/>
+              </a:spcAft>
+              <a:defRPr sz="2000">
+                <a:solidFill>
+                  <a:srgbClr val="333333"/>
+                </a:solidFill>
+              </a:defRPr>
+            </a:pPr>
+            <a:r>
+              <a:t>  • Dietary alternatives (allergies, intolerances)</a:t>
+            </a:r>
+          </a:p>
+          <a:p>
+            <a:pPr>
+              <a:spcBef>
+                <a:spcPts val="600"/>
+              </a:spcBef>
+              <a:spcAft>
+                <a:spcPts val="800"/>
+              </a:spcAft>
+              <a:defRPr sz="2000">
+                <a:solidFill>
+                  <a:srgbClr val="333333"/>
+                </a:solidFill>
+              </a:defRPr>
+            </a:pPr>
+            <a:endParaRPr/>
+          </a:p>
+          <a:p>
+            <a:pPr>
+              <a:spcBef>
+                <a:spcPts val="600"/>
+              </a:spcBef>
+              <a:spcAft>
+                <a:spcPts val="800"/>
+              </a:spcAft>
+              <a:defRPr sz="2000">
+                <a:solidFill>
+                  <a:srgbClr val="333333"/>
+                </a:solidFill>
+              </a:defRPr>
+            </a:pPr>
+            <a:r>
+              <a:t>Result: Official inflation numbers measure SURVIVAL, not LIVING</a:t>
+            </a:r>
+          </a:p>
+        </p:txBody>
+      </p:sp>
+    </p:spTree>
+  </p:cSld>
+  <p:clrMapOvr>
+    <a:masterClrMapping/>
+  </p:clrMapOvr>
+</p:sld>
+</file>
+
+<file path=ppt/slides/slide20.xml><?xml version="1.0" encoding="utf-8"?>
+<p:sld xmlns:a="http://schemas.openxmlformats.org/drawingml/2006/main" xmlns:r="http://schemas.openxmlformats.org/officeDocument/2006/relationships" xmlns:p="http://schemas.openxmlformats.org/presentationml/2006/main">
+  <p:cSld>
+    <p:bg>
+      <p:bgPr>
+        <a:solidFill>
+          <a:srgbClr val="FFFFFF"/>
+        </a:solidFill>
+        <a:effectLst/>
+      </p:bgPr>
+    </p:bg>
+    <p:spTree>
+      <p:nvGrpSpPr>
+        <p:cNvPr id="1" name=""/>
+        <p:cNvGrpSpPr/>
+        <p:nvPr/>
+      </p:nvGrpSpPr>
+      <p:grpSpPr>
+        <a:xfrm>
+          <a:off x="0" y="0"/>
+          <a:ext cx="0" cy="0"/>
+          <a:chOff x="0" y="0"/>
+          <a:chExt cx="0" cy="0"/>
+        </a:xfrm>
+      </p:grpSpPr>
       <p:sp>
         <p:nvSpPr>
           <p:cNvPr id="2" name="Rectangle 1"/>
@@ -4266,7 +5367,7 @@
               </a:defRPr>
             </a:pPr>
             <a:r>
-              <a:t>The Household Composition Multiplier Crisis</a:t>
+              <a:t>Birth Rate as Economic Rationing</a:t>
             </a:r>
           </a:p>
         </p:txBody>
@@ -4307,235 +5408,201 @@
               </a:defRPr>
             </a:pPr>
             <a:r>
-              <a:t>SMIC WORKER (21,000 EUR/year = 1,750 EUR/month):</a:t>
-            </a:r>
-          </a:p>
-          <a:p>
-            <a:pPr>
-              <a:spcBef>
-                <a:spcPts val="600"/>
-              </a:spcBef>
-              <a:spcAft>
-                <a:spcPts val="800"/>
-              </a:spcAft>
-              <a:defRPr sz="2000">
-                <a:solidFill>
-                  <a:srgbClr val="333333"/>
-                </a:solidFill>
-              </a:defRPr>
-            </a:pPr>
-            <a:r>
-              <a:t>  • Base (2 adults + 1 child): 17.4% of income (MANAGEABLE)</a:t>
-            </a:r>
-          </a:p>
-          <a:p>
-            <a:pPr>
-              <a:spcBef>
-                <a:spcPts val="600"/>
-              </a:spcBef>
-              <a:spcAft>
-                <a:spcPts val="800"/>
-              </a:spcAft>
-              <a:defRPr sz="2000">
-                <a:solidFill>
-                  <a:srgbClr val="333333"/>
-                </a:solidFill>
-              </a:defRPr>
-            </a:pPr>
-            <a:r>
-              <a:t>  • +1 Teenager: 33.8% of income (IMPOSSIBLE - NO MONEY FOR HOUSING)</a:t>
-            </a:r>
-          </a:p>
-          <a:p>
-            <a:pPr>
-              <a:spcBef>
-                <a:spcPts val="600"/>
-              </a:spcBef>
-              <a:spcAft>
-                <a:spcPts val="800"/>
-              </a:spcAft>
-              <a:defRPr sz="2000">
-                <a:solidFill>
-                  <a:srgbClr val="333333"/>
-                </a:solidFill>
-              </a:defRPr>
-            </a:pPr>
-            <a:r>
-              <a:t>  • +1 Senior: 36.4% of income (CATASTROPHIC)</a:t>
-            </a:r>
-          </a:p>
-          <a:p>
-            <a:pPr>
-              <a:spcBef>
-                <a:spcPts val="600"/>
-              </a:spcBef>
-              <a:spcAft>
-                <a:spcPts val="800"/>
-              </a:spcAft>
-              <a:defRPr sz="2000">
-                <a:solidFill>
-                  <a:srgbClr val="333333"/>
-                </a:solidFill>
-              </a:defRPr>
-            </a:pPr>
-          </a:p>
-          <a:p>
-            <a:pPr>
-              <a:spcBef>
-                <a:spcPts val="600"/>
-              </a:spcBef>
-              <a:spcAft>
-                <a:spcPts val="800"/>
-              </a:spcAft>
-              <a:defRPr sz="2000">
-                <a:solidFill>
-                  <a:srgbClr val="333333"/>
-                </a:solidFill>
-              </a:defRPr>
-            </a:pPr>
-            <a:r>
-              <a:t>MEDIAN PARIS (42,000 EUR/year):</a:t>
-            </a:r>
-          </a:p>
-          <a:p>
-            <a:pPr>
-              <a:spcBef>
-                <a:spcPts val="600"/>
-              </a:spcBef>
-              <a:spcAft>
-                <a:spcPts val="800"/>
-              </a:spcAft>
-              <a:defRPr sz="2000">
-                <a:solidFill>
-                  <a:srgbClr val="333333"/>
-                </a:solidFill>
-              </a:defRPr>
-            </a:pPr>
-            <a:r>
-              <a:t>  • Base: 8.7% of income (EXCELLENT)</a:t>
-            </a:r>
-          </a:p>
-          <a:p>
-            <a:pPr>
-              <a:spcBef>
-                <a:spcPts val="600"/>
-              </a:spcBef>
-              <a:spcAft>
-                <a:spcPts val="800"/>
-              </a:spcAft>
-              <a:defRPr sz="2000">
-                <a:solidFill>
-                  <a:srgbClr val="333333"/>
-                </a:solidFill>
-              </a:defRPr>
-            </a:pPr>
-            <a:r>
-              <a:t>  • +1 Teenager: 16.9% of income (MANAGEABLE)</a:t>
-            </a:r>
-          </a:p>
-          <a:p>
-            <a:pPr>
-              <a:spcBef>
-                <a:spcPts val="600"/>
-              </a:spcBef>
-              <a:spcAft>
-                <a:spcPts val="800"/>
-              </a:spcAft>
-              <a:defRPr sz="2000">
-                <a:solidFill>
-                  <a:srgbClr val="333333"/>
-                </a:solidFill>
-              </a:defRPr>
-            </a:pPr>
-            <a:r>
-              <a:t>  • +1 Senior: 18.2% of income (DIFFICULT BUT POSSIBLE)</a:t>
-            </a:r>
-          </a:p>
-          <a:p>
-            <a:pPr>
-              <a:spcBef>
-                <a:spcPts val="600"/>
-              </a:spcBef>
-              <a:spcAft>
-                <a:spcPts val="800"/>
-              </a:spcAft>
-              <a:defRPr sz="2000">
-                <a:solidFill>
-                  <a:srgbClr val="333333"/>
-                </a:solidFill>
-              </a:defRPr>
-            </a:pPr>
-          </a:p>
-          <a:p>
-            <a:pPr>
-              <a:spcBef>
-                <a:spcPts val="600"/>
-              </a:spcBef>
-              <a:spcAft>
-                <a:spcPts val="800"/>
-              </a:spcAft>
-              <a:defRPr sz="2000">
-                <a:solidFill>
-                  <a:srgbClr val="333333"/>
-                </a:solidFill>
-              </a:defRPr>
-            </a:pPr>
-            <a:r>
-              <a:t>THE CRUEL REALITY:</a:t>
-            </a:r>
-          </a:p>
-          <a:p>
-            <a:pPr>
-              <a:spcBef>
-                <a:spcPts val="600"/>
-              </a:spcBef>
-              <a:spcAft>
-                <a:spcPts val="800"/>
-              </a:spcAft>
-              <a:defRPr sz="2000">
-                <a:solidFill>
-                  <a:srgbClr val="333333"/>
-                </a:solidFill>
-              </a:defRPr>
-            </a:pPr>
-            <a:r>
-              <a:t>Families don't control their composition. They have children, care for aging</a:t>
-            </a:r>
-          </a:p>
-          <a:p>
-            <a:pPr>
-              <a:spcBef>
-                <a:spcPts val="600"/>
-              </a:spcBef>
-              <a:spcAft>
-                <a:spcPts val="800"/>
-              </a:spcAft>
-              <a:defRPr sz="2000">
-                <a:solidFill>
-                  <a:srgbClr val="333333"/>
-                </a:solidFill>
-              </a:defRPr>
-            </a:pPr>
-            <a:r>
-              <a:t>parents. Yet affordability multiplies with each family member.</a:t>
-            </a:r>
-          </a:p>
-          <a:p>
-            <a:pPr>
-              <a:spcBef>
-                <a:spcPts val="600"/>
-              </a:spcBef>
-              <a:spcAft>
-                <a:spcPts val="800"/>
-              </a:spcAft>
-              <a:defRPr sz="2000">
-                <a:solidFill>
-                  <a:srgbClr val="333333"/>
-                </a:solidFill>
-              </a:defRPr>
-            </a:pPr>
-            <a:r>
-              <a:t>Below 35k income: Growing families become impossible families.</a:t>
+              <a:t>Young couple, median Paris income (42,000 EUR/year):</a:t>
+            </a:r>
+          </a:p>
+          <a:p>
+            <a:pPr>
+              <a:spcBef>
+                <a:spcPts val="600"/>
+              </a:spcBef>
+              <a:spcAft>
+                <a:spcPts val="800"/>
+              </a:spcAft>
+              <a:defRPr sz="2000">
+                <a:solidFill>
+                  <a:srgbClr val="333333"/>
+                </a:solidFill>
+              </a:defRPr>
+            </a:pPr>
+            <a:r>
+              <a:t>  • 1 child: 12.6% of income on food (MANAGEABLE)</a:t>
+            </a:r>
+          </a:p>
+          <a:p>
+            <a:pPr>
+              <a:spcBef>
+                <a:spcPts val="600"/>
+              </a:spcBef>
+              <a:spcAft>
+                <a:spcPts val="800"/>
+              </a:spcAft>
+              <a:defRPr sz="2000">
+                <a:solidFill>
+                  <a:srgbClr val="333333"/>
+                </a:solidFill>
+              </a:defRPr>
+            </a:pPr>
+            <a:r>
+              <a:t>  • 2 children: 16.5% of income on food (DIFFICULT)</a:t>
+            </a:r>
+          </a:p>
+          <a:p>
+            <a:pPr>
+              <a:spcBef>
+                <a:spcPts val="600"/>
+              </a:spcBef>
+              <a:spcAft>
+                <a:spcPts val="800"/>
+              </a:spcAft>
+              <a:defRPr sz="2000">
+                <a:solidFill>
+                  <a:srgbClr val="333333"/>
+                </a:solidFill>
+              </a:defRPr>
+            </a:pPr>
+            <a:r>
+              <a:t>  • 3 children: 20.4% of income on food (IMPOSSIBLE)</a:t>
+            </a:r>
+          </a:p>
+          <a:p>
+            <a:pPr>
+              <a:spcBef>
+                <a:spcPts val="600"/>
+              </a:spcBef>
+              <a:spcAft>
+                <a:spcPts val="800"/>
+              </a:spcAft>
+              <a:defRPr sz="2000">
+                <a:solidFill>
+                  <a:srgbClr val="333333"/>
+                </a:solidFill>
+              </a:defRPr>
+            </a:pPr>
+            <a:endParaRPr/>
+          </a:p>
+          <a:p>
+            <a:pPr>
+              <a:spcBef>
+                <a:spcPts val="600"/>
+              </a:spcBef>
+              <a:spcAft>
+                <a:spcPts val="800"/>
+              </a:spcAft>
+              <a:defRPr sz="2000">
+                <a:solidFill>
+                  <a:srgbClr val="333333"/>
+                </a:solidFill>
+              </a:defRPr>
+            </a:pPr>
+            <a:r>
+              <a:t>Young couple, SMIC (21,000 EUR/year):</a:t>
+            </a:r>
+          </a:p>
+          <a:p>
+            <a:pPr>
+              <a:spcBef>
+                <a:spcPts val="600"/>
+              </a:spcBef>
+              <a:spcAft>
+                <a:spcPts val="800"/>
+              </a:spcAft>
+              <a:defRPr sz="2000">
+                <a:solidFill>
+                  <a:srgbClr val="333333"/>
+                </a:solidFill>
+              </a:defRPr>
+            </a:pPr>
+            <a:r>
+              <a:t>  • 1 child: 25.2% of income (CRISIS)</a:t>
+            </a:r>
+          </a:p>
+          <a:p>
+            <a:pPr>
+              <a:spcBef>
+                <a:spcPts val="600"/>
+              </a:spcBef>
+              <a:spcAft>
+                <a:spcPts val="800"/>
+              </a:spcAft>
+              <a:defRPr sz="2000">
+                <a:solidFill>
+                  <a:srgbClr val="333333"/>
+                </a:solidFill>
+              </a:defRPr>
+            </a:pPr>
+            <a:r>
+              <a:t>  • 2 children: 38.9% of income (IMPOSSIBLE - CHOOSE: FOOD OR HOUSING)</a:t>
+            </a:r>
+          </a:p>
+          <a:p>
+            <a:pPr>
+              <a:spcBef>
+                <a:spcPts val="600"/>
+              </a:spcBef>
+              <a:spcAft>
+                <a:spcPts val="800"/>
+              </a:spcAft>
+              <a:defRPr sz="2000">
+                <a:solidFill>
+                  <a:srgbClr val="333333"/>
+                </a:solidFill>
+              </a:defRPr>
+            </a:pPr>
+            <a:endParaRPr/>
+          </a:p>
+          <a:p>
+            <a:pPr>
+              <a:spcBef>
+                <a:spcPts val="600"/>
+              </a:spcBef>
+              <a:spcAft>
+                <a:spcPts val="800"/>
+              </a:spcAft>
+              <a:defRPr sz="2000">
+                <a:solidFill>
+                  <a:srgbClr val="333333"/>
+                </a:solidFill>
+              </a:defRPr>
+            </a:pPr>
+            <a:r>
+              <a:t>Paris birth rate: 1.4 children/woman (replacement: 2.1)</a:t>
+            </a:r>
+          </a:p>
+          <a:p>
+            <a:pPr>
+              <a:spcBef>
+                <a:spcPts val="600"/>
+              </a:spcBef>
+              <a:spcAft>
+                <a:spcPts val="800"/>
+              </a:spcAft>
+              <a:defRPr sz="2000">
+                <a:solidFill>
+                  <a:srgbClr val="333333"/>
+                </a:solidFill>
+              </a:defRPr>
+            </a:pPr>
+            <a:r>
+              <a:t>This is not cultural choice. This is economic calculus.</a:t>
+            </a:r>
+          </a:p>
+          <a:p>
+            <a:pPr>
+              <a:spcBef>
+                <a:spcPts val="600"/>
+              </a:spcBef>
+              <a:spcAft>
+                <a:spcPts val="800"/>
+              </a:spcAft>
+              <a:defRPr sz="2000">
+                <a:solidFill>
+                  <a:srgbClr val="333333"/>
+                </a:solidFill>
+              </a:defRPr>
+            </a:pPr>
+            <a:r>
+              <a:t>Families are rationing their size. Demographic collapse is silent rationing.</a:t>
             </a:r>
           </a:p>
         </p:txBody>
@@ -4548,8 +5615,8 @@
 </p:sld>
 </file>
 
-<file path=ppt/slides/slide18.xml><?xml version="1.0" encoding="utf-8"?>
-<p:sld xmlns:a="http://schemas.openxmlformats.org/drawingml/2006/main" xmlns:p="http://schemas.openxmlformats.org/presentationml/2006/main" xmlns:r="http://schemas.openxmlformats.org/officeDocument/2006/relationships">
+<file path=ppt/slides/slide21.xml><?xml version="1.0" encoding="utf-8"?>
+<p:sld xmlns:a="http://schemas.openxmlformats.org/drawingml/2006/main" xmlns:r="http://schemas.openxmlformats.org/officeDocument/2006/relationships" xmlns:p="http://schemas.openxmlformats.org/presentationml/2006/main">
   <p:cSld>
     <p:bg>
       <p:bgPr>
@@ -4565,7 +5632,14 @@
         <p:cNvGrpSpPr/>
         <p:nvPr/>
       </p:nvGrpSpPr>
-      <p:grpSpPr/>
+      <p:grpSpPr>
+        <a:xfrm>
+          <a:off x="0" y="0"/>
+          <a:ext cx="0" cy="0"/>
+          <a:chOff x="0" y="0"/>
+          <a:chExt cx="0" cy="0"/>
+        </a:xfrm>
+      </p:grpSpPr>
       <p:sp>
         <p:nvSpPr>
           <p:cNvPr id="2" name="Rectangle 1"/>
@@ -4621,7 +5695,7 @@
               </a:defRPr>
             </a:pPr>
             <a:r>
-              <a:t>The Invisibility Crisis: Who Official Statistics Erase</a:t>
+              <a:t>Why This Matters</a:t>
             </a:r>
           </a:p>
         </p:txBody>
@@ -4662,199 +5736,215 @@
               </a:defRPr>
             </a:pPr>
             <a:r>
-              <a:t>SENIORS: Specialized dietary needs (soft foods, health management)</a:t>
-            </a:r>
-          </a:p>
-          <a:p>
-            <a:pPr>
-              <a:spcBef>
-                <a:spcPts val="600"/>
-              </a:spcBef>
-              <a:spcAft>
-                <a:spcPts val="800"/>
-              </a:spcAft>
-              <a:defRPr sz="2000">
-                <a:solidFill>
-                  <a:srgbClr val="333333"/>
-                </a:solidFill>
-              </a:defRPr>
-            </a:pPr>
-            <a:r>
-              <a:t>  • €334/month more than baseline, but counted as 'standard adult'</a:t>
-            </a:r>
-          </a:p>
-          <a:p>
-            <a:pPr>
-              <a:spcBef>
-                <a:spcPts val="600"/>
-              </a:spcBef>
-              <a:spcAft>
-                <a:spcPts val="800"/>
-              </a:spcAft>
-              <a:defRPr sz="2000">
-                <a:solidFill>
-                  <a:srgbClr val="333333"/>
-                </a:solidFill>
-              </a:defRPr>
-            </a:pPr>
-            <a:r>
-              <a:t>  • Elderly people disappear from policy view</a:t>
-            </a:r>
-          </a:p>
-          <a:p>
-            <a:pPr>
-              <a:spcBef>
-                <a:spcPts val="600"/>
-              </a:spcBef>
-              <a:spcAft>
-                <a:spcPts val="800"/>
-              </a:spcAft>
-              <a:defRPr sz="2000">
-                <a:solidFill>
-                  <a:srgbClr val="333333"/>
-                </a:solidFill>
-              </a:defRPr>
-            </a:pPr>
-          </a:p>
-          <a:p>
-            <a:pPr>
-              <a:spcBef>
-                <a:spcPts val="600"/>
-              </a:spcBef>
-              <a:spcAft>
-                <a:spcPts val="800"/>
-              </a:spcAft>
-              <a:defRPr sz="2000">
-                <a:solidFill>
-                  <a:srgbClr val="333333"/>
-                </a:solidFill>
-              </a:defRPr>
-            </a:pPr>
-            <a:r>
-              <a:t>TEENAGERS: Abrupt appetite transition (110% cost jump at age 13)</a:t>
-            </a:r>
-          </a:p>
-          <a:p>
-            <a:pPr>
-              <a:spcBef>
-                <a:spcPts val="600"/>
-              </a:spcBef>
-              <a:spcAft>
-                <a:spcPts val="800"/>
-              </a:spcAft>
-              <a:defRPr sz="2000">
-                <a:solidFill>
-                  <a:srgbClr val="333333"/>
-                </a:solidFill>
-              </a:defRPr>
-            </a:pPr>
-            <a:r>
-              <a:t>  • Malnutrition risk precisely when growth is critical</a:t>
-            </a:r>
-          </a:p>
-          <a:p>
-            <a:pPr>
-              <a:spcBef>
-                <a:spcPts val="600"/>
-              </a:spcBef>
-              <a:spcAft>
-                <a:spcPts val="800"/>
-              </a:spcAft>
-              <a:defRPr sz="2000">
-                <a:solidFill>
-                  <a:srgbClr val="333333"/>
-                </a:solidFill>
-              </a:defRPr>
-            </a:pPr>
-            <a:r>
-              <a:t>  • Not child-cost, not adult-cost—uncounted gap</a:t>
-            </a:r>
-          </a:p>
-          <a:p>
-            <a:pPr>
-              <a:spcBef>
-                <a:spcPts val="600"/>
-              </a:spcBef>
-              <a:spcAft>
-                <a:spcPts val="800"/>
-              </a:spcAft>
-              <a:defRPr sz="2000">
-                <a:solidFill>
-                  <a:srgbClr val="333333"/>
-                </a:solidFill>
-              </a:defRPr>
-            </a:pPr>
-          </a:p>
-          <a:p>
-            <a:pPr>
-              <a:spcBef>
-                <a:spcPts val="600"/>
-              </a:spcBef>
-              <a:spcAft>
-                <a:spcPts val="800"/>
-              </a:spcAft>
-              <a:defRPr sz="2000">
-                <a:solidFill>
-                  <a:srgbClr val="333333"/>
-                </a:solidFill>
-              </a:defRPr>
-            </a:pPr>
-            <a:r>
-              <a:t>THE SANDWICH GENERATION: Supporting both elderly AND children</a:t>
-            </a:r>
-          </a:p>
-          <a:p>
-            <a:pPr>
-              <a:spcBef>
-                <a:spcPts val="600"/>
-              </a:spcBef>
-              <a:spcAft>
-                <a:spcPts val="800"/>
-              </a:spcAft>
-              <a:defRPr sz="2000">
-                <a:solidFill>
-                  <a:srgbClr val="333333"/>
-                </a:solidFill>
-              </a:defRPr>
-            </a:pPr>
-            <a:r>
-              <a:t>  • 45-year-old: Parent +€334, Child +€304 = household multiplied</a:t>
-            </a:r>
-          </a:p>
-          <a:p>
-            <a:pPr>
-              <a:spcBef>
-                <a:spcPts val="600"/>
-              </a:spcBef>
-              <a:spcAft>
-                <a:spcPts val="800"/>
-              </a:spcAft>
-              <a:defRPr sz="2000">
-                <a:solidFill>
-                  <a:srgbClr val="333333"/>
-                </a:solidFill>
-              </a:defRPr>
-            </a:pPr>
-            <a:r>
-              <a:t>  • €941/month food costs (27% of median income)</a:t>
-            </a:r>
-          </a:p>
-          <a:p>
-            <a:pPr>
-              <a:spcBef>
-                <a:spcPts val="600"/>
-              </a:spcBef>
-              <a:spcAft>
-                <a:spcPts val="800"/>
-              </a:spcAft>
-              <a:defRPr sz="2000">
-                <a:solidFill>
-                  <a:srgbClr val="333333"/>
-                </a:solidFill>
-              </a:defRPr>
-            </a:pPr>
-            <a:r>
-              <a:t>  • Silent burden. Invisible in statistics. Breaking quietly.</a:t>
+              <a:t>POLICY MAKERS base decisions on official inflation rates that underestimate</a:t>
+            </a:r>
+          </a:p>
+          <a:p>
+            <a:pPr>
+              <a:spcBef>
+                <a:spcPts val="600"/>
+              </a:spcBef>
+              <a:spcAft>
+                <a:spcPts val="800"/>
+              </a:spcAft>
+              <a:defRPr sz="2000">
+                <a:solidFill>
+                  <a:srgbClr val="333333"/>
+                </a:solidFill>
+              </a:defRPr>
+            </a:pPr>
+            <a:r>
+              <a:t>real costs by 30-50%</a:t>
+            </a:r>
+          </a:p>
+          <a:p>
+            <a:pPr>
+              <a:spcBef>
+                <a:spcPts val="600"/>
+              </a:spcBef>
+              <a:spcAft>
+                <a:spcPts val="800"/>
+              </a:spcAft>
+              <a:defRPr sz="2000">
+                <a:solidFill>
+                  <a:srgbClr val="333333"/>
+                </a:solidFill>
+              </a:defRPr>
+            </a:pPr>
+            <a:endParaRPr/>
+          </a:p>
+          <a:p>
+            <a:pPr>
+              <a:spcBef>
+                <a:spcPts val="600"/>
+              </a:spcBef>
+              <a:spcAft>
+                <a:spcPts val="800"/>
+              </a:spcAft>
+              <a:defRPr sz="2000">
+                <a:solidFill>
+                  <a:srgbClr val="333333"/>
+                </a:solidFill>
+              </a:defRPr>
+            </a:pPr>
+            <a:r>
+              <a:t>WORKERS see their salaries (linked to inflation) never keep pace with actual</a:t>
+            </a:r>
+          </a:p>
+          <a:p>
+            <a:pPr>
+              <a:spcBef>
+                <a:spcPts val="600"/>
+              </a:spcBef>
+              <a:spcAft>
+                <a:spcPts val="800"/>
+              </a:spcAft>
+              <a:defRPr sz="2000">
+                <a:solidFill>
+                  <a:srgbClr val="333333"/>
+                </a:solidFill>
+              </a:defRPr>
+            </a:pPr>
+            <a:r>
+              <a:t>living expenses</a:t>
+            </a:r>
+          </a:p>
+          <a:p>
+            <a:pPr>
+              <a:spcBef>
+                <a:spcPts val="600"/>
+              </a:spcBef>
+              <a:spcAft>
+                <a:spcPts val="800"/>
+              </a:spcAft>
+              <a:defRPr sz="2000">
+                <a:solidFill>
+                  <a:srgbClr val="333333"/>
+                </a:solidFill>
+              </a:defRPr>
+            </a:pPr>
+            <a:endParaRPr/>
+          </a:p>
+          <a:p>
+            <a:pPr>
+              <a:spcBef>
+                <a:spcPts val="600"/>
+              </a:spcBef>
+              <a:spcAft>
+                <a:spcPts val="800"/>
+              </a:spcAft>
+              <a:defRPr sz="2000">
+                <a:solidFill>
+                  <a:srgbClr val="333333"/>
+                </a:solidFill>
+              </a:defRPr>
+            </a:pPr>
+            <a:r>
+              <a:t>FAMILIES make impossible choices: healthy food OR paying rent?</a:t>
+            </a:r>
+          </a:p>
+          <a:p>
+            <a:pPr>
+              <a:spcBef>
+                <a:spcPts val="600"/>
+              </a:spcBef>
+              <a:spcAft>
+                <a:spcPts val="800"/>
+              </a:spcAft>
+              <a:defRPr sz="2000">
+                <a:solidFill>
+                  <a:srgbClr val="333333"/>
+                </a:solidFill>
+              </a:defRPr>
+            </a:pPr>
+            <a:r>
+              <a:t>Diapers OR transportation?</a:t>
+            </a:r>
+          </a:p>
+          <a:p>
+            <a:pPr>
+              <a:spcBef>
+                <a:spcPts val="600"/>
+              </a:spcBef>
+              <a:spcAft>
+                <a:spcPts val="800"/>
+              </a:spcAft>
+              <a:defRPr sz="2000">
+                <a:solidFill>
+                  <a:srgbClr val="333333"/>
+                </a:solidFill>
+              </a:defRPr>
+            </a:pPr>
+            <a:endParaRPr/>
+          </a:p>
+          <a:p>
+            <a:pPr>
+              <a:spcBef>
+                <a:spcPts val="600"/>
+              </a:spcBef>
+              <a:spcAft>
+                <a:spcPts val="800"/>
+              </a:spcAft>
+              <a:defRPr sz="2000">
+                <a:solidFill>
+                  <a:srgbClr val="333333"/>
+                </a:solidFill>
+              </a:defRPr>
+            </a:pPr>
+            <a:r>
+              <a:t>INEQUALITY is hidden in the numbers. What's not measured is not managed.</a:t>
+            </a:r>
+          </a:p>
+          <a:p>
+            <a:pPr>
+              <a:spcBef>
+                <a:spcPts val="600"/>
+              </a:spcBef>
+              <a:spcAft>
+                <a:spcPts val="800"/>
+              </a:spcAft>
+              <a:defRPr sz="2000">
+                <a:solidFill>
+                  <a:srgbClr val="333333"/>
+                </a:solidFill>
+              </a:defRPr>
+            </a:pPr>
+            <a:endParaRPr/>
+          </a:p>
+          <a:p>
+            <a:pPr>
+              <a:spcBef>
+                <a:spcPts val="600"/>
+              </a:spcBef>
+              <a:spcAft>
+                <a:spcPts val="800"/>
+              </a:spcAft>
+              <a:defRPr sz="2000">
+                <a:solidFill>
+                  <a:srgbClr val="333333"/>
+                </a:solidFill>
+              </a:defRPr>
+            </a:pPr>
+            <a:r>
+              <a:t>STATISTICS are not neutral. They reveal what society has decided to COUNT</a:t>
+            </a:r>
+          </a:p>
+          <a:p>
+            <a:pPr>
+              <a:spcBef>
+                <a:spcPts val="600"/>
+              </a:spcBef>
+              <a:spcAft>
+                <a:spcPts val="800"/>
+              </a:spcAft>
+              <a:defRPr sz="2000">
+                <a:solidFill>
+                  <a:srgbClr val="333333"/>
+                </a:solidFill>
+              </a:defRPr>
+            </a:pPr>
+            <a:r>
+              <a:t>and what it chooses to IGNORE.</a:t>
             </a:r>
           </a:p>
         </p:txBody>
@@ -4867,8 +5957,319 @@
 </p:sld>
 </file>
 
-<file path=ppt/slides/slide19.xml><?xml version="1.0" encoding="utf-8"?>
-<p:sld xmlns:a="http://schemas.openxmlformats.org/drawingml/2006/main" xmlns:p="http://schemas.openxmlformats.org/presentationml/2006/main" xmlns:r="http://schemas.openxmlformats.org/officeDocument/2006/relationships">
+<file path=ppt/slides/slide22.xml><?xml version="1.0" encoding="utf-8"?>
+<p:sld xmlns:a="http://schemas.openxmlformats.org/drawingml/2006/main" xmlns:r="http://schemas.openxmlformats.org/officeDocument/2006/relationships" xmlns:p="http://schemas.openxmlformats.org/presentationml/2006/main">
+  <p:cSld>
+    <p:bg>
+      <p:bgPr>
+        <a:solidFill>
+          <a:srgbClr val="FFFFFF"/>
+        </a:solidFill>
+        <a:effectLst/>
+      </p:bgPr>
+    </p:bg>
+    <p:spTree>
+      <p:nvGrpSpPr>
+        <p:cNvPr id="1" name=""/>
+        <p:cNvGrpSpPr/>
+        <p:nvPr/>
+      </p:nvGrpSpPr>
+      <p:grpSpPr>
+        <a:xfrm>
+          <a:off x="0" y="0"/>
+          <a:ext cx="0" cy="0"/>
+          <a:chOff x="0" y="0"/>
+          <a:chExt cx="0" cy="0"/>
+        </a:xfrm>
+      </p:grpSpPr>
+      <p:sp>
+        <p:nvSpPr>
+          <p:cNvPr id="2" name="Rectangle 1"/>
+          <p:cNvSpPr/>
+          <p:nvPr/>
+        </p:nvSpPr>
+        <p:spPr>
+          <a:xfrm>
+            <a:off x="0" y="0"/>
+            <a:ext cx="9144000" cy="1188720"/>
+          </a:xfrm>
+          <a:prstGeom prst="rect">
+            <a:avLst/>
+          </a:prstGeom>
+          <a:solidFill>
+            <a:srgbClr val="1F4E79"/>
+          </a:solidFill>
+          <a:ln>
+            <a:solidFill>
+              <a:srgbClr val="1F4E79"/>
+            </a:solidFill>
+          </a:ln>
+        </p:spPr>
+        <p:style>
+          <a:lnRef idx="1">
+            <a:schemeClr val="accent1"/>
+          </a:lnRef>
+          <a:fillRef idx="3">
+            <a:schemeClr val="accent1"/>
+          </a:fillRef>
+          <a:effectRef idx="2">
+            <a:schemeClr val="accent1"/>
+          </a:effectRef>
+          <a:fontRef idx="minor">
+            <a:schemeClr val="lt1"/>
+          </a:fontRef>
+        </p:style>
+        <p:txBody>
+          <a:bodyPr rtlCol="0" anchor="ctr"/>
+          <a:lstStyle/>
+          <a:p>
+            <a:pPr algn="ctr">
+              <a:spcBef>
+                <a:spcPts val="1200"/>
+              </a:spcBef>
+              <a:spcAft>
+                <a:spcPts val="1200"/>
+              </a:spcAft>
+              <a:defRPr sz="4400" b="1">
+                <a:solidFill>
+                  <a:srgbClr val="FFFFFF"/>
+                </a:solidFill>
+              </a:defRPr>
+            </a:pPr>
+            <a:r>
+              <a:rPr dirty="0"/>
+              <a:t>The Opportunity: Real Data for Real Decisions</a:t>
+            </a:r>
+          </a:p>
+        </p:txBody>
+      </p:sp>
+      <p:sp>
+        <p:nvSpPr>
+          <p:cNvPr id="3" name="TextBox 2"/>
+          <p:cNvSpPr txBox="1"/>
+          <p:nvPr/>
+        </p:nvSpPr>
+        <p:spPr>
+          <a:xfrm>
+            <a:off x="731520" y="1188720"/>
+            <a:ext cx="7680960" cy="5212080"/>
+          </a:xfrm>
+          <a:prstGeom prst="rect">
+            <a:avLst/>
+          </a:prstGeom>
+          <a:noFill/>
+        </p:spPr>
+        <p:txBody>
+          <a:bodyPr wrap="square">
+            <a:spAutoFit/>
+          </a:bodyPr>
+          <a:lstStyle/>
+          <a:p>
+            <a:pPr>
+              <a:spcBef>
+                <a:spcPts val="600"/>
+              </a:spcBef>
+              <a:spcAft>
+                <a:spcPts val="800"/>
+              </a:spcAft>
+              <a:defRPr sz="2000">
+                <a:solidFill>
+                  <a:srgbClr val="333333"/>
+                </a:solidFill>
+              </a:defRPr>
+            </a:pPr>
+            <a:r>
+              <a:t>Snipper Tool changes this by collecting REAL pricing data for REAL baskets:</a:t>
+            </a:r>
+          </a:p>
+          <a:p>
+            <a:pPr>
+              <a:spcBef>
+                <a:spcPts val="600"/>
+              </a:spcBef>
+              <a:spcAft>
+                <a:spcPts val="800"/>
+              </a:spcAft>
+              <a:defRPr sz="2000">
+                <a:solidFill>
+                  <a:srgbClr val="333333"/>
+                </a:solidFill>
+              </a:defRPr>
+            </a:pPr>
+            <a:endParaRPr/>
+          </a:p>
+          <a:p>
+            <a:pPr>
+              <a:spcBef>
+                <a:spcPts val="600"/>
+              </a:spcBef>
+              <a:spcAft>
+                <a:spcPts val="800"/>
+              </a:spcAft>
+              <a:defRPr sz="2000">
+                <a:solidFill>
+                  <a:srgbClr val="333333"/>
+                </a:solidFill>
+              </a:defRPr>
+            </a:pPr>
+            <a:r>
+              <a:t>Real families don't buy INSEE baskets.</a:t>
+            </a:r>
+          </a:p>
+          <a:p>
+            <a:pPr>
+              <a:spcBef>
+                <a:spcPts val="600"/>
+              </a:spcBef>
+              <a:spcAft>
+                <a:spcPts val="800"/>
+              </a:spcAft>
+              <a:defRPr sz="2000">
+                <a:solidFill>
+                  <a:srgbClr val="333333"/>
+                </a:solidFill>
+              </a:defRPr>
+            </a:pPr>
+            <a:r>
+              <a:t>They buy complete meals, dietary alternatives, baby products, and items</a:t>
+            </a:r>
+          </a:p>
+          <a:p>
+            <a:pPr>
+              <a:spcBef>
+                <a:spcPts val="600"/>
+              </a:spcBef>
+              <a:spcAft>
+                <a:spcPts val="800"/>
+              </a:spcAft>
+              <a:defRPr sz="2000">
+                <a:solidFill>
+                  <a:srgbClr val="333333"/>
+                </a:solidFill>
+              </a:defRPr>
+            </a:pPr>
+            <a:r>
+              <a:t>that support healthy, dignified family life.</a:t>
+            </a:r>
+          </a:p>
+          <a:p>
+            <a:pPr>
+              <a:spcBef>
+                <a:spcPts val="600"/>
+              </a:spcBef>
+              <a:spcAft>
+                <a:spcPts val="800"/>
+              </a:spcAft>
+              <a:defRPr sz="2000">
+                <a:solidFill>
+                  <a:srgbClr val="333333"/>
+                </a:solidFill>
+              </a:defRPr>
+            </a:pPr>
+            <a:endParaRPr/>
+          </a:p>
+          <a:p>
+            <a:pPr>
+              <a:spcBef>
+                <a:spcPts val="600"/>
+              </a:spcBef>
+              <a:spcAft>
+                <a:spcPts val="800"/>
+              </a:spcAft>
+              <a:defRPr sz="2000">
+                <a:solidFill>
+                  <a:srgbClr val="333333"/>
+                </a:solidFill>
+              </a:defRPr>
+            </a:pPr>
+            <a:r>
+              <a:t>By tracking ACTUAL purchases across Paris supermarkets, Snipper Tool can:</a:t>
+            </a:r>
+          </a:p>
+          <a:p>
+            <a:pPr>
+              <a:spcBef>
+                <a:spcPts val="600"/>
+              </a:spcBef>
+              <a:spcAft>
+                <a:spcPts val="800"/>
+              </a:spcAft>
+              <a:defRPr sz="2000">
+                <a:solidFill>
+                  <a:srgbClr val="333333"/>
+                </a:solidFill>
+              </a:defRPr>
+            </a:pPr>
+            <a:r>
+              <a:t>  • Expose the gap between official statistics and real costs</a:t>
+            </a:r>
+          </a:p>
+          <a:p>
+            <a:pPr>
+              <a:spcBef>
+                <a:spcPts val="600"/>
+              </a:spcBef>
+              <a:spcAft>
+                <a:spcPts val="800"/>
+              </a:spcAft>
+              <a:defRPr sz="2000">
+                <a:solidFill>
+                  <a:srgbClr val="333333"/>
+                </a:solidFill>
+              </a:defRPr>
+            </a:pPr>
+            <a:r>
+              <a:t>  • Track health-focused pricing decisions</a:t>
+            </a:r>
+          </a:p>
+          <a:p>
+            <a:pPr>
+              <a:spcBef>
+                <a:spcPts val="600"/>
+              </a:spcBef>
+              <a:spcAft>
+                <a:spcPts val="800"/>
+              </a:spcAft>
+              <a:defRPr sz="2000">
+                <a:solidFill>
+                  <a:srgbClr val="333333"/>
+                </a:solidFill>
+              </a:defRPr>
+            </a:pPr>
+            <a:r>
+              <a:t>  • Identify affordability cliffs by income and family type</a:t>
+            </a:r>
+          </a:p>
+          <a:p>
+            <a:pPr>
+              <a:spcBef>
+                <a:spcPts val="600"/>
+              </a:spcBef>
+              <a:spcAft>
+                <a:spcPts val="800"/>
+              </a:spcAft>
+              <a:defRPr sz="2000">
+                <a:solidFill>
+                  <a:srgbClr val="333333"/>
+                </a:solidFill>
+              </a:defRPr>
+            </a:pPr>
+            <a:r>
+              <a:t>  • Provide data for better policy and wage decisions</a:t>
+            </a:r>
+          </a:p>
+        </p:txBody>
+      </p:sp>
+    </p:spTree>
+  </p:cSld>
+  <p:clrMapOvr>
+    <a:masterClrMapping/>
+  </p:clrMapOvr>
+</p:sld>
+</file>
+
+<file path=ppt/slides/slide23.xml><?xml version="1.0" encoding="utf-8"?>
+<p:sld xmlns:a="http://schemas.openxmlformats.org/drawingml/2006/main" xmlns:r="http://schemas.openxmlformats.org/officeDocument/2006/relationships" xmlns:p="http://schemas.openxmlformats.org/presentationml/2006/main">
   <p:cSld>
     <p:bg>
       <p:bgPr>
@@ -4884,7 +6285,14 @@
         <p:cNvGrpSpPr/>
         <p:nvPr/>
       </p:nvGrpSpPr>
-      <p:grpSpPr/>
+      <p:grpSpPr>
+        <a:xfrm>
+          <a:off x="0" y="0"/>
+          <a:ext cx="0" cy="0"/>
+          <a:chOff x="0" y="0"/>
+          <a:chExt cx="0" cy="0"/>
+        </a:xfrm>
+      </p:grpSpPr>
       <p:sp>
         <p:nvSpPr>
           <p:cNvPr id="2" name="TextBox 1"/>
@@ -4894,7 +6302,7 @@
         <p:spPr>
           <a:xfrm>
             <a:off x="914400" y="2286000"/>
-            <a:ext cx="7315200" cy="2286000"/>
+            <a:ext cx="7315200" cy="1938992"/>
           </a:xfrm>
           <a:prstGeom prst="rect">
             <a:avLst/>
@@ -4915,15 +6323,15 @@
               </a:defRPr>
             </a:pPr>
             <a:r>
-              <a:t>What gets priced out of reach doesn't get born.</a:t>
-            </a:r>
-            <a:br/>
-            <a:r>
-              <a:t>Food affordability is not just poverty.</a:t>
-            </a:r>
-            <a:br/>
-            <a:r>
-              <a:t>It's a demographic determinant.</a:t>
+              <a:rPr sz="4000" dirty="0"/>
+              <a:t>The numbers never lie.</a:t>
+            </a:r>
+            <a:br>
+              <a:rPr sz="4000" dirty="0"/>
+            </a:br>
+            <a:r>
+              <a:rPr sz="4000" dirty="0"/>
+              <a:t>But incomplete numbers hide the truth.</a:t>
             </a:r>
           </a:p>
         </p:txBody>
@@ -4958,7 +6366,7 @@
               </a:defRPr>
             </a:pPr>
             <a:r>
-              <a:t>THE HIDDEN CONSEQUENCE: Why Birth Rates Are Collapsing</a:t>
+              <a:t>FINAL INSIGHT: What You Measure is What You Manage</a:t>
             </a:r>
           </a:p>
         </p:txBody>
@@ -4971,8 +6379,8 @@
 </p:sld>
 </file>
 
-<file path=ppt/slides/slide2.xml><?xml version="1.0" encoding="utf-8"?>
-<p:sld xmlns:a="http://schemas.openxmlformats.org/drawingml/2006/main" xmlns:p="http://schemas.openxmlformats.org/presentationml/2006/main" xmlns:r="http://schemas.openxmlformats.org/officeDocument/2006/relationships">
+<file path=ppt/slides/slide24.xml><?xml version="1.0" encoding="utf-8"?>
+<p:sld xmlns:a="http://schemas.openxmlformats.org/drawingml/2006/main" xmlns:r="http://schemas.openxmlformats.org/officeDocument/2006/relationships" xmlns:p="http://schemas.openxmlformats.org/presentationml/2006/main">
   <p:cSld>
     <p:bg>
       <p:bgPr>
@@ -4988,7 +6396,14 @@
         <p:cNvGrpSpPr/>
         <p:nvPr/>
       </p:nvGrpSpPr>
-      <p:grpSpPr/>
+      <p:grpSpPr>
+        <a:xfrm>
+          <a:off x="0" y="0"/>
+          <a:ext cx="0" cy="0"/>
+          <a:chOff x="0" y="0"/>
+          <a:chExt cx="0" cy="0"/>
+        </a:xfrm>
+      </p:grpSpPr>
       <p:sp>
         <p:nvSpPr>
           <p:cNvPr id="2" name="Rectangle 1"/>
@@ -5044,7 +6459,7 @@
               </a:defRPr>
             </a:pPr>
             <a:r>
-              <a:t>The Problem: Official Baskets are Incomplete</a:t>
+              <a:t>This Analysis</a:t>
             </a:r>
           </a:p>
         </p:txBody>
@@ -5085,163 +6500,253 @@
               </a:defRPr>
             </a:pPr>
             <a:r>
-              <a:t>INSEE reports inflation based on a MINIMAL BASKET of emblematic products:</a:t>
-            </a:r>
-          </a:p>
-          <a:p>
-            <a:pPr>
-              <a:spcBef>
-                <a:spcPts val="600"/>
-              </a:spcBef>
-              <a:spcAft>
-                <a:spcPts val="800"/>
-              </a:spcAft>
-              <a:defRPr sz="2000">
-                <a:solidFill>
-                  <a:srgbClr val="333333"/>
-                </a:solidFill>
-              </a:defRPr>
-            </a:pPr>
-            <a:r>
-              <a:t>  • Milk, bread, eggs, cheese, butter, pasta...</a:t>
-            </a:r>
-          </a:p>
-          <a:p>
-            <a:pPr>
-              <a:spcBef>
-                <a:spcPts val="600"/>
-              </a:spcBef>
-              <a:spcAft>
-                <a:spcPts val="800"/>
-              </a:spcAft>
-              <a:defRPr sz="2000">
-                <a:solidFill>
-                  <a:srgbClr val="333333"/>
-                </a:solidFill>
-              </a:defRPr>
-            </a:pPr>
-          </a:p>
-          <a:p>
-            <a:pPr>
-              <a:spcBef>
-                <a:spcPts val="600"/>
-              </a:spcBef>
-              <a:spcAft>
-                <a:spcPts val="800"/>
-              </a:spcAft>
-              <a:defRPr sz="2000">
-                <a:solidFill>
-                  <a:srgbClr val="333333"/>
-                </a:solidFill>
-              </a:defRPr>
-            </a:pPr>
-            <a:r>
-              <a:t>But official baskets IGNORE the complementary items families actually need:</a:t>
-            </a:r>
-          </a:p>
-          <a:p>
-            <a:pPr>
-              <a:spcBef>
-                <a:spcPts val="600"/>
-              </a:spcBef>
-              <a:spcAft>
-                <a:spcPts val="800"/>
-              </a:spcAft>
-              <a:defRPr sz="2000">
-                <a:solidFill>
-                  <a:srgbClr val="333333"/>
-                </a:solidFill>
-              </a:defRPr>
-            </a:pPr>
-            <a:r>
-              <a:t>  • Different milk types (lactose-free, baby formula)</a:t>
-            </a:r>
-          </a:p>
-          <a:p>
-            <a:pPr>
-              <a:spcBef>
-                <a:spcPts val="600"/>
-              </a:spcBef>
-              <a:spcAft>
-                <a:spcPts val="800"/>
-              </a:spcAft>
-              <a:defRPr sz="2000">
-                <a:solidFill>
-                  <a:srgbClr val="333333"/>
-                </a:solidFill>
-              </a:defRPr>
-            </a:pPr>
-            <a:r>
-              <a:t>  • Items that complete meals (sauces, oils, spices)</a:t>
-            </a:r>
-          </a:p>
-          <a:p>
-            <a:pPr>
-              <a:spcBef>
-                <a:spcPts val="600"/>
-              </a:spcBef>
-              <a:spcAft>
-                <a:spcPts val="800"/>
-              </a:spcAft>
-              <a:defRPr sz="2000">
-                <a:solidFill>
-                  <a:srgbClr val="333333"/>
-                </a:solidFill>
-              </a:defRPr>
-            </a:pPr>
-            <a:r>
-              <a:t>  • Baby essentials (diapers, creams)</a:t>
-            </a:r>
-          </a:p>
-          <a:p>
-            <a:pPr>
-              <a:spcBef>
-                <a:spcPts val="600"/>
-              </a:spcBef>
-              <a:spcAft>
-                <a:spcPts val="800"/>
-              </a:spcAft>
-              <a:defRPr sz="2000">
-                <a:solidFill>
-                  <a:srgbClr val="333333"/>
-                </a:solidFill>
-              </a:defRPr>
-            </a:pPr>
-            <a:r>
-              <a:t>  • Dietary alternatives (allergies, intolerances)</a:t>
-            </a:r>
-          </a:p>
-          <a:p>
-            <a:pPr>
-              <a:spcBef>
-                <a:spcPts val="600"/>
-              </a:spcBef>
-              <a:spcAft>
-                <a:spcPts val="800"/>
-              </a:spcAft>
-              <a:defRPr sz="2000">
-                <a:solidFill>
-                  <a:srgbClr val="333333"/>
-                </a:solidFill>
-              </a:defRPr>
-            </a:pPr>
-          </a:p>
-          <a:p>
-            <a:pPr>
-              <a:spcBef>
-                <a:spcPts val="600"/>
-              </a:spcBef>
-              <a:spcAft>
-                <a:spcPts val="800"/>
-              </a:spcAft>
-              <a:defRPr sz="2000">
-                <a:solidFill>
-                  <a:srgbClr val="333333"/>
-                </a:solidFill>
-              </a:defRPr>
-            </a:pPr>
-            <a:r>
-              <a:t>Result: Official inflation numbers measure SURVIVAL, not LIVING</a:t>
+              <a:t>Dataset: 2,163 synthetic price observations (Apr 2025 - Apr 2026)</a:t>
+            </a:r>
+          </a:p>
+          <a:p>
+            <a:pPr>
+              <a:spcBef>
+                <a:spcPts val="600"/>
+              </a:spcBef>
+              <a:spcAft>
+                <a:spcPts val="800"/>
+              </a:spcAft>
+              <a:defRPr sz="2000">
+                <a:solidFill>
+                  <a:srgbClr val="333333"/>
+                </a:solidFill>
+              </a:defRPr>
+            </a:pPr>
+            <a:r>
+              <a:t>From Snipper Tool captures in Paris Auchan and Carrefour stores</a:t>
+            </a:r>
+          </a:p>
+          <a:p>
+            <a:pPr>
+              <a:spcBef>
+                <a:spcPts val="600"/>
+              </a:spcBef>
+              <a:spcAft>
+                <a:spcPts val="800"/>
+              </a:spcAft>
+              <a:defRPr sz="2000">
+                <a:solidFill>
+                  <a:srgbClr val="333333"/>
+                </a:solidFill>
+              </a:defRPr>
+            </a:pPr>
+            <a:endParaRPr/>
+          </a:p>
+          <a:p>
+            <a:pPr>
+              <a:spcBef>
+                <a:spcPts val="600"/>
+              </a:spcBef>
+              <a:spcAft>
+                <a:spcPts val="800"/>
+              </a:spcAft>
+              <a:defRPr sz="2000">
+                <a:solidFill>
+                  <a:srgbClr val="333333"/>
+                </a:solidFill>
+              </a:defRPr>
+            </a:pPr>
+            <a:r>
+              <a:t>Compared THREE basket types:</a:t>
+            </a:r>
+          </a:p>
+          <a:p>
+            <a:pPr>
+              <a:spcBef>
+                <a:spcPts val="600"/>
+              </a:spcBef>
+              <a:spcAft>
+                <a:spcPts val="800"/>
+              </a:spcAft>
+              <a:defRPr sz="2000">
+                <a:solidFill>
+                  <a:srgbClr val="333333"/>
+                </a:solidFill>
+              </a:defRPr>
+            </a:pPr>
+            <a:r>
+              <a:t>  1. Official INSEE Minimal Basket</a:t>
+            </a:r>
+          </a:p>
+          <a:p>
+            <a:pPr>
+              <a:spcBef>
+                <a:spcPts val="600"/>
+              </a:spcBef>
+              <a:spcAft>
+                <a:spcPts val="800"/>
+              </a:spcAft>
+              <a:defRPr sz="2000">
+                <a:solidFill>
+                  <a:srgbClr val="333333"/>
+                </a:solidFill>
+              </a:defRPr>
+            </a:pPr>
+            <a:r>
+              <a:t>  2. Real Complete Living Basket (includes complementary items)</a:t>
+            </a:r>
+          </a:p>
+          <a:p>
+            <a:pPr>
+              <a:spcBef>
+                <a:spcPts val="600"/>
+              </a:spcBef>
+              <a:spcAft>
+                <a:spcPts val="800"/>
+              </a:spcAft>
+              <a:defRPr sz="2000">
+                <a:solidFill>
+                  <a:srgbClr val="333333"/>
+                </a:solidFill>
+              </a:defRPr>
+            </a:pPr>
+            <a:r>
+              <a:t>  3. Healthy Complete Basket (for nutritional wellness)</a:t>
+            </a:r>
+          </a:p>
+          <a:p>
+            <a:pPr>
+              <a:spcBef>
+                <a:spcPts val="600"/>
+              </a:spcBef>
+              <a:spcAft>
+                <a:spcPts val="800"/>
+              </a:spcAft>
+              <a:defRPr sz="2000">
+                <a:solidFill>
+                  <a:srgbClr val="333333"/>
+                </a:solidFill>
+              </a:defRPr>
+            </a:pPr>
+            <a:endParaRPr/>
+          </a:p>
+          <a:p>
+            <a:pPr>
+              <a:spcBef>
+                <a:spcPts val="600"/>
+              </a:spcBef>
+              <a:spcAft>
+                <a:spcPts val="800"/>
+              </a:spcAft>
+              <a:defRPr sz="2000">
+                <a:solidFill>
+                  <a:srgbClr val="333333"/>
+                </a:solidFill>
+              </a:defRPr>
+            </a:pPr>
+            <a:r>
+              <a:t>Against PARIS HOUSEHOLD INCOMES:</a:t>
+            </a:r>
+          </a:p>
+          <a:p>
+            <a:pPr>
+              <a:spcBef>
+                <a:spcPts val="600"/>
+              </a:spcBef>
+              <a:spcAft>
+                <a:spcPts val="800"/>
+              </a:spcAft>
+              <a:defRPr sz="2000">
+                <a:solidFill>
+                  <a:srgbClr val="333333"/>
+                </a:solidFill>
+              </a:defRPr>
+            </a:pPr>
+            <a:r>
+              <a:t>  • SMIC (minimum wage): 21,000 EUR/year</a:t>
+            </a:r>
+          </a:p>
+          <a:p>
+            <a:pPr>
+              <a:spcBef>
+                <a:spcPts val="600"/>
+              </a:spcBef>
+              <a:spcAft>
+                <a:spcPts val="800"/>
+              </a:spcAft>
+              <a:defRPr sz="2000">
+                <a:solidFill>
+                  <a:srgbClr val="333333"/>
+                </a:solidFill>
+              </a:defRPr>
+            </a:pPr>
+            <a:r>
+              <a:t>  • Low income: 28,000 EUR/year</a:t>
+            </a:r>
+          </a:p>
+          <a:p>
+            <a:pPr>
+              <a:spcBef>
+                <a:spcPts val="600"/>
+              </a:spcBef>
+              <a:spcAft>
+                <a:spcPts val="800"/>
+              </a:spcAft>
+              <a:defRPr sz="2000">
+                <a:solidFill>
+                  <a:srgbClr val="333333"/>
+                </a:solidFill>
+              </a:defRPr>
+            </a:pPr>
+            <a:r>
+              <a:t>  • Median: 42,000 EUR/year</a:t>
+            </a:r>
+          </a:p>
+          <a:p>
+            <a:pPr>
+              <a:spcBef>
+                <a:spcPts val="600"/>
+              </a:spcBef>
+              <a:spcAft>
+                <a:spcPts val="800"/>
+              </a:spcAft>
+              <a:defRPr sz="2000">
+                <a:solidFill>
+                  <a:srgbClr val="333333"/>
+                </a:solidFill>
+              </a:defRPr>
+            </a:pPr>
+            <a:r>
+              <a:t>  • Upper middle: 65,000 EUR/year</a:t>
+            </a:r>
+          </a:p>
+          <a:p>
+            <a:pPr>
+              <a:spcBef>
+                <a:spcPts val="600"/>
+              </a:spcBef>
+              <a:spcAft>
+                <a:spcPts val="800"/>
+              </a:spcAft>
+              <a:defRPr sz="2000">
+                <a:solidFill>
+                  <a:srgbClr val="333333"/>
+                </a:solidFill>
+              </a:defRPr>
+            </a:pPr>
+            <a:endParaRPr/>
+          </a:p>
+          <a:p>
+            <a:pPr>
+              <a:spcBef>
+                <a:spcPts val="600"/>
+              </a:spcBef>
+              <a:spcAft>
+                <a:spcPts val="800"/>
+              </a:spcAft>
+              <a:defRPr sz="2000">
+                <a:solidFill>
+                  <a:srgbClr val="333333"/>
+                </a:solidFill>
+              </a:defRPr>
+            </a:pPr>
+            <a:r>
+              <a:t>Geography: Paris region (Ile-de-France)</a:t>
             </a:r>
           </a:p>
         </p:txBody>
@@ -5254,8 +6759,412 @@
 </p:sld>
 </file>
 
-<file path=ppt/slides/slide20.xml><?xml version="1.0" encoding="utf-8"?>
-<p:sld xmlns:a="http://schemas.openxmlformats.org/drawingml/2006/main" xmlns:p="http://schemas.openxmlformats.org/presentationml/2006/main" xmlns:r="http://schemas.openxmlformats.org/officeDocument/2006/relationships">
+<file path=ppt/slides/slide25.xml><?xml version="1.0" encoding="utf-8"?>
+<p:sld xmlns:a="http://schemas.openxmlformats.org/drawingml/2006/main" xmlns:r="http://schemas.openxmlformats.org/officeDocument/2006/relationships" xmlns:p="http://schemas.openxmlformats.org/presentationml/2006/main">
+  <p:cSld>
+    <p:bg>
+      <p:bgPr>
+        <a:solidFill>
+          <a:srgbClr val="F5F5F5"/>
+        </a:solidFill>
+        <a:effectLst/>
+      </p:bgPr>
+    </p:bg>
+    <p:spTree>
+      <p:nvGrpSpPr>
+        <p:cNvPr id="1" name=""/>
+        <p:cNvGrpSpPr/>
+        <p:nvPr/>
+      </p:nvGrpSpPr>
+      <p:grpSpPr>
+        <a:xfrm>
+          <a:off x="0" y="0"/>
+          <a:ext cx="0" cy="0"/>
+          <a:chOff x="0" y="0"/>
+          <a:chExt cx="0" cy="0"/>
+        </a:xfrm>
+      </p:grpSpPr>
+      <p:sp>
+        <p:nvSpPr>
+          <p:cNvPr id="2" name="TextBox 1"/>
+          <p:cNvSpPr txBox="1"/>
+          <p:nvPr/>
+        </p:nvSpPr>
+        <p:spPr>
+          <a:xfrm>
+            <a:off x="457200" y="274320"/>
+            <a:ext cx="6017225" cy="1323439"/>
+          </a:xfrm>
+          <a:prstGeom prst="rect">
+            <a:avLst/>
+          </a:prstGeom>
+          <a:noFill/>
+        </p:spPr>
+        <p:txBody>
+          <a:bodyPr wrap="none">
+            <a:spAutoFit/>
+          </a:bodyPr>
+          <a:lstStyle/>
+          <a:p>
+            <a:pPr>
+              <a:defRPr sz="4000" b="1">
+                <a:solidFill>
+                  <a:srgbClr val="1F4D76"/>
+                </a:solidFill>
+              </a:defRPr>
+            </a:pPr>
+            <a:r>
+              <a:rPr dirty="0"/>
+              <a:t>Complete Budget Reality: </a:t>
+            </a:r>
+            <a:endParaRPr lang="en-US" dirty="0"/>
+          </a:p>
+          <a:p>
+            <a:pPr>
+              <a:defRPr sz="4000" b="1">
+                <a:solidFill>
+                  <a:srgbClr val="1F4D76"/>
+                </a:solidFill>
+              </a:defRPr>
+            </a:pPr>
+            <a:r>
+              <a:rPr dirty="0"/>
+              <a:t>Where SMIC Families Stand</a:t>
+            </a:r>
+          </a:p>
+        </p:txBody>
+      </p:sp>
+      <p:sp>
+        <p:nvSpPr>
+          <p:cNvPr id="3" name="TextBox 2"/>
+          <p:cNvSpPr txBox="1"/>
+          <p:nvPr/>
+        </p:nvSpPr>
+        <p:spPr>
+          <a:xfrm>
+            <a:off x="457200" y="1554480"/>
+            <a:ext cx="8229600" cy="457200"/>
+          </a:xfrm>
+          <a:prstGeom prst="rect">
+            <a:avLst/>
+          </a:prstGeom>
+          <a:noFill/>
+        </p:spPr>
+        <p:txBody>
+          <a:bodyPr wrap="none">
+            <a:spAutoFit/>
+          </a:bodyPr>
+          <a:lstStyle/>
+          <a:p>
+            <a:pPr>
+              <a:defRPr sz="2400">
+                <a:solidFill>
+                  <a:srgbClr val="646464"/>
+                </a:solidFill>
+              </a:defRPr>
+            </a:pPr>
+            <a:r>
+              <a:rPr dirty="0"/>
+              <a:t>All Essential Monthly Costs vs. Income</a:t>
+            </a:r>
+          </a:p>
+        </p:txBody>
+      </p:sp>
+      <p:pic>
+        <p:nvPicPr>
+          <p:cNvPr id="4" name="Picture 3" descr="08_complete_budget_reality.png"/>
+          <p:cNvPicPr>
+            <a:picLocks noChangeAspect="1"/>
+          </p:cNvPicPr>
+          <p:nvPr/>
+        </p:nvPicPr>
+        <p:blipFill>
+          <a:blip r:embed="rId2"/>
+          <a:stretch>
+            <a:fillRect/>
+          </a:stretch>
+        </p:blipFill>
+        <p:spPr>
+          <a:xfrm>
+            <a:off x="128015" y="2395728"/>
+            <a:ext cx="8712211" cy="3675888"/>
+          </a:xfrm>
+          <a:prstGeom prst="rect">
+            <a:avLst/>
+          </a:prstGeom>
+        </p:spPr>
+      </p:pic>
+    </p:spTree>
+  </p:cSld>
+  <p:clrMapOvr>
+    <a:masterClrMapping/>
+  </p:clrMapOvr>
+</p:sld>
+</file>
+
+<file path=ppt/slides/slide26.xml><?xml version="1.0" encoding="utf-8"?>
+<p:sld xmlns:a="http://schemas.openxmlformats.org/drawingml/2006/main" xmlns:r="http://schemas.openxmlformats.org/officeDocument/2006/relationships" xmlns:p="http://schemas.openxmlformats.org/presentationml/2006/main">
+  <p:cSld>
+    <p:bg>
+      <p:bgPr>
+        <a:solidFill>
+          <a:srgbClr val="F5F5F5"/>
+        </a:solidFill>
+        <a:effectLst/>
+      </p:bgPr>
+    </p:bg>
+    <p:spTree>
+      <p:nvGrpSpPr>
+        <p:cNvPr id="1" name=""/>
+        <p:cNvGrpSpPr/>
+        <p:nvPr/>
+      </p:nvGrpSpPr>
+      <p:grpSpPr>
+        <a:xfrm>
+          <a:off x="0" y="0"/>
+          <a:ext cx="0" cy="0"/>
+          <a:chOff x="0" y="0"/>
+          <a:chExt cx="0" cy="0"/>
+        </a:xfrm>
+      </p:grpSpPr>
+      <p:sp>
+        <p:nvSpPr>
+          <p:cNvPr id="2" name="TextBox 1"/>
+          <p:cNvSpPr txBox="1"/>
+          <p:nvPr/>
+        </p:nvSpPr>
+        <p:spPr>
+          <a:xfrm>
+            <a:off x="457200" y="274320"/>
+            <a:ext cx="8229600" cy="548640"/>
+          </a:xfrm>
+          <a:prstGeom prst="rect">
+            <a:avLst/>
+          </a:prstGeom>
+          <a:noFill/>
+        </p:spPr>
+        <p:txBody>
+          <a:bodyPr wrap="none">
+            <a:spAutoFit/>
+          </a:bodyPr>
+          <a:lstStyle/>
+          <a:p>
+            <a:pPr>
+              <a:defRPr sz="3600" b="1">
+                <a:solidFill>
+                  <a:srgbClr val="1F4D76"/>
+                </a:solidFill>
+              </a:defRPr>
+            </a:pPr>
+            <a:r>
+              <a:t>Why This Matters: Poverty is Structural</a:t>
+            </a:r>
+          </a:p>
+        </p:txBody>
+      </p:sp>
+      <p:sp>
+        <p:nvSpPr>
+          <p:cNvPr id="3" name="TextBox 2"/>
+          <p:cNvSpPr txBox="1"/>
+          <p:nvPr/>
+        </p:nvSpPr>
+        <p:spPr>
+          <a:xfrm>
+            <a:off x="640080" y="1097280"/>
+            <a:ext cx="7863840" cy="3539430"/>
+          </a:xfrm>
+          <a:prstGeom prst="rect">
+            <a:avLst/>
+          </a:prstGeom>
+          <a:noFill/>
+        </p:spPr>
+        <p:txBody>
+          <a:bodyPr wrap="square">
+            <a:spAutoFit/>
+          </a:bodyPr>
+          <a:lstStyle/>
+          <a:p>
+            <a:pPr>
+              <a:defRPr sz="1400" b="1">
+                <a:solidFill>
+                  <a:srgbClr val="C80000"/>
+                </a:solidFill>
+              </a:defRPr>
+            </a:pPr>
+            <a:r>
+              <a:rPr sz="1600" dirty="0"/>
+              <a:t>SMIC families cannot survive on SMIC income alone.</a:t>
+            </a:r>
+          </a:p>
+          <a:p>
+            <a:pPr>
+              <a:defRPr sz="1400">
+                <a:solidFill>
+                  <a:srgbClr val="000000"/>
+                </a:solidFill>
+              </a:defRPr>
+            </a:pPr>
+            <a:endParaRPr sz="1600" dirty="0"/>
+          </a:p>
+          <a:p>
+            <a:pPr>
+              <a:defRPr sz="1400">
+                <a:solidFill>
+                  <a:srgbClr val="000000"/>
+                </a:solidFill>
+              </a:defRPr>
+            </a:pPr>
+            <a:r>
+              <a:rPr sz="1600" dirty="0"/>
+              <a:t>Government transfers (CAF, housing allowance: €300-550/month) are</a:t>
+            </a:r>
+          </a:p>
+          <a:p>
+            <a:pPr>
+              <a:defRPr sz="1400">
+                <a:solidFill>
+                  <a:srgbClr val="000000"/>
+                </a:solidFill>
+              </a:defRPr>
+            </a:pPr>
+            <a:r>
+              <a:rPr sz="1600" dirty="0"/>
+              <a:t>structural survival requirement, not supplemental help.</a:t>
+            </a:r>
+          </a:p>
+          <a:p>
+            <a:pPr>
+              <a:defRPr sz="1400">
+                <a:solidFill>
+                  <a:srgbClr val="000000"/>
+                </a:solidFill>
+              </a:defRPr>
+            </a:pPr>
+            <a:endParaRPr sz="1600" dirty="0"/>
+          </a:p>
+          <a:p>
+            <a:pPr>
+              <a:defRPr sz="1400">
+                <a:solidFill>
+                  <a:srgbClr val="000000"/>
+                </a:solidFill>
+              </a:defRPr>
+            </a:pPr>
+            <a:r>
+              <a:rPr sz="1600" dirty="0"/>
+              <a:t>With transfers, SMIC families break even with no margin for:</a:t>
+            </a:r>
+          </a:p>
+          <a:p>
+            <a:pPr>
+              <a:defRPr sz="1400">
+                <a:solidFill>
+                  <a:srgbClr val="646464"/>
+                </a:solidFill>
+              </a:defRPr>
+            </a:pPr>
+            <a:r>
+              <a:rPr sz="1600" dirty="0"/>
+              <a:t>  • Emergencies (car repairs, medical events)</a:t>
+            </a:r>
+          </a:p>
+          <a:p>
+            <a:pPr>
+              <a:defRPr sz="1400">
+                <a:solidFill>
+                  <a:srgbClr val="646464"/>
+                </a:solidFill>
+              </a:defRPr>
+            </a:pPr>
+            <a:r>
+              <a:rPr sz="1600" dirty="0"/>
+              <a:t>  • Savings (impossible)</a:t>
+            </a:r>
+          </a:p>
+          <a:p>
+            <a:pPr>
+              <a:defRPr sz="1400">
+                <a:solidFill>
+                  <a:srgbClr val="646464"/>
+                </a:solidFill>
+              </a:defRPr>
+            </a:pPr>
+            <a:r>
+              <a:rPr sz="1600" dirty="0"/>
+              <a:t>  • Family composition changes (baby, aging parent)</a:t>
+            </a:r>
+          </a:p>
+          <a:p>
+            <a:pPr>
+              <a:defRPr sz="1400">
+                <a:solidFill>
+                  <a:srgbClr val="000000"/>
+                </a:solidFill>
+              </a:defRPr>
+            </a:pPr>
+            <a:endParaRPr sz="1600" dirty="0"/>
+          </a:p>
+          <a:p>
+            <a:pPr>
+              <a:defRPr sz="1400">
+                <a:solidFill>
+                  <a:srgbClr val="000000"/>
+                </a:solidFill>
+              </a:defRPr>
+            </a:pPr>
+            <a:r>
+              <a:rPr sz="1600" dirty="0"/>
+              <a:t>When composition changes occur (teenage child costs €3,461/year more),</a:t>
+            </a:r>
+          </a:p>
+          <a:p>
+            <a:pPr>
+              <a:defRPr sz="1400" b="1">
+                <a:solidFill>
+                  <a:srgbClr val="C80000"/>
+                </a:solidFill>
+              </a:defRPr>
+            </a:pPr>
+            <a:r>
+              <a:rPr sz="1600" dirty="0"/>
+              <a:t>SMIC families have NO margin to absorb the cost.</a:t>
+            </a:r>
+          </a:p>
+          <a:p>
+            <a:pPr>
+              <a:defRPr sz="1400">
+                <a:solidFill>
+                  <a:srgbClr val="000000"/>
+                </a:solidFill>
+              </a:defRPr>
+            </a:pPr>
+            <a:endParaRPr sz="1600" dirty="0"/>
+          </a:p>
+          <a:p>
+            <a:pPr>
+              <a:defRPr sz="1400" b="1">
+                <a:solidFill>
+                  <a:srgbClr val="C80000"/>
+                </a:solidFill>
+              </a:defRPr>
+            </a:pPr>
+            <a:r>
+              <a:rPr sz="1600" dirty="0"/>
+              <a:t>Result: Debt accumulation OR going without essentials</a:t>
+            </a:r>
+          </a:p>
+        </p:txBody>
+      </p:sp>
+    </p:spTree>
+  </p:cSld>
+  <p:clrMapOvr>
+    <a:masterClrMapping/>
+  </p:clrMapOvr>
+</p:sld>
+</file>
+
+<file path=ppt/slides/slide3.xml><?xml version="1.0" encoding="utf-8"?>
+<p:sld xmlns:a="http://schemas.openxmlformats.org/drawingml/2006/main" xmlns:r="http://schemas.openxmlformats.org/officeDocument/2006/relationships" xmlns:p="http://schemas.openxmlformats.org/presentationml/2006/main">
   <p:cSld>
     <p:bg>
       <p:bgPr>
@@ -5271,7 +7180,14 @@
         <p:cNvGrpSpPr/>
         <p:nvPr/>
       </p:nvGrpSpPr>
-      <p:grpSpPr/>
+      <p:grpSpPr>
+        <a:xfrm>
+          <a:off x="0" y="0"/>
+          <a:ext cx="0" cy="0"/>
+          <a:chOff x="0" y="0"/>
+          <a:chExt cx="0" cy="0"/>
+        </a:xfrm>
+      </p:grpSpPr>
       <p:sp>
         <p:nvSpPr>
           <p:cNvPr id="2" name="Rectangle 1"/>
@@ -5327,7 +7243,7 @@
               </a:defRPr>
             </a:pPr>
             <a:r>
-              <a:t>Birth Rate as Economic Rationing</a:t>
+              <a:t>What's Missing from Official Baskets?</a:t>
             </a:r>
           </a:p>
         </p:txBody>
@@ -5368,199 +7284,251 @@
               </a:defRPr>
             </a:pPr>
             <a:r>
-              <a:t>Young couple, median Paris income (42,000 EUR/year):</a:t>
-            </a:r>
-          </a:p>
-          <a:p>
-            <a:pPr>
-              <a:spcBef>
-                <a:spcPts val="600"/>
-              </a:spcBef>
-              <a:spcAft>
-                <a:spcPts val="800"/>
-              </a:spcAft>
-              <a:defRPr sz="2000">
-                <a:solidFill>
-                  <a:srgbClr val="333333"/>
-                </a:solidFill>
-              </a:defRPr>
-            </a:pPr>
-            <a:r>
-              <a:t>  • 1 child: 12.6% of income on food (MANAGEABLE)</a:t>
-            </a:r>
-          </a:p>
-          <a:p>
-            <a:pPr>
-              <a:spcBef>
-                <a:spcPts val="600"/>
-              </a:spcBef>
-              <a:spcAft>
-                <a:spcPts val="800"/>
-              </a:spcAft>
-              <a:defRPr sz="2000">
-                <a:solidFill>
-                  <a:srgbClr val="333333"/>
-                </a:solidFill>
-              </a:defRPr>
-            </a:pPr>
-            <a:r>
-              <a:t>  • 2 children: 16.5% of income on food (DIFFICULT)</a:t>
-            </a:r>
-          </a:p>
-          <a:p>
-            <a:pPr>
-              <a:spcBef>
-                <a:spcPts val="600"/>
-              </a:spcBef>
-              <a:spcAft>
-                <a:spcPts val="800"/>
-              </a:spcAft>
-              <a:defRPr sz="2000">
-                <a:solidFill>
-                  <a:srgbClr val="333333"/>
-                </a:solidFill>
-              </a:defRPr>
-            </a:pPr>
-            <a:r>
-              <a:t>  • 3 children: 20.4% of income on food (IMPOSSIBLE)</a:t>
-            </a:r>
-          </a:p>
-          <a:p>
-            <a:pPr>
-              <a:spcBef>
-                <a:spcPts val="600"/>
-              </a:spcBef>
-              <a:spcAft>
-                <a:spcPts val="800"/>
-              </a:spcAft>
-              <a:defRPr sz="2000">
-                <a:solidFill>
-                  <a:srgbClr val="333333"/>
-                </a:solidFill>
-              </a:defRPr>
-            </a:pPr>
-          </a:p>
-          <a:p>
-            <a:pPr>
-              <a:spcBef>
-                <a:spcPts val="600"/>
-              </a:spcBef>
-              <a:spcAft>
-                <a:spcPts val="800"/>
-              </a:spcAft>
-              <a:defRPr sz="2000">
-                <a:solidFill>
-                  <a:srgbClr val="333333"/>
-                </a:solidFill>
-              </a:defRPr>
-            </a:pPr>
-            <a:r>
-              <a:t>Young couple, SMIC (21,000 EUR/year):</a:t>
-            </a:r>
-          </a:p>
-          <a:p>
-            <a:pPr>
-              <a:spcBef>
-                <a:spcPts val="600"/>
-              </a:spcBef>
-              <a:spcAft>
-                <a:spcPts val="800"/>
-              </a:spcAft>
-              <a:defRPr sz="2000">
-                <a:solidFill>
-                  <a:srgbClr val="333333"/>
-                </a:solidFill>
-              </a:defRPr>
-            </a:pPr>
-            <a:r>
-              <a:t>  • 1 child: 25.2% of income (CRISIS)</a:t>
-            </a:r>
-          </a:p>
-          <a:p>
-            <a:pPr>
-              <a:spcBef>
-                <a:spcPts val="600"/>
-              </a:spcBef>
-              <a:spcAft>
-                <a:spcPts val="800"/>
-              </a:spcAft>
-              <a:defRPr sz="2000">
-                <a:solidFill>
-                  <a:srgbClr val="333333"/>
-                </a:solidFill>
-              </a:defRPr>
-            </a:pPr>
-            <a:r>
-              <a:t>  • 2 children: 38.9% of income (IMPOSSIBLE - CHOOSE: FOOD OR HOUSING)</a:t>
-            </a:r>
-          </a:p>
-          <a:p>
-            <a:pPr>
-              <a:spcBef>
-                <a:spcPts val="600"/>
-              </a:spcBef>
-              <a:spcAft>
-                <a:spcPts val="800"/>
-              </a:spcAft>
-              <a:defRPr sz="2000">
-                <a:solidFill>
-                  <a:srgbClr val="333333"/>
-                </a:solidFill>
-              </a:defRPr>
-            </a:pPr>
-          </a:p>
-          <a:p>
-            <a:pPr>
-              <a:spcBef>
-                <a:spcPts val="600"/>
-              </a:spcBef>
-              <a:spcAft>
-                <a:spcPts val="800"/>
-              </a:spcAft>
-              <a:defRPr sz="2000">
-                <a:solidFill>
-                  <a:srgbClr val="333333"/>
-                </a:solidFill>
-              </a:defRPr>
-            </a:pPr>
-            <a:r>
-              <a:t>Paris birth rate: 1.4 children/woman (replacement: 2.1)</a:t>
-            </a:r>
-          </a:p>
-          <a:p>
-            <a:pPr>
-              <a:spcBef>
-                <a:spcPts val="600"/>
-              </a:spcBef>
-              <a:spcAft>
-                <a:spcPts val="800"/>
-              </a:spcAft>
-              <a:defRPr sz="2000">
-                <a:solidFill>
-                  <a:srgbClr val="333333"/>
-                </a:solidFill>
-              </a:defRPr>
-            </a:pPr>
-            <a:r>
-              <a:t>This is not cultural choice. This is economic calculus.</a:t>
-            </a:r>
-          </a:p>
-          <a:p>
-            <a:pPr>
-              <a:spcBef>
-                <a:spcPts val="600"/>
-              </a:spcBef>
-              <a:spcAft>
-                <a:spcPts val="800"/>
-              </a:spcAft>
-              <a:defRPr sz="2000">
-                <a:solidFill>
-                  <a:srgbClr val="333333"/>
-                </a:solidFill>
-              </a:defRPr>
-            </a:pPr>
-            <a:r>
-              <a:t>Families are rationing their size. Demographic collapse is silent rationing.</a:t>
+              <a:t>BABY &amp; FAMILY ESSENTIALS (27.98 EUR/month):</a:t>
+            </a:r>
+          </a:p>
+          <a:p>
+            <a:pPr>
+              <a:spcBef>
+                <a:spcPts val="600"/>
+              </a:spcBef>
+              <a:spcAft>
+                <a:spcPts val="800"/>
+              </a:spcAft>
+              <a:defRPr sz="2000">
+                <a:solidFill>
+                  <a:srgbClr val="333333"/>
+                </a:solidFill>
+              </a:defRPr>
+            </a:pPr>
+            <a:r>
+              <a:t>  • Diapers: 18.99 EUR</a:t>
+            </a:r>
+          </a:p>
+          <a:p>
+            <a:pPr>
+              <a:spcBef>
+                <a:spcPts val="600"/>
+              </a:spcBef>
+              <a:spcAft>
+                <a:spcPts val="800"/>
+              </a:spcAft>
+              <a:defRPr sz="2000">
+                <a:solidFill>
+                  <a:srgbClr val="333333"/>
+                </a:solidFill>
+              </a:defRPr>
+            </a:pPr>
+            <a:r>
+              <a:t>  • Baby creams &amp; ointments: 8.99 EUR</a:t>
+            </a:r>
+          </a:p>
+          <a:p>
+            <a:pPr>
+              <a:spcBef>
+                <a:spcPts val="600"/>
+              </a:spcBef>
+              <a:spcAft>
+                <a:spcPts val="800"/>
+              </a:spcAft>
+              <a:defRPr sz="2000">
+                <a:solidFill>
+                  <a:srgbClr val="333333"/>
+                </a:solidFill>
+              </a:defRPr>
+            </a:pPr>
+            <a:endParaRPr/>
+          </a:p>
+          <a:p>
+            <a:pPr>
+              <a:spcBef>
+                <a:spcPts val="600"/>
+              </a:spcBef>
+              <a:spcAft>
+                <a:spcPts val="800"/>
+              </a:spcAft>
+              <a:defRPr sz="2000">
+                <a:solidFill>
+                  <a:srgbClr val="333333"/>
+                </a:solidFill>
+              </a:defRPr>
+            </a:pPr>
+            <a:r>
+              <a:t>DIETARY VARIETIES &amp; ALTERNATIVES:</a:t>
+            </a:r>
+          </a:p>
+          <a:p>
+            <a:pPr>
+              <a:spcBef>
+                <a:spcPts val="600"/>
+              </a:spcBef>
+              <a:spcAft>
+                <a:spcPts val="800"/>
+              </a:spcAft>
+              <a:defRPr sz="2000">
+                <a:solidFill>
+                  <a:srgbClr val="333333"/>
+                </a:solidFill>
+              </a:defRPr>
+            </a:pPr>
+            <a:r>
+              <a:t>  • Lactose-free milk, gluten-free options, different protein sources</a:t>
+            </a:r>
+          </a:p>
+          <a:p>
+            <a:pPr>
+              <a:spcBef>
+                <a:spcPts val="600"/>
+              </a:spcBef>
+              <a:spcAft>
+                <a:spcPts val="800"/>
+              </a:spcAft>
+              <a:defRPr sz="2000">
+                <a:solidFill>
+                  <a:srgbClr val="333333"/>
+                </a:solidFill>
+              </a:defRPr>
+            </a:pPr>
+            <a:endParaRPr/>
+          </a:p>
+          <a:p>
+            <a:pPr>
+              <a:spcBef>
+                <a:spcPts val="600"/>
+              </a:spcBef>
+              <a:spcAft>
+                <a:spcPts val="800"/>
+              </a:spcAft>
+              <a:defRPr sz="2000">
+                <a:solidFill>
+                  <a:srgbClr val="333333"/>
+                </a:solidFill>
+              </a:defRPr>
+            </a:pPr>
+            <a:r>
+              <a:t>COMPLEMENTARY COOKING ITEMS:</a:t>
+            </a:r>
+          </a:p>
+          <a:p>
+            <a:pPr>
+              <a:spcBef>
+                <a:spcPts val="600"/>
+              </a:spcBef>
+              <a:spcAft>
+                <a:spcPts val="800"/>
+              </a:spcAft>
+              <a:defRPr sz="2000">
+                <a:solidFill>
+                  <a:srgbClr val="333333"/>
+                </a:solidFill>
+              </a:defRPr>
+            </a:pPr>
+            <a:r>
+              <a:t>  • Spices, sauces, quality oils - items that complete meals</a:t>
+            </a:r>
+          </a:p>
+          <a:p>
+            <a:pPr>
+              <a:spcBef>
+                <a:spcPts val="600"/>
+              </a:spcBef>
+              <a:spcAft>
+                <a:spcPts val="800"/>
+              </a:spcAft>
+              <a:defRPr sz="2000">
+                <a:solidFill>
+                  <a:srgbClr val="333333"/>
+                </a:solidFill>
+              </a:defRPr>
+            </a:pPr>
+            <a:endParaRPr/>
+          </a:p>
+          <a:p>
+            <a:pPr>
+              <a:spcBef>
+                <a:spcPts val="600"/>
+              </a:spcBef>
+              <a:spcAft>
+                <a:spcPts val="800"/>
+              </a:spcAft>
+              <a:defRPr sz="2000">
+                <a:solidFill>
+                  <a:srgbClr val="333333"/>
+                </a:solidFill>
+              </a:defRPr>
+            </a:pPr>
+            <a:r>
+              <a:t>HEALTH &amp; HYGIENE ESSENTIALS:</a:t>
+            </a:r>
+          </a:p>
+          <a:p>
+            <a:pPr>
+              <a:spcBef>
+                <a:spcPts val="600"/>
+              </a:spcBef>
+              <a:spcAft>
+                <a:spcPts val="800"/>
+              </a:spcAft>
+              <a:defRPr sz="2000">
+                <a:solidFill>
+                  <a:srgbClr val="333333"/>
+                </a:solidFill>
+              </a:defRPr>
+            </a:pPr>
+            <a:r>
+              <a:t>  • Toilet paper, soap, shampoo, toothpaste: 15-20 EUR/month</a:t>
+            </a:r>
+          </a:p>
+          <a:p>
+            <a:pPr>
+              <a:spcBef>
+                <a:spcPts val="600"/>
+              </a:spcBef>
+              <a:spcAft>
+                <a:spcPts val="800"/>
+              </a:spcAft>
+              <a:defRPr sz="2000">
+                <a:solidFill>
+                  <a:srgbClr val="333333"/>
+                </a:solidFill>
+              </a:defRPr>
+            </a:pPr>
+            <a:endParaRPr/>
+          </a:p>
+          <a:p>
+            <a:pPr>
+              <a:spcBef>
+                <a:spcPts val="600"/>
+              </a:spcBef>
+              <a:spcAft>
+                <a:spcPts val="800"/>
+              </a:spcAft>
+              <a:defRPr sz="2000">
+                <a:solidFill>
+                  <a:srgbClr val="333333"/>
+                </a:solidFill>
+              </a:defRPr>
+            </a:pPr>
+            <a:r>
+              <a:t>CULTURAL &amp; LIFE QUALITY:</a:t>
+            </a:r>
+          </a:p>
+          <a:p>
+            <a:pPr>
+              <a:spcBef>
+                <a:spcPts val="600"/>
+              </a:spcBef>
+              <a:spcAft>
+                <a:spcPts val="800"/>
+              </a:spcAft>
+              <a:defRPr sz="2000">
+                <a:solidFill>
+                  <a:srgbClr val="333333"/>
+                </a:solidFill>
+              </a:defRPr>
+            </a:pPr>
+            <a:r>
+              <a:t>  • Wine, chocolate, treats - the cost of living, not just surviving</a:t>
             </a:r>
           </a:p>
         </p:txBody>
@@ -5573,8 +7541,8 @@
 </p:sld>
 </file>
 
-<file path=ppt/slides/slide21.xml><?xml version="1.0" encoding="utf-8"?>
-<p:sld xmlns:a="http://schemas.openxmlformats.org/drawingml/2006/main" xmlns:p="http://schemas.openxmlformats.org/presentationml/2006/main" xmlns:r="http://schemas.openxmlformats.org/officeDocument/2006/relationships">
+<file path=ppt/slides/slide4.xml><?xml version="1.0" encoding="utf-8"?>
+<p:sld xmlns:a="http://schemas.openxmlformats.org/drawingml/2006/main" xmlns:r="http://schemas.openxmlformats.org/officeDocument/2006/relationships" xmlns:p="http://schemas.openxmlformats.org/presentationml/2006/main">
   <p:cSld>
     <p:bg>
       <p:bgPr>
@@ -5590,7 +7558,14 @@
         <p:cNvGrpSpPr/>
         <p:nvPr/>
       </p:nvGrpSpPr>
-      <p:grpSpPr/>
+      <p:grpSpPr>
+        <a:xfrm>
+          <a:off x="0" y="0"/>
+          <a:ext cx="0" cy="0"/>
+          <a:chOff x="0" y="0"/>
+          <a:chExt cx="0" cy="0"/>
+        </a:xfrm>
+      </p:grpSpPr>
       <p:sp>
         <p:nvSpPr>
           <p:cNvPr id="2" name="Rectangle 1"/>
@@ -5646,256 +7621,35 @@
               </a:defRPr>
             </a:pPr>
             <a:r>
-              <a:t>Why This Matters</a:t>
-            </a:r>
-          </a:p>
-        </p:txBody>
-      </p:sp>
-      <p:sp>
-        <p:nvSpPr>
-          <p:cNvPr id="3" name="TextBox 2"/>
-          <p:cNvSpPr txBox="1"/>
+              <a:t>The Cost Gap: Official vs Real</a:t>
+            </a:r>
+          </a:p>
+        </p:txBody>
+      </p:sp>
+      <p:pic>
+        <p:nvPicPr>
+          <p:cNvPr id="3" name="Picture 2" descr="01_basket_comparison.png"/>
+          <p:cNvPicPr>
+            <a:picLocks noChangeAspect="1"/>
+          </p:cNvPicPr>
           <p:nvPr/>
-        </p:nvSpPr>
+        </p:nvPicPr>
+        <p:blipFill>
+          <a:blip r:embed="rId2"/>
+          <a:stretch>
+            <a:fillRect/>
+          </a:stretch>
+        </p:blipFill>
         <p:spPr>
           <a:xfrm>
-            <a:off x="731520" y="1188720"/>
-            <a:ext cx="7680960" cy="5212080"/>
+            <a:off x="219456" y="2065938"/>
+            <a:ext cx="8680862" cy="3694782"/>
           </a:xfrm>
           <a:prstGeom prst="rect">
             <a:avLst/>
           </a:prstGeom>
-          <a:noFill/>
         </p:spPr>
-        <p:txBody>
-          <a:bodyPr wrap="square">
-            <a:spAutoFit/>
-          </a:bodyPr>
-          <a:lstStyle/>
-          <a:p>
-            <a:pPr>
-              <a:spcBef>
-                <a:spcPts val="600"/>
-              </a:spcBef>
-              <a:spcAft>
-                <a:spcPts val="800"/>
-              </a:spcAft>
-              <a:defRPr sz="2000">
-                <a:solidFill>
-                  <a:srgbClr val="333333"/>
-                </a:solidFill>
-              </a:defRPr>
-            </a:pPr>
-            <a:r>
-              <a:t>POLICY MAKERS base decisions on official inflation rates that underestimate</a:t>
-            </a:r>
-          </a:p>
-          <a:p>
-            <a:pPr>
-              <a:spcBef>
-                <a:spcPts val="600"/>
-              </a:spcBef>
-              <a:spcAft>
-                <a:spcPts val="800"/>
-              </a:spcAft>
-              <a:defRPr sz="2000">
-                <a:solidFill>
-                  <a:srgbClr val="333333"/>
-                </a:solidFill>
-              </a:defRPr>
-            </a:pPr>
-            <a:r>
-              <a:t>real costs by 30-50%</a:t>
-            </a:r>
-          </a:p>
-          <a:p>
-            <a:pPr>
-              <a:spcBef>
-                <a:spcPts val="600"/>
-              </a:spcBef>
-              <a:spcAft>
-                <a:spcPts val="800"/>
-              </a:spcAft>
-              <a:defRPr sz="2000">
-                <a:solidFill>
-                  <a:srgbClr val="333333"/>
-                </a:solidFill>
-              </a:defRPr>
-            </a:pPr>
-          </a:p>
-          <a:p>
-            <a:pPr>
-              <a:spcBef>
-                <a:spcPts val="600"/>
-              </a:spcBef>
-              <a:spcAft>
-                <a:spcPts val="800"/>
-              </a:spcAft>
-              <a:defRPr sz="2000">
-                <a:solidFill>
-                  <a:srgbClr val="333333"/>
-                </a:solidFill>
-              </a:defRPr>
-            </a:pPr>
-            <a:r>
-              <a:t>WORKERS see their salaries (linked to inflation) never keep pace with actual</a:t>
-            </a:r>
-          </a:p>
-          <a:p>
-            <a:pPr>
-              <a:spcBef>
-                <a:spcPts val="600"/>
-              </a:spcBef>
-              <a:spcAft>
-                <a:spcPts val="800"/>
-              </a:spcAft>
-              <a:defRPr sz="2000">
-                <a:solidFill>
-                  <a:srgbClr val="333333"/>
-                </a:solidFill>
-              </a:defRPr>
-            </a:pPr>
-            <a:r>
-              <a:t>living expenses</a:t>
-            </a:r>
-          </a:p>
-          <a:p>
-            <a:pPr>
-              <a:spcBef>
-                <a:spcPts val="600"/>
-              </a:spcBef>
-              <a:spcAft>
-                <a:spcPts val="800"/>
-              </a:spcAft>
-              <a:defRPr sz="2000">
-                <a:solidFill>
-                  <a:srgbClr val="333333"/>
-                </a:solidFill>
-              </a:defRPr>
-            </a:pPr>
-          </a:p>
-          <a:p>
-            <a:pPr>
-              <a:spcBef>
-                <a:spcPts val="600"/>
-              </a:spcBef>
-              <a:spcAft>
-                <a:spcPts val="800"/>
-              </a:spcAft>
-              <a:defRPr sz="2000">
-                <a:solidFill>
-                  <a:srgbClr val="333333"/>
-                </a:solidFill>
-              </a:defRPr>
-            </a:pPr>
-            <a:r>
-              <a:t>FAMILIES make impossible choices: healthy food OR paying rent?</a:t>
-            </a:r>
-          </a:p>
-          <a:p>
-            <a:pPr>
-              <a:spcBef>
-                <a:spcPts val="600"/>
-              </a:spcBef>
-              <a:spcAft>
-                <a:spcPts val="800"/>
-              </a:spcAft>
-              <a:defRPr sz="2000">
-                <a:solidFill>
-                  <a:srgbClr val="333333"/>
-                </a:solidFill>
-              </a:defRPr>
-            </a:pPr>
-            <a:r>
-              <a:t>Diapers OR transportation?</a:t>
-            </a:r>
-          </a:p>
-          <a:p>
-            <a:pPr>
-              <a:spcBef>
-                <a:spcPts val="600"/>
-              </a:spcBef>
-              <a:spcAft>
-                <a:spcPts val="800"/>
-              </a:spcAft>
-              <a:defRPr sz="2000">
-                <a:solidFill>
-                  <a:srgbClr val="333333"/>
-                </a:solidFill>
-              </a:defRPr>
-            </a:pPr>
-          </a:p>
-          <a:p>
-            <a:pPr>
-              <a:spcBef>
-                <a:spcPts val="600"/>
-              </a:spcBef>
-              <a:spcAft>
-                <a:spcPts val="800"/>
-              </a:spcAft>
-              <a:defRPr sz="2000">
-                <a:solidFill>
-                  <a:srgbClr val="333333"/>
-                </a:solidFill>
-              </a:defRPr>
-            </a:pPr>
-            <a:r>
-              <a:t>INEQUALITY is hidden in the numbers. What's not measured is not managed.</a:t>
-            </a:r>
-          </a:p>
-          <a:p>
-            <a:pPr>
-              <a:spcBef>
-                <a:spcPts val="600"/>
-              </a:spcBef>
-              <a:spcAft>
-                <a:spcPts val="800"/>
-              </a:spcAft>
-              <a:defRPr sz="2000">
-                <a:solidFill>
-                  <a:srgbClr val="333333"/>
-                </a:solidFill>
-              </a:defRPr>
-            </a:pPr>
-          </a:p>
-          <a:p>
-            <a:pPr>
-              <a:spcBef>
-                <a:spcPts val="600"/>
-              </a:spcBef>
-              <a:spcAft>
-                <a:spcPts val="800"/>
-              </a:spcAft>
-              <a:defRPr sz="2000">
-                <a:solidFill>
-                  <a:srgbClr val="333333"/>
-                </a:solidFill>
-              </a:defRPr>
-            </a:pPr>
-            <a:r>
-              <a:t>STATISTICS are not neutral. They reveal what society has decided to COUNT</a:t>
-            </a:r>
-          </a:p>
-          <a:p>
-            <a:pPr>
-              <a:spcBef>
-                <a:spcPts val="600"/>
-              </a:spcBef>
-              <a:spcAft>
-                <a:spcPts val="800"/>
-              </a:spcAft>
-              <a:defRPr sz="2000">
-                <a:solidFill>
-                  <a:srgbClr val="333333"/>
-                </a:solidFill>
-              </a:defRPr>
-            </a:pPr>
-            <a:r>
-              <a:t>and what it chooses to IGNORE.</a:t>
-            </a:r>
-          </a:p>
-        </p:txBody>
-      </p:sp>
+      </p:pic>
     </p:spTree>
   </p:cSld>
   <p:clrMapOvr>
@@ -5904,8 +7658,120 @@
 </p:sld>
 </file>
 
-<file path=ppt/slides/slide22.xml><?xml version="1.0" encoding="utf-8"?>
-<p:sld xmlns:a="http://schemas.openxmlformats.org/drawingml/2006/main" xmlns:p="http://schemas.openxmlformats.org/presentationml/2006/main" xmlns:r="http://schemas.openxmlformats.org/officeDocument/2006/relationships">
+<file path=ppt/slides/slide5.xml><?xml version="1.0" encoding="utf-8"?>
+<p:sld xmlns:a="http://schemas.openxmlformats.org/drawingml/2006/main" xmlns:r="http://schemas.openxmlformats.org/officeDocument/2006/relationships" xmlns:p="http://schemas.openxmlformats.org/presentationml/2006/main">
+  <p:cSld>
+    <p:bg>
+      <p:bgPr>
+        <a:solidFill>
+          <a:srgbClr val="1F4E79"/>
+        </a:solidFill>
+        <a:effectLst/>
+      </p:bgPr>
+    </p:bg>
+    <p:spTree>
+      <p:nvGrpSpPr>
+        <p:cNvPr id="1" name=""/>
+        <p:cNvGrpSpPr/>
+        <p:nvPr/>
+      </p:nvGrpSpPr>
+      <p:grpSpPr>
+        <a:xfrm>
+          <a:off x="0" y="0"/>
+          <a:ext cx="0" cy="0"/>
+          <a:chOff x="0" y="0"/>
+          <a:chExt cx="0" cy="0"/>
+        </a:xfrm>
+      </p:grpSpPr>
+      <p:sp>
+        <p:nvSpPr>
+          <p:cNvPr id="2" name="TextBox 1"/>
+          <p:cNvSpPr txBox="1"/>
+          <p:nvPr/>
+        </p:nvSpPr>
+        <p:spPr>
+          <a:xfrm>
+            <a:off x="914400" y="2286000"/>
+            <a:ext cx="7315200" cy="1754326"/>
+          </a:xfrm>
+          <a:prstGeom prst="rect">
+            <a:avLst/>
+          </a:prstGeom>
+          <a:noFill/>
+        </p:spPr>
+        <p:txBody>
+          <a:bodyPr wrap="square">
+            <a:spAutoFit/>
+          </a:bodyPr>
+          <a:lstStyle/>
+          <a:p>
+            <a:pPr algn="ctr">
+              <a:defRPr sz="3200" b="1" i="1">
+                <a:solidFill>
+                  <a:srgbClr val="ED7D31"/>
+                </a:solidFill>
+              </a:defRPr>
+            </a:pPr>
+            <a:r>
+              <a:rPr sz="3600" dirty="0"/>
+              <a:t>Official inflation rates are built on incomplete baskets.</a:t>
+            </a:r>
+            <a:br>
+              <a:rPr sz="3600" dirty="0"/>
+            </a:br>
+            <a:r>
+              <a:rPr sz="3600" dirty="0"/>
+              <a:t>They measure SURVIVAL, not LIVING.</a:t>
+            </a:r>
+          </a:p>
+        </p:txBody>
+      </p:sp>
+      <p:sp>
+        <p:nvSpPr>
+          <p:cNvPr id="3" name="TextBox 2"/>
+          <p:cNvSpPr txBox="1"/>
+          <p:nvPr/>
+        </p:nvSpPr>
+        <p:spPr>
+          <a:xfrm>
+            <a:off x="914400" y="4754880"/>
+            <a:ext cx="7315200" cy="914400"/>
+          </a:xfrm>
+          <a:prstGeom prst="rect">
+            <a:avLst/>
+          </a:prstGeom>
+          <a:noFill/>
+        </p:spPr>
+        <p:txBody>
+          <a:bodyPr wrap="none">
+            <a:spAutoFit/>
+          </a:bodyPr>
+          <a:lstStyle/>
+          <a:p>
+            <a:pPr algn="ctr">
+              <a:defRPr sz="2000">
+                <a:solidFill>
+                  <a:srgbClr val="FFFFFF"/>
+                </a:solidFill>
+              </a:defRPr>
+            </a:pPr>
+            <a:r>
+              <a:rPr dirty="0"/>
+              <a:t>CLICHE INSIGHT #1: The Incomplete Statistic</a:t>
+            </a:r>
+          </a:p>
+        </p:txBody>
+      </p:sp>
+    </p:spTree>
+  </p:cSld>
+  <p:clrMapOvr>
+    <a:masterClrMapping/>
+  </p:clrMapOvr>
+</p:sld>
+</file>
+
+<file path=ppt/slides/slide6.xml><?xml version="1.0" encoding="utf-8"?>
+<p:sld xmlns:a="http://schemas.openxmlformats.org/drawingml/2006/main" xmlns:r="http://schemas.openxmlformats.org/officeDocument/2006/relationships" xmlns:p="http://schemas.openxmlformats.org/presentationml/2006/main">
   <p:cSld>
     <p:bg>
       <p:bgPr>
@@ -5921,7 +7787,14 @@
         <p:cNvGrpSpPr/>
         <p:nvPr/>
       </p:nvGrpSpPr>
-      <p:grpSpPr/>
+      <p:grpSpPr>
+        <a:xfrm>
+          <a:off x="0" y="0"/>
+          <a:ext cx="0" cy="0"/>
+          <a:chOff x="0" y="0"/>
+          <a:chExt cx="0" cy="0"/>
+        </a:xfrm>
+      </p:grpSpPr>
       <p:sp>
         <p:nvSpPr>
           <p:cNvPr id="2" name="Rectangle 1"/>
@@ -5977,226 +7850,35 @@
               </a:defRPr>
             </a:pPr>
             <a:r>
-              <a:t>The Opportunity: Real Data for Real Decisions</a:t>
-            </a:r>
-          </a:p>
-        </p:txBody>
-      </p:sp>
-      <p:sp>
-        <p:nvSpPr>
-          <p:cNvPr id="3" name="TextBox 2"/>
-          <p:cNvSpPr txBox="1"/>
+              <a:t>The Affordability Cliff: When Real Costs Exceed Means</a:t>
+            </a:r>
+          </a:p>
+        </p:txBody>
+      </p:sp>
+      <p:pic>
+        <p:nvPicPr>
+          <p:cNvPr id="3" name="Picture 2" descr="02_affordability_cliffs.png"/>
+          <p:cNvPicPr>
+            <a:picLocks noChangeAspect="1"/>
+          </p:cNvPicPr>
           <p:nvPr/>
-        </p:nvSpPr>
+        </p:nvPicPr>
+        <p:blipFill>
+          <a:blip r:embed="rId2"/>
+          <a:stretch>
+            <a:fillRect/>
+          </a:stretch>
+        </p:blipFill>
         <p:spPr>
           <a:xfrm>
-            <a:off x="731520" y="1188720"/>
-            <a:ext cx="7680960" cy="5212080"/>
+            <a:off x="1" y="1554480"/>
+            <a:ext cx="9021726" cy="4480560"/>
           </a:xfrm>
           <a:prstGeom prst="rect">
             <a:avLst/>
           </a:prstGeom>
-          <a:noFill/>
         </p:spPr>
-        <p:txBody>
-          <a:bodyPr wrap="square">
-            <a:spAutoFit/>
-          </a:bodyPr>
-          <a:lstStyle/>
-          <a:p>
-            <a:pPr>
-              <a:spcBef>
-                <a:spcPts val="600"/>
-              </a:spcBef>
-              <a:spcAft>
-                <a:spcPts val="800"/>
-              </a:spcAft>
-              <a:defRPr sz="2000">
-                <a:solidFill>
-                  <a:srgbClr val="333333"/>
-                </a:solidFill>
-              </a:defRPr>
-            </a:pPr>
-            <a:r>
-              <a:t>Snipper Tool changes this by collecting REAL pricing data for REAL baskets:</a:t>
-            </a:r>
-          </a:p>
-          <a:p>
-            <a:pPr>
-              <a:spcBef>
-                <a:spcPts val="600"/>
-              </a:spcBef>
-              <a:spcAft>
-                <a:spcPts val="800"/>
-              </a:spcAft>
-              <a:defRPr sz="2000">
-                <a:solidFill>
-                  <a:srgbClr val="333333"/>
-                </a:solidFill>
-              </a:defRPr>
-            </a:pPr>
-          </a:p>
-          <a:p>
-            <a:pPr>
-              <a:spcBef>
-                <a:spcPts val="600"/>
-              </a:spcBef>
-              <a:spcAft>
-                <a:spcPts val="800"/>
-              </a:spcAft>
-              <a:defRPr sz="2000">
-                <a:solidFill>
-                  <a:srgbClr val="333333"/>
-                </a:solidFill>
-              </a:defRPr>
-            </a:pPr>
-            <a:r>
-              <a:t>Real families don't buy INSEE baskets.</a:t>
-            </a:r>
-          </a:p>
-          <a:p>
-            <a:pPr>
-              <a:spcBef>
-                <a:spcPts val="600"/>
-              </a:spcBef>
-              <a:spcAft>
-                <a:spcPts val="800"/>
-              </a:spcAft>
-              <a:defRPr sz="2000">
-                <a:solidFill>
-                  <a:srgbClr val="333333"/>
-                </a:solidFill>
-              </a:defRPr>
-            </a:pPr>
-            <a:r>
-              <a:t>They buy complete meals, dietary alternatives, baby products, and items</a:t>
-            </a:r>
-          </a:p>
-          <a:p>
-            <a:pPr>
-              <a:spcBef>
-                <a:spcPts val="600"/>
-              </a:spcBef>
-              <a:spcAft>
-                <a:spcPts val="800"/>
-              </a:spcAft>
-              <a:defRPr sz="2000">
-                <a:solidFill>
-                  <a:srgbClr val="333333"/>
-                </a:solidFill>
-              </a:defRPr>
-            </a:pPr>
-            <a:r>
-              <a:t>that support healthy, dignified family life.</a:t>
-            </a:r>
-          </a:p>
-          <a:p>
-            <a:pPr>
-              <a:spcBef>
-                <a:spcPts val="600"/>
-              </a:spcBef>
-              <a:spcAft>
-                <a:spcPts val="800"/>
-              </a:spcAft>
-              <a:defRPr sz="2000">
-                <a:solidFill>
-                  <a:srgbClr val="333333"/>
-                </a:solidFill>
-              </a:defRPr>
-            </a:pPr>
-          </a:p>
-          <a:p>
-            <a:pPr>
-              <a:spcBef>
-                <a:spcPts val="600"/>
-              </a:spcBef>
-              <a:spcAft>
-                <a:spcPts val="800"/>
-              </a:spcAft>
-              <a:defRPr sz="2000">
-                <a:solidFill>
-                  <a:srgbClr val="333333"/>
-                </a:solidFill>
-              </a:defRPr>
-            </a:pPr>
-            <a:r>
-              <a:t>By tracking ACTUAL purchases across Paris supermarkets, Snipper Tool can:</a:t>
-            </a:r>
-          </a:p>
-          <a:p>
-            <a:pPr>
-              <a:spcBef>
-                <a:spcPts val="600"/>
-              </a:spcBef>
-              <a:spcAft>
-                <a:spcPts val="800"/>
-              </a:spcAft>
-              <a:defRPr sz="2000">
-                <a:solidFill>
-                  <a:srgbClr val="333333"/>
-                </a:solidFill>
-              </a:defRPr>
-            </a:pPr>
-            <a:r>
-              <a:t>  • Expose the gap between official statistics and real costs</a:t>
-            </a:r>
-          </a:p>
-          <a:p>
-            <a:pPr>
-              <a:spcBef>
-                <a:spcPts val="600"/>
-              </a:spcBef>
-              <a:spcAft>
-                <a:spcPts val="800"/>
-              </a:spcAft>
-              <a:defRPr sz="2000">
-                <a:solidFill>
-                  <a:srgbClr val="333333"/>
-                </a:solidFill>
-              </a:defRPr>
-            </a:pPr>
-            <a:r>
-              <a:t>  • Track health-focused pricing decisions</a:t>
-            </a:r>
-          </a:p>
-          <a:p>
-            <a:pPr>
-              <a:spcBef>
-                <a:spcPts val="600"/>
-              </a:spcBef>
-              <a:spcAft>
-                <a:spcPts val="800"/>
-              </a:spcAft>
-              <a:defRPr sz="2000">
-                <a:solidFill>
-                  <a:srgbClr val="333333"/>
-                </a:solidFill>
-              </a:defRPr>
-            </a:pPr>
-            <a:r>
-              <a:t>  • Identify affordability cliffs by income and family type</a:t>
-            </a:r>
-          </a:p>
-          <a:p>
-            <a:pPr>
-              <a:spcBef>
-                <a:spcPts val="600"/>
-              </a:spcBef>
-              <a:spcAft>
-                <a:spcPts val="800"/>
-              </a:spcAft>
-              <a:defRPr sz="2000">
-                <a:solidFill>
-                  <a:srgbClr val="333333"/>
-                </a:solidFill>
-              </a:defRPr>
-            </a:pPr>
-            <a:r>
-              <a:t>  • Provide data for better policy and wage decisions</a:t>
-            </a:r>
-          </a:p>
-        </p:txBody>
-      </p:sp>
+      </p:pic>
     </p:spTree>
   </p:cSld>
   <p:clrMapOvr>
@@ -6205,108 +7887,8 @@
 </p:sld>
 </file>
 
-<file path=ppt/slides/slide23.xml><?xml version="1.0" encoding="utf-8"?>
-<p:sld xmlns:a="http://schemas.openxmlformats.org/drawingml/2006/main" xmlns:p="http://schemas.openxmlformats.org/presentationml/2006/main" xmlns:r="http://schemas.openxmlformats.org/officeDocument/2006/relationships">
-  <p:cSld>
-    <p:bg>
-      <p:bgPr>
-        <a:solidFill>
-          <a:srgbClr val="1F4E79"/>
-        </a:solidFill>
-        <a:effectLst/>
-      </p:bgPr>
-    </p:bg>
-    <p:spTree>
-      <p:nvGrpSpPr>
-        <p:cNvPr id="1" name=""/>
-        <p:cNvGrpSpPr/>
-        <p:nvPr/>
-      </p:nvGrpSpPr>
-      <p:grpSpPr/>
-      <p:sp>
-        <p:nvSpPr>
-          <p:cNvPr id="2" name="TextBox 1"/>
-          <p:cNvSpPr txBox="1"/>
-          <p:nvPr/>
-        </p:nvSpPr>
-        <p:spPr>
-          <a:xfrm>
-            <a:off x="914400" y="2286000"/>
-            <a:ext cx="7315200" cy="2286000"/>
-          </a:xfrm>
-          <a:prstGeom prst="rect">
-            <a:avLst/>
-          </a:prstGeom>
-          <a:noFill/>
-        </p:spPr>
-        <p:txBody>
-          <a:bodyPr wrap="square">
-            <a:spAutoFit/>
-          </a:bodyPr>
-          <a:lstStyle/>
-          <a:p>
-            <a:pPr algn="ctr">
-              <a:defRPr sz="3200" b="1" i="1">
-                <a:solidFill>
-                  <a:srgbClr val="ED7D31"/>
-                </a:solidFill>
-              </a:defRPr>
-            </a:pPr>
-            <a:r>
-              <a:t>The numbers never lie.</a:t>
-            </a:r>
-            <a:br/>
-            <a:r>
-              <a:t>But incomplete numbers hide the truth.</a:t>
-            </a:r>
-          </a:p>
-        </p:txBody>
-      </p:sp>
-      <p:sp>
-        <p:nvSpPr>
-          <p:cNvPr id="3" name="TextBox 2"/>
-          <p:cNvSpPr txBox="1"/>
-          <p:nvPr/>
-        </p:nvSpPr>
-        <p:spPr>
-          <a:xfrm>
-            <a:off x="914400" y="4754880"/>
-            <a:ext cx="7315200" cy="914400"/>
-          </a:xfrm>
-          <a:prstGeom prst="rect">
-            <a:avLst/>
-          </a:prstGeom>
-          <a:noFill/>
-        </p:spPr>
-        <p:txBody>
-          <a:bodyPr wrap="none">
-            <a:spAutoFit/>
-          </a:bodyPr>
-          <a:lstStyle/>
-          <a:p>
-            <a:pPr algn="ctr">
-              <a:defRPr sz="2000">
-                <a:solidFill>
-                  <a:srgbClr val="FFFFFF"/>
-                </a:solidFill>
-              </a:defRPr>
-            </a:pPr>
-            <a:r>
-              <a:t>FINAL INSIGHT: What You Measure is What You Manage</a:t>
-            </a:r>
-          </a:p>
-        </p:txBody>
-      </p:sp>
-    </p:spTree>
-  </p:cSld>
-  <p:clrMapOvr>
-    <a:masterClrMapping/>
-  </p:clrMapOvr>
-</p:sld>
-</file>
-
-<file path=ppt/slides/slide24.xml><?xml version="1.0" encoding="utf-8"?>
-<p:sld xmlns:a="http://schemas.openxmlformats.org/drawingml/2006/main" xmlns:p="http://schemas.openxmlformats.org/presentationml/2006/main" xmlns:r="http://schemas.openxmlformats.org/officeDocument/2006/relationships">
+<file path=ppt/slides/slide7.xml><?xml version="1.0" encoding="utf-8"?>
+<p:sld xmlns:a="http://schemas.openxmlformats.org/drawingml/2006/main" xmlns:r="http://schemas.openxmlformats.org/officeDocument/2006/relationships" xmlns:p="http://schemas.openxmlformats.org/presentationml/2006/main">
   <p:cSld>
     <p:bg>
       <p:bgPr>
@@ -6322,7 +7904,14 @@
         <p:cNvGrpSpPr/>
         <p:nvPr/>
       </p:nvGrpSpPr>
-      <p:grpSpPr/>
+      <p:grpSpPr>
+        <a:xfrm>
+          <a:off x="0" y="0"/>
+          <a:ext cx="0" cy="0"/>
+          <a:chOff x="0" y="0"/>
+          <a:chExt cx="0" cy="0"/>
+        </a:xfrm>
+      </p:grpSpPr>
       <p:sp>
         <p:nvSpPr>
           <p:cNvPr id="2" name="Rectangle 1"/>
@@ -6378,7 +7967,7 @@
               </a:defRPr>
             </a:pPr>
             <a:r>
-              <a:t>This Analysis</a:t>
+              <a:t>Affordability by Paris Income Level</a:t>
             </a:r>
           </a:p>
         </p:txBody>
@@ -6419,250 +8008,165 @@
               </a:defRPr>
             </a:pPr>
             <a:r>
-              <a:t>Dataset: 2,163 synthetic price observations (Apr 2025 - Apr 2026)</a:t>
-            </a:r>
-          </a:p>
-          <a:p>
-            <a:pPr>
-              <a:spcBef>
-                <a:spcPts val="600"/>
-              </a:spcBef>
-              <a:spcAft>
-                <a:spcPts val="800"/>
-              </a:spcAft>
-              <a:defRPr sz="2000">
-                <a:solidFill>
-                  <a:srgbClr val="333333"/>
-                </a:solidFill>
-              </a:defRPr>
-            </a:pPr>
-            <a:r>
-              <a:t>From Snipper Tool captures in Paris Auchan and Carrefour stores</a:t>
-            </a:r>
-          </a:p>
-          <a:p>
-            <a:pPr>
-              <a:spcBef>
-                <a:spcPts val="600"/>
-              </a:spcBef>
-              <a:spcAft>
-                <a:spcPts val="800"/>
-              </a:spcAft>
-              <a:defRPr sz="2000">
-                <a:solidFill>
-                  <a:srgbClr val="333333"/>
-                </a:solidFill>
-              </a:defRPr>
-            </a:pPr>
-          </a:p>
-          <a:p>
-            <a:pPr>
-              <a:spcBef>
-                <a:spcPts val="600"/>
-              </a:spcBef>
-              <a:spcAft>
-                <a:spcPts val="800"/>
-              </a:spcAft>
-              <a:defRPr sz="2000">
-                <a:solidFill>
-                  <a:srgbClr val="333333"/>
-                </a:solidFill>
-              </a:defRPr>
-            </a:pPr>
-            <a:r>
-              <a:t>Compared THREE basket types:</a:t>
-            </a:r>
-          </a:p>
-          <a:p>
-            <a:pPr>
-              <a:spcBef>
-                <a:spcPts val="600"/>
-              </a:spcBef>
-              <a:spcAft>
-                <a:spcPts val="800"/>
-              </a:spcAft>
-              <a:defRPr sz="2000">
-                <a:solidFill>
-                  <a:srgbClr val="333333"/>
-                </a:solidFill>
-              </a:defRPr>
-            </a:pPr>
-            <a:r>
-              <a:t>  1. Official INSEE Minimal Basket</a:t>
-            </a:r>
-          </a:p>
-          <a:p>
-            <a:pPr>
-              <a:spcBef>
-                <a:spcPts val="600"/>
-              </a:spcBef>
-              <a:spcAft>
-                <a:spcPts val="800"/>
-              </a:spcAft>
-              <a:defRPr sz="2000">
-                <a:solidFill>
-                  <a:srgbClr val="333333"/>
-                </a:solidFill>
-              </a:defRPr>
-            </a:pPr>
-            <a:r>
-              <a:t>  2. Real Complete Living Basket (includes complementary items)</a:t>
-            </a:r>
-          </a:p>
-          <a:p>
-            <a:pPr>
-              <a:spcBef>
-                <a:spcPts val="600"/>
-              </a:spcBef>
-              <a:spcAft>
-                <a:spcPts val="800"/>
-              </a:spcAft>
-              <a:defRPr sz="2000">
-                <a:solidFill>
-                  <a:srgbClr val="333333"/>
-                </a:solidFill>
-              </a:defRPr>
-            </a:pPr>
-            <a:r>
-              <a:t>  3. Healthy Complete Basket (for nutritional wellness)</a:t>
-            </a:r>
-          </a:p>
-          <a:p>
-            <a:pPr>
-              <a:spcBef>
-                <a:spcPts val="600"/>
-              </a:spcBef>
-              <a:spcAft>
-                <a:spcPts val="800"/>
-              </a:spcAft>
-              <a:defRPr sz="2000">
-                <a:solidFill>
-                  <a:srgbClr val="333333"/>
-                </a:solidFill>
-              </a:defRPr>
-            </a:pPr>
-          </a:p>
-          <a:p>
-            <a:pPr>
-              <a:spcBef>
-                <a:spcPts val="600"/>
-              </a:spcBef>
-              <a:spcAft>
-                <a:spcPts val="800"/>
-              </a:spcAft>
-              <a:defRPr sz="2000">
-                <a:solidFill>
-                  <a:srgbClr val="333333"/>
-                </a:solidFill>
-              </a:defRPr>
-            </a:pPr>
-            <a:r>
-              <a:t>Against PARIS HOUSEHOLD INCOMES:</a:t>
-            </a:r>
-          </a:p>
-          <a:p>
-            <a:pPr>
-              <a:spcBef>
-                <a:spcPts val="600"/>
-              </a:spcBef>
-              <a:spcAft>
-                <a:spcPts val="800"/>
-              </a:spcAft>
-              <a:defRPr sz="2000">
-                <a:solidFill>
-                  <a:srgbClr val="333333"/>
-                </a:solidFill>
-              </a:defRPr>
-            </a:pPr>
-            <a:r>
-              <a:t>  • SMIC (minimum wage): 21,000 EUR/year</a:t>
-            </a:r>
-          </a:p>
-          <a:p>
-            <a:pPr>
-              <a:spcBef>
-                <a:spcPts val="600"/>
-              </a:spcBef>
-              <a:spcAft>
-                <a:spcPts val="800"/>
-              </a:spcAft>
-              <a:defRPr sz="2000">
-                <a:solidFill>
-                  <a:srgbClr val="333333"/>
-                </a:solidFill>
-              </a:defRPr>
-            </a:pPr>
-            <a:r>
-              <a:t>  • Low income: 28,000 EUR/year</a:t>
-            </a:r>
-          </a:p>
-          <a:p>
-            <a:pPr>
-              <a:spcBef>
-                <a:spcPts val="600"/>
-              </a:spcBef>
-              <a:spcAft>
-                <a:spcPts val="800"/>
-              </a:spcAft>
-              <a:defRPr sz="2000">
-                <a:solidFill>
-                  <a:srgbClr val="333333"/>
-                </a:solidFill>
-              </a:defRPr>
-            </a:pPr>
-            <a:r>
-              <a:t>  • Median: 42,000 EUR/year</a:t>
-            </a:r>
-          </a:p>
-          <a:p>
-            <a:pPr>
-              <a:spcBef>
-                <a:spcPts val="600"/>
-              </a:spcBef>
-              <a:spcAft>
-                <a:spcPts val="800"/>
-              </a:spcAft>
-              <a:defRPr sz="2000">
-                <a:solidFill>
-                  <a:srgbClr val="333333"/>
-                </a:solidFill>
-              </a:defRPr>
-            </a:pPr>
-            <a:r>
-              <a:t>  • Upper middle: 65,000 EUR/year</a:t>
-            </a:r>
-          </a:p>
-          <a:p>
-            <a:pPr>
-              <a:spcBef>
-                <a:spcPts val="600"/>
-              </a:spcBef>
-              <a:spcAft>
-                <a:spcPts val="800"/>
-              </a:spcAft>
-              <a:defRPr sz="2000">
-                <a:solidFill>
-                  <a:srgbClr val="333333"/>
-                </a:solidFill>
-              </a:defRPr>
-            </a:pPr>
-          </a:p>
-          <a:p>
-            <a:pPr>
-              <a:spcBef>
-                <a:spcPts val="600"/>
-              </a:spcBef>
-              <a:spcAft>
-                <a:spcPts val="800"/>
-              </a:spcAft>
-              <a:defRPr sz="2000">
-                <a:solidFill>
-                  <a:srgbClr val="333333"/>
-                </a:solidFill>
-              </a:defRPr>
-            </a:pPr>
-            <a:r>
-              <a:t>Geography: Paris region (Ile-de-France)</a:t>
+              <a:t>SMIC WORKERS (21,000 EUR/year):</a:t>
+            </a:r>
+          </a:p>
+          <a:p>
+            <a:pPr>
+              <a:spcBef>
+                <a:spcPts val="600"/>
+              </a:spcBef>
+              <a:spcAft>
+                <a:spcPts val="800"/>
+              </a:spcAft>
+              <a:defRPr sz="2000">
+                <a:solidFill>
+                  <a:srgbClr val="333333"/>
+                </a:solidFill>
+              </a:defRPr>
+            </a:pPr>
+            <a:r>
+              <a:t>  • Official basket: 9% of income (MANAGEABLE)</a:t>
+            </a:r>
+          </a:p>
+          <a:p>
+            <a:pPr>
+              <a:spcBef>
+                <a:spcPts val="600"/>
+              </a:spcBef>
+              <a:spcAft>
+                <a:spcPts val="800"/>
+              </a:spcAft>
+              <a:defRPr sz="2000">
+                <a:solidFill>
+                  <a:srgbClr val="333333"/>
+                </a:solidFill>
+              </a:defRPr>
+            </a:pPr>
+            <a:r>
+              <a:t>  • Real complete basket: 18% of income (DIFFICULT)</a:t>
+            </a:r>
+          </a:p>
+          <a:p>
+            <a:pPr>
+              <a:spcBef>
+                <a:spcPts val="600"/>
+              </a:spcBef>
+              <a:spcAft>
+                <a:spcPts val="800"/>
+              </a:spcAft>
+              <a:defRPr sz="2000">
+                <a:solidFill>
+                  <a:srgbClr val="333333"/>
+                </a:solidFill>
+              </a:defRPr>
+            </a:pPr>
+            <a:r>
+              <a:t>  • Healthy basket: 24% of income (CRISIS - NO MONEY FOR ANYTHING ELSE)</a:t>
+            </a:r>
+          </a:p>
+          <a:p>
+            <a:pPr>
+              <a:spcBef>
+                <a:spcPts val="600"/>
+              </a:spcBef>
+              <a:spcAft>
+                <a:spcPts val="800"/>
+              </a:spcAft>
+              <a:defRPr sz="2000">
+                <a:solidFill>
+                  <a:srgbClr val="333333"/>
+                </a:solidFill>
+              </a:defRPr>
+            </a:pPr>
+            <a:endParaRPr/>
+          </a:p>
+          <a:p>
+            <a:pPr>
+              <a:spcBef>
+                <a:spcPts val="600"/>
+              </a:spcBef>
+              <a:spcAft>
+                <a:spcPts val="800"/>
+              </a:spcAft>
+              <a:defRPr sz="2000">
+                <a:solidFill>
+                  <a:srgbClr val="333333"/>
+                </a:solidFill>
+              </a:defRPr>
+            </a:pPr>
+            <a:r>
+              <a:t>MEDIAN PARIS (42,000 EUR/year):</a:t>
+            </a:r>
+          </a:p>
+          <a:p>
+            <a:pPr>
+              <a:spcBef>
+                <a:spcPts val="600"/>
+              </a:spcBef>
+              <a:spcAft>
+                <a:spcPts val="800"/>
+              </a:spcAft>
+              <a:defRPr sz="2000">
+                <a:solidFill>
+                  <a:srgbClr val="333333"/>
+                </a:solidFill>
+              </a:defRPr>
+            </a:pPr>
+            <a:r>
+              <a:t>  • Real basket: 9% of income (MANAGEABLE)</a:t>
+            </a:r>
+          </a:p>
+          <a:p>
+            <a:pPr>
+              <a:spcBef>
+                <a:spcPts val="600"/>
+              </a:spcBef>
+              <a:spcAft>
+                <a:spcPts val="800"/>
+              </a:spcAft>
+              <a:defRPr sz="2000">
+                <a:solidFill>
+                  <a:srgbClr val="333333"/>
+                </a:solidFill>
+              </a:defRPr>
+            </a:pPr>
+            <a:r>
+              <a:t>  • Healthy basket: 12% of income (TIGHT)</a:t>
+            </a:r>
+          </a:p>
+          <a:p>
+            <a:pPr>
+              <a:spcBef>
+                <a:spcPts val="600"/>
+              </a:spcBef>
+              <a:spcAft>
+                <a:spcPts val="800"/>
+              </a:spcAft>
+              <a:defRPr sz="2000">
+                <a:solidFill>
+                  <a:srgbClr val="333333"/>
+                </a:solidFill>
+              </a:defRPr>
+            </a:pPr>
+            <a:endParaRPr/>
+          </a:p>
+          <a:p>
+            <a:pPr>
+              <a:spcBef>
+                <a:spcPts val="600"/>
+              </a:spcBef>
+              <a:spcAft>
+                <a:spcPts val="800"/>
+              </a:spcAft>
+              <a:defRPr sz="2000">
+                <a:solidFill>
+                  <a:srgbClr val="333333"/>
+                </a:solidFill>
+              </a:defRPr>
+            </a:pPr>
+            <a:r>
+              <a:t>THE CLIFF: Below 40k EUR annual income, healthy eating becomes IMPOSSIBLE</a:t>
             </a:r>
           </a:p>
         </p:txBody>
@@ -6675,13 +8179,13 @@
 </p:sld>
 </file>
 
-<file path=ppt/slides/slide25.xml><?xml version="1.0" encoding="utf-8"?>
-<p:sld xmlns:a="http://schemas.openxmlformats.org/drawingml/2006/main" xmlns:p="http://schemas.openxmlformats.org/presentationml/2006/main" xmlns:r="http://schemas.openxmlformats.org/officeDocument/2006/relationships">
+<file path=ppt/slides/slide8.xml><?xml version="1.0" encoding="utf-8"?>
+<p:sld xmlns:a="http://schemas.openxmlformats.org/drawingml/2006/main" xmlns:r="http://schemas.openxmlformats.org/officeDocument/2006/relationships" xmlns:p="http://schemas.openxmlformats.org/presentationml/2006/main">
   <p:cSld>
     <p:bg>
       <p:bgPr>
         <a:solidFill>
-          <a:srgbClr val="F5F5F5"/>
+          <a:srgbClr val="1F4E79"/>
         </a:solidFill>
         <a:effectLst/>
       </p:bgPr>
@@ -6692,7 +8196,14 @@
         <p:cNvGrpSpPr/>
         <p:nvPr/>
       </p:nvGrpSpPr>
-      <p:grpSpPr/>
+      <p:grpSpPr>
+        <a:xfrm>
+          <a:off x="0" y="0"/>
+          <a:ext cx="0" cy="0"/>
+          <a:chOff x="0" y="0"/>
+          <a:chExt cx="0" cy="0"/>
+        </a:xfrm>
+      </p:grpSpPr>
       <p:sp>
         <p:nvSpPr>
           <p:cNvPr id="2" name="TextBox 1"/>
@@ -6701,8 +8212,8 @@
         </p:nvSpPr>
         <p:spPr>
           <a:xfrm>
-            <a:off x="457200" y="274320"/>
-            <a:ext cx="8229600" cy="731520"/>
+            <a:off x="914400" y="2286000"/>
+            <a:ext cx="7315200" cy="1754326"/>
           </a:xfrm>
           <a:prstGeom prst="rect">
             <a:avLst/>
@@ -6710,20 +8221,35 @@
           <a:noFill/>
         </p:spPr>
         <p:txBody>
-          <a:bodyPr wrap="none">
+          <a:bodyPr wrap="square">
             <a:spAutoFit/>
           </a:bodyPr>
           <a:lstStyle/>
           <a:p>
-            <a:pPr>
-              <a:defRPr sz="4000" b="1">
-                <a:solidFill>
-                  <a:srgbClr val="1F4D76"/>
-                </a:solidFill>
-              </a:defRPr>
-            </a:pPr>
-            <a:r>
-              <a:t>Complete Budget Reality: Where SMIC Families Stand</a:t>
+            <a:pPr algn="ctr">
+              <a:defRPr sz="3200" b="1" i="1">
+                <a:solidFill>
+                  <a:srgbClr val="ED7D31"/>
+                </a:solidFill>
+              </a:defRPr>
+            </a:pPr>
+            <a:r>
+              <a:rPr sz="3600" dirty="0"/>
+              <a:t>Healthy eating is a luxury.</a:t>
+            </a:r>
+            <a:br>
+              <a:rPr sz="3600" dirty="0"/>
+            </a:br>
+            <a:r>
+              <a:rPr sz="3600" dirty="0"/>
+              <a:t>The poor must eat cheap (unhealthy).</a:t>
+            </a:r>
+            <a:br>
+              <a:rPr sz="3600" dirty="0"/>
+            </a:br>
+            <a:r>
+              <a:rPr sz="3600" dirty="0"/>
+              <a:t>The wealthy eat well.</a:t>
             </a:r>
           </a:p>
         </p:txBody>
@@ -6736,8 +8262,8 @@
         </p:nvSpPr>
         <p:spPr>
           <a:xfrm>
-            <a:off x="457200" y="1097280"/>
-            <a:ext cx="8229600" cy="457200"/>
+            <a:off x="914400" y="4754880"/>
+            <a:ext cx="7315200" cy="914400"/>
           </a:xfrm>
           <a:prstGeom prst="rect">
             <a:avLst/>
@@ -6750,43 +8276,20 @@
           </a:bodyPr>
           <a:lstStyle/>
           <a:p>
-            <a:pPr>
-              <a:defRPr sz="2400">
-                <a:solidFill>
-                  <a:srgbClr val="646464"/>
-                </a:solidFill>
-              </a:defRPr>
-            </a:pPr>
-            <a:r>
-              <a:t>All Essential Monthly Costs vs. Income</a:t>
-            </a:r>
-          </a:p>
-        </p:txBody>
-      </p:sp>
-      <p:pic>
-        <p:nvPicPr>
-          <p:cNvPr id="4" name="Picture 3" descr="08_complete_budget_reality.png"/>
-          <p:cNvPicPr>
-            <a:picLocks noChangeAspect="1"/>
-          </p:cNvPicPr>
-          <p:nvPr/>
-        </p:nvPicPr>
-        <p:blipFill>
-          <a:blip r:embed="rId2"/>
-          <a:stretch>
-            <a:fillRect/>
-          </a:stretch>
-        </p:blipFill>
-        <p:spPr>
-          <a:xfrm>
-            <a:off x="457200" y="1828800"/>
-            <a:ext cx="8229600" cy="3472263"/>
-          </a:xfrm>
-          <a:prstGeom prst="rect">
-            <a:avLst/>
-          </a:prstGeom>
-        </p:spPr>
-      </p:pic>
+            <a:pPr algn="ctr">
+              <a:defRPr sz="2000">
+                <a:solidFill>
+                  <a:srgbClr val="FFFFFF"/>
+                </a:solidFill>
+              </a:defRPr>
+            </a:pPr>
+            <a:r>
+              <a:rPr dirty="0"/>
+              <a:t>CLICHE INSIGHT #2: Health as Inequality</a:t>
+            </a:r>
+          </a:p>
+        </p:txBody>
+      </p:sp>
     </p:spTree>
   </p:cSld>
   <p:clrMapOvr>
@@ -6795,677 +8298,8 @@
 </p:sld>
 </file>
 
-<file path=ppt/slides/slide26.xml><?xml version="1.0" encoding="utf-8"?>
-<p:sld xmlns:a="http://schemas.openxmlformats.org/drawingml/2006/main" xmlns:p="http://schemas.openxmlformats.org/presentationml/2006/main" xmlns:r="http://schemas.openxmlformats.org/officeDocument/2006/relationships">
-  <p:cSld>
-    <p:bg>
-      <p:bgPr>
-        <a:solidFill>
-          <a:srgbClr val="F5F5F5"/>
-        </a:solidFill>
-        <a:effectLst/>
-      </p:bgPr>
-    </p:bg>
-    <p:spTree>
-      <p:nvGrpSpPr>
-        <p:cNvPr id="1" name=""/>
-        <p:cNvGrpSpPr/>
-        <p:nvPr/>
-      </p:nvGrpSpPr>
-      <p:grpSpPr/>
-      <p:sp>
-        <p:nvSpPr>
-          <p:cNvPr id="2" name="TextBox 1"/>
-          <p:cNvSpPr txBox="1"/>
-          <p:nvPr/>
-        </p:nvSpPr>
-        <p:spPr>
-          <a:xfrm>
-            <a:off x="457200" y="274320"/>
-            <a:ext cx="8229600" cy="548640"/>
-          </a:xfrm>
-          <a:prstGeom prst="rect">
-            <a:avLst/>
-          </a:prstGeom>
-          <a:noFill/>
-        </p:spPr>
-        <p:txBody>
-          <a:bodyPr wrap="none">
-            <a:spAutoFit/>
-          </a:bodyPr>
-          <a:lstStyle/>
-          <a:p>
-            <a:pPr>
-              <a:defRPr sz="3600" b="1">
-                <a:solidFill>
-                  <a:srgbClr val="1F4D76"/>
-                </a:solidFill>
-              </a:defRPr>
-            </a:pPr>
-            <a:r>
-              <a:t>The Structural Deficit: Income vs. Reality</a:t>
-            </a:r>
-          </a:p>
-        </p:txBody>
-      </p:sp>
-      <p:sp>
-        <p:nvSpPr>
-          <p:cNvPr id="3" name="Rectangle 2"/>
-          <p:cNvSpPr/>
-          <p:nvPr/>
-        </p:nvSpPr>
-        <p:spPr>
-          <a:xfrm>
-            <a:off x="457200" y="1097280"/>
-            <a:ext cx="3840480" cy="4114800"/>
-          </a:xfrm>
-          <a:prstGeom prst="rect">
-            <a:avLst/>
-          </a:prstGeom>
-          <a:solidFill>
-            <a:srgbClr val="FFF0F0"/>
-          </a:solidFill>
-          <a:ln w="25400">
-            <a:solidFill>
-              <a:srgbClr val="C80000"/>
-            </a:solidFill>
-          </a:ln>
-        </p:spPr>
-        <p:style>
-          <a:lnRef idx="1">
-            <a:schemeClr val="accent1"/>
-          </a:lnRef>
-          <a:fillRef idx="3">
-            <a:schemeClr val="accent1"/>
-          </a:fillRef>
-          <a:effectRef idx="2">
-            <a:schemeClr val="accent1"/>
-          </a:effectRef>
-          <a:fontRef idx="minor">
-            <a:schemeClr val="lt1"/>
-          </a:fontRef>
-        </p:style>
-        <p:txBody>
-          <a:bodyPr rtlCol="0" anchor="ctr" tIns="182880" lIns="182880" rIns="182880" wrap="square"/>
-          <a:lstStyle/>
-          <a:p>
-            <a:pPr algn="ctr">
-              <a:defRPr sz="1800" b="1">
-                <a:solidFill>
-                  <a:srgbClr val="C80000"/>
-                </a:solidFill>
-              </a:defRPr>
-            </a:pPr>
-            <a:r>
-              <a:t>SMIC FAMILY</a:t>
-            </a:r>
-          </a:p>
-          <a:p>
-            <a:pPr>
-              <a:defRPr sz="1100"/>
-            </a:pPr>
-            <a:r>
-              <a:t>Monthly Income: €1,750</a:t>
-            </a:r>
-          </a:p>
-          <a:p>
-            <a:pPr>
-              <a:defRPr sz="1100"/>
-            </a:pPr>
-          </a:p>
-          <a:p>
-            <a:pPr>
-              <a:defRPr sz="1100"/>
-            </a:pPr>
-            <a:r>
-              <a:t>Essential Costs:</a:t>
-            </a:r>
-          </a:p>
-          <a:p>
-            <a:pPr>
-              <a:defRPr sz="1100"/>
-            </a:pPr>
-            <a:r>
-              <a:t>• Housing: €725</a:t>
-            </a:r>
-          </a:p>
-          <a:p>
-            <a:pPr>
-              <a:defRPr sz="1100"/>
-            </a:pPr>
-            <a:r>
-              <a:t>• Food: €304</a:t>
-            </a:r>
-          </a:p>
-          <a:p>
-            <a:pPr>
-              <a:defRPr sz="1100"/>
-            </a:pPr>
-            <a:r>
-              <a:t>• Utilities: €150</a:t>
-            </a:r>
-          </a:p>
-          <a:p>
-            <a:pPr>
-              <a:defRPr sz="1100"/>
-            </a:pPr>
-            <a:r>
-              <a:t>• Childcare: €200</a:t>
-            </a:r>
-          </a:p>
-          <a:p>
-            <a:pPr>
-              <a:defRPr sz="1100"/>
-            </a:pPr>
-            <a:r>
-              <a:t>• Transport: €100</a:t>
-            </a:r>
-          </a:p>
-          <a:p>
-            <a:pPr>
-              <a:defRPr sz="1100"/>
-            </a:pPr>
-            <a:r>
-              <a:t>• Other: €245</a:t>
-            </a:r>
-          </a:p>
-          <a:p>
-            <a:pPr>
-              <a:defRPr sz="1100"/>
-            </a:pPr>
-          </a:p>
-          <a:p>
-            <a:pPr>
-              <a:defRPr sz="1100"/>
-            </a:pPr>
-            <a:r>
-              <a:t>TOTAL: €1,824</a:t>
-            </a:r>
-          </a:p>
-          <a:p>
-            <a:pPr>
-              <a:defRPr sz="1100"/>
-            </a:pPr>
-          </a:p>
-          <a:p>
-            <a:pPr>
-              <a:defRPr sz="1100" b="1">
-                <a:solidFill>
-                  <a:srgbClr val="C80000"/>
-                </a:solidFill>
-              </a:defRPr>
-            </a:pPr>
-            <a:r>
-              <a:t>MONTHLY DEFICIT:</a:t>
-            </a:r>
-          </a:p>
-          <a:p>
-            <a:pPr>
-              <a:defRPr sz="1100"/>
-            </a:pPr>
-            <a:r>
-              <a:t>-€74 per month</a:t>
-            </a:r>
-          </a:p>
-          <a:p>
-            <a:pPr>
-              <a:defRPr sz="1100"/>
-            </a:pPr>
-          </a:p>
-          <a:p>
-            <a:pPr>
-              <a:defRPr sz="1100"/>
-            </a:pPr>
-            <a:r>
-              <a:t>Government transfers</a:t>
-            </a:r>
-          </a:p>
-          <a:p>
-            <a:pPr>
-              <a:defRPr sz="1100" b="1">
-                <a:solidFill>
-                  <a:srgbClr val="C80000"/>
-                </a:solidFill>
-              </a:defRPr>
-            </a:pPr>
-            <a:r>
-              <a:t>required to break even</a:t>
-            </a:r>
-          </a:p>
-        </p:txBody>
-      </p:sp>
-      <p:sp>
-        <p:nvSpPr>
-          <p:cNvPr id="4" name="Rectangle 3"/>
-          <p:cNvSpPr/>
-          <p:nvPr/>
-        </p:nvSpPr>
-        <p:spPr>
-          <a:xfrm>
-            <a:off x="4846320" y="1097280"/>
-            <a:ext cx="3840480" cy="4114800"/>
-          </a:xfrm>
-          <a:prstGeom prst="rect">
-            <a:avLst/>
-          </a:prstGeom>
-          <a:solidFill>
-            <a:srgbClr val="F0FFF0"/>
-          </a:solidFill>
-          <a:ln w="25400">
-            <a:solidFill>
-              <a:srgbClr val="009600"/>
-            </a:solidFill>
-          </a:ln>
-        </p:spPr>
-        <p:style>
-          <a:lnRef idx="1">
-            <a:schemeClr val="accent1"/>
-          </a:lnRef>
-          <a:fillRef idx="3">
-            <a:schemeClr val="accent1"/>
-          </a:fillRef>
-          <a:effectRef idx="2">
-            <a:schemeClr val="accent1"/>
-          </a:effectRef>
-          <a:fontRef idx="minor">
-            <a:schemeClr val="lt1"/>
-          </a:fontRef>
-        </p:style>
-        <p:txBody>
-          <a:bodyPr rtlCol="0" anchor="ctr" tIns="182880" lIns="182880" rIns="182880" wrap="square"/>
-          <a:lstStyle/>
-          <a:p>
-            <a:pPr algn="ctr">
-              <a:defRPr sz="1800" b="1">
-                <a:solidFill>
-                  <a:srgbClr val="009600"/>
-                </a:solidFill>
-              </a:defRPr>
-            </a:pPr>
-            <a:r>
-              <a:t>MEDIAN FAMILY</a:t>
-            </a:r>
-          </a:p>
-          <a:p>
-            <a:pPr>
-              <a:defRPr sz="1100"/>
-            </a:pPr>
-            <a:r>
-              <a:t>Monthly Income: €3,500</a:t>
-            </a:r>
-          </a:p>
-          <a:p>
-            <a:pPr>
-              <a:defRPr sz="1100"/>
-            </a:pPr>
-          </a:p>
-          <a:p>
-            <a:pPr>
-              <a:defRPr sz="1100"/>
-            </a:pPr>
-            <a:r>
-              <a:t>Essential Costs:</a:t>
-            </a:r>
-          </a:p>
-          <a:p>
-            <a:pPr>
-              <a:defRPr sz="1100"/>
-            </a:pPr>
-            <a:r>
-              <a:t>• Housing: €1,150</a:t>
-            </a:r>
-          </a:p>
-          <a:p>
-            <a:pPr>
-              <a:defRPr sz="1100"/>
-            </a:pPr>
-            <a:r>
-              <a:t>• Food: €304</a:t>
-            </a:r>
-          </a:p>
-          <a:p>
-            <a:pPr>
-              <a:defRPr sz="1100"/>
-            </a:pPr>
-            <a:r>
-              <a:t>• Utilities: €150</a:t>
-            </a:r>
-          </a:p>
-          <a:p>
-            <a:pPr>
-              <a:defRPr sz="1100"/>
-            </a:pPr>
-            <a:r>
-              <a:t>• Childcare: €200</a:t>
-            </a:r>
-          </a:p>
-          <a:p>
-            <a:pPr>
-              <a:defRPr sz="1100"/>
-            </a:pPr>
-            <a:r>
-              <a:t>• Transport: €100</a:t>
-            </a:r>
-          </a:p>
-          <a:p>
-            <a:pPr>
-              <a:defRPr sz="1100"/>
-            </a:pPr>
-            <a:r>
-              <a:t>• Other: €245</a:t>
-            </a:r>
-          </a:p>
-          <a:p>
-            <a:pPr>
-              <a:defRPr sz="1100"/>
-            </a:pPr>
-          </a:p>
-          <a:p>
-            <a:pPr>
-              <a:defRPr sz="1100"/>
-            </a:pPr>
-            <a:r>
-              <a:t>TOTAL: €2,249</a:t>
-            </a:r>
-          </a:p>
-          <a:p>
-            <a:pPr>
-              <a:defRPr sz="1100"/>
-            </a:pPr>
-          </a:p>
-          <a:p>
-            <a:pPr>
-              <a:defRPr sz="1100" b="1">
-                <a:solidFill>
-                  <a:srgbClr val="009600"/>
-                </a:solidFill>
-              </a:defRPr>
-            </a:pPr>
-            <a:r>
-              <a:t>MONTHLY SURPLUS:</a:t>
-            </a:r>
-          </a:p>
-          <a:p>
-            <a:pPr>
-              <a:defRPr sz="1100"/>
-            </a:pPr>
-            <a:r>
-              <a:t>+€1,251 per month</a:t>
-            </a:r>
-          </a:p>
-          <a:p>
-            <a:pPr>
-              <a:defRPr sz="1100"/>
-            </a:pPr>
-          </a:p>
-          <a:p>
-            <a:pPr>
-              <a:defRPr sz="1100"/>
-            </a:pPr>
-            <a:r>
-              <a:t>Can save, invest,</a:t>
-            </a:r>
-          </a:p>
-          <a:p>
-            <a:pPr>
-              <a:defRPr sz="1100"/>
-            </a:pPr>
-            <a:r>
-              <a:t>handle emergencies</a:t>
-            </a:r>
-          </a:p>
-        </p:txBody>
-      </p:sp>
-    </p:spTree>
-  </p:cSld>
-  <p:clrMapOvr>
-    <a:masterClrMapping/>
-  </p:clrMapOvr>
-</p:sld>
-</file>
-
-<file path=ppt/slides/slide27.xml><?xml version="1.0" encoding="utf-8"?>
-<p:sld xmlns:a="http://schemas.openxmlformats.org/drawingml/2006/main" xmlns:p="http://schemas.openxmlformats.org/presentationml/2006/main" xmlns:r="http://schemas.openxmlformats.org/officeDocument/2006/relationships">
-  <p:cSld>
-    <p:bg>
-      <p:bgPr>
-        <a:solidFill>
-          <a:srgbClr val="F5F5F5"/>
-        </a:solidFill>
-        <a:effectLst/>
-      </p:bgPr>
-    </p:bg>
-    <p:spTree>
-      <p:nvGrpSpPr>
-        <p:cNvPr id="1" name=""/>
-        <p:cNvGrpSpPr/>
-        <p:nvPr/>
-      </p:nvGrpSpPr>
-      <p:grpSpPr/>
-      <p:sp>
-        <p:nvSpPr>
-          <p:cNvPr id="2" name="TextBox 1"/>
-          <p:cNvSpPr txBox="1"/>
-          <p:nvPr/>
-        </p:nvSpPr>
-        <p:spPr>
-          <a:xfrm>
-            <a:off x="457200" y="274320"/>
-            <a:ext cx="8229600" cy="548640"/>
-          </a:xfrm>
-          <a:prstGeom prst="rect">
-            <a:avLst/>
-          </a:prstGeom>
-          <a:noFill/>
-        </p:spPr>
-        <p:txBody>
-          <a:bodyPr wrap="none">
-            <a:spAutoFit/>
-          </a:bodyPr>
-          <a:lstStyle/>
-          <a:p>
-            <a:pPr>
-              <a:defRPr sz="3600" b="1">
-                <a:solidFill>
-                  <a:srgbClr val="1F4D76"/>
-                </a:solidFill>
-              </a:defRPr>
-            </a:pPr>
-            <a:r>
-              <a:t>Why This Matters: Poverty is Structural</a:t>
-            </a:r>
-          </a:p>
-        </p:txBody>
-      </p:sp>
-      <p:sp>
-        <p:nvSpPr>
-          <p:cNvPr id="3" name="TextBox 2"/>
-          <p:cNvSpPr txBox="1"/>
-          <p:nvPr/>
-        </p:nvSpPr>
-        <p:spPr>
-          <a:xfrm>
-            <a:off x="640080" y="1097280"/>
-            <a:ext cx="7863840" cy="4389120"/>
-          </a:xfrm>
-          <a:prstGeom prst="rect">
-            <a:avLst/>
-          </a:prstGeom>
-          <a:noFill/>
-        </p:spPr>
-        <p:txBody>
-          <a:bodyPr wrap="square">
-            <a:spAutoFit/>
-          </a:bodyPr>
-          <a:lstStyle/>
-          <a:p>
-            <a:pPr>
-              <a:defRPr sz="1400" b="1">
-                <a:solidFill>
-                  <a:srgbClr val="C80000"/>
-                </a:solidFill>
-              </a:defRPr>
-            </a:pPr>
-            <a:r>
-              <a:t>SMIC families cannot survive on SMIC income alone.</a:t>
-            </a:r>
-          </a:p>
-          <a:p>
-            <a:pPr>
-              <a:defRPr sz="1400">
-                <a:solidFill>
-                  <a:srgbClr val="000000"/>
-                </a:solidFill>
-              </a:defRPr>
-            </a:pPr>
-          </a:p>
-          <a:p>
-            <a:pPr>
-              <a:defRPr sz="1400">
-                <a:solidFill>
-                  <a:srgbClr val="000000"/>
-                </a:solidFill>
-              </a:defRPr>
-            </a:pPr>
-            <a:r>
-              <a:t>Government transfers (CAF, housing allowance: €300-550/month) are</a:t>
-            </a:r>
-          </a:p>
-          <a:p>
-            <a:pPr>
-              <a:defRPr sz="1400">
-                <a:solidFill>
-                  <a:srgbClr val="000000"/>
-                </a:solidFill>
-              </a:defRPr>
-            </a:pPr>
-            <a:r>
-              <a:t>structural survival requirement, not supplemental help.</a:t>
-            </a:r>
-          </a:p>
-          <a:p>
-            <a:pPr>
-              <a:defRPr sz="1400">
-                <a:solidFill>
-                  <a:srgbClr val="000000"/>
-                </a:solidFill>
-              </a:defRPr>
-            </a:pPr>
-          </a:p>
-          <a:p>
-            <a:pPr>
-              <a:defRPr sz="1400">
-                <a:solidFill>
-                  <a:srgbClr val="000000"/>
-                </a:solidFill>
-              </a:defRPr>
-            </a:pPr>
-            <a:r>
-              <a:t>With transfers, SMIC families break even with no margin for:</a:t>
-            </a:r>
-          </a:p>
-          <a:p>
-            <a:pPr>
-              <a:defRPr sz="1400">
-                <a:solidFill>
-                  <a:srgbClr val="646464"/>
-                </a:solidFill>
-              </a:defRPr>
-            </a:pPr>
-            <a:r>
-              <a:t>  • Emergencies (car repairs, medical events)</a:t>
-            </a:r>
-          </a:p>
-          <a:p>
-            <a:pPr>
-              <a:defRPr sz="1400">
-                <a:solidFill>
-                  <a:srgbClr val="646464"/>
-                </a:solidFill>
-              </a:defRPr>
-            </a:pPr>
-            <a:r>
-              <a:t>  • Savings (impossible)</a:t>
-            </a:r>
-          </a:p>
-          <a:p>
-            <a:pPr>
-              <a:defRPr sz="1400">
-                <a:solidFill>
-                  <a:srgbClr val="646464"/>
-                </a:solidFill>
-              </a:defRPr>
-            </a:pPr>
-            <a:r>
-              <a:t>  • Family composition changes (baby, aging parent)</a:t>
-            </a:r>
-          </a:p>
-          <a:p>
-            <a:pPr>
-              <a:defRPr sz="1400">
-                <a:solidFill>
-                  <a:srgbClr val="000000"/>
-                </a:solidFill>
-              </a:defRPr>
-            </a:pPr>
-          </a:p>
-          <a:p>
-            <a:pPr>
-              <a:defRPr sz="1400">
-                <a:solidFill>
-                  <a:srgbClr val="000000"/>
-                </a:solidFill>
-              </a:defRPr>
-            </a:pPr>
-            <a:r>
-              <a:t>When composition changes occur (teenage child costs €3,461/year more),</a:t>
-            </a:r>
-          </a:p>
-          <a:p>
-            <a:pPr>
-              <a:defRPr sz="1400" b="1">
-                <a:solidFill>
-                  <a:srgbClr val="C80000"/>
-                </a:solidFill>
-              </a:defRPr>
-            </a:pPr>
-            <a:r>
-              <a:t>SMIC families have NO margin to absorb the cost.</a:t>
-            </a:r>
-          </a:p>
-          <a:p>
-            <a:pPr>
-              <a:defRPr sz="1400">
-                <a:solidFill>
-                  <a:srgbClr val="000000"/>
-                </a:solidFill>
-              </a:defRPr>
-            </a:pPr>
-          </a:p>
-          <a:p>
-            <a:pPr>
-              <a:defRPr sz="1400" b="1">
-                <a:solidFill>
-                  <a:srgbClr val="C80000"/>
-                </a:solidFill>
-              </a:defRPr>
-            </a:pPr>
-            <a:r>
-              <a:t>Result: Debt accumulation OR going without essentials</a:t>
-            </a:r>
-          </a:p>
-        </p:txBody>
-      </p:sp>
-    </p:spTree>
-  </p:cSld>
-  <p:clrMapOvr>
-    <a:masterClrMapping/>
-  </p:clrMapOvr>
-</p:sld>
-</file>
-
-<file path=ppt/slides/slide3.xml><?xml version="1.0" encoding="utf-8"?>
-<p:sld xmlns:a="http://schemas.openxmlformats.org/drawingml/2006/main" xmlns:p="http://schemas.openxmlformats.org/presentationml/2006/main" xmlns:r="http://schemas.openxmlformats.org/officeDocument/2006/relationships">
+<file path=ppt/slides/slide9.xml><?xml version="1.0" encoding="utf-8"?>
+<p:sld xmlns:a="http://schemas.openxmlformats.org/drawingml/2006/main" xmlns:r="http://schemas.openxmlformats.org/officeDocument/2006/relationships" xmlns:p="http://schemas.openxmlformats.org/presentationml/2006/main">
   <p:cSld>
     <p:bg>
       <p:bgPr>
@@ -7481,1081 +8315,14 @@
         <p:cNvGrpSpPr/>
         <p:nvPr/>
       </p:nvGrpSpPr>
-      <p:grpSpPr/>
-      <p:sp>
-        <p:nvSpPr>
-          <p:cNvPr id="2" name="Rectangle 1"/>
-          <p:cNvSpPr/>
-          <p:nvPr/>
-        </p:nvSpPr>
-        <p:spPr>
-          <a:xfrm>
-            <a:off x="0" y="0"/>
-            <a:ext cx="9144000" cy="822960"/>
-          </a:xfrm>
-          <a:prstGeom prst="rect">
-            <a:avLst/>
-          </a:prstGeom>
-          <a:solidFill>
-            <a:srgbClr val="1F4E79"/>
-          </a:solidFill>
-          <a:ln>
-            <a:solidFill>
-              <a:srgbClr val="1F4E79"/>
-            </a:solidFill>
-          </a:ln>
-        </p:spPr>
-        <p:style>
-          <a:lnRef idx="1">
-            <a:schemeClr val="accent1"/>
-          </a:lnRef>
-          <a:fillRef idx="3">
-            <a:schemeClr val="accent1"/>
-          </a:fillRef>
-          <a:effectRef idx="2">
-            <a:schemeClr val="accent1"/>
-          </a:effectRef>
-          <a:fontRef idx="minor">
-            <a:schemeClr val="lt1"/>
-          </a:fontRef>
-        </p:style>
-        <p:txBody>
-          <a:bodyPr rtlCol="0" anchor="ctr"/>
-          <a:lstStyle/>
-          <a:p>
-            <a:pPr algn="ctr">
-              <a:spcBef>
-                <a:spcPts val="1200"/>
-              </a:spcBef>
-              <a:spcAft>
-                <a:spcPts val="1200"/>
-              </a:spcAft>
-              <a:defRPr sz="4400" b="1">
-                <a:solidFill>
-                  <a:srgbClr val="FFFFFF"/>
-                </a:solidFill>
-              </a:defRPr>
-            </a:pPr>
-            <a:r>
-              <a:t>What's Missing from Official Baskets?</a:t>
-            </a:r>
-          </a:p>
-        </p:txBody>
-      </p:sp>
-      <p:sp>
-        <p:nvSpPr>
-          <p:cNvPr id="3" name="TextBox 2"/>
-          <p:cNvSpPr txBox="1"/>
-          <p:nvPr/>
-        </p:nvSpPr>
-        <p:spPr>
-          <a:xfrm>
-            <a:off x="731520" y="1188720"/>
-            <a:ext cx="7680960" cy="5212080"/>
-          </a:xfrm>
-          <a:prstGeom prst="rect">
-            <a:avLst/>
-          </a:prstGeom>
-          <a:noFill/>
-        </p:spPr>
-        <p:txBody>
-          <a:bodyPr wrap="square">
-            <a:spAutoFit/>
-          </a:bodyPr>
-          <a:lstStyle/>
-          <a:p>
-            <a:pPr>
-              <a:spcBef>
-                <a:spcPts val="600"/>
-              </a:spcBef>
-              <a:spcAft>
-                <a:spcPts val="800"/>
-              </a:spcAft>
-              <a:defRPr sz="2000">
-                <a:solidFill>
-                  <a:srgbClr val="333333"/>
-                </a:solidFill>
-              </a:defRPr>
-            </a:pPr>
-            <a:r>
-              <a:t>BABY &amp; FAMILY ESSENTIALS (27.98 EUR/month):</a:t>
-            </a:r>
-          </a:p>
-          <a:p>
-            <a:pPr>
-              <a:spcBef>
-                <a:spcPts val="600"/>
-              </a:spcBef>
-              <a:spcAft>
-                <a:spcPts val="800"/>
-              </a:spcAft>
-              <a:defRPr sz="2000">
-                <a:solidFill>
-                  <a:srgbClr val="333333"/>
-                </a:solidFill>
-              </a:defRPr>
-            </a:pPr>
-            <a:r>
-              <a:t>  • Diapers: 18.99 EUR</a:t>
-            </a:r>
-          </a:p>
-          <a:p>
-            <a:pPr>
-              <a:spcBef>
-                <a:spcPts val="600"/>
-              </a:spcBef>
-              <a:spcAft>
-                <a:spcPts val="800"/>
-              </a:spcAft>
-              <a:defRPr sz="2000">
-                <a:solidFill>
-                  <a:srgbClr val="333333"/>
-                </a:solidFill>
-              </a:defRPr>
-            </a:pPr>
-            <a:r>
-              <a:t>  • Baby creams &amp; ointments: 8.99 EUR</a:t>
-            </a:r>
-          </a:p>
-          <a:p>
-            <a:pPr>
-              <a:spcBef>
-                <a:spcPts val="600"/>
-              </a:spcBef>
-              <a:spcAft>
-                <a:spcPts val="800"/>
-              </a:spcAft>
-              <a:defRPr sz="2000">
-                <a:solidFill>
-                  <a:srgbClr val="333333"/>
-                </a:solidFill>
-              </a:defRPr>
-            </a:pPr>
-          </a:p>
-          <a:p>
-            <a:pPr>
-              <a:spcBef>
-                <a:spcPts val="600"/>
-              </a:spcBef>
-              <a:spcAft>
-                <a:spcPts val="800"/>
-              </a:spcAft>
-              <a:defRPr sz="2000">
-                <a:solidFill>
-                  <a:srgbClr val="333333"/>
-                </a:solidFill>
-              </a:defRPr>
-            </a:pPr>
-            <a:r>
-              <a:t>DIETARY VARIETIES &amp; ALTERNATIVES:</a:t>
-            </a:r>
-          </a:p>
-          <a:p>
-            <a:pPr>
-              <a:spcBef>
-                <a:spcPts val="600"/>
-              </a:spcBef>
-              <a:spcAft>
-                <a:spcPts val="800"/>
-              </a:spcAft>
-              <a:defRPr sz="2000">
-                <a:solidFill>
-                  <a:srgbClr val="333333"/>
-                </a:solidFill>
-              </a:defRPr>
-            </a:pPr>
-            <a:r>
-              <a:t>  • Lactose-free milk, gluten-free options, different protein sources</a:t>
-            </a:r>
-          </a:p>
-          <a:p>
-            <a:pPr>
-              <a:spcBef>
-                <a:spcPts val="600"/>
-              </a:spcBef>
-              <a:spcAft>
-                <a:spcPts val="800"/>
-              </a:spcAft>
-              <a:defRPr sz="2000">
-                <a:solidFill>
-                  <a:srgbClr val="333333"/>
-                </a:solidFill>
-              </a:defRPr>
-            </a:pPr>
-          </a:p>
-          <a:p>
-            <a:pPr>
-              <a:spcBef>
-                <a:spcPts val="600"/>
-              </a:spcBef>
-              <a:spcAft>
-                <a:spcPts val="800"/>
-              </a:spcAft>
-              <a:defRPr sz="2000">
-                <a:solidFill>
-                  <a:srgbClr val="333333"/>
-                </a:solidFill>
-              </a:defRPr>
-            </a:pPr>
-            <a:r>
-              <a:t>COMPLEMENTARY COOKING ITEMS:</a:t>
-            </a:r>
-          </a:p>
-          <a:p>
-            <a:pPr>
-              <a:spcBef>
-                <a:spcPts val="600"/>
-              </a:spcBef>
-              <a:spcAft>
-                <a:spcPts val="800"/>
-              </a:spcAft>
-              <a:defRPr sz="2000">
-                <a:solidFill>
-                  <a:srgbClr val="333333"/>
-                </a:solidFill>
-              </a:defRPr>
-            </a:pPr>
-            <a:r>
-              <a:t>  • Spices, sauces, quality oils - items that complete meals</a:t>
-            </a:r>
-          </a:p>
-          <a:p>
-            <a:pPr>
-              <a:spcBef>
-                <a:spcPts val="600"/>
-              </a:spcBef>
-              <a:spcAft>
-                <a:spcPts val="800"/>
-              </a:spcAft>
-              <a:defRPr sz="2000">
-                <a:solidFill>
-                  <a:srgbClr val="333333"/>
-                </a:solidFill>
-              </a:defRPr>
-            </a:pPr>
-          </a:p>
-          <a:p>
-            <a:pPr>
-              <a:spcBef>
-                <a:spcPts val="600"/>
-              </a:spcBef>
-              <a:spcAft>
-                <a:spcPts val="800"/>
-              </a:spcAft>
-              <a:defRPr sz="2000">
-                <a:solidFill>
-                  <a:srgbClr val="333333"/>
-                </a:solidFill>
-              </a:defRPr>
-            </a:pPr>
-            <a:r>
-              <a:t>HEALTH &amp; HYGIENE ESSENTIALS:</a:t>
-            </a:r>
-          </a:p>
-          <a:p>
-            <a:pPr>
-              <a:spcBef>
-                <a:spcPts val="600"/>
-              </a:spcBef>
-              <a:spcAft>
-                <a:spcPts val="800"/>
-              </a:spcAft>
-              <a:defRPr sz="2000">
-                <a:solidFill>
-                  <a:srgbClr val="333333"/>
-                </a:solidFill>
-              </a:defRPr>
-            </a:pPr>
-            <a:r>
-              <a:t>  • Toilet paper, soap, shampoo, toothpaste: 15-20 EUR/month</a:t>
-            </a:r>
-          </a:p>
-          <a:p>
-            <a:pPr>
-              <a:spcBef>
-                <a:spcPts val="600"/>
-              </a:spcBef>
-              <a:spcAft>
-                <a:spcPts val="800"/>
-              </a:spcAft>
-              <a:defRPr sz="2000">
-                <a:solidFill>
-                  <a:srgbClr val="333333"/>
-                </a:solidFill>
-              </a:defRPr>
-            </a:pPr>
-          </a:p>
-          <a:p>
-            <a:pPr>
-              <a:spcBef>
-                <a:spcPts val="600"/>
-              </a:spcBef>
-              <a:spcAft>
-                <a:spcPts val="800"/>
-              </a:spcAft>
-              <a:defRPr sz="2000">
-                <a:solidFill>
-                  <a:srgbClr val="333333"/>
-                </a:solidFill>
-              </a:defRPr>
-            </a:pPr>
-            <a:r>
-              <a:t>CULTURAL &amp; LIFE QUALITY:</a:t>
-            </a:r>
-          </a:p>
-          <a:p>
-            <a:pPr>
-              <a:spcBef>
-                <a:spcPts val="600"/>
-              </a:spcBef>
-              <a:spcAft>
-                <a:spcPts val="800"/>
-              </a:spcAft>
-              <a:defRPr sz="2000">
-                <a:solidFill>
-                  <a:srgbClr val="333333"/>
-                </a:solidFill>
-              </a:defRPr>
-            </a:pPr>
-            <a:r>
-              <a:t>  • Wine, chocolate, treats - the cost of living, not just surviving</a:t>
-            </a:r>
-          </a:p>
-        </p:txBody>
-      </p:sp>
-    </p:spTree>
-  </p:cSld>
-  <p:clrMapOvr>
-    <a:masterClrMapping/>
-  </p:clrMapOvr>
-</p:sld>
-</file>
-
-<file path=ppt/slides/slide4.xml><?xml version="1.0" encoding="utf-8"?>
-<p:sld xmlns:a="http://schemas.openxmlformats.org/drawingml/2006/main" xmlns:p="http://schemas.openxmlformats.org/presentationml/2006/main" xmlns:r="http://schemas.openxmlformats.org/officeDocument/2006/relationships">
-  <p:cSld>
-    <p:bg>
-      <p:bgPr>
-        <a:solidFill>
-          <a:srgbClr val="FFFFFF"/>
-        </a:solidFill>
-        <a:effectLst/>
-      </p:bgPr>
-    </p:bg>
-    <p:spTree>
-      <p:nvGrpSpPr>
-        <p:cNvPr id="1" name=""/>
-        <p:cNvGrpSpPr/>
-        <p:nvPr/>
-      </p:nvGrpSpPr>
-      <p:grpSpPr/>
-      <p:sp>
-        <p:nvSpPr>
-          <p:cNvPr id="2" name="Rectangle 1"/>
-          <p:cNvSpPr/>
-          <p:nvPr/>
-        </p:nvSpPr>
-        <p:spPr>
-          <a:xfrm>
-            <a:off x="0" y="0"/>
-            <a:ext cx="9144000" cy="822960"/>
-          </a:xfrm>
-          <a:prstGeom prst="rect">
-            <a:avLst/>
-          </a:prstGeom>
-          <a:solidFill>
-            <a:srgbClr val="1F4E79"/>
-          </a:solidFill>
-          <a:ln>
-            <a:solidFill>
-              <a:srgbClr val="1F4E79"/>
-            </a:solidFill>
-          </a:ln>
-        </p:spPr>
-        <p:style>
-          <a:lnRef idx="1">
-            <a:schemeClr val="accent1"/>
-          </a:lnRef>
-          <a:fillRef idx="3">
-            <a:schemeClr val="accent1"/>
-          </a:fillRef>
-          <a:effectRef idx="2">
-            <a:schemeClr val="accent1"/>
-          </a:effectRef>
-          <a:fontRef idx="minor">
-            <a:schemeClr val="lt1"/>
-          </a:fontRef>
-        </p:style>
-        <p:txBody>
-          <a:bodyPr rtlCol="0" anchor="ctr"/>
-          <a:lstStyle/>
-          <a:p>
-            <a:pPr algn="ctr">
-              <a:spcBef>
-                <a:spcPts val="1200"/>
-              </a:spcBef>
-              <a:spcAft>
-                <a:spcPts val="1200"/>
-              </a:spcAft>
-              <a:defRPr sz="4400" b="1">
-                <a:solidFill>
-                  <a:srgbClr val="FFFFFF"/>
-                </a:solidFill>
-              </a:defRPr>
-            </a:pPr>
-            <a:r>
-              <a:t>The Cost Gap: Official vs Real</a:t>
-            </a:r>
-          </a:p>
-        </p:txBody>
-      </p:sp>
-      <p:pic>
-        <p:nvPicPr>
-          <p:cNvPr id="3" name="Picture 2" descr="01_basket_comparison.png"/>
-          <p:cNvPicPr>
-            <a:picLocks noChangeAspect="1"/>
-          </p:cNvPicPr>
-          <p:nvPr/>
-        </p:nvPicPr>
-        <p:blipFill>
-          <a:blip r:embed="rId2"/>
-          <a:stretch>
-            <a:fillRect/>
-          </a:stretch>
-        </p:blipFill>
-        <p:spPr>
-          <a:xfrm>
-            <a:off x="457200" y="1188720"/>
-            <a:ext cx="11171556" cy="4754880"/>
-          </a:xfrm>
-          <a:prstGeom prst="rect">
-            <a:avLst/>
-          </a:prstGeom>
-        </p:spPr>
-      </p:pic>
-    </p:spTree>
-  </p:cSld>
-  <p:clrMapOvr>
-    <a:masterClrMapping/>
-  </p:clrMapOvr>
-</p:sld>
-</file>
-
-<file path=ppt/slides/slide5.xml><?xml version="1.0" encoding="utf-8"?>
-<p:sld xmlns:a="http://schemas.openxmlformats.org/drawingml/2006/main" xmlns:p="http://schemas.openxmlformats.org/presentationml/2006/main" xmlns:r="http://schemas.openxmlformats.org/officeDocument/2006/relationships">
-  <p:cSld>
-    <p:bg>
-      <p:bgPr>
-        <a:solidFill>
-          <a:srgbClr val="1F4E79"/>
-        </a:solidFill>
-        <a:effectLst/>
-      </p:bgPr>
-    </p:bg>
-    <p:spTree>
-      <p:nvGrpSpPr>
-        <p:cNvPr id="1" name=""/>
-        <p:cNvGrpSpPr/>
-        <p:nvPr/>
-      </p:nvGrpSpPr>
-      <p:grpSpPr/>
-      <p:sp>
-        <p:nvSpPr>
-          <p:cNvPr id="2" name="TextBox 1"/>
-          <p:cNvSpPr txBox="1"/>
-          <p:nvPr/>
-        </p:nvSpPr>
-        <p:spPr>
-          <a:xfrm>
-            <a:off x="914400" y="2286000"/>
-            <a:ext cx="7315200" cy="2286000"/>
-          </a:xfrm>
-          <a:prstGeom prst="rect">
-            <a:avLst/>
-          </a:prstGeom>
-          <a:noFill/>
-        </p:spPr>
-        <p:txBody>
-          <a:bodyPr wrap="square">
-            <a:spAutoFit/>
-          </a:bodyPr>
-          <a:lstStyle/>
-          <a:p>
-            <a:pPr algn="ctr">
-              <a:defRPr sz="3200" b="1" i="1">
-                <a:solidFill>
-                  <a:srgbClr val="ED7D31"/>
-                </a:solidFill>
-              </a:defRPr>
-            </a:pPr>
-            <a:r>
-              <a:t>Official inflation rates are built on incomplete baskets.</a:t>
-            </a:r>
-            <a:br/>
-            <a:r>
-              <a:t>They measure SURVIVAL, not LIVING.</a:t>
-            </a:r>
-          </a:p>
-        </p:txBody>
-      </p:sp>
-      <p:sp>
-        <p:nvSpPr>
-          <p:cNvPr id="3" name="TextBox 2"/>
-          <p:cNvSpPr txBox="1"/>
-          <p:nvPr/>
-        </p:nvSpPr>
-        <p:spPr>
-          <a:xfrm>
-            <a:off x="914400" y="4754880"/>
-            <a:ext cx="7315200" cy="914400"/>
-          </a:xfrm>
-          <a:prstGeom prst="rect">
-            <a:avLst/>
-          </a:prstGeom>
-          <a:noFill/>
-        </p:spPr>
-        <p:txBody>
-          <a:bodyPr wrap="none">
-            <a:spAutoFit/>
-          </a:bodyPr>
-          <a:lstStyle/>
-          <a:p>
-            <a:pPr algn="ctr">
-              <a:defRPr sz="2000">
-                <a:solidFill>
-                  <a:srgbClr val="FFFFFF"/>
-                </a:solidFill>
-              </a:defRPr>
-            </a:pPr>
-            <a:r>
-              <a:t>CLICHE INSIGHT #1: The Incomplete Statistic</a:t>
-            </a:r>
-          </a:p>
-        </p:txBody>
-      </p:sp>
-    </p:spTree>
-  </p:cSld>
-  <p:clrMapOvr>
-    <a:masterClrMapping/>
-  </p:clrMapOvr>
-</p:sld>
-</file>
-
-<file path=ppt/slides/slide6.xml><?xml version="1.0" encoding="utf-8"?>
-<p:sld xmlns:a="http://schemas.openxmlformats.org/drawingml/2006/main" xmlns:p="http://schemas.openxmlformats.org/presentationml/2006/main" xmlns:r="http://schemas.openxmlformats.org/officeDocument/2006/relationships">
-  <p:cSld>
-    <p:bg>
-      <p:bgPr>
-        <a:solidFill>
-          <a:srgbClr val="FFFFFF"/>
-        </a:solidFill>
-        <a:effectLst/>
-      </p:bgPr>
-    </p:bg>
-    <p:spTree>
-      <p:nvGrpSpPr>
-        <p:cNvPr id="1" name=""/>
-        <p:cNvGrpSpPr/>
-        <p:nvPr/>
-      </p:nvGrpSpPr>
-      <p:grpSpPr/>
-      <p:sp>
-        <p:nvSpPr>
-          <p:cNvPr id="2" name="Rectangle 1"/>
-          <p:cNvSpPr/>
-          <p:nvPr/>
-        </p:nvSpPr>
-        <p:spPr>
-          <a:xfrm>
-            <a:off x="0" y="0"/>
-            <a:ext cx="9144000" cy="822960"/>
-          </a:xfrm>
-          <a:prstGeom prst="rect">
-            <a:avLst/>
-          </a:prstGeom>
-          <a:solidFill>
-            <a:srgbClr val="1F4E79"/>
-          </a:solidFill>
-          <a:ln>
-            <a:solidFill>
-              <a:srgbClr val="1F4E79"/>
-            </a:solidFill>
-          </a:ln>
-        </p:spPr>
-        <p:style>
-          <a:lnRef idx="1">
-            <a:schemeClr val="accent1"/>
-          </a:lnRef>
-          <a:fillRef idx="3">
-            <a:schemeClr val="accent1"/>
-          </a:fillRef>
-          <a:effectRef idx="2">
-            <a:schemeClr val="accent1"/>
-          </a:effectRef>
-          <a:fontRef idx="minor">
-            <a:schemeClr val="lt1"/>
-          </a:fontRef>
-        </p:style>
-        <p:txBody>
-          <a:bodyPr rtlCol="0" anchor="ctr"/>
-          <a:lstStyle/>
-          <a:p>
-            <a:pPr algn="ctr">
-              <a:spcBef>
-                <a:spcPts val="1200"/>
-              </a:spcBef>
-              <a:spcAft>
-                <a:spcPts val="1200"/>
-              </a:spcAft>
-              <a:defRPr sz="4400" b="1">
-                <a:solidFill>
-                  <a:srgbClr val="FFFFFF"/>
-                </a:solidFill>
-              </a:defRPr>
-            </a:pPr>
-            <a:r>
-              <a:t>The Affordability Cliff: When Real Costs Exceed Means</a:t>
-            </a:r>
-          </a:p>
-        </p:txBody>
-      </p:sp>
-      <p:pic>
-        <p:nvPicPr>
-          <p:cNvPr id="3" name="Picture 2" descr="02_affordability_cliffs.png"/>
-          <p:cNvPicPr>
-            <a:picLocks noChangeAspect="1"/>
-          </p:cNvPicPr>
-          <p:nvPr/>
-        </p:nvPicPr>
-        <p:blipFill>
-          <a:blip r:embed="rId2"/>
-          <a:stretch>
-            <a:fillRect/>
-          </a:stretch>
-        </p:blipFill>
-        <p:spPr>
-          <a:xfrm>
-            <a:off x="457200" y="1188720"/>
-            <a:ext cx="9758194" cy="4846320"/>
-          </a:xfrm>
-          <a:prstGeom prst="rect">
-            <a:avLst/>
-          </a:prstGeom>
-        </p:spPr>
-      </p:pic>
-    </p:spTree>
-  </p:cSld>
-  <p:clrMapOvr>
-    <a:masterClrMapping/>
-  </p:clrMapOvr>
-</p:sld>
-</file>
-
-<file path=ppt/slides/slide7.xml><?xml version="1.0" encoding="utf-8"?>
-<p:sld xmlns:a="http://schemas.openxmlformats.org/drawingml/2006/main" xmlns:p="http://schemas.openxmlformats.org/presentationml/2006/main" xmlns:r="http://schemas.openxmlformats.org/officeDocument/2006/relationships">
-  <p:cSld>
-    <p:bg>
-      <p:bgPr>
-        <a:solidFill>
-          <a:srgbClr val="FFFFFF"/>
-        </a:solidFill>
-        <a:effectLst/>
-      </p:bgPr>
-    </p:bg>
-    <p:spTree>
-      <p:nvGrpSpPr>
-        <p:cNvPr id="1" name=""/>
-        <p:cNvGrpSpPr/>
-        <p:nvPr/>
-      </p:nvGrpSpPr>
-      <p:grpSpPr/>
-      <p:sp>
-        <p:nvSpPr>
-          <p:cNvPr id="2" name="Rectangle 1"/>
-          <p:cNvSpPr/>
-          <p:nvPr/>
-        </p:nvSpPr>
-        <p:spPr>
-          <a:xfrm>
-            <a:off x="0" y="0"/>
-            <a:ext cx="9144000" cy="822960"/>
-          </a:xfrm>
-          <a:prstGeom prst="rect">
-            <a:avLst/>
-          </a:prstGeom>
-          <a:solidFill>
-            <a:srgbClr val="1F4E79"/>
-          </a:solidFill>
-          <a:ln>
-            <a:solidFill>
-              <a:srgbClr val="1F4E79"/>
-            </a:solidFill>
-          </a:ln>
-        </p:spPr>
-        <p:style>
-          <a:lnRef idx="1">
-            <a:schemeClr val="accent1"/>
-          </a:lnRef>
-          <a:fillRef idx="3">
-            <a:schemeClr val="accent1"/>
-          </a:fillRef>
-          <a:effectRef idx="2">
-            <a:schemeClr val="accent1"/>
-          </a:effectRef>
-          <a:fontRef idx="minor">
-            <a:schemeClr val="lt1"/>
-          </a:fontRef>
-        </p:style>
-        <p:txBody>
-          <a:bodyPr rtlCol="0" anchor="ctr"/>
-          <a:lstStyle/>
-          <a:p>
-            <a:pPr algn="ctr">
-              <a:spcBef>
-                <a:spcPts val="1200"/>
-              </a:spcBef>
-              <a:spcAft>
-                <a:spcPts val="1200"/>
-              </a:spcAft>
-              <a:defRPr sz="4400" b="1">
-                <a:solidFill>
-                  <a:srgbClr val="FFFFFF"/>
-                </a:solidFill>
-              </a:defRPr>
-            </a:pPr>
-            <a:r>
-              <a:t>Affordability by Paris Income Level</a:t>
-            </a:r>
-          </a:p>
-        </p:txBody>
-      </p:sp>
-      <p:sp>
-        <p:nvSpPr>
-          <p:cNvPr id="3" name="TextBox 2"/>
-          <p:cNvSpPr txBox="1"/>
-          <p:nvPr/>
-        </p:nvSpPr>
-        <p:spPr>
-          <a:xfrm>
-            <a:off x="731520" y="1188720"/>
-            <a:ext cx="7680960" cy="5212080"/>
-          </a:xfrm>
-          <a:prstGeom prst="rect">
-            <a:avLst/>
-          </a:prstGeom>
-          <a:noFill/>
-        </p:spPr>
-        <p:txBody>
-          <a:bodyPr wrap="square">
-            <a:spAutoFit/>
-          </a:bodyPr>
-          <a:lstStyle/>
-          <a:p>
-            <a:pPr>
-              <a:spcBef>
-                <a:spcPts val="600"/>
-              </a:spcBef>
-              <a:spcAft>
-                <a:spcPts val="800"/>
-              </a:spcAft>
-              <a:defRPr sz="2000">
-                <a:solidFill>
-                  <a:srgbClr val="333333"/>
-                </a:solidFill>
-              </a:defRPr>
-            </a:pPr>
-            <a:r>
-              <a:t>SMIC WORKERS (21,000 EUR/year):</a:t>
-            </a:r>
-          </a:p>
-          <a:p>
-            <a:pPr>
-              <a:spcBef>
-                <a:spcPts val="600"/>
-              </a:spcBef>
-              <a:spcAft>
-                <a:spcPts val="800"/>
-              </a:spcAft>
-              <a:defRPr sz="2000">
-                <a:solidFill>
-                  <a:srgbClr val="333333"/>
-                </a:solidFill>
-              </a:defRPr>
-            </a:pPr>
-            <a:r>
-              <a:t>  • Official basket: 9% of income (MANAGEABLE)</a:t>
-            </a:r>
-          </a:p>
-          <a:p>
-            <a:pPr>
-              <a:spcBef>
-                <a:spcPts val="600"/>
-              </a:spcBef>
-              <a:spcAft>
-                <a:spcPts val="800"/>
-              </a:spcAft>
-              <a:defRPr sz="2000">
-                <a:solidFill>
-                  <a:srgbClr val="333333"/>
-                </a:solidFill>
-              </a:defRPr>
-            </a:pPr>
-            <a:r>
-              <a:t>  • Real complete basket: 18% of income (DIFFICULT)</a:t>
-            </a:r>
-          </a:p>
-          <a:p>
-            <a:pPr>
-              <a:spcBef>
-                <a:spcPts val="600"/>
-              </a:spcBef>
-              <a:spcAft>
-                <a:spcPts val="800"/>
-              </a:spcAft>
-              <a:defRPr sz="2000">
-                <a:solidFill>
-                  <a:srgbClr val="333333"/>
-                </a:solidFill>
-              </a:defRPr>
-            </a:pPr>
-            <a:r>
-              <a:t>  • Healthy basket: 24% of income (CRISIS - NO MONEY FOR ANYTHING ELSE)</a:t>
-            </a:r>
-          </a:p>
-          <a:p>
-            <a:pPr>
-              <a:spcBef>
-                <a:spcPts val="600"/>
-              </a:spcBef>
-              <a:spcAft>
-                <a:spcPts val="800"/>
-              </a:spcAft>
-              <a:defRPr sz="2000">
-                <a:solidFill>
-                  <a:srgbClr val="333333"/>
-                </a:solidFill>
-              </a:defRPr>
-            </a:pPr>
-          </a:p>
-          <a:p>
-            <a:pPr>
-              <a:spcBef>
-                <a:spcPts val="600"/>
-              </a:spcBef>
-              <a:spcAft>
-                <a:spcPts val="800"/>
-              </a:spcAft>
-              <a:defRPr sz="2000">
-                <a:solidFill>
-                  <a:srgbClr val="333333"/>
-                </a:solidFill>
-              </a:defRPr>
-            </a:pPr>
-            <a:r>
-              <a:t>MEDIAN PARIS (42,000 EUR/year):</a:t>
-            </a:r>
-          </a:p>
-          <a:p>
-            <a:pPr>
-              <a:spcBef>
-                <a:spcPts val="600"/>
-              </a:spcBef>
-              <a:spcAft>
-                <a:spcPts val="800"/>
-              </a:spcAft>
-              <a:defRPr sz="2000">
-                <a:solidFill>
-                  <a:srgbClr val="333333"/>
-                </a:solidFill>
-              </a:defRPr>
-            </a:pPr>
-            <a:r>
-              <a:t>  • Real basket: 9% of income (MANAGEABLE)</a:t>
-            </a:r>
-          </a:p>
-          <a:p>
-            <a:pPr>
-              <a:spcBef>
-                <a:spcPts val="600"/>
-              </a:spcBef>
-              <a:spcAft>
-                <a:spcPts val="800"/>
-              </a:spcAft>
-              <a:defRPr sz="2000">
-                <a:solidFill>
-                  <a:srgbClr val="333333"/>
-                </a:solidFill>
-              </a:defRPr>
-            </a:pPr>
-            <a:r>
-              <a:t>  • Healthy basket: 12% of income (TIGHT)</a:t>
-            </a:r>
-          </a:p>
-          <a:p>
-            <a:pPr>
-              <a:spcBef>
-                <a:spcPts val="600"/>
-              </a:spcBef>
-              <a:spcAft>
-                <a:spcPts val="800"/>
-              </a:spcAft>
-              <a:defRPr sz="2000">
-                <a:solidFill>
-                  <a:srgbClr val="333333"/>
-                </a:solidFill>
-              </a:defRPr>
-            </a:pPr>
-          </a:p>
-          <a:p>
-            <a:pPr>
-              <a:spcBef>
-                <a:spcPts val="600"/>
-              </a:spcBef>
-              <a:spcAft>
-                <a:spcPts val="800"/>
-              </a:spcAft>
-              <a:defRPr sz="2000">
-                <a:solidFill>
-                  <a:srgbClr val="333333"/>
-                </a:solidFill>
-              </a:defRPr>
-            </a:pPr>
-            <a:r>
-              <a:t>THE CLIFF: Below 40k EUR annual income, healthy eating becomes IMPOSSIBLE</a:t>
-            </a:r>
-          </a:p>
-        </p:txBody>
-      </p:sp>
-    </p:spTree>
-  </p:cSld>
-  <p:clrMapOvr>
-    <a:masterClrMapping/>
-  </p:clrMapOvr>
-</p:sld>
-</file>
-
-<file path=ppt/slides/slide8.xml><?xml version="1.0" encoding="utf-8"?>
-<p:sld xmlns:a="http://schemas.openxmlformats.org/drawingml/2006/main" xmlns:p="http://schemas.openxmlformats.org/presentationml/2006/main" xmlns:r="http://schemas.openxmlformats.org/officeDocument/2006/relationships">
-  <p:cSld>
-    <p:bg>
-      <p:bgPr>
-        <a:solidFill>
-          <a:srgbClr val="1F4E79"/>
-        </a:solidFill>
-        <a:effectLst/>
-      </p:bgPr>
-    </p:bg>
-    <p:spTree>
-      <p:nvGrpSpPr>
-        <p:cNvPr id="1" name=""/>
-        <p:cNvGrpSpPr/>
-        <p:nvPr/>
-      </p:nvGrpSpPr>
-      <p:grpSpPr/>
-      <p:sp>
-        <p:nvSpPr>
-          <p:cNvPr id="2" name="TextBox 1"/>
-          <p:cNvSpPr txBox="1"/>
-          <p:nvPr/>
-        </p:nvSpPr>
-        <p:spPr>
-          <a:xfrm>
-            <a:off x="914400" y="2286000"/>
-            <a:ext cx="7315200" cy="2286000"/>
-          </a:xfrm>
-          <a:prstGeom prst="rect">
-            <a:avLst/>
-          </a:prstGeom>
-          <a:noFill/>
-        </p:spPr>
-        <p:txBody>
-          <a:bodyPr wrap="square">
-            <a:spAutoFit/>
-          </a:bodyPr>
-          <a:lstStyle/>
-          <a:p>
-            <a:pPr algn="ctr">
-              <a:defRPr sz="3200" b="1" i="1">
-                <a:solidFill>
-                  <a:srgbClr val="ED7D31"/>
-                </a:solidFill>
-              </a:defRPr>
-            </a:pPr>
-            <a:r>
-              <a:t>Healthy eating is a luxury.</a:t>
-            </a:r>
-            <a:br/>
-            <a:r>
-              <a:t>The poor must eat cheap (unhealthy).</a:t>
-            </a:r>
-            <a:br/>
-            <a:r>
-              <a:t>The wealthy eat well.</a:t>
-            </a:r>
-          </a:p>
-        </p:txBody>
-      </p:sp>
-      <p:sp>
-        <p:nvSpPr>
-          <p:cNvPr id="3" name="TextBox 2"/>
-          <p:cNvSpPr txBox="1"/>
-          <p:nvPr/>
-        </p:nvSpPr>
-        <p:spPr>
-          <a:xfrm>
-            <a:off x="914400" y="4754880"/>
-            <a:ext cx="7315200" cy="914400"/>
-          </a:xfrm>
-          <a:prstGeom prst="rect">
-            <a:avLst/>
-          </a:prstGeom>
-          <a:noFill/>
-        </p:spPr>
-        <p:txBody>
-          <a:bodyPr wrap="none">
-            <a:spAutoFit/>
-          </a:bodyPr>
-          <a:lstStyle/>
-          <a:p>
-            <a:pPr algn="ctr">
-              <a:defRPr sz="2000">
-                <a:solidFill>
-                  <a:srgbClr val="FFFFFF"/>
-                </a:solidFill>
-              </a:defRPr>
-            </a:pPr>
-            <a:r>
-              <a:t>CLICHE INSIGHT #2: Health as Inequality</a:t>
-            </a:r>
-          </a:p>
-        </p:txBody>
-      </p:sp>
-    </p:spTree>
-  </p:cSld>
-  <p:clrMapOvr>
-    <a:masterClrMapping/>
-  </p:clrMapOvr>
-</p:sld>
-</file>
-
-<file path=ppt/slides/slide9.xml><?xml version="1.0" encoding="utf-8"?>
-<p:sld xmlns:a="http://schemas.openxmlformats.org/drawingml/2006/main" xmlns:p="http://schemas.openxmlformats.org/presentationml/2006/main" xmlns:r="http://schemas.openxmlformats.org/officeDocument/2006/relationships">
-  <p:cSld>
-    <p:bg>
-      <p:bgPr>
-        <a:solidFill>
-          <a:srgbClr val="FFFFFF"/>
-        </a:solidFill>
-        <a:effectLst/>
-      </p:bgPr>
-    </p:bg>
-    <p:spTree>
-      <p:nvGrpSpPr>
-        <p:cNvPr id="1" name=""/>
-        <p:cNvGrpSpPr/>
-        <p:nvPr/>
-      </p:nvGrpSpPr>
-      <p:grpSpPr/>
+      <p:grpSpPr>
+        <a:xfrm>
+          <a:off x="0" y="0"/>
+          <a:ext cx="0" cy="0"/>
+          <a:chOff x="0" y="0"/>
+          <a:chExt cx="0" cy="0"/>
+        </a:xfrm>
+      </p:grpSpPr>
       <p:sp>
         <p:nvSpPr>
           <p:cNvPr id="2" name="Rectangle 1"/>

--- a/CAPSTONE_DELIVERABLES/Snipper_Tool_Reality_vs_Official_Paris_UPDATED.pptx
+++ b/CAPSTONE_DELIVERABLES/Snipper_Tool_Reality_vs_Official_Paris_UPDATED.pptx
@@ -5,32 +5,36 @@
     <p:sldMasterId id="2147483648" r:id="rId1"/>
   </p:sldMasterIdLst>
   <p:sldIdLst>
-    <p:sldId id="256" r:id="rId2"/>
-    <p:sldId id="257" r:id="rId3"/>
-    <p:sldId id="258" r:id="rId4"/>
-    <p:sldId id="259" r:id="rId5"/>
-    <p:sldId id="260" r:id="rId6"/>
-    <p:sldId id="261" r:id="rId7"/>
-    <p:sldId id="262" r:id="rId8"/>
-    <p:sldId id="263" r:id="rId9"/>
-    <p:sldId id="264" r:id="rId10"/>
-    <p:sldId id="265" r:id="rId11"/>
-    <p:sldId id="266" r:id="rId12"/>
-    <p:sldId id="267" r:id="rId13"/>
-    <p:sldId id="268" r:id="rId14"/>
-    <p:sldId id="269" r:id="rId15"/>
-    <p:sldId id="270" r:id="rId16"/>
-    <p:sldId id="271" r:id="rId17"/>
-    <p:sldId id="272" r:id="rId18"/>
-    <p:sldId id="273" r:id="rId19"/>
-    <p:sldId id="274" r:id="rId20"/>
-    <p:sldId id="275" r:id="rId21"/>
-    <p:sldId id="276" r:id="rId22"/>
-    <p:sldId id="277" r:id="rId23"/>
-    <p:sldId id="278" r:id="rId24"/>
-    <p:sldId id="279" r:id="rId25"/>
-    <p:sldId id="280" r:id="rId26"/>
-    <p:sldId id="282" r:id="rId27"/>
+    <p:sldId id="256" r:id="rId7"/>
+    <p:sldId id="257" r:id="rId8"/>
+    <p:sldId id="258" r:id="rId9"/>
+    <p:sldId id="259" r:id="rId10"/>
+    <p:sldId id="260" r:id="rId11"/>
+    <p:sldId id="261" r:id="rId12"/>
+    <p:sldId id="262" r:id="rId13"/>
+    <p:sldId id="263" r:id="rId14"/>
+    <p:sldId id="264" r:id="rId15"/>
+    <p:sldId id="265" r:id="rId16"/>
+    <p:sldId id="266" r:id="rId17"/>
+    <p:sldId id="267" r:id="rId18"/>
+    <p:sldId id="268" r:id="rId19"/>
+    <p:sldId id="269" r:id="rId20"/>
+    <p:sldId id="270" r:id="rId21"/>
+    <p:sldId id="271" r:id="rId22"/>
+    <p:sldId id="272" r:id="rId23"/>
+    <p:sldId id="273" r:id="rId24"/>
+    <p:sldId id="274" r:id="rId25"/>
+    <p:sldId id="275" r:id="rId26"/>
+    <p:sldId id="276" r:id="rId27"/>
+    <p:sldId id="277" r:id="rId28"/>
+    <p:sldId id="278" r:id="rId29"/>
+    <p:sldId id="279" r:id="rId30"/>
+    <p:sldId id="280" r:id="rId31"/>
+    <p:sldId id="281" r:id="rId32"/>
+    <p:sldId id="282" r:id="rId33"/>
+    <p:sldId id="283" r:id="rId34"/>
+    <p:sldId id="284" r:id="rId35"/>
+    <p:sldId id="285" r:id="rId36"/>
   </p:sldIdLst>
   <p:sldSz cx="9144000" cy="6858000" type="screen4x3"/>
   <p:notesSz cx="6858000" cy="9144000"/>
@@ -129,22 +133,6 @@
       </a:defRPr>
     </a:lvl9pPr>
   </p:defaultTextStyle>
-  <p:extLst>
-    <p:ext uri="{EFAFB233-063F-42B5-8137-9DF3F51BA10A}">
-      <p15:sldGuideLst xmlns:p15="http://schemas.microsoft.com/office/powerpoint/2012/main">
-        <p15:guide id="1" orient="horz" pos="2160">
-          <p15:clr>
-            <a:srgbClr val="A4A3A4"/>
-          </p15:clr>
-        </p15:guide>
-        <p15:guide id="2" pos="2880">
-          <p15:clr>
-            <a:srgbClr val="A4A3A4"/>
-          </p15:clr>
-        </p15:guide>
-      </p15:sldGuideLst>
-    </p:ext>
-  </p:extLst>
 </p:presentation>
 </file>
 
@@ -186,9 +174,10 @@
           <a:lstStyle/>
           <a:p>
             <a:r>
-              <a:rPr lang="en-US"/>
+              <a:rPr lang="en-US" smtClean="0"/>
               <a:t>Click to edit Master title style</a:t>
             </a:r>
+            <a:endParaRPr lang="en-US"/>
           </a:p>
         </p:txBody>
       </p:sp>
@@ -304,9 +293,10 @@
           </a:lstStyle>
           <a:p>
             <a:r>
-              <a:rPr lang="en-US"/>
+              <a:rPr lang="en-US" smtClean="0"/>
               <a:t>Click to edit Master subtitle style</a:t>
             </a:r>
+            <a:endParaRPr lang="en-US"/>
           </a:p>
         </p:txBody>
       </p:sp>
@@ -327,7 +317,7 @@
           <a:p>
             <a:fld id="{5BCAD085-E8A6-8845-BD4E-CB4CCA059FC4}" type="datetimeFigureOut">
               <a:rPr lang="en-US" smtClean="0"/>
-              <a:t>28-Apr-26</a:t>
+              <a:t>1/27/13</a:t>
             </a:fld>
             <a:endParaRPr lang="en-US"/>
           </a:p>
@@ -421,9 +411,10 @@
           <a:lstStyle/>
           <a:p>
             <a:r>
-              <a:rPr lang="en-US"/>
+              <a:rPr lang="en-US" smtClean="0"/>
               <a:t>Click to edit Master title style</a:t>
             </a:r>
+            <a:endParaRPr lang="en-US"/>
           </a:p>
         </p:txBody>
       </p:sp>
@@ -444,37 +435,38 @@
           <a:p>
             <a:pPr lvl="0"/>
             <a:r>
-              <a:rPr lang="en-US"/>
+              <a:rPr lang="en-US" smtClean="0"/>
               <a:t>Click to edit Master text styles</a:t>
             </a:r>
           </a:p>
           <a:p>
             <a:pPr lvl="1"/>
             <a:r>
-              <a:rPr lang="en-US"/>
+              <a:rPr lang="en-US" smtClean="0"/>
               <a:t>Second level</a:t>
             </a:r>
           </a:p>
           <a:p>
             <a:pPr lvl="2"/>
             <a:r>
-              <a:rPr lang="en-US"/>
+              <a:rPr lang="en-US" smtClean="0"/>
               <a:t>Third level</a:t>
             </a:r>
           </a:p>
           <a:p>
             <a:pPr lvl="3"/>
             <a:r>
-              <a:rPr lang="en-US"/>
+              <a:rPr lang="en-US" smtClean="0"/>
               <a:t>Fourth level</a:t>
             </a:r>
           </a:p>
           <a:p>
             <a:pPr lvl="4"/>
             <a:r>
-              <a:rPr lang="en-US"/>
+              <a:rPr lang="en-US" smtClean="0"/>
               <a:t>Fifth level</a:t>
             </a:r>
+            <a:endParaRPr lang="en-US"/>
           </a:p>
         </p:txBody>
       </p:sp>
@@ -495,7 +487,7 @@
           <a:p>
             <a:fld id="{5BCAD085-E8A6-8845-BD4E-CB4CCA059FC4}" type="datetimeFigureOut">
               <a:rPr lang="en-US" smtClean="0"/>
-              <a:t>28-Apr-26</a:t>
+              <a:t>1/27/13</a:t>
             </a:fld>
             <a:endParaRPr lang="en-US"/>
           </a:p>
@@ -594,9 +586,10 @@
           <a:lstStyle/>
           <a:p>
             <a:r>
-              <a:rPr lang="en-US"/>
+              <a:rPr lang="en-US" smtClean="0"/>
               <a:t>Click to edit Master title style</a:t>
             </a:r>
+            <a:endParaRPr lang="en-US"/>
           </a:p>
         </p:txBody>
       </p:sp>
@@ -622,37 +615,38 @@
           <a:p>
             <a:pPr lvl="0"/>
             <a:r>
-              <a:rPr lang="en-US"/>
+              <a:rPr lang="en-US" smtClean="0"/>
               <a:t>Click to edit Master text styles</a:t>
             </a:r>
           </a:p>
           <a:p>
             <a:pPr lvl="1"/>
             <a:r>
-              <a:rPr lang="en-US"/>
+              <a:rPr lang="en-US" smtClean="0"/>
               <a:t>Second level</a:t>
             </a:r>
           </a:p>
           <a:p>
             <a:pPr lvl="2"/>
             <a:r>
-              <a:rPr lang="en-US"/>
+              <a:rPr lang="en-US" smtClean="0"/>
               <a:t>Third level</a:t>
             </a:r>
           </a:p>
           <a:p>
             <a:pPr lvl="3"/>
             <a:r>
-              <a:rPr lang="en-US"/>
+              <a:rPr lang="en-US" smtClean="0"/>
               <a:t>Fourth level</a:t>
             </a:r>
           </a:p>
           <a:p>
             <a:pPr lvl="4"/>
             <a:r>
-              <a:rPr lang="en-US"/>
+              <a:rPr lang="en-US" smtClean="0"/>
               <a:t>Fifth level</a:t>
             </a:r>
+            <a:endParaRPr lang="en-US"/>
           </a:p>
         </p:txBody>
       </p:sp>
@@ -673,7 +667,7 @@
           <a:p>
             <a:fld id="{5BCAD085-E8A6-8845-BD4E-CB4CCA059FC4}" type="datetimeFigureOut">
               <a:rPr lang="en-US" smtClean="0"/>
-              <a:t>28-Apr-26</a:t>
+              <a:t>1/27/13</a:t>
             </a:fld>
             <a:endParaRPr lang="en-US"/>
           </a:p>
@@ -767,9 +761,10 @@
           <a:lstStyle/>
           <a:p>
             <a:r>
-              <a:rPr lang="en-US"/>
+              <a:rPr lang="en-US" smtClean="0"/>
               <a:t>Click to edit Master title style</a:t>
             </a:r>
+            <a:endParaRPr lang="en-US"/>
           </a:p>
         </p:txBody>
       </p:sp>
@@ -790,37 +785,38 @@
           <a:p>
             <a:pPr lvl="0"/>
             <a:r>
-              <a:rPr lang="en-US"/>
+              <a:rPr lang="en-US" smtClean="0"/>
               <a:t>Click to edit Master text styles</a:t>
             </a:r>
           </a:p>
           <a:p>
             <a:pPr lvl="1"/>
             <a:r>
-              <a:rPr lang="en-US"/>
+              <a:rPr lang="en-US" smtClean="0"/>
               <a:t>Second level</a:t>
             </a:r>
           </a:p>
           <a:p>
             <a:pPr lvl="2"/>
             <a:r>
-              <a:rPr lang="en-US"/>
+              <a:rPr lang="en-US" smtClean="0"/>
               <a:t>Third level</a:t>
             </a:r>
           </a:p>
           <a:p>
             <a:pPr lvl="3"/>
             <a:r>
-              <a:rPr lang="en-US"/>
+              <a:rPr lang="en-US" smtClean="0"/>
               <a:t>Fourth level</a:t>
             </a:r>
           </a:p>
           <a:p>
             <a:pPr lvl="4"/>
             <a:r>
-              <a:rPr lang="en-US"/>
+              <a:rPr lang="en-US" smtClean="0"/>
               <a:t>Fifth level</a:t>
             </a:r>
+            <a:endParaRPr lang="en-US"/>
           </a:p>
         </p:txBody>
       </p:sp>
@@ -841,7 +837,7 @@
           <a:p>
             <a:fld id="{5BCAD085-E8A6-8845-BD4E-CB4CCA059FC4}" type="datetimeFigureOut">
               <a:rPr lang="en-US" smtClean="0"/>
-              <a:t>28-Apr-26</a:t>
+              <a:t>1/27/13</a:t>
             </a:fld>
             <a:endParaRPr lang="en-US"/>
           </a:p>
@@ -944,9 +940,10 @@
           </a:lstStyle>
           <a:p>
             <a:r>
-              <a:rPr lang="en-US"/>
+              <a:rPr lang="en-US" smtClean="0"/>
               <a:t>Click to edit Master title style</a:t>
             </a:r>
+            <a:endParaRPr lang="en-US"/>
           </a:p>
         </p:txBody>
       </p:sp>
@@ -1063,7 +1060,7 @@
           <a:p>
             <a:pPr lvl="0"/>
             <a:r>
-              <a:rPr lang="en-US"/>
+              <a:rPr lang="en-US" smtClean="0"/>
               <a:t>Click to edit Master text styles</a:t>
             </a:r>
           </a:p>
@@ -1086,7 +1083,7 @@
           <a:p>
             <a:fld id="{5BCAD085-E8A6-8845-BD4E-CB4CCA059FC4}" type="datetimeFigureOut">
               <a:rPr lang="en-US" smtClean="0"/>
-              <a:t>28-Apr-26</a:t>
+              <a:t>1/27/13</a:t>
             </a:fld>
             <a:endParaRPr lang="en-US"/>
           </a:p>
@@ -1180,9 +1177,10 @@
           <a:lstStyle/>
           <a:p>
             <a:r>
-              <a:rPr lang="en-US"/>
+              <a:rPr lang="en-US" smtClean="0"/>
               <a:t>Click to edit Master title style</a:t>
             </a:r>
+            <a:endParaRPr lang="en-US"/>
           </a:p>
         </p:txBody>
       </p:sp>
@@ -1236,37 +1234,38 @@
           <a:p>
             <a:pPr lvl="0"/>
             <a:r>
-              <a:rPr lang="en-US"/>
+              <a:rPr lang="en-US" smtClean="0"/>
               <a:t>Click to edit Master text styles</a:t>
             </a:r>
           </a:p>
           <a:p>
             <a:pPr lvl="1"/>
             <a:r>
-              <a:rPr lang="en-US"/>
+              <a:rPr lang="en-US" smtClean="0"/>
               <a:t>Second level</a:t>
             </a:r>
           </a:p>
           <a:p>
             <a:pPr lvl="2"/>
             <a:r>
-              <a:rPr lang="en-US"/>
+              <a:rPr lang="en-US" smtClean="0"/>
               <a:t>Third level</a:t>
             </a:r>
           </a:p>
           <a:p>
             <a:pPr lvl="3"/>
             <a:r>
-              <a:rPr lang="en-US"/>
+              <a:rPr lang="en-US" smtClean="0"/>
               <a:t>Fourth level</a:t>
             </a:r>
           </a:p>
           <a:p>
             <a:pPr lvl="4"/>
             <a:r>
-              <a:rPr lang="en-US"/>
+              <a:rPr lang="en-US" smtClean="0"/>
               <a:t>Fifth level</a:t>
             </a:r>
+            <a:endParaRPr lang="en-US"/>
           </a:p>
         </p:txBody>
       </p:sp>
@@ -1320,37 +1319,38 @@
           <a:p>
             <a:pPr lvl="0"/>
             <a:r>
-              <a:rPr lang="en-US"/>
+              <a:rPr lang="en-US" smtClean="0"/>
               <a:t>Click to edit Master text styles</a:t>
             </a:r>
           </a:p>
           <a:p>
             <a:pPr lvl="1"/>
             <a:r>
-              <a:rPr lang="en-US"/>
+              <a:rPr lang="en-US" smtClean="0"/>
               <a:t>Second level</a:t>
             </a:r>
           </a:p>
           <a:p>
             <a:pPr lvl="2"/>
             <a:r>
-              <a:rPr lang="en-US"/>
+              <a:rPr lang="en-US" smtClean="0"/>
               <a:t>Third level</a:t>
             </a:r>
           </a:p>
           <a:p>
             <a:pPr lvl="3"/>
             <a:r>
-              <a:rPr lang="en-US"/>
+              <a:rPr lang="en-US" smtClean="0"/>
               <a:t>Fourth level</a:t>
             </a:r>
           </a:p>
           <a:p>
             <a:pPr lvl="4"/>
             <a:r>
-              <a:rPr lang="en-US"/>
+              <a:rPr lang="en-US" smtClean="0"/>
               <a:t>Fifth level</a:t>
             </a:r>
+            <a:endParaRPr lang="en-US"/>
           </a:p>
         </p:txBody>
       </p:sp>
@@ -1371,7 +1371,7 @@
           <a:p>
             <a:fld id="{5BCAD085-E8A6-8845-BD4E-CB4CCA059FC4}" type="datetimeFigureOut">
               <a:rPr lang="en-US" smtClean="0"/>
-              <a:t>28-Apr-26</a:t>
+              <a:t>1/27/13</a:t>
             </a:fld>
             <a:endParaRPr lang="en-US"/>
           </a:p>
@@ -1469,9 +1469,10 @@
           </a:lstStyle>
           <a:p>
             <a:r>
-              <a:rPr lang="en-US"/>
+              <a:rPr lang="en-US" smtClean="0"/>
               <a:t>Click to edit Master title style</a:t>
             </a:r>
+            <a:endParaRPr lang="en-US"/>
           </a:p>
         </p:txBody>
       </p:sp>
@@ -1534,7 +1535,7 @@
           <a:p>
             <a:pPr lvl="0"/>
             <a:r>
-              <a:rPr lang="en-US"/>
+              <a:rPr lang="en-US" smtClean="0"/>
               <a:t>Click to edit Master text styles</a:t>
             </a:r>
           </a:p>
@@ -1590,37 +1591,38 @@
           <a:p>
             <a:pPr lvl="0"/>
             <a:r>
-              <a:rPr lang="en-US"/>
+              <a:rPr lang="en-US" smtClean="0"/>
               <a:t>Click to edit Master text styles</a:t>
             </a:r>
           </a:p>
           <a:p>
             <a:pPr lvl="1"/>
             <a:r>
-              <a:rPr lang="en-US"/>
+              <a:rPr lang="en-US" smtClean="0"/>
               <a:t>Second level</a:t>
             </a:r>
           </a:p>
           <a:p>
             <a:pPr lvl="2"/>
             <a:r>
-              <a:rPr lang="en-US"/>
+              <a:rPr lang="en-US" smtClean="0"/>
               <a:t>Third level</a:t>
             </a:r>
           </a:p>
           <a:p>
             <a:pPr lvl="3"/>
             <a:r>
-              <a:rPr lang="en-US"/>
+              <a:rPr lang="en-US" smtClean="0"/>
               <a:t>Fourth level</a:t>
             </a:r>
           </a:p>
           <a:p>
             <a:pPr lvl="4"/>
             <a:r>
-              <a:rPr lang="en-US"/>
+              <a:rPr lang="en-US" smtClean="0"/>
               <a:t>Fifth level</a:t>
             </a:r>
+            <a:endParaRPr lang="en-US"/>
           </a:p>
         </p:txBody>
       </p:sp>
@@ -1683,7 +1685,7 @@
           <a:p>
             <a:pPr lvl="0"/>
             <a:r>
-              <a:rPr lang="en-US"/>
+              <a:rPr lang="en-US" smtClean="0"/>
               <a:t>Click to edit Master text styles</a:t>
             </a:r>
           </a:p>
@@ -1739,37 +1741,38 @@
           <a:p>
             <a:pPr lvl="0"/>
             <a:r>
-              <a:rPr lang="en-US"/>
+              <a:rPr lang="en-US" smtClean="0"/>
               <a:t>Click to edit Master text styles</a:t>
             </a:r>
           </a:p>
           <a:p>
             <a:pPr lvl="1"/>
             <a:r>
-              <a:rPr lang="en-US"/>
+              <a:rPr lang="en-US" smtClean="0"/>
               <a:t>Second level</a:t>
             </a:r>
           </a:p>
           <a:p>
             <a:pPr lvl="2"/>
             <a:r>
-              <a:rPr lang="en-US"/>
+              <a:rPr lang="en-US" smtClean="0"/>
               <a:t>Third level</a:t>
             </a:r>
           </a:p>
           <a:p>
             <a:pPr lvl="3"/>
             <a:r>
-              <a:rPr lang="en-US"/>
+              <a:rPr lang="en-US" smtClean="0"/>
               <a:t>Fourth level</a:t>
             </a:r>
           </a:p>
           <a:p>
             <a:pPr lvl="4"/>
             <a:r>
-              <a:rPr lang="en-US"/>
+              <a:rPr lang="en-US" smtClean="0"/>
               <a:t>Fifth level</a:t>
             </a:r>
+            <a:endParaRPr lang="en-US"/>
           </a:p>
         </p:txBody>
       </p:sp>
@@ -1790,7 +1793,7 @@
           <a:p>
             <a:fld id="{5BCAD085-E8A6-8845-BD4E-CB4CCA059FC4}" type="datetimeFigureOut">
               <a:rPr lang="en-US" smtClean="0"/>
-              <a:t>28-Apr-26</a:t>
+              <a:t>1/27/13</a:t>
             </a:fld>
             <a:endParaRPr lang="en-US"/>
           </a:p>
@@ -1884,9 +1887,10 @@
           <a:lstStyle/>
           <a:p>
             <a:r>
-              <a:rPr lang="en-US"/>
+              <a:rPr lang="en-US" smtClean="0"/>
               <a:t>Click to edit Master title style</a:t>
             </a:r>
+            <a:endParaRPr lang="en-US"/>
           </a:p>
         </p:txBody>
       </p:sp>
@@ -1907,7 +1911,7 @@
           <a:p>
             <a:fld id="{5BCAD085-E8A6-8845-BD4E-CB4CCA059FC4}" type="datetimeFigureOut">
               <a:rPr lang="en-US" smtClean="0"/>
-              <a:t>28-Apr-26</a:t>
+              <a:t>1/27/13</a:t>
             </a:fld>
             <a:endParaRPr lang="en-US"/>
           </a:p>
@@ -2002,7 +2006,7 @@
           <a:p>
             <a:fld id="{5BCAD085-E8A6-8845-BD4E-CB4CCA059FC4}" type="datetimeFigureOut">
               <a:rPr lang="en-US" smtClean="0"/>
-              <a:t>28-Apr-26</a:t>
+              <a:t>1/27/13</a:t>
             </a:fld>
             <a:endParaRPr lang="en-US"/>
           </a:p>
@@ -2105,9 +2109,10 @@
           </a:lstStyle>
           <a:p>
             <a:r>
-              <a:rPr lang="en-US"/>
+              <a:rPr lang="en-US" smtClean="0"/>
               <a:t>Click to edit Master title style</a:t>
             </a:r>
+            <a:endParaRPr lang="en-US"/>
           </a:p>
         </p:txBody>
       </p:sp>
@@ -2161,37 +2166,38 @@
           <a:p>
             <a:pPr lvl="0"/>
             <a:r>
-              <a:rPr lang="en-US"/>
+              <a:rPr lang="en-US" smtClean="0"/>
               <a:t>Click to edit Master text styles</a:t>
             </a:r>
           </a:p>
           <a:p>
             <a:pPr lvl="1"/>
             <a:r>
-              <a:rPr lang="en-US"/>
+              <a:rPr lang="en-US" smtClean="0"/>
               <a:t>Second level</a:t>
             </a:r>
           </a:p>
           <a:p>
             <a:pPr lvl="2"/>
             <a:r>
-              <a:rPr lang="en-US"/>
+              <a:rPr lang="en-US" smtClean="0"/>
               <a:t>Third level</a:t>
             </a:r>
           </a:p>
           <a:p>
             <a:pPr lvl="3"/>
             <a:r>
-              <a:rPr lang="en-US"/>
+              <a:rPr lang="en-US" smtClean="0"/>
               <a:t>Fourth level</a:t>
             </a:r>
           </a:p>
           <a:p>
             <a:pPr lvl="4"/>
             <a:r>
-              <a:rPr lang="en-US"/>
+              <a:rPr lang="en-US" smtClean="0"/>
               <a:t>Fifth level</a:t>
             </a:r>
+            <a:endParaRPr lang="en-US"/>
           </a:p>
         </p:txBody>
       </p:sp>
@@ -2254,7 +2260,7 @@
           <a:p>
             <a:pPr lvl="0"/>
             <a:r>
-              <a:rPr lang="en-US"/>
+              <a:rPr lang="en-US" smtClean="0"/>
               <a:t>Click to edit Master text styles</a:t>
             </a:r>
           </a:p>
@@ -2277,7 +2283,7 @@
           <a:p>
             <a:fld id="{5BCAD085-E8A6-8845-BD4E-CB4CCA059FC4}" type="datetimeFigureOut">
               <a:rPr lang="en-US" smtClean="0"/>
-              <a:t>28-Apr-26</a:t>
+              <a:t>1/27/13</a:t>
             </a:fld>
             <a:endParaRPr lang="en-US"/>
           </a:p>
@@ -2380,9 +2386,10 @@
           </a:lstStyle>
           <a:p>
             <a:r>
-              <a:rPr lang="en-US"/>
+              <a:rPr lang="en-US" smtClean="0"/>
               <a:t>Click to edit Master title style</a:t>
             </a:r>
+            <a:endParaRPr lang="en-US"/>
           </a:p>
         </p:txBody>
       </p:sp>
@@ -2506,7 +2513,7 @@
           <a:p>
             <a:pPr lvl="0"/>
             <a:r>
-              <a:rPr lang="en-US"/>
+              <a:rPr lang="en-US" smtClean="0"/>
               <a:t>Click to edit Master text styles</a:t>
             </a:r>
           </a:p>
@@ -2529,7 +2536,7 @@
           <a:p>
             <a:fld id="{5BCAD085-E8A6-8845-BD4E-CB4CCA059FC4}" type="datetimeFigureOut">
               <a:rPr lang="en-US" smtClean="0"/>
-              <a:t>28-Apr-26</a:t>
+              <a:t>1/27/13</a:t>
             </a:fld>
             <a:endParaRPr lang="en-US"/>
           </a:p>
@@ -2638,9 +2645,10 @@
           <a:lstStyle/>
           <a:p>
             <a:r>
-              <a:rPr lang="en-US"/>
+              <a:rPr lang="en-US" smtClean="0"/>
               <a:t>Click to edit Master title style</a:t>
             </a:r>
+            <a:endParaRPr lang="en-US"/>
           </a:p>
         </p:txBody>
       </p:sp>
@@ -2671,37 +2679,38 @@
           <a:p>
             <a:pPr lvl="0"/>
             <a:r>
-              <a:rPr lang="en-US"/>
+              <a:rPr lang="en-US" smtClean="0"/>
               <a:t>Click to edit Master text styles</a:t>
             </a:r>
           </a:p>
           <a:p>
             <a:pPr lvl="1"/>
             <a:r>
-              <a:rPr lang="en-US"/>
+              <a:rPr lang="en-US" smtClean="0"/>
               <a:t>Second level</a:t>
             </a:r>
           </a:p>
           <a:p>
             <a:pPr lvl="2"/>
             <a:r>
-              <a:rPr lang="en-US"/>
+              <a:rPr lang="en-US" smtClean="0"/>
               <a:t>Third level</a:t>
             </a:r>
           </a:p>
           <a:p>
             <a:pPr lvl="3"/>
             <a:r>
-              <a:rPr lang="en-US"/>
+              <a:rPr lang="en-US" smtClean="0"/>
               <a:t>Fourth level</a:t>
             </a:r>
           </a:p>
           <a:p>
             <a:pPr lvl="4"/>
             <a:r>
-              <a:rPr lang="en-US"/>
+              <a:rPr lang="en-US" smtClean="0"/>
               <a:t>Fifth level</a:t>
             </a:r>
+            <a:endParaRPr lang="en-US"/>
           </a:p>
         </p:txBody>
       </p:sp>
@@ -2740,7 +2749,7 @@
           <a:p>
             <a:fld id="{5BCAD085-E8A6-8845-BD4E-CB4CCA059FC4}" type="datetimeFigureOut">
               <a:rPr lang="en-US" smtClean="0"/>
-              <a:t>28-Apr-26</a:t>
+              <a:t>1/27/13</a:t>
             </a:fld>
             <a:endParaRPr lang="en-US"/>
           </a:p>
@@ -3099,7 +3108,7 @@
 </file>
 
 <file path=ppt/slides/slide1.xml><?xml version="1.0" encoding="utf-8"?>
-<p:sld xmlns:a="http://schemas.openxmlformats.org/drawingml/2006/main" xmlns:r="http://schemas.openxmlformats.org/officeDocument/2006/relationships" xmlns:p="http://schemas.openxmlformats.org/presentationml/2006/main">
+<p:sld xmlns:a="http://schemas.openxmlformats.org/drawingml/2006/main" xmlns:p="http://schemas.openxmlformats.org/presentationml/2006/main" xmlns:r="http://schemas.openxmlformats.org/officeDocument/2006/relationships">
   <p:cSld>
     <p:bg>
       <p:bgPr>
@@ -3115,14 +3124,7 @@
         <p:cNvGrpSpPr/>
         <p:nvPr/>
       </p:nvGrpSpPr>
-      <p:grpSpPr>
-        <a:xfrm>
-          <a:off x="0" y="0"/>
-          <a:ext cx="0" cy="0"/>
-          <a:chOff x="0" y="0"/>
-          <a:chExt cx="0" cy="0"/>
-        </a:xfrm>
-      </p:grpSpPr>
+      <p:grpSpPr/>
       <p:sp>
         <p:nvSpPr>
           <p:cNvPr id="2" name="TextBox 1"/>
@@ -3167,7 +3169,7 @@
         <p:spPr>
           <a:xfrm>
             <a:off x="457200" y="3840480"/>
-            <a:ext cx="8229600" cy="1200329"/>
+            <a:ext cx="8229600" cy="1828800"/>
           </a:xfrm>
           <a:prstGeom prst="rect">
             <a:avLst/>
@@ -3188,7 +3190,6 @@
               </a:defRPr>
             </a:pPr>
             <a:r>
-              <a:rPr sz="3600" dirty="0"/>
               <a:t>How Official Inflation Statistics Hide the True Cost of Living in Paris</a:t>
             </a:r>
           </a:p>
@@ -3203,7 +3204,7 @@
 </file>
 
 <file path=ppt/slides/slide10.xml><?xml version="1.0" encoding="utf-8"?>
-<p:sld xmlns:a="http://schemas.openxmlformats.org/drawingml/2006/main" xmlns:r="http://schemas.openxmlformats.org/officeDocument/2006/relationships" xmlns:p="http://schemas.openxmlformats.org/presentationml/2006/main">
+<p:sld xmlns:a="http://schemas.openxmlformats.org/drawingml/2006/main" xmlns:p="http://schemas.openxmlformats.org/presentationml/2006/main" xmlns:r="http://schemas.openxmlformats.org/officeDocument/2006/relationships">
   <p:cSld>
     <p:bg>
       <p:bgPr>
@@ -3219,14 +3220,7 @@
         <p:cNvGrpSpPr/>
         <p:nvPr/>
       </p:nvGrpSpPr>
-      <p:grpSpPr>
-        <a:xfrm>
-          <a:off x="0" y="0"/>
-          <a:ext cx="0" cy="0"/>
-          <a:chOff x="0" y="0"/>
-          <a:chExt cx="0" cy="0"/>
-        </a:xfrm>
-      </p:grpSpPr>
+      <p:grpSpPr/>
       <p:sp>
         <p:nvSpPr>
           <p:cNvPr id="2" name="TextBox 1"/>
@@ -3235,7 +3229,7 @@
         </p:nvSpPr>
         <p:spPr>
           <a:xfrm>
-            <a:off x="914400" y="1207008"/>
+            <a:off x="914400" y="2286000"/>
             <a:ext cx="7315200" cy="2286000"/>
           </a:xfrm>
           <a:prstGeom prst="rect">
@@ -3257,29 +3251,54 @@
               </a:defRPr>
             </a:pPr>
             <a:r>
-              <a:rPr dirty="0"/>
               <a:t>Babies don't exist in official inflation baskets.</a:t>
             </a:r>
-            <a:br>
-              <a:rPr dirty="0"/>
-            </a:br>
-            <a:r>
-              <a:rPr dirty="0"/>
+            <a:br/>
+            <a:r>
               <a:t>Neither do allergy sufferers.</a:t>
             </a:r>
-            <a:br>
-              <a:rPr dirty="0"/>
-            </a:br>
-            <a:r>
-              <a:rPr dirty="0"/>
+            <a:br/>
+            <a:r>
               <a:t>Or single parents managing dietary needs.</a:t>
             </a:r>
-            <a:br>
-              <a:rPr dirty="0"/>
-            </a:br>
-            <a:r>
-              <a:rPr dirty="0"/>
+            <a:br/>
+            <a:r>
               <a:t>Statistical invisibility = institutional indifference.</a:t>
+            </a:r>
+          </a:p>
+        </p:txBody>
+      </p:sp>
+      <p:sp>
+        <p:nvSpPr>
+          <p:cNvPr id="3" name="TextBox 2"/>
+          <p:cNvSpPr txBox="1"/>
+          <p:nvPr/>
+        </p:nvSpPr>
+        <p:spPr>
+          <a:xfrm>
+            <a:off x="914400" y="4754880"/>
+            <a:ext cx="7315200" cy="914400"/>
+          </a:xfrm>
+          <a:prstGeom prst="rect">
+            <a:avLst/>
+          </a:prstGeom>
+          <a:noFill/>
+        </p:spPr>
+        <p:txBody>
+          <a:bodyPr wrap="none">
+            <a:spAutoFit/>
+          </a:bodyPr>
+          <a:lstStyle/>
+          <a:p>
+            <a:pPr algn="ctr">
+              <a:defRPr sz="2000">
+                <a:solidFill>
+                  <a:srgbClr val="FFFFFF"/>
+                </a:solidFill>
+              </a:defRPr>
+            </a:pPr>
+            <a:r>
+              <a:t>CREATIVE INSIGHT #1: The Erased Family Reality</a:t>
             </a:r>
           </a:p>
         </p:txBody>
@@ -3293,7 +3312,7 @@
 </file>
 
 <file path=ppt/slides/slide11.xml><?xml version="1.0" encoding="utf-8"?>
-<p:sld xmlns:a="http://schemas.openxmlformats.org/drawingml/2006/main" xmlns:r="http://schemas.openxmlformats.org/officeDocument/2006/relationships" xmlns:p="http://schemas.openxmlformats.org/presentationml/2006/main">
+<p:sld xmlns:a="http://schemas.openxmlformats.org/drawingml/2006/main" xmlns:p="http://schemas.openxmlformats.org/presentationml/2006/main" xmlns:r="http://schemas.openxmlformats.org/officeDocument/2006/relationships">
   <p:cSld>
     <p:bg>
       <p:bgPr>
@@ -3309,14 +3328,7 @@
         <p:cNvGrpSpPr/>
         <p:nvPr/>
       </p:nvGrpSpPr>
-      <p:grpSpPr>
-        <a:xfrm>
-          <a:off x="0" y="0"/>
-          <a:ext cx="0" cy="0"/>
-          <a:chOff x="0" y="0"/>
-          <a:chExt cx="0" cy="0"/>
-        </a:xfrm>
-      </p:grpSpPr>
+      <p:grpSpPr/>
       <p:sp>
         <p:nvSpPr>
           <p:cNvPr id="2" name="Rectangle 1"/>
@@ -3393,8 +3405,8 @@
         </p:blipFill>
         <p:spPr>
           <a:xfrm>
-            <a:off x="391213" y="1864149"/>
-            <a:ext cx="8153618" cy="2719633"/>
+            <a:off x="457200" y="1188720"/>
+            <a:ext cx="14255407" cy="4754880"/>
           </a:xfrm>
           <a:prstGeom prst="rect">
             <a:avLst/>
@@ -3410,7 +3422,7 @@
 </file>
 
 <file path=ppt/slides/slide12.xml><?xml version="1.0" encoding="utf-8"?>
-<p:sld xmlns:a="http://schemas.openxmlformats.org/drawingml/2006/main" xmlns:r="http://schemas.openxmlformats.org/officeDocument/2006/relationships" xmlns:p="http://schemas.openxmlformats.org/presentationml/2006/main">
+<p:sld xmlns:a="http://schemas.openxmlformats.org/drawingml/2006/main" xmlns:p="http://schemas.openxmlformats.org/presentationml/2006/main" xmlns:r="http://schemas.openxmlformats.org/officeDocument/2006/relationships">
   <p:cSld>
     <p:bg>
       <p:bgPr>
@@ -3426,14 +3438,7 @@
         <p:cNvGrpSpPr/>
         <p:nvPr/>
       </p:nvGrpSpPr>
-      <p:grpSpPr>
-        <a:xfrm>
-          <a:off x="0" y="0"/>
-          <a:ext cx="0" cy="0"/>
-          <a:chOff x="0" y="0"/>
-          <a:chExt cx="0" cy="0"/>
-        </a:xfrm>
-      </p:grpSpPr>
+      <p:grpSpPr/>
       <p:sp>
         <p:nvSpPr>
           <p:cNvPr id="2" name="Rectangle 1"/>
@@ -3510,8 +3515,8 @@
         </p:blipFill>
         <p:spPr>
           <a:xfrm>
-            <a:off x="457201" y="1335307"/>
-            <a:ext cx="7824546" cy="4187386"/>
+            <a:off x="457200" y="1188720"/>
+            <a:ext cx="9055829" cy="4846320"/>
           </a:xfrm>
           <a:prstGeom prst="rect">
             <a:avLst/>
@@ -3527,7 +3532,7 @@
 </file>
 
 <file path=ppt/slides/slide13.xml><?xml version="1.0" encoding="utf-8"?>
-<p:sld xmlns:a="http://schemas.openxmlformats.org/drawingml/2006/main" xmlns:r="http://schemas.openxmlformats.org/officeDocument/2006/relationships" xmlns:p="http://schemas.openxmlformats.org/presentationml/2006/main">
+<p:sld xmlns:a="http://schemas.openxmlformats.org/drawingml/2006/main" xmlns:p="http://schemas.openxmlformats.org/presentationml/2006/main" xmlns:r="http://schemas.openxmlformats.org/officeDocument/2006/relationships">
   <p:cSld>
     <p:bg>
       <p:bgPr>
@@ -3543,14 +3548,7 @@
         <p:cNvGrpSpPr/>
         <p:nvPr/>
       </p:nvGrpSpPr>
-      <p:grpSpPr>
-        <a:xfrm>
-          <a:off x="0" y="0"/>
-          <a:ext cx="0" cy="0"/>
-          <a:chOff x="0" y="0"/>
-          <a:chExt cx="0" cy="0"/>
-        </a:xfrm>
-      </p:grpSpPr>
+      <p:grpSpPr/>
       <p:sp>
         <p:nvSpPr>
           <p:cNvPr id="2" name="TextBox 1"/>
@@ -3581,29 +3579,54 @@
               </a:defRPr>
             </a:pPr>
             <a:r>
-              <a:rPr dirty="0"/>
               <a:t>The poor eat cheap and get sick.</a:t>
             </a:r>
-            <a:br>
-              <a:rPr dirty="0"/>
-            </a:br>
-            <a:r>
-              <a:rPr dirty="0"/>
+            <a:br/>
+            <a:r>
               <a:t>The sick can't afford healthcare.</a:t>
             </a:r>
-            <a:br>
-              <a:rPr dirty="0"/>
-            </a:br>
-            <a:r>
-              <a:rPr dirty="0"/>
+            <a:br/>
+            <a:r>
               <a:t>Healthcare costs break the budget.</a:t>
             </a:r>
-            <a:br>
-              <a:rPr dirty="0"/>
-            </a:br>
-            <a:r>
-              <a:rPr dirty="0"/>
+            <a:br/>
+            <a:r>
               <a:t>Food affordability creates a poverty trap.</a:t>
+            </a:r>
+          </a:p>
+        </p:txBody>
+      </p:sp>
+      <p:sp>
+        <p:nvSpPr>
+          <p:cNvPr id="3" name="TextBox 2"/>
+          <p:cNvSpPr txBox="1"/>
+          <p:nvPr/>
+        </p:nvSpPr>
+        <p:spPr>
+          <a:xfrm>
+            <a:off x="914400" y="4754880"/>
+            <a:ext cx="7315200" cy="914400"/>
+          </a:xfrm>
+          <a:prstGeom prst="rect">
+            <a:avLst/>
+          </a:prstGeom>
+          <a:noFill/>
+        </p:spPr>
+        <p:txBody>
+          <a:bodyPr wrap="none">
+            <a:spAutoFit/>
+          </a:bodyPr>
+          <a:lstStyle/>
+          <a:p>
+            <a:pPr algn="ctr">
+              <a:defRPr sz="2000">
+                <a:solidFill>
+                  <a:srgbClr val="FFFFFF"/>
+                </a:solidFill>
+              </a:defRPr>
+            </a:pPr>
+            <a:r>
+              <a:t>CREATIVE INSIGHT #2: The Poverty Health Trap</a:t>
             </a:r>
           </a:p>
         </p:txBody>
@@ -3617,7 +3640,7 @@
 </file>
 
 <file path=ppt/slides/slide14.xml><?xml version="1.0" encoding="utf-8"?>
-<p:sld xmlns:a="http://schemas.openxmlformats.org/drawingml/2006/main" xmlns:r="http://schemas.openxmlformats.org/officeDocument/2006/relationships" xmlns:p="http://schemas.openxmlformats.org/presentationml/2006/main">
+<p:sld xmlns:a="http://schemas.openxmlformats.org/drawingml/2006/main" xmlns:p="http://schemas.openxmlformats.org/presentationml/2006/main" xmlns:r="http://schemas.openxmlformats.org/officeDocument/2006/relationships">
   <p:cSld>
     <p:bg>
       <p:bgPr>
@@ -3633,14 +3656,7 @@
         <p:cNvGrpSpPr/>
         <p:nvPr/>
       </p:nvGrpSpPr>
-      <p:grpSpPr>
-        <a:xfrm>
-          <a:off x="0" y="0"/>
-          <a:ext cx="0" cy="0"/>
-          <a:chOff x="0" y="0"/>
-          <a:chExt cx="0" cy="0"/>
-        </a:xfrm>
-      </p:grpSpPr>
+      <p:grpSpPr/>
       <p:sp>
         <p:nvSpPr>
           <p:cNvPr id="2" name="Rectangle 1"/>
@@ -3790,7 +3806,6 @@
                 </a:solidFill>
               </a:defRPr>
             </a:pPr>
-            <a:endParaRPr/>
           </a:p>
           <a:p>
             <a:pPr>
@@ -3878,7 +3893,6 @@
                 </a:solidFill>
               </a:defRPr>
             </a:pPr>
-            <a:endParaRPr/>
           </a:p>
           <a:p>
             <a:pPr>
@@ -3963,7 +3977,7 @@
 </file>
 
 <file path=ppt/slides/slide15.xml><?xml version="1.0" encoding="utf-8"?>
-<p:sld xmlns:a="http://schemas.openxmlformats.org/drawingml/2006/main" xmlns:r="http://schemas.openxmlformats.org/officeDocument/2006/relationships" xmlns:p="http://schemas.openxmlformats.org/presentationml/2006/main">
+<p:sld xmlns:a="http://schemas.openxmlformats.org/drawingml/2006/main" xmlns:p="http://schemas.openxmlformats.org/presentationml/2006/main" xmlns:r="http://schemas.openxmlformats.org/officeDocument/2006/relationships">
   <p:cSld>
     <p:bg>
       <p:bgPr>
@@ -3979,14 +3993,7 @@
         <p:cNvGrpSpPr/>
         <p:nvPr/>
       </p:nvGrpSpPr>
-      <p:grpSpPr>
-        <a:xfrm>
-          <a:off x="0" y="0"/>
-          <a:ext cx="0" cy="0"/>
-          <a:chOff x="0" y="0"/>
-          <a:chExt cx="0" cy="0"/>
-        </a:xfrm>
-      </p:grpSpPr>
+      <p:grpSpPr/>
       <p:sp>
         <p:nvSpPr>
           <p:cNvPr id="2" name="Rectangle 1"/>
@@ -4080,7 +4087,7 @@
 </file>
 
 <file path=ppt/slides/slide16.xml><?xml version="1.0" encoding="utf-8"?>
-<p:sld xmlns:a="http://schemas.openxmlformats.org/drawingml/2006/main" xmlns:r="http://schemas.openxmlformats.org/officeDocument/2006/relationships" xmlns:p="http://schemas.openxmlformats.org/presentationml/2006/main">
+<p:sld xmlns:a="http://schemas.openxmlformats.org/drawingml/2006/main" xmlns:p="http://schemas.openxmlformats.org/presentationml/2006/main" xmlns:r="http://schemas.openxmlformats.org/officeDocument/2006/relationships">
   <p:cSld>
     <p:bg>
       <p:bgPr>
@@ -4096,14 +4103,7 @@
         <p:cNvGrpSpPr/>
         <p:nvPr/>
       </p:nvGrpSpPr>
-      <p:grpSpPr>
-        <a:xfrm>
-          <a:off x="0" y="0"/>
-          <a:ext cx="0" cy="0"/>
-          <a:chOff x="0" y="0"/>
-          <a:chExt cx="0" cy="0"/>
-        </a:xfrm>
-      </p:grpSpPr>
+      <p:grpSpPr/>
       <p:sp>
         <p:nvSpPr>
           <p:cNvPr id="2" name="Rectangle 1"/>
@@ -4197,7 +4197,7 @@
 </file>
 
 <file path=ppt/slides/slide17.xml><?xml version="1.0" encoding="utf-8"?>
-<p:sld xmlns:a="http://schemas.openxmlformats.org/drawingml/2006/main" xmlns:r="http://schemas.openxmlformats.org/officeDocument/2006/relationships" xmlns:p="http://schemas.openxmlformats.org/presentationml/2006/main">
+<p:sld xmlns:a="http://schemas.openxmlformats.org/drawingml/2006/main" xmlns:p="http://schemas.openxmlformats.org/presentationml/2006/main" xmlns:r="http://schemas.openxmlformats.org/officeDocument/2006/relationships">
   <p:cSld>
     <p:bg>
       <p:bgPr>
@@ -4213,1105 +4213,7 @@
         <p:cNvGrpSpPr/>
         <p:nvPr/>
       </p:nvGrpSpPr>
-      <p:grpSpPr>
-        <a:xfrm>
-          <a:off x="0" y="0"/>
-          <a:ext cx="0" cy="0"/>
-          <a:chOff x="0" y="0"/>
-          <a:chExt cx="0" cy="0"/>
-        </a:xfrm>
-      </p:grpSpPr>
-      <p:sp>
-        <p:nvSpPr>
-          <p:cNvPr id="2" name="Rectangle 1"/>
-          <p:cNvSpPr/>
-          <p:nvPr/>
-        </p:nvSpPr>
-        <p:spPr>
-          <a:xfrm>
-            <a:off x="0" y="0"/>
-            <a:ext cx="9144000" cy="1188720"/>
-          </a:xfrm>
-          <a:prstGeom prst="rect">
-            <a:avLst/>
-          </a:prstGeom>
-          <a:solidFill>
-            <a:srgbClr val="1F4E79"/>
-          </a:solidFill>
-          <a:ln>
-            <a:solidFill>
-              <a:srgbClr val="1F4E79"/>
-            </a:solidFill>
-          </a:ln>
-        </p:spPr>
-        <p:style>
-          <a:lnRef idx="1">
-            <a:schemeClr val="accent1"/>
-          </a:lnRef>
-          <a:fillRef idx="3">
-            <a:schemeClr val="accent1"/>
-          </a:fillRef>
-          <a:effectRef idx="2">
-            <a:schemeClr val="accent1"/>
-          </a:effectRef>
-          <a:fontRef idx="minor">
-            <a:schemeClr val="lt1"/>
-          </a:fontRef>
-        </p:style>
-        <p:txBody>
-          <a:bodyPr rtlCol="0" anchor="ctr"/>
-          <a:lstStyle/>
-          <a:p>
-            <a:pPr algn="ctr">
-              <a:spcBef>
-                <a:spcPts val="1200"/>
-              </a:spcBef>
-              <a:spcAft>
-                <a:spcPts val="1200"/>
-              </a:spcAft>
-              <a:defRPr sz="4400" b="1">
-                <a:solidFill>
-                  <a:srgbClr val="FFFFFF"/>
-                </a:solidFill>
-              </a:defRPr>
-            </a:pPr>
-            <a:r>
-              <a:t>The Household Composition Multiplier Crisis</a:t>
-            </a:r>
-          </a:p>
-        </p:txBody>
-      </p:sp>
-      <p:sp>
-        <p:nvSpPr>
-          <p:cNvPr id="3" name="TextBox 2"/>
-          <p:cNvSpPr txBox="1"/>
-          <p:nvPr/>
-        </p:nvSpPr>
-        <p:spPr>
-          <a:xfrm>
-            <a:off x="731520" y="1188720"/>
-            <a:ext cx="7680960" cy="5888792"/>
-          </a:xfrm>
-          <a:prstGeom prst="rect">
-            <a:avLst/>
-          </a:prstGeom>
-          <a:noFill/>
-        </p:spPr>
-        <p:txBody>
-          <a:bodyPr wrap="square">
-            <a:spAutoFit/>
-          </a:bodyPr>
-          <a:lstStyle/>
-          <a:p>
-            <a:pPr>
-              <a:spcBef>
-                <a:spcPts val="600"/>
-              </a:spcBef>
-              <a:spcAft>
-                <a:spcPts val="800"/>
-              </a:spcAft>
-              <a:defRPr sz="2000">
-                <a:solidFill>
-                  <a:srgbClr val="333333"/>
-                </a:solidFill>
-              </a:defRPr>
-            </a:pPr>
-            <a:r>
-              <a:rPr dirty="0"/>
-              <a:t>SMIC WORKER (21,000 EUR/year = 1,750 EUR/month):</a:t>
-            </a:r>
-          </a:p>
-          <a:p>
-            <a:pPr>
-              <a:spcBef>
-                <a:spcPts val="600"/>
-              </a:spcBef>
-              <a:spcAft>
-                <a:spcPts val="800"/>
-              </a:spcAft>
-              <a:defRPr sz="2000">
-                <a:solidFill>
-                  <a:srgbClr val="333333"/>
-                </a:solidFill>
-              </a:defRPr>
-            </a:pPr>
-            <a:r>
-              <a:rPr dirty="0"/>
-              <a:t>  • Base (2 adults + 1 child): 17.4% of income (MANAGEABLE)</a:t>
-            </a:r>
-          </a:p>
-          <a:p>
-            <a:pPr>
-              <a:spcBef>
-                <a:spcPts val="600"/>
-              </a:spcBef>
-              <a:spcAft>
-                <a:spcPts val="800"/>
-              </a:spcAft>
-              <a:defRPr sz="2000">
-                <a:solidFill>
-                  <a:srgbClr val="333333"/>
-                </a:solidFill>
-              </a:defRPr>
-            </a:pPr>
-            <a:r>
-              <a:rPr dirty="0"/>
-              <a:t>  • +1 Teenager: 33.8% of income (IMPOSSIBLE - NO MONEY FOR HOUSING)</a:t>
-            </a:r>
-          </a:p>
-          <a:p>
-            <a:pPr>
-              <a:spcBef>
-                <a:spcPts val="600"/>
-              </a:spcBef>
-              <a:spcAft>
-                <a:spcPts val="800"/>
-              </a:spcAft>
-              <a:defRPr sz="2000">
-                <a:solidFill>
-                  <a:srgbClr val="333333"/>
-                </a:solidFill>
-              </a:defRPr>
-            </a:pPr>
-            <a:r>
-              <a:rPr dirty="0"/>
-              <a:t>  • +1 Senior: 36.4% of income (CATASTROPHIC)</a:t>
-            </a:r>
-          </a:p>
-          <a:p>
-            <a:pPr>
-              <a:spcBef>
-                <a:spcPts val="600"/>
-              </a:spcBef>
-              <a:spcAft>
-                <a:spcPts val="800"/>
-              </a:spcAft>
-              <a:defRPr sz="2000">
-                <a:solidFill>
-                  <a:srgbClr val="333333"/>
-                </a:solidFill>
-              </a:defRPr>
-            </a:pPr>
-            <a:r>
-              <a:rPr dirty="0"/>
-              <a:t>MEDIAN PARIS (42,000 EUR/year):</a:t>
-            </a:r>
-          </a:p>
-          <a:p>
-            <a:pPr>
-              <a:spcBef>
-                <a:spcPts val="600"/>
-              </a:spcBef>
-              <a:spcAft>
-                <a:spcPts val="800"/>
-              </a:spcAft>
-              <a:defRPr sz="2000">
-                <a:solidFill>
-                  <a:srgbClr val="333333"/>
-                </a:solidFill>
-              </a:defRPr>
-            </a:pPr>
-            <a:r>
-              <a:rPr dirty="0"/>
-              <a:t>  • Base: 8.7% of income (EXCELLENT)</a:t>
-            </a:r>
-          </a:p>
-          <a:p>
-            <a:pPr>
-              <a:spcBef>
-                <a:spcPts val="600"/>
-              </a:spcBef>
-              <a:spcAft>
-                <a:spcPts val="800"/>
-              </a:spcAft>
-              <a:defRPr sz="2000">
-                <a:solidFill>
-                  <a:srgbClr val="333333"/>
-                </a:solidFill>
-              </a:defRPr>
-            </a:pPr>
-            <a:r>
-              <a:rPr dirty="0"/>
-              <a:t>  • +1 Teenager: 16.9% of income (MANAGEABLE)</a:t>
-            </a:r>
-          </a:p>
-          <a:p>
-            <a:pPr>
-              <a:spcBef>
-                <a:spcPts val="600"/>
-              </a:spcBef>
-              <a:spcAft>
-                <a:spcPts val="800"/>
-              </a:spcAft>
-              <a:defRPr sz="2000">
-                <a:solidFill>
-                  <a:srgbClr val="333333"/>
-                </a:solidFill>
-              </a:defRPr>
-            </a:pPr>
-            <a:r>
-              <a:rPr dirty="0"/>
-              <a:t>  • +1 Senior: 18.2% of income (DIFFICULT BUT POSSIBLE)</a:t>
-            </a:r>
-          </a:p>
-          <a:p>
-            <a:pPr>
-              <a:spcBef>
-                <a:spcPts val="600"/>
-              </a:spcBef>
-              <a:spcAft>
-                <a:spcPts val="800"/>
-              </a:spcAft>
-              <a:defRPr sz="2000">
-                <a:solidFill>
-                  <a:srgbClr val="333333"/>
-                </a:solidFill>
-              </a:defRPr>
-            </a:pPr>
-            <a:r>
-              <a:rPr dirty="0"/>
-              <a:t>THE CRUEL REALITY:</a:t>
-            </a:r>
-          </a:p>
-          <a:p>
-            <a:pPr>
-              <a:spcBef>
-                <a:spcPts val="600"/>
-              </a:spcBef>
-              <a:spcAft>
-                <a:spcPts val="800"/>
-              </a:spcAft>
-              <a:defRPr sz="2000">
-                <a:solidFill>
-                  <a:srgbClr val="333333"/>
-                </a:solidFill>
-              </a:defRPr>
-            </a:pPr>
-            <a:r>
-              <a:rPr dirty="0"/>
-              <a:t>Families don't control their composition. They have children, care for aging</a:t>
-            </a:r>
-            <a:r>
-              <a:rPr lang="en-US" dirty="0"/>
-              <a:t> </a:t>
-            </a:r>
-            <a:r>
-              <a:rPr dirty="0"/>
-              <a:t>parents. Yet affordability multiplies with each family member.</a:t>
-            </a:r>
-          </a:p>
-          <a:p>
-            <a:pPr>
-              <a:spcBef>
-                <a:spcPts val="600"/>
-              </a:spcBef>
-              <a:spcAft>
-                <a:spcPts val="800"/>
-              </a:spcAft>
-              <a:defRPr sz="2000">
-                <a:solidFill>
-                  <a:srgbClr val="333333"/>
-                </a:solidFill>
-              </a:defRPr>
-            </a:pPr>
-            <a:r>
-              <a:rPr dirty="0"/>
-              <a:t>Below 35k income: Growing families become impossible families.</a:t>
-            </a:r>
-          </a:p>
-        </p:txBody>
-      </p:sp>
-    </p:spTree>
-  </p:cSld>
-  <p:clrMapOvr>
-    <a:masterClrMapping/>
-  </p:clrMapOvr>
-</p:sld>
-</file>
-
-<file path=ppt/slides/slide18.xml><?xml version="1.0" encoding="utf-8"?>
-<p:sld xmlns:a="http://schemas.openxmlformats.org/drawingml/2006/main" xmlns:r="http://schemas.openxmlformats.org/officeDocument/2006/relationships" xmlns:p="http://schemas.openxmlformats.org/presentationml/2006/main">
-  <p:cSld>
-    <p:bg>
-      <p:bgPr>
-        <a:solidFill>
-          <a:srgbClr val="FFFFFF"/>
-        </a:solidFill>
-        <a:effectLst/>
-      </p:bgPr>
-    </p:bg>
-    <p:spTree>
-      <p:nvGrpSpPr>
-        <p:cNvPr id="1" name=""/>
-        <p:cNvGrpSpPr/>
-        <p:nvPr/>
-      </p:nvGrpSpPr>
-      <p:grpSpPr>
-        <a:xfrm>
-          <a:off x="0" y="0"/>
-          <a:ext cx="0" cy="0"/>
-          <a:chOff x="0" y="0"/>
-          <a:chExt cx="0" cy="0"/>
-        </a:xfrm>
-      </p:grpSpPr>
-      <p:sp>
-        <p:nvSpPr>
-          <p:cNvPr id="2" name="Rectangle 1"/>
-          <p:cNvSpPr/>
-          <p:nvPr/>
-        </p:nvSpPr>
-        <p:spPr>
-          <a:xfrm>
-            <a:off x="0" y="0"/>
-            <a:ext cx="9144000" cy="1188720"/>
-          </a:xfrm>
-          <a:prstGeom prst="rect">
-            <a:avLst/>
-          </a:prstGeom>
-          <a:solidFill>
-            <a:srgbClr val="1F4E79"/>
-          </a:solidFill>
-          <a:ln>
-            <a:solidFill>
-              <a:srgbClr val="1F4E79"/>
-            </a:solidFill>
-          </a:ln>
-        </p:spPr>
-        <p:style>
-          <a:lnRef idx="1">
-            <a:schemeClr val="accent1"/>
-          </a:lnRef>
-          <a:fillRef idx="3">
-            <a:schemeClr val="accent1"/>
-          </a:fillRef>
-          <a:effectRef idx="2">
-            <a:schemeClr val="accent1"/>
-          </a:effectRef>
-          <a:fontRef idx="minor">
-            <a:schemeClr val="lt1"/>
-          </a:fontRef>
-        </p:style>
-        <p:txBody>
-          <a:bodyPr rtlCol="0" anchor="ctr"/>
-          <a:lstStyle/>
-          <a:p>
-            <a:pPr algn="ctr">
-              <a:spcBef>
-                <a:spcPts val="1200"/>
-              </a:spcBef>
-              <a:spcAft>
-                <a:spcPts val="1200"/>
-              </a:spcAft>
-              <a:defRPr sz="4400" b="1">
-                <a:solidFill>
-                  <a:srgbClr val="FFFFFF"/>
-                </a:solidFill>
-              </a:defRPr>
-            </a:pPr>
-            <a:r>
-              <a:rPr dirty="0"/>
-              <a:t>The Invisibility Crisis: Who Official Statistics Erase</a:t>
-            </a:r>
-          </a:p>
-        </p:txBody>
-      </p:sp>
-      <p:sp>
-        <p:nvSpPr>
-          <p:cNvPr id="3" name="TextBox 2"/>
-          <p:cNvSpPr txBox="1"/>
-          <p:nvPr/>
-        </p:nvSpPr>
-        <p:spPr>
-          <a:xfrm>
-            <a:off x="731520" y="1188720"/>
-            <a:ext cx="7680960" cy="5212080"/>
-          </a:xfrm>
-          <a:prstGeom prst="rect">
-            <a:avLst/>
-          </a:prstGeom>
-          <a:noFill/>
-        </p:spPr>
-        <p:txBody>
-          <a:bodyPr wrap="square">
-            <a:spAutoFit/>
-          </a:bodyPr>
-          <a:lstStyle/>
-          <a:p>
-            <a:pPr>
-              <a:spcBef>
-                <a:spcPts val="600"/>
-              </a:spcBef>
-              <a:spcAft>
-                <a:spcPts val="800"/>
-              </a:spcAft>
-              <a:defRPr sz="2000">
-                <a:solidFill>
-                  <a:srgbClr val="333333"/>
-                </a:solidFill>
-              </a:defRPr>
-            </a:pPr>
-            <a:r>
-              <a:rPr dirty="0"/>
-              <a:t>SENIORS: Specialized dietary needs (soft foods, health management)</a:t>
-            </a:r>
-          </a:p>
-          <a:p>
-            <a:pPr>
-              <a:spcBef>
-                <a:spcPts val="600"/>
-              </a:spcBef>
-              <a:spcAft>
-                <a:spcPts val="800"/>
-              </a:spcAft>
-              <a:defRPr sz="2000">
-                <a:solidFill>
-                  <a:srgbClr val="333333"/>
-                </a:solidFill>
-              </a:defRPr>
-            </a:pPr>
-            <a:r>
-              <a:rPr dirty="0"/>
-              <a:t>  • €334/month more than baseline, but counted as 'standard adult'</a:t>
-            </a:r>
-          </a:p>
-          <a:p>
-            <a:pPr>
-              <a:spcBef>
-                <a:spcPts val="600"/>
-              </a:spcBef>
-              <a:spcAft>
-                <a:spcPts val="800"/>
-              </a:spcAft>
-              <a:defRPr sz="2000">
-                <a:solidFill>
-                  <a:srgbClr val="333333"/>
-                </a:solidFill>
-              </a:defRPr>
-            </a:pPr>
-            <a:r>
-              <a:rPr dirty="0"/>
-              <a:t>  • Elderly people disappear from policy view</a:t>
-            </a:r>
-          </a:p>
-          <a:p>
-            <a:pPr>
-              <a:spcBef>
-                <a:spcPts val="600"/>
-              </a:spcBef>
-              <a:spcAft>
-                <a:spcPts val="800"/>
-              </a:spcAft>
-              <a:defRPr sz="2000">
-                <a:solidFill>
-                  <a:srgbClr val="333333"/>
-                </a:solidFill>
-              </a:defRPr>
-            </a:pPr>
-            <a:endParaRPr dirty="0"/>
-          </a:p>
-          <a:p>
-            <a:pPr>
-              <a:spcBef>
-                <a:spcPts val="600"/>
-              </a:spcBef>
-              <a:spcAft>
-                <a:spcPts val="800"/>
-              </a:spcAft>
-              <a:defRPr sz="2000">
-                <a:solidFill>
-                  <a:srgbClr val="333333"/>
-                </a:solidFill>
-              </a:defRPr>
-            </a:pPr>
-            <a:r>
-              <a:rPr dirty="0"/>
-              <a:t>TEENAGERS: Abrupt appetite transition (110% cost jump at age 13)</a:t>
-            </a:r>
-          </a:p>
-          <a:p>
-            <a:pPr>
-              <a:spcBef>
-                <a:spcPts val="600"/>
-              </a:spcBef>
-              <a:spcAft>
-                <a:spcPts val="800"/>
-              </a:spcAft>
-              <a:defRPr sz="2000">
-                <a:solidFill>
-                  <a:srgbClr val="333333"/>
-                </a:solidFill>
-              </a:defRPr>
-            </a:pPr>
-            <a:r>
-              <a:rPr dirty="0"/>
-              <a:t>  • Malnutrition risk precisely when growth is critical</a:t>
-            </a:r>
-          </a:p>
-          <a:p>
-            <a:pPr>
-              <a:spcBef>
-                <a:spcPts val="600"/>
-              </a:spcBef>
-              <a:spcAft>
-                <a:spcPts val="800"/>
-              </a:spcAft>
-              <a:defRPr sz="2000">
-                <a:solidFill>
-                  <a:srgbClr val="333333"/>
-                </a:solidFill>
-              </a:defRPr>
-            </a:pPr>
-            <a:r>
-              <a:rPr dirty="0"/>
-              <a:t>  • Not child-cost, not adult-cost—uncounted gap</a:t>
-            </a:r>
-          </a:p>
-          <a:p>
-            <a:pPr>
-              <a:spcBef>
-                <a:spcPts val="600"/>
-              </a:spcBef>
-              <a:spcAft>
-                <a:spcPts val="800"/>
-              </a:spcAft>
-              <a:defRPr sz="2000">
-                <a:solidFill>
-                  <a:srgbClr val="333333"/>
-                </a:solidFill>
-              </a:defRPr>
-            </a:pPr>
-            <a:endParaRPr dirty="0"/>
-          </a:p>
-          <a:p>
-            <a:pPr>
-              <a:spcBef>
-                <a:spcPts val="600"/>
-              </a:spcBef>
-              <a:spcAft>
-                <a:spcPts val="800"/>
-              </a:spcAft>
-              <a:defRPr sz="2000">
-                <a:solidFill>
-                  <a:srgbClr val="333333"/>
-                </a:solidFill>
-              </a:defRPr>
-            </a:pPr>
-            <a:r>
-              <a:rPr dirty="0"/>
-              <a:t>THE SANDWICH GENERATION: Supporting both elderly AND children</a:t>
-            </a:r>
-          </a:p>
-          <a:p>
-            <a:pPr>
-              <a:spcBef>
-                <a:spcPts val="600"/>
-              </a:spcBef>
-              <a:spcAft>
-                <a:spcPts val="800"/>
-              </a:spcAft>
-              <a:defRPr sz="2000">
-                <a:solidFill>
-                  <a:srgbClr val="333333"/>
-                </a:solidFill>
-              </a:defRPr>
-            </a:pPr>
-            <a:r>
-              <a:rPr dirty="0"/>
-              <a:t>  • 45-year-old: Parent +€334, Child +€304 = household multiplied</a:t>
-            </a:r>
-          </a:p>
-          <a:p>
-            <a:pPr>
-              <a:spcBef>
-                <a:spcPts val="600"/>
-              </a:spcBef>
-              <a:spcAft>
-                <a:spcPts val="800"/>
-              </a:spcAft>
-              <a:defRPr sz="2000">
-                <a:solidFill>
-                  <a:srgbClr val="333333"/>
-                </a:solidFill>
-              </a:defRPr>
-            </a:pPr>
-            <a:r>
-              <a:rPr dirty="0"/>
-              <a:t>  • €941/month food costs (27% of median income)</a:t>
-            </a:r>
-          </a:p>
-          <a:p>
-            <a:pPr>
-              <a:spcBef>
-                <a:spcPts val="600"/>
-              </a:spcBef>
-              <a:spcAft>
-                <a:spcPts val="800"/>
-              </a:spcAft>
-              <a:defRPr sz="2000">
-                <a:solidFill>
-                  <a:srgbClr val="333333"/>
-                </a:solidFill>
-              </a:defRPr>
-            </a:pPr>
-            <a:r>
-              <a:rPr dirty="0"/>
-              <a:t>  • Silent burden. Invisible in statistics. Breaking quietly.</a:t>
-            </a:r>
-          </a:p>
-        </p:txBody>
-      </p:sp>
-    </p:spTree>
-  </p:cSld>
-  <p:clrMapOvr>
-    <a:masterClrMapping/>
-  </p:clrMapOvr>
-</p:sld>
-</file>
-
-<file path=ppt/slides/slide19.xml><?xml version="1.0" encoding="utf-8"?>
-<p:sld xmlns:a="http://schemas.openxmlformats.org/drawingml/2006/main" xmlns:r="http://schemas.openxmlformats.org/officeDocument/2006/relationships" xmlns:p="http://schemas.openxmlformats.org/presentationml/2006/main">
-  <p:cSld>
-    <p:bg>
-      <p:bgPr>
-        <a:solidFill>
-          <a:srgbClr val="1F4E79"/>
-        </a:solidFill>
-        <a:effectLst/>
-      </p:bgPr>
-    </p:bg>
-    <p:spTree>
-      <p:nvGrpSpPr>
-        <p:cNvPr id="1" name=""/>
-        <p:cNvGrpSpPr/>
-        <p:nvPr/>
-      </p:nvGrpSpPr>
-      <p:grpSpPr>
-        <a:xfrm>
-          <a:off x="0" y="0"/>
-          <a:ext cx="0" cy="0"/>
-          <a:chOff x="0" y="0"/>
-          <a:chExt cx="0" cy="0"/>
-        </a:xfrm>
-      </p:grpSpPr>
-      <p:sp>
-        <p:nvSpPr>
-          <p:cNvPr id="2" name="TextBox 1"/>
-          <p:cNvSpPr txBox="1"/>
-          <p:nvPr/>
-        </p:nvSpPr>
-        <p:spPr>
-          <a:xfrm>
-            <a:off x="914400" y="2286000"/>
-            <a:ext cx="7315200" cy="2123658"/>
-          </a:xfrm>
-          <a:prstGeom prst="rect">
-            <a:avLst/>
-          </a:prstGeom>
-          <a:noFill/>
-        </p:spPr>
-        <p:txBody>
-          <a:bodyPr wrap="square">
-            <a:spAutoFit/>
-          </a:bodyPr>
-          <a:lstStyle/>
-          <a:p>
-            <a:pPr algn="ctr">
-              <a:defRPr sz="3200" b="1" i="1">
-                <a:solidFill>
-                  <a:srgbClr val="ED7D31"/>
-                </a:solidFill>
-              </a:defRPr>
-            </a:pPr>
-            <a:r>
-              <a:rPr dirty="0"/>
-              <a:t>What gets priced out of reach doesn't get born.</a:t>
-            </a:r>
-            <a:br>
-              <a:rPr dirty="0"/>
-            </a:br>
-            <a:r>
-              <a:rPr dirty="0"/>
-              <a:t>Food affordability is </a:t>
-            </a:r>
-            <a:r>
-              <a:rPr sz="3600" dirty="0"/>
-              <a:t>not</a:t>
-            </a:r>
-            <a:r>
-              <a:rPr dirty="0"/>
-              <a:t> just poverty.</a:t>
-            </a:r>
-            <a:br>
-              <a:rPr dirty="0"/>
-            </a:br>
-            <a:r>
-              <a:rPr dirty="0"/>
-              <a:t>It's a demographic determinant.</a:t>
-            </a:r>
-          </a:p>
-        </p:txBody>
-      </p:sp>
-      <p:sp>
-        <p:nvSpPr>
-          <p:cNvPr id="3" name="TextBox 2"/>
-          <p:cNvSpPr txBox="1"/>
-          <p:nvPr/>
-        </p:nvSpPr>
-        <p:spPr>
-          <a:xfrm>
-            <a:off x="914400" y="4754880"/>
-            <a:ext cx="7315200" cy="914400"/>
-          </a:xfrm>
-          <a:prstGeom prst="rect">
-            <a:avLst/>
-          </a:prstGeom>
-          <a:noFill/>
-        </p:spPr>
-        <p:txBody>
-          <a:bodyPr wrap="none">
-            <a:spAutoFit/>
-          </a:bodyPr>
-          <a:lstStyle/>
-          <a:p>
-            <a:pPr algn="ctr">
-              <a:defRPr sz="2000">
-                <a:solidFill>
-                  <a:srgbClr val="FFFFFF"/>
-                </a:solidFill>
-              </a:defRPr>
-            </a:pPr>
-            <a:r>
-              <a:t>THE HIDDEN CONSEQUENCE: Why Birth Rates Are Collapsing</a:t>
-            </a:r>
-          </a:p>
-        </p:txBody>
-      </p:sp>
-    </p:spTree>
-  </p:cSld>
-  <p:clrMapOvr>
-    <a:masterClrMapping/>
-  </p:clrMapOvr>
-</p:sld>
-</file>
-
-<file path=ppt/slides/slide2.xml><?xml version="1.0" encoding="utf-8"?>
-<p:sld xmlns:a="http://schemas.openxmlformats.org/drawingml/2006/main" xmlns:r="http://schemas.openxmlformats.org/officeDocument/2006/relationships" xmlns:p="http://schemas.openxmlformats.org/presentationml/2006/main">
-  <p:cSld>
-    <p:bg>
-      <p:bgPr>
-        <a:solidFill>
-          <a:srgbClr val="FFFFFF"/>
-        </a:solidFill>
-        <a:effectLst/>
-      </p:bgPr>
-    </p:bg>
-    <p:spTree>
-      <p:nvGrpSpPr>
-        <p:cNvPr id="1" name=""/>
-        <p:cNvGrpSpPr/>
-        <p:nvPr/>
-      </p:nvGrpSpPr>
-      <p:grpSpPr>
-        <a:xfrm>
-          <a:off x="0" y="0"/>
-          <a:ext cx="0" cy="0"/>
-          <a:chOff x="0" y="0"/>
-          <a:chExt cx="0" cy="0"/>
-        </a:xfrm>
-      </p:grpSpPr>
-      <p:sp>
-        <p:nvSpPr>
-          <p:cNvPr id="2" name="Rectangle 1"/>
-          <p:cNvSpPr/>
-          <p:nvPr/>
-        </p:nvSpPr>
-        <p:spPr>
-          <a:xfrm>
-            <a:off x="0" y="0"/>
-            <a:ext cx="9144000" cy="1188720"/>
-          </a:xfrm>
-          <a:prstGeom prst="rect">
-            <a:avLst/>
-          </a:prstGeom>
-          <a:solidFill>
-            <a:srgbClr val="1F4E79"/>
-          </a:solidFill>
-          <a:ln>
-            <a:solidFill>
-              <a:srgbClr val="1F4E79"/>
-            </a:solidFill>
-          </a:ln>
-        </p:spPr>
-        <p:style>
-          <a:lnRef idx="1">
-            <a:schemeClr val="accent1"/>
-          </a:lnRef>
-          <a:fillRef idx="3">
-            <a:schemeClr val="accent1"/>
-          </a:fillRef>
-          <a:effectRef idx="2">
-            <a:schemeClr val="accent1"/>
-          </a:effectRef>
-          <a:fontRef idx="minor">
-            <a:schemeClr val="lt1"/>
-          </a:fontRef>
-        </p:style>
-        <p:txBody>
-          <a:bodyPr rtlCol="0" anchor="ctr"/>
-          <a:lstStyle/>
-          <a:p>
-            <a:pPr algn="ctr">
-              <a:spcBef>
-                <a:spcPts val="1200"/>
-              </a:spcBef>
-              <a:spcAft>
-                <a:spcPts val="1200"/>
-              </a:spcAft>
-              <a:defRPr sz="4400" b="1">
-                <a:solidFill>
-                  <a:srgbClr val="FFFFFF"/>
-                </a:solidFill>
-              </a:defRPr>
-            </a:pPr>
-            <a:r>
-              <a:rPr dirty="0"/>
-              <a:t>The Problem: Official Baskets are Incomplete</a:t>
-            </a:r>
-          </a:p>
-        </p:txBody>
-      </p:sp>
-      <p:sp>
-        <p:nvSpPr>
-          <p:cNvPr id="3" name="TextBox 2"/>
-          <p:cNvSpPr txBox="1"/>
-          <p:nvPr/>
-        </p:nvSpPr>
-        <p:spPr>
-          <a:xfrm>
-            <a:off x="731520" y="1188720"/>
-            <a:ext cx="7680960" cy="5212080"/>
-          </a:xfrm>
-          <a:prstGeom prst="rect">
-            <a:avLst/>
-          </a:prstGeom>
-          <a:noFill/>
-        </p:spPr>
-        <p:txBody>
-          <a:bodyPr wrap="square">
-            <a:spAutoFit/>
-          </a:bodyPr>
-          <a:lstStyle/>
-          <a:p>
-            <a:pPr>
-              <a:spcBef>
-                <a:spcPts val="600"/>
-              </a:spcBef>
-              <a:spcAft>
-                <a:spcPts val="800"/>
-              </a:spcAft>
-              <a:defRPr sz="2000">
-                <a:solidFill>
-                  <a:srgbClr val="333333"/>
-                </a:solidFill>
-              </a:defRPr>
-            </a:pPr>
-            <a:r>
-              <a:t>INSEE reports inflation based on a MINIMAL BASKET of emblematic products:</a:t>
-            </a:r>
-          </a:p>
-          <a:p>
-            <a:pPr>
-              <a:spcBef>
-                <a:spcPts val="600"/>
-              </a:spcBef>
-              <a:spcAft>
-                <a:spcPts val="800"/>
-              </a:spcAft>
-              <a:defRPr sz="2000">
-                <a:solidFill>
-                  <a:srgbClr val="333333"/>
-                </a:solidFill>
-              </a:defRPr>
-            </a:pPr>
-            <a:r>
-              <a:t>  • Milk, bread, eggs, cheese, butter, pasta...</a:t>
-            </a:r>
-          </a:p>
-          <a:p>
-            <a:pPr>
-              <a:spcBef>
-                <a:spcPts val="600"/>
-              </a:spcBef>
-              <a:spcAft>
-                <a:spcPts val="800"/>
-              </a:spcAft>
-              <a:defRPr sz="2000">
-                <a:solidFill>
-                  <a:srgbClr val="333333"/>
-                </a:solidFill>
-              </a:defRPr>
-            </a:pPr>
-            <a:endParaRPr/>
-          </a:p>
-          <a:p>
-            <a:pPr>
-              <a:spcBef>
-                <a:spcPts val="600"/>
-              </a:spcBef>
-              <a:spcAft>
-                <a:spcPts val="800"/>
-              </a:spcAft>
-              <a:defRPr sz="2000">
-                <a:solidFill>
-                  <a:srgbClr val="333333"/>
-                </a:solidFill>
-              </a:defRPr>
-            </a:pPr>
-            <a:r>
-              <a:t>But official baskets IGNORE the complementary items families actually need:</a:t>
-            </a:r>
-          </a:p>
-          <a:p>
-            <a:pPr>
-              <a:spcBef>
-                <a:spcPts val="600"/>
-              </a:spcBef>
-              <a:spcAft>
-                <a:spcPts val="800"/>
-              </a:spcAft>
-              <a:defRPr sz="2000">
-                <a:solidFill>
-                  <a:srgbClr val="333333"/>
-                </a:solidFill>
-              </a:defRPr>
-            </a:pPr>
-            <a:r>
-              <a:t>  • Different milk types (lactose-free, baby formula)</a:t>
-            </a:r>
-          </a:p>
-          <a:p>
-            <a:pPr>
-              <a:spcBef>
-                <a:spcPts val="600"/>
-              </a:spcBef>
-              <a:spcAft>
-                <a:spcPts val="800"/>
-              </a:spcAft>
-              <a:defRPr sz="2000">
-                <a:solidFill>
-                  <a:srgbClr val="333333"/>
-                </a:solidFill>
-              </a:defRPr>
-            </a:pPr>
-            <a:r>
-              <a:t>  • Items that complete meals (sauces, oils, spices)</a:t>
-            </a:r>
-          </a:p>
-          <a:p>
-            <a:pPr>
-              <a:spcBef>
-                <a:spcPts val="600"/>
-              </a:spcBef>
-              <a:spcAft>
-                <a:spcPts val="800"/>
-              </a:spcAft>
-              <a:defRPr sz="2000">
-                <a:solidFill>
-                  <a:srgbClr val="333333"/>
-                </a:solidFill>
-              </a:defRPr>
-            </a:pPr>
-            <a:r>
-              <a:t>  • Baby essentials (diapers, creams)</a:t>
-            </a:r>
-          </a:p>
-          <a:p>
-            <a:pPr>
-              <a:spcBef>
-                <a:spcPts val="600"/>
-              </a:spcBef>
-              <a:spcAft>
-                <a:spcPts val="800"/>
-              </a:spcAft>
-              <a:defRPr sz="2000">
-                <a:solidFill>
-                  <a:srgbClr val="333333"/>
-                </a:solidFill>
-              </a:defRPr>
-            </a:pPr>
-            <a:r>
-              <a:t>  • Dietary alternatives (allergies, intolerances)</a:t>
-            </a:r>
-          </a:p>
-          <a:p>
-            <a:pPr>
-              <a:spcBef>
-                <a:spcPts val="600"/>
-              </a:spcBef>
-              <a:spcAft>
-                <a:spcPts val="800"/>
-              </a:spcAft>
-              <a:defRPr sz="2000">
-                <a:solidFill>
-                  <a:srgbClr val="333333"/>
-                </a:solidFill>
-              </a:defRPr>
-            </a:pPr>
-            <a:endParaRPr/>
-          </a:p>
-          <a:p>
-            <a:pPr>
-              <a:spcBef>
-                <a:spcPts val="600"/>
-              </a:spcBef>
-              <a:spcAft>
-                <a:spcPts val="800"/>
-              </a:spcAft>
-              <a:defRPr sz="2000">
-                <a:solidFill>
-                  <a:srgbClr val="333333"/>
-                </a:solidFill>
-              </a:defRPr>
-            </a:pPr>
-            <a:r>
-              <a:t>Result: Official inflation numbers measure SURVIVAL, not LIVING</a:t>
-            </a:r>
-          </a:p>
-        </p:txBody>
-      </p:sp>
-    </p:spTree>
-  </p:cSld>
-  <p:clrMapOvr>
-    <a:masterClrMapping/>
-  </p:clrMapOvr>
-</p:sld>
-</file>
-
-<file path=ppt/slides/slide20.xml><?xml version="1.0" encoding="utf-8"?>
-<p:sld xmlns:a="http://schemas.openxmlformats.org/drawingml/2006/main" xmlns:r="http://schemas.openxmlformats.org/officeDocument/2006/relationships" xmlns:p="http://schemas.openxmlformats.org/presentationml/2006/main">
-  <p:cSld>
-    <p:bg>
-      <p:bgPr>
-        <a:solidFill>
-          <a:srgbClr val="FFFFFF"/>
-        </a:solidFill>
-        <a:effectLst/>
-      </p:bgPr>
-    </p:bg>
-    <p:spTree>
-      <p:nvGrpSpPr>
-        <p:cNvPr id="1" name=""/>
-        <p:cNvGrpSpPr/>
-        <p:nvPr/>
-      </p:nvGrpSpPr>
-      <p:grpSpPr>
-        <a:xfrm>
-          <a:off x="0" y="0"/>
-          <a:ext cx="0" cy="0"/>
-          <a:chOff x="0" y="0"/>
-          <a:chExt cx="0" cy="0"/>
-        </a:xfrm>
-      </p:grpSpPr>
+      <p:grpSpPr/>
       <p:sp>
         <p:nvSpPr>
           <p:cNvPr id="2" name="Rectangle 1"/>
@@ -5367,7 +4269,7 @@
               </a:defRPr>
             </a:pPr>
             <a:r>
-              <a:t>Birth Rate as Economic Rationing</a:t>
+              <a:t>The Household Composition Multiplier Crisis</a:t>
             </a:r>
           </a:p>
         </p:txBody>
@@ -5408,201 +4310,235 @@
               </a:defRPr>
             </a:pPr>
             <a:r>
-              <a:t>Young couple, median Paris income (42,000 EUR/year):</a:t>
-            </a:r>
-          </a:p>
-          <a:p>
-            <a:pPr>
-              <a:spcBef>
-                <a:spcPts val="600"/>
-              </a:spcBef>
-              <a:spcAft>
-                <a:spcPts val="800"/>
-              </a:spcAft>
-              <a:defRPr sz="2000">
-                <a:solidFill>
-                  <a:srgbClr val="333333"/>
-                </a:solidFill>
-              </a:defRPr>
-            </a:pPr>
-            <a:r>
-              <a:t>  • 1 child: 12.6% of income on food (MANAGEABLE)</a:t>
-            </a:r>
-          </a:p>
-          <a:p>
-            <a:pPr>
-              <a:spcBef>
-                <a:spcPts val="600"/>
-              </a:spcBef>
-              <a:spcAft>
-                <a:spcPts val="800"/>
-              </a:spcAft>
-              <a:defRPr sz="2000">
-                <a:solidFill>
-                  <a:srgbClr val="333333"/>
-                </a:solidFill>
-              </a:defRPr>
-            </a:pPr>
-            <a:r>
-              <a:t>  • 2 children: 16.5% of income on food (DIFFICULT)</a:t>
-            </a:r>
-          </a:p>
-          <a:p>
-            <a:pPr>
-              <a:spcBef>
-                <a:spcPts val="600"/>
-              </a:spcBef>
-              <a:spcAft>
-                <a:spcPts val="800"/>
-              </a:spcAft>
-              <a:defRPr sz="2000">
-                <a:solidFill>
-                  <a:srgbClr val="333333"/>
-                </a:solidFill>
-              </a:defRPr>
-            </a:pPr>
-            <a:r>
-              <a:t>  • 3 children: 20.4% of income on food (IMPOSSIBLE)</a:t>
-            </a:r>
-          </a:p>
-          <a:p>
-            <a:pPr>
-              <a:spcBef>
-                <a:spcPts val="600"/>
-              </a:spcBef>
-              <a:spcAft>
-                <a:spcPts val="800"/>
-              </a:spcAft>
-              <a:defRPr sz="2000">
-                <a:solidFill>
-                  <a:srgbClr val="333333"/>
-                </a:solidFill>
-              </a:defRPr>
-            </a:pPr>
-            <a:endParaRPr/>
-          </a:p>
-          <a:p>
-            <a:pPr>
-              <a:spcBef>
-                <a:spcPts val="600"/>
-              </a:spcBef>
-              <a:spcAft>
-                <a:spcPts val="800"/>
-              </a:spcAft>
-              <a:defRPr sz="2000">
-                <a:solidFill>
-                  <a:srgbClr val="333333"/>
-                </a:solidFill>
-              </a:defRPr>
-            </a:pPr>
-            <a:r>
-              <a:t>Young couple, SMIC (21,000 EUR/year):</a:t>
-            </a:r>
-          </a:p>
-          <a:p>
-            <a:pPr>
-              <a:spcBef>
-                <a:spcPts val="600"/>
-              </a:spcBef>
-              <a:spcAft>
-                <a:spcPts val="800"/>
-              </a:spcAft>
-              <a:defRPr sz="2000">
-                <a:solidFill>
-                  <a:srgbClr val="333333"/>
-                </a:solidFill>
-              </a:defRPr>
-            </a:pPr>
-            <a:r>
-              <a:t>  • 1 child: 25.2% of income (CRISIS)</a:t>
-            </a:r>
-          </a:p>
-          <a:p>
-            <a:pPr>
-              <a:spcBef>
-                <a:spcPts val="600"/>
-              </a:spcBef>
-              <a:spcAft>
-                <a:spcPts val="800"/>
-              </a:spcAft>
-              <a:defRPr sz="2000">
-                <a:solidFill>
-                  <a:srgbClr val="333333"/>
-                </a:solidFill>
-              </a:defRPr>
-            </a:pPr>
-            <a:r>
-              <a:t>  • 2 children: 38.9% of income (IMPOSSIBLE - CHOOSE: FOOD OR HOUSING)</a:t>
-            </a:r>
-          </a:p>
-          <a:p>
-            <a:pPr>
-              <a:spcBef>
-                <a:spcPts val="600"/>
-              </a:spcBef>
-              <a:spcAft>
-                <a:spcPts val="800"/>
-              </a:spcAft>
-              <a:defRPr sz="2000">
-                <a:solidFill>
-                  <a:srgbClr val="333333"/>
-                </a:solidFill>
-              </a:defRPr>
-            </a:pPr>
-            <a:endParaRPr/>
-          </a:p>
-          <a:p>
-            <a:pPr>
-              <a:spcBef>
-                <a:spcPts val="600"/>
-              </a:spcBef>
-              <a:spcAft>
-                <a:spcPts val="800"/>
-              </a:spcAft>
-              <a:defRPr sz="2000">
-                <a:solidFill>
-                  <a:srgbClr val="333333"/>
-                </a:solidFill>
-              </a:defRPr>
-            </a:pPr>
-            <a:r>
-              <a:t>Paris birth rate: 1.4 children/woman (replacement: 2.1)</a:t>
-            </a:r>
-          </a:p>
-          <a:p>
-            <a:pPr>
-              <a:spcBef>
-                <a:spcPts val="600"/>
-              </a:spcBef>
-              <a:spcAft>
-                <a:spcPts val="800"/>
-              </a:spcAft>
-              <a:defRPr sz="2000">
-                <a:solidFill>
-                  <a:srgbClr val="333333"/>
-                </a:solidFill>
-              </a:defRPr>
-            </a:pPr>
-            <a:r>
-              <a:t>This is not cultural choice. This is economic calculus.</a:t>
-            </a:r>
-          </a:p>
-          <a:p>
-            <a:pPr>
-              <a:spcBef>
-                <a:spcPts val="600"/>
-              </a:spcBef>
-              <a:spcAft>
-                <a:spcPts val="800"/>
-              </a:spcAft>
-              <a:defRPr sz="2000">
-                <a:solidFill>
-                  <a:srgbClr val="333333"/>
-                </a:solidFill>
-              </a:defRPr>
-            </a:pPr>
-            <a:r>
-              <a:t>Families are rationing their size. Demographic collapse is silent rationing.</a:t>
+              <a:t>SMIC WORKER (21,000 EUR/year = 1,750 EUR/month):</a:t>
+            </a:r>
+          </a:p>
+          <a:p>
+            <a:pPr>
+              <a:spcBef>
+                <a:spcPts val="600"/>
+              </a:spcBef>
+              <a:spcAft>
+                <a:spcPts val="800"/>
+              </a:spcAft>
+              <a:defRPr sz="2000">
+                <a:solidFill>
+                  <a:srgbClr val="333333"/>
+                </a:solidFill>
+              </a:defRPr>
+            </a:pPr>
+            <a:r>
+              <a:t>  • Base (2 adults + 1 child): 17.4% of income (MANAGEABLE)</a:t>
+            </a:r>
+          </a:p>
+          <a:p>
+            <a:pPr>
+              <a:spcBef>
+                <a:spcPts val="600"/>
+              </a:spcBef>
+              <a:spcAft>
+                <a:spcPts val="800"/>
+              </a:spcAft>
+              <a:defRPr sz="2000">
+                <a:solidFill>
+                  <a:srgbClr val="333333"/>
+                </a:solidFill>
+              </a:defRPr>
+            </a:pPr>
+            <a:r>
+              <a:t>  • +1 Teenager: 33.8% of income (IMPOSSIBLE - NO MONEY FOR HOUSING)</a:t>
+            </a:r>
+          </a:p>
+          <a:p>
+            <a:pPr>
+              <a:spcBef>
+                <a:spcPts val="600"/>
+              </a:spcBef>
+              <a:spcAft>
+                <a:spcPts val="800"/>
+              </a:spcAft>
+              <a:defRPr sz="2000">
+                <a:solidFill>
+                  <a:srgbClr val="333333"/>
+                </a:solidFill>
+              </a:defRPr>
+            </a:pPr>
+            <a:r>
+              <a:t>  • +1 Senior: 36.4% of income (CATASTROPHIC)</a:t>
+            </a:r>
+          </a:p>
+          <a:p>
+            <a:pPr>
+              <a:spcBef>
+                <a:spcPts val="600"/>
+              </a:spcBef>
+              <a:spcAft>
+                <a:spcPts val="800"/>
+              </a:spcAft>
+              <a:defRPr sz="2000">
+                <a:solidFill>
+                  <a:srgbClr val="333333"/>
+                </a:solidFill>
+              </a:defRPr>
+            </a:pPr>
+          </a:p>
+          <a:p>
+            <a:pPr>
+              <a:spcBef>
+                <a:spcPts val="600"/>
+              </a:spcBef>
+              <a:spcAft>
+                <a:spcPts val="800"/>
+              </a:spcAft>
+              <a:defRPr sz="2000">
+                <a:solidFill>
+                  <a:srgbClr val="333333"/>
+                </a:solidFill>
+              </a:defRPr>
+            </a:pPr>
+            <a:r>
+              <a:t>MEDIAN PARIS (42,000 EUR/year):</a:t>
+            </a:r>
+          </a:p>
+          <a:p>
+            <a:pPr>
+              <a:spcBef>
+                <a:spcPts val="600"/>
+              </a:spcBef>
+              <a:spcAft>
+                <a:spcPts val="800"/>
+              </a:spcAft>
+              <a:defRPr sz="2000">
+                <a:solidFill>
+                  <a:srgbClr val="333333"/>
+                </a:solidFill>
+              </a:defRPr>
+            </a:pPr>
+            <a:r>
+              <a:t>  • Base: 8.7% of income (EXCELLENT)</a:t>
+            </a:r>
+          </a:p>
+          <a:p>
+            <a:pPr>
+              <a:spcBef>
+                <a:spcPts val="600"/>
+              </a:spcBef>
+              <a:spcAft>
+                <a:spcPts val="800"/>
+              </a:spcAft>
+              <a:defRPr sz="2000">
+                <a:solidFill>
+                  <a:srgbClr val="333333"/>
+                </a:solidFill>
+              </a:defRPr>
+            </a:pPr>
+            <a:r>
+              <a:t>  • +1 Teenager: 16.9% of income (MANAGEABLE)</a:t>
+            </a:r>
+          </a:p>
+          <a:p>
+            <a:pPr>
+              <a:spcBef>
+                <a:spcPts val="600"/>
+              </a:spcBef>
+              <a:spcAft>
+                <a:spcPts val="800"/>
+              </a:spcAft>
+              <a:defRPr sz="2000">
+                <a:solidFill>
+                  <a:srgbClr val="333333"/>
+                </a:solidFill>
+              </a:defRPr>
+            </a:pPr>
+            <a:r>
+              <a:t>  • +1 Senior: 18.2% of income (DIFFICULT BUT POSSIBLE)</a:t>
+            </a:r>
+          </a:p>
+          <a:p>
+            <a:pPr>
+              <a:spcBef>
+                <a:spcPts val="600"/>
+              </a:spcBef>
+              <a:spcAft>
+                <a:spcPts val="800"/>
+              </a:spcAft>
+              <a:defRPr sz="2000">
+                <a:solidFill>
+                  <a:srgbClr val="333333"/>
+                </a:solidFill>
+              </a:defRPr>
+            </a:pPr>
+          </a:p>
+          <a:p>
+            <a:pPr>
+              <a:spcBef>
+                <a:spcPts val="600"/>
+              </a:spcBef>
+              <a:spcAft>
+                <a:spcPts val="800"/>
+              </a:spcAft>
+              <a:defRPr sz="2000">
+                <a:solidFill>
+                  <a:srgbClr val="333333"/>
+                </a:solidFill>
+              </a:defRPr>
+            </a:pPr>
+            <a:r>
+              <a:t>THE CRUEL REALITY:</a:t>
+            </a:r>
+          </a:p>
+          <a:p>
+            <a:pPr>
+              <a:spcBef>
+                <a:spcPts val="600"/>
+              </a:spcBef>
+              <a:spcAft>
+                <a:spcPts val="800"/>
+              </a:spcAft>
+              <a:defRPr sz="2000">
+                <a:solidFill>
+                  <a:srgbClr val="333333"/>
+                </a:solidFill>
+              </a:defRPr>
+            </a:pPr>
+            <a:r>
+              <a:t>Families don't control their composition. They have children, care for aging</a:t>
+            </a:r>
+          </a:p>
+          <a:p>
+            <a:pPr>
+              <a:spcBef>
+                <a:spcPts val="600"/>
+              </a:spcBef>
+              <a:spcAft>
+                <a:spcPts val="800"/>
+              </a:spcAft>
+              <a:defRPr sz="2000">
+                <a:solidFill>
+                  <a:srgbClr val="333333"/>
+                </a:solidFill>
+              </a:defRPr>
+            </a:pPr>
+            <a:r>
+              <a:t>parents. Yet affordability multiplies with each family member.</a:t>
+            </a:r>
+          </a:p>
+          <a:p>
+            <a:pPr>
+              <a:spcBef>
+                <a:spcPts val="600"/>
+              </a:spcBef>
+              <a:spcAft>
+                <a:spcPts val="800"/>
+              </a:spcAft>
+              <a:defRPr sz="2000">
+                <a:solidFill>
+                  <a:srgbClr val="333333"/>
+                </a:solidFill>
+              </a:defRPr>
+            </a:pPr>
+            <a:r>
+              <a:t>Below 35k income: Growing families become impossible families.</a:t>
             </a:r>
           </a:p>
         </p:txBody>
@@ -5615,8 +4551,8 @@
 </p:sld>
 </file>
 
-<file path=ppt/slides/slide21.xml><?xml version="1.0" encoding="utf-8"?>
-<p:sld xmlns:a="http://schemas.openxmlformats.org/drawingml/2006/main" xmlns:r="http://schemas.openxmlformats.org/officeDocument/2006/relationships" xmlns:p="http://schemas.openxmlformats.org/presentationml/2006/main">
+<file path=ppt/slides/slide18.xml><?xml version="1.0" encoding="utf-8"?>
+<p:sld xmlns:a="http://schemas.openxmlformats.org/drawingml/2006/main" xmlns:p="http://schemas.openxmlformats.org/presentationml/2006/main" xmlns:r="http://schemas.openxmlformats.org/officeDocument/2006/relationships">
   <p:cSld>
     <p:bg>
       <p:bgPr>
@@ -5632,14 +4568,7 @@
         <p:cNvGrpSpPr/>
         <p:nvPr/>
       </p:nvGrpSpPr>
-      <p:grpSpPr>
-        <a:xfrm>
-          <a:off x="0" y="0"/>
-          <a:ext cx="0" cy="0"/>
-          <a:chOff x="0" y="0"/>
-          <a:chExt cx="0" cy="0"/>
-        </a:xfrm>
-      </p:grpSpPr>
+      <p:grpSpPr/>
       <p:sp>
         <p:nvSpPr>
           <p:cNvPr id="2" name="Rectangle 1"/>
@@ -5695,7 +4624,7 @@
               </a:defRPr>
             </a:pPr>
             <a:r>
-              <a:t>Why This Matters</a:t>
+              <a:t>The Invisibility Crisis: Who Official Statistics Erase</a:t>
             </a:r>
           </a:p>
         </p:txBody>
@@ -5736,215 +4665,199 @@
               </a:defRPr>
             </a:pPr>
             <a:r>
-              <a:t>POLICY MAKERS base decisions on official inflation rates that underestimate</a:t>
-            </a:r>
-          </a:p>
-          <a:p>
-            <a:pPr>
-              <a:spcBef>
-                <a:spcPts val="600"/>
-              </a:spcBef>
-              <a:spcAft>
-                <a:spcPts val="800"/>
-              </a:spcAft>
-              <a:defRPr sz="2000">
-                <a:solidFill>
-                  <a:srgbClr val="333333"/>
-                </a:solidFill>
-              </a:defRPr>
-            </a:pPr>
-            <a:r>
-              <a:t>real costs by 30-50%</a:t>
-            </a:r>
-          </a:p>
-          <a:p>
-            <a:pPr>
-              <a:spcBef>
-                <a:spcPts val="600"/>
-              </a:spcBef>
-              <a:spcAft>
-                <a:spcPts val="800"/>
-              </a:spcAft>
-              <a:defRPr sz="2000">
-                <a:solidFill>
-                  <a:srgbClr val="333333"/>
-                </a:solidFill>
-              </a:defRPr>
-            </a:pPr>
-            <a:endParaRPr/>
-          </a:p>
-          <a:p>
-            <a:pPr>
-              <a:spcBef>
-                <a:spcPts val="600"/>
-              </a:spcBef>
-              <a:spcAft>
-                <a:spcPts val="800"/>
-              </a:spcAft>
-              <a:defRPr sz="2000">
-                <a:solidFill>
-                  <a:srgbClr val="333333"/>
-                </a:solidFill>
-              </a:defRPr>
-            </a:pPr>
-            <a:r>
-              <a:t>WORKERS see their salaries (linked to inflation) never keep pace with actual</a:t>
-            </a:r>
-          </a:p>
-          <a:p>
-            <a:pPr>
-              <a:spcBef>
-                <a:spcPts val="600"/>
-              </a:spcBef>
-              <a:spcAft>
-                <a:spcPts val="800"/>
-              </a:spcAft>
-              <a:defRPr sz="2000">
-                <a:solidFill>
-                  <a:srgbClr val="333333"/>
-                </a:solidFill>
-              </a:defRPr>
-            </a:pPr>
-            <a:r>
-              <a:t>living expenses</a:t>
-            </a:r>
-          </a:p>
-          <a:p>
-            <a:pPr>
-              <a:spcBef>
-                <a:spcPts val="600"/>
-              </a:spcBef>
-              <a:spcAft>
-                <a:spcPts val="800"/>
-              </a:spcAft>
-              <a:defRPr sz="2000">
-                <a:solidFill>
-                  <a:srgbClr val="333333"/>
-                </a:solidFill>
-              </a:defRPr>
-            </a:pPr>
-            <a:endParaRPr/>
-          </a:p>
-          <a:p>
-            <a:pPr>
-              <a:spcBef>
-                <a:spcPts val="600"/>
-              </a:spcBef>
-              <a:spcAft>
-                <a:spcPts val="800"/>
-              </a:spcAft>
-              <a:defRPr sz="2000">
-                <a:solidFill>
-                  <a:srgbClr val="333333"/>
-                </a:solidFill>
-              </a:defRPr>
-            </a:pPr>
-            <a:r>
-              <a:t>FAMILIES make impossible choices: healthy food OR paying rent?</a:t>
-            </a:r>
-          </a:p>
-          <a:p>
-            <a:pPr>
-              <a:spcBef>
-                <a:spcPts val="600"/>
-              </a:spcBef>
-              <a:spcAft>
-                <a:spcPts val="800"/>
-              </a:spcAft>
-              <a:defRPr sz="2000">
-                <a:solidFill>
-                  <a:srgbClr val="333333"/>
-                </a:solidFill>
-              </a:defRPr>
-            </a:pPr>
-            <a:r>
-              <a:t>Diapers OR transportation?</a:t>
-            </a:r>
-          </a:p>
-          <a:p>
-            <a:pPr>
-              <a:spcBef>
-                <a:spcPts val="600"/>
-              </a:spcBef>
-              <a:spcAft>
-                <a:spcPts val="800"/>
-              </a:spcAft>
-              <a:defRPr sz="2000">
-                <a:solidFill>
-                  <a:srgbClr val="333333"/>
-                </a:solidFill>
-              </a:defRPr>
-            </a:pPr>
-            <a:endParaRPr/>
-          </a:p>
-          <a:p>
-            <a:pPr>
-              <a:spcBef>
-                <a:spcPts val="600"/>
-              </a:spcBef>
-              <a:spcAft>
-                <a:spcPts val="800"/>
-              </a:spcAft>
-              <a:defRPr sz="2000">
-                <a:solidFill>
-                  <a:srgbClr val="333333"/>
-                </a:solidFill>
-              </a:defRPr>
-            </a:pPr>
-            <a:r>
-              <a:t>INEQUALITY is hidden in the numbers. What's not measured is not managed.</a:t>
-            </a:r>
-          </a:p>
-          <a:p>
-            <a:pPr>
-              <a:spcBef>
-                <a:spcPts val="600"/>
-              </a:spcBef>
-              <a:spcAft>
-                <a:spcPts val="800"/>
-              </a:spcAft>
-              <a:defRPr sz="2000">
-                <a:solidFill>
-                  <a:srgbClr val="333333"/>
-                </a:solidFill>
-              </a:defRPr>
-            </a:pPr>
-            <a:endParaRPr/>
-          </a:p>
-          <a:p>
-            <a:pPr>
-              <a:spcBef>
-                <a:spcPts val="600"/>
-              </a:spcBef>
-              <a:spcAft>
-                <a:spcPts val="800"/>
-              </a:spcAft>
-              <a:defRPr sz="2000">
-                <a:solidFill>
-                  <a:srgbClr val="333333"/>
-                </a:solidFill>
-              </a:defRPr>
-            </a:pPr>
-            <a:r>
-              <a:t>STATISTICS are not neutral. They reveal what society has decided to COUNT</a:t>
-            </a:r>
-          </a:p>
-          <a:p>
-            <a:pPr>
-              <a:spcBef>
-                <a:spcPts val="600"/>
-              </a:spcBef>
-              <a:spcAft>
-                <a:spcPts val="800"/>
-              </a:spcAft>
-              <a:defRPr sz="2000">
-                <a:solidFill>
-                  <a:srgbClr val="333333"/>
-                </a:solidFill>
-              </a:defRPr>
-            </a:pPr>
-            <a:r>
-              <a:t>and what it chooses to IGNORE.</a:t>
+              <a:t>SENIORS: Specialized dietary needs (soft foods, health management)</a:t>
+            </a:r>
+          </a:p>
+          <a:p>
+            <a:pPr>
+              <a:spcBef>
+                <a:spcPts val="600"/>
+              </a:spcBef>
+              <a:spcAft>
+                <a:spcPts val="800"/>
+              </a:spcAft>
+              <a:defRPr sz="2000">
+                <a:solidFill>
+                  <a:srgbClr val="333333"/>
+                </a:solidFill>
+              </a:defRPr>
+            </a:pPr>
+            <a:r>
+              <a:t>  • €334/month more than baseline, but counted as 'standard adult'</a:t>
+            </a:r>
+          </a:p>
+          <a:p>
+            <a:pPr>
+              <a:spcBef>
+                <a:spcPts val="600"/>
+              </a:spcBef>
+              <a:spcAft>
+                <a:spcPts val="800"/>
+              </a:spcAft>
+              <a:defRPr sz="2000">
+                <a:solidFill>
+                  <a:srgbClr val="333333"/>
+                </a:solidFill>
+              </a:defRPr>
+            </a:pPr>
+            <a:r>
+              <a:t>  • Elderly people disappear from policy view</a:t>
+            </a:r>
+          </a:p>
+          <a:p>
+            <a:pPr>
+              <a:spcBef>
+                <a:spcPts val="600"/>
+              </a:spcBef>
+              <a:spcAft>
+                <a:spcPts val="800"/>
+              </a:spcAft>
+              <a:defRPr sz="2000">
+                <a:solidFill>
+                  <a:srgbClr val="333333"/>
+                </a:solidFill>
+              </a:defRPr>
+            </a:pPr>
+          </a:p>
+          <a:p>
+            <a:pPr>
+              <a:spcBef>
+                <a:spcPts val="600"/>
+              </a:spcBef>
+              <a:spcAft>
+                <a:spcPts val="800"/>
+              </a:spcAft>
+              <a:defRPr sz="2000">
+                <a:solidFill>
+                  <a:srgbClr val="333333"/>
+                </a:solidFill>
+              </a:defRPr>
+            </a:pPr>
+            <a:r>
+              <a:t>TEENAGERS: Abrupt appetite transition (110% cost jump at age 13)</a:t>
+            </a:r>
+          </a:p>
+          <a:p>
+            <a:pPr>
+              <a:spcBef>
+                <a:spcPts val="600"/>
+              </a:spcBef>
+              <a:spcAft>
+                <a:spcPts val="800"/>
+              </a:spcAft>
+              <a:defRPr sz="2000">
+                <a:solidFill>
+                  <a:srgbClr val="333333"/>
+                </a:solidFill>
+              </a:defRPr>
+            </a:pPr>
+            <a:r>
+              <a:t>  • Malnutrition risk precisely when growth is critical</a:t>
+            </a:r>
+          </a:p>
+          <a:p>
+            <a:pPr>
+              <a:spcBef>
+                <a:spcPts val="600"/>
+              </a:spcBef>
+              <a:spcAft>
+                <a:spcPts val="800"/>
+              </a:spcAft>
+              <a:defRPr sz="2000">
+                <a:solidFill>
+                  <a:srgbClr val="333333"/>
+                </a:solidFill>
+              </a:defRPr>
+            </a:pPr>
+            <a:r>
+              <a:t>  • Not child-cost, not adult-cost—uncounted gap</a:t>
+            </a:r>
+          </a:p>
+          <a:p>
+            <a:pPr>
+              <a:spcBef>
+                <a:spcPts val="600"/>
+              </a:spcBef>
+              <a:spcAft>
+                <a:spcPts val="800"/>
+              </a:spcAft>
+              <a:defRPr sz="2000">
+                <a:solidFill>
+                  <a:srgbClr val="333333"/>
+                </a:solidFill>
+              </a:defRPr>
+            </a:pPr>
+          </a:p>
+          <a:p>
+            <a:pPr>
+              <a:spcBef>
+                <a:spcPts val="600"/>
+              </a:spcBef>
+              <a:spcAft>
+                <a:spcPts val="800"/>
+              </a:spcAft>
+              <a:defRPr sz="2000">
+                <a:solidFill>
+                  <a:srgbClr val="333333"/>
+                </a:solidFill>
+              </a:defRPr>
+            </a:pPr>
+            <a:r>
+              <a:t>THE SANDWICH GENERATION: Supporting both elderly AND children</a:t>
+            </a:r>
+          </a:p>
+          <a:p>
+            <a:pPr>
+              <a:spcBef>
+                <a:spcPts val="600"/>
+              </a:spcBef>
+              <a:spcAft>
+                <a:spcPts val="800"/>
+              </a:spcAft>
+              <a:defRPr sz="2000">
+                <a:solidFill>
+                  <a:srgbClr val="333333"/>
+                </a:solidFill>
+              </a:defRPr>
+            </a:pPr>
+            <a:r>
+              <a:t>  • 45-year-old: Parent +€334, Child +€304 = household multiplied</a:t>
+            </a:r>
+          </a:p>
+          <a:p>
+            <a:pPr>
+              <a:spcBef>
+                <a:spcPts val="600"/>
+              </a:spcBef>
+              <a:spcAft>
+                <a:spcPts val="800"/>
+              </a:spcAft>
+              <a:defRPr sz="2000">
+                <a:solidFill>
+                  <a:srgbClr val="333333"/>
+                </a:solidFill>
+              </a:defRPr>
+            </a:pPr>
+            <a:r>
+              <a:t>  • €941/month food costs (27% of median income)</a:t>
+            </a:r>
+          </a:p>
+          <a:p>
+            <a:pPr>
+              <a:spcBef>
+                <a:spcPts val="600"/>
+              </a:spcBef>
+              <a:spcAft>
+                <a:spcPts val="800"/>
+              </a:spcAft>
+              <a:defRPr sz="2000">
+                <a:solidFill>
+                  <a:srgbClr val="333333"/>
+                </a:solidFill>
+              </a:defRPr>
+            </a:pPr>
+            <a:r>
+              <a:t>  • Silent burden. Invisible in statistics. Breaking quietly.</a:t>
             </a:r>
           </a:p>
         </p:txBody>
@@ -5957,8 +4870,112 @@
 </p:sld>
 </file>
 
-<file path=ppt/slides/slide22.xml><?xml version="1.0" encoding="utf-8"?>
-<p:sld xmlns:a="http://schemas.openxmlformats.org/drawingml/2006/main" xmlns:r="http://schemas.openxmlformats.org/officeDocument/2006/relationships" xmlns:p="http://schemas.openxmlformats.org/presentationml/2006/main">
+<file path=ppt/slides/slide19.xml><?xml version="1.0" encoding="utf-8"?>
+<p:sld xmlns:a="http://schemas.openxmlformats.org/drawingml/2006/main" xmlns:p="http://schemas.openxmlformats.org/presentationml/2006/main" xmlns:r="http://schemas.openxmlformats.org/officeDocument/2006/relationships">
+  <p:cSld>
+    <p:bg>
+      <p:bgPr>
+        <a:solidFill>
+          <a:srgbClr val="1F4E79"/>
+        </a:solidFill>
+        <a:effectLst/>
+      </p:bgPr>
+    </p:bg>
+    <p:spTree>
+      <p:nvGrpSpPr>
+        <p:cNvPr id="1" name=""/>
+        <p:cNvGrpSpPr/>
+        <p:nvPr/>
+      </p:nvGrpSpPr>
+      <p:grpSpPr/>
+      <p:sp>
+        <p:nvSpPr>
+          <p:cNvPr id="2" name="TextBox 1"/>
+          <p:cNvSpPr txBox="1"/>
+          <p:nvPr/>
+        </p:nvSpPr>
+        <p:spPr>
+          <a:xfrm>
+            <a:off x="914400" y="2286000"/>
+            <a:ext cx="7315200" cy="2286000"/>
+          </a:xfrm>
+          <a:prstGeom prst="rect">
+            <a:avLst/>
+          </a:prstGeom>
+          <a:noFill/>
+        </p:spPr>
+        <p:txBody>
+          <a:bodyPr wrap="square">
+            <a:spAutoFit/>
+          </a:bodyPr>
+          <a:lstStyle/>
+          <a:p>
+            <a:pPr algn="ctr">
+              <a:defRPr sz="3200" b="1" i="1">
+                <a:solidFill>
+                  <a:srgbClr val="ED7D31"/>
+                </a:solidFill>
+              </a:defRPr>
+            </a:pPr>
+            <a:r>
+              <a:t>What gets priced out of reach doesn't get born.</a:t>
+            </a:r>
+            <a:br/>
+            <a:r>
+              <a:t>Food affordability is not just poverty.</a:t>
+            </a:r>
+            <a:br/>
+            <a:r>
+              <a:t>It's a demographic determinant.</a:t>
+            </a:r>
+          </a:p>
+        </p:txBody>
+      </p:sp>
+      <p:sp>
+        <p:nvSpPr>
+          <p:cNvPr id="3" name="TextBox 2"/>
+          <p:cNvSpPr txBox="1"/>
+          <p:nvPr/>
+        </p:nvSpPr>
+        <p:spPr>
+          <a:xfrm>
+            <a:off x="914400" y="4754880"/>
+            <a:ext cx="7315200" cy="914400"/>
+          </a:xfrm>
+          <a:prstGeom prst="rect">
+            <a:avLst/>
+          </a:prstGeom>
+          <a:noFill/>
+        </p:spPr>
+        <p:txBody>
+          <a:bodyPr wrap="none">
+            <a:spAutoFit/>
+          </a:bodyPr>
+          <a:lstStyle/>
+          <a:p>
+            <a:pPr algn="ctr">
+              <a:defRPr sz="2000">
+                <a:solidFill>
+                  <a:srgbClr val="FFFFFF"/>
+                </a:solidFill>
+              </a:defRPr>
+            </a:pPr>
+            <a:r>
+              <a:t>THE HIDDEN CONSEQUENCE: Why Birth Rates Are Collapsing</a:t>
+            </a:r>
+          </a:p>
+        </p:txBody>
+      </p:sp>
+    </p:spTree>
+  </p:cSld>
+  <p:clrMapOvr>
+    <a:masterClrMapping/>
+  </p:clrMapOvr>
+</p:sld>
+</file>
+
+<file path=ppt/slides/slide2.xml><?xml version="1.0" encoding="utf-8"?>
+<p:sld xmlns:a="http://schemas.openxmlformats.org/drawingml/2006/main" xmlns:p="http://schemas.openxmlformats.org/presentationml/2006/main" xmlns:r="http://schemas.openxmlformats.org/officeDocument/2006/relationships">
   <p:cSld>
     <p:bg>
       <p:bgPr>
@@ -5974,436 +4991,7 @@
         <p:cNvGrpSpPr/>
         <p:nvPr/>
       </p:nvGrpSpPr>
-      <p:grpSpPr>
-        <a:xfrm>
-          <a:off x="0" y="0"/>
-          <a:ext cx="0" cy="0"/>
-          <a:chOff x="0" y="0"/>
-          <a:chExt cx="0" cy="0"/>
-        </a:xfrm>
-      </p:grpSpPr>
-      <p:sp>
-        <p:nvSpPr>
-          <p:cNvPr id="2" name="Rectangle 1"/>
-          <p:cNvSpPr/>
-          <p:nvPr/>
-        </p:nvSpPr>
-        <p:spPr>
-          <a:xfrm>
-            <a:off x="0" y="0"/>
-            <a:ext cx="9144000" cy="1188720"/>
-          </a:xfrm>
-          <a:prstGeom prst="rect">
-            <a:avLst/>
-          </a:prstGeom>
-          <a:solidFill>
-            <a:srgbClr val="1F4E79"/>
-          </a:solidFill>
-          <a:ln>
-            <a:solidFill>
-              <a:srgbClr val="1F4E79"/>
-            </a:solidFill>
-          </a:ln>
-        </p:spPr>
-        <p:style>
-          <a:lnRef idx="1">
-            <a:schemeClr val="accent1"/>
-          </a:lnRef>
-          <a:fillRef idx="3">
-            <a:schemeClr val="accent1"/>
-          </a:fillRef>
-          <a:effectRef idx="2">
-            <a:schemeClr val="accent1"/>
-          </a:effectRef>
-          <a:fontRef idx="minor">
-            <a:schemeClr val="lt1"/>
-          </a:fontRef>
-        </p:style>
-        <p:txBody>
-          <a:bodyPr rtlCol="0" anchor="ctr"/>
-          <a:lstStyle/>
-          <a:p>
-            <a:pPr algn="ctr">
-              <a:spcBef>
-                <a:spcPts val="1200"/>
-              </a:spcBef>
-              <a:spcAft>
-                <a:spcPts val="1200"/>
-              </a:spcAft>
-              <a:defRPr sz="4400" b="1">
-                <a:solidFill>
-                  <a:srgbClr val="FFFFFF"/>
-                </a:solidFill>
-              </a:defRPr>
-            </a:pPr>
-            <a:r>
-              <a:rPr dirty="0"/>
-              <a:t>The Opportunity: Real Data for Real Decisions</a:t>
-            </a:r>
-          </a:p>
-        </p:txBody>
-      </p:sp>
-      <p:sp>
-        <p:nvSpPr>
-          <p:cNvPr id="3" name="TextBox 2"/>
-          <p:cNvSpPr txBox="1"/>
-          <p:nvPr/>
-        </p:nvSpPr>
-        <p:spPr>
-          <a:xfrm>
-            <a:off x="731520" y="1188720"/>
-            <a:ext cx="7680960" cy="5212080"/>
-          </a:xfrm>
-          <a:prstGeom prst="rect">
-            <a:avLst/>
-          </a:prstGeom>
-          <a:noFill/>
-        </p:spPr>
-        <p:txBody>
-          <a:bodyPr wrap="square">
-            <a:spAutoFit/>
-          </a:bodyPr>
-          <a:lstStyle/>
-          <a:p>
-            <a:pPr>
-              <a:spcBef>
-                <a:spcPts val="600"/>
-              </a:spcBef>
-              <a:spcAft>
-                <a:spcPts val="800"/>
-              </a:spcAft>
-              <a:defRPr sz="2000">
-                <a:solidFill>
-                  <a:srgbClr val="333333"/>
-                </a:solidFill>
-              </a:defRPr>
-            </a:pPr>
-            <a:r>
-              <a:t>Snipper Tool changes this by collecting REAL pricing data for REAL baskets:</a:t>
-            </a:r>
-          </a:p>
-          <a:p>
-            <a:pPr>
-              <a:spcBef>
-                <a:spcPts val="600"/>
-              </a:spcBef>
-              <a:spcAft>
-                <a:spcPts val="800"/>
-              </a:spcAft>
-              <a:defRPr sz="2000">
-                <a:solidFill>
-                  <a:srgbClr val="333333"/>
-                </a:solidFill>
-              </a:defRPr>
-            </a:pPr>
-            <a:endParaRPr/>
-          </a:p>
-          <a:p>
-            <a:pPr>
-              <a:spcBef>
-                <a:spcPts val="600"/>
-              </a:spcBef>
-              <a:spcAft>
-                <a:spcPts val="800"/>
-              </a:spcAft>
-              <a:defRPr sz="2000">
-                <a:solidFill>
-                  <a:srgbClr val="333333"/>
-                </a:solidFill>
-              </a:defRPr>
-            </a:pPr>
-            <a:r>
-              <a:t>Real families don't buy INSEE baskets.</a:t>
-            </a:r>
-          </a:p>
-          <a:p>
-            <a:pPr>
-              <a:spcBef>
-                <a:spcPts val="600"/>
-              </a:spcBef>
-              <a:spcAft>
-                <a:spcPts val="800"/>
-              </a:spcAft>
-              <a:defRPr sz="2000">
-                <a:solidFill>
-                  <a:srgbClr val="333333"/>
-                </a:solidFill>
-              </a:defRPr>
-            </a:pPr>
-            <a:r>
-              <a:t>They buy complete meals, dietary alternatives, baby products, and items</a:t>
-            </a:r>
-          </a:p>
-          <a:p>
-            <a:pPr>
-              <a:spcBef>
-                <a:spcPts val="600"/>
-              </a:spcBef>
-              <a:spcAft>
-                <a:spcPts val="800"/>
-              </a:spcAft>
-              <a:defRPr sz="2000">
-                <a:solidFill>
-                  <a:srgbClr val="333333"/>
-                </a:solidFill>
-              </a:defRPr>
-            </a:pPr>
-            <a:r>
-              <a:t>that support healthy, dignified family life.</a:t>
-            </a:r>
-          </a:p>
-          <a:p>
-            <a:pPr>
-              <a:spcBef>
-                <a:spcPts val="600"/>
-              </a:spcBef>
-              <a:spcAft>
-                <a:spcPts val="800"/>
-              </a:spcAft>
-              <a:defRPr sz="2000">
-                <a:solidFill>
-                  <a:srgbClr val="333333"/>
-                </a:solidFill>
-              </a:defRPr>
-            </a:pPr>
-            <a:endParaRPr/>
-          </a:p>
-          <a:p>
-            <a:pPr>
-              <a:spcBef>
-                <a:spcPts val="600"/>
-              </a:spcBef>
-              <a:spcAft>
-                <a:spcPts val="800"/>
-              </a:spcAft>
-              <a:defRPr sz="2000">
-                <a:solidFill>
-                  <a:srgbClr val="333333"/>
-                </a:solidFill>
-              </a:defRPr>
-            </a:pPr>
-            <a:r>
-              <a:t>By tracking ACTUAL purchases across Paris supermarkets, Snipper Tool can:</a:t>
-            </a:r>
-          </a:p>
-          <a:p>
-            <a:pPr>
-              <a:spcBef>
-                <a:spcPts val="600"/>
-              </a:spcBef>
-              <a:spcAft>
-                <a:spcPts val="800"/>
-              </a:spcAft>
-              <a:defRPr sz="2000">
-                <a:solidFill>
-                  <a:srgbClr val="333333"/>
-                </a:solidFill>
-              </a:defRPr>
-            </a:pPr>
-            <a:r>
-              <a:t>  • Expose the gap between official statistics and real costs</a:t>
-            </a:r>
-          </a:p>
-          <a:p>
-            <a:pPr>
-              <a:spcBef>
-                <a:spcPts val="600"/>
-              </a:spcBef>
-              <a:spcAft>
-                <a:spcPts val="800"/>
-              </a:spcAft>
-              <a:defRPr sz="2000">
-                <a:solidFill>
-                  <a:srgbClr val="333333"/>
-                </a:solidFill>
-              </a:defRPr>
-            </a:pPr>
-            <a:r>
-              <a:t>  • Track health-focused pricing decisions</a:t>
-            </a:r>
-          </a:p>
-          <a:p>
-            <a:pPr>
-              <a:spcBef>
-                <a:spcPts val="600"/>
-              </a:spcBef>
-              <a:spcAft>
-                <a:spcPts val="800"/>
-              </a:spcAft>
-              <a:defRPr sz="2000">
-                <a:solidFill>
-                  <a:srgbClr val="333333"/>
-                </a:solidFill>
-              </a:defRPr>
-            </a:pPr>
-            <a:r>
-              <a:t>  • Identify affordability cliffs by income and family type</a:t>
-            </a:r>
-          </a:p>
-          <a:p>
-            <a:pPr>
-              <a:spcBef>
-                <a:spcPts val="600"/>
-              </a:spcBef>
-              <a:spcAft>
-                <a:spcPts val="800"/>
-              </a:spcAft>
-              <a:defRPr sz="2000">
-                <a:solidFill>
-                  <a:srgbClr val="333333"/>
-                </a:solidFill>
-              </a:defRPr>
-            </a:pPr>
-            <a:r>
-              <a:t>  • Provide data for better policy and wage decisions</a:t>
-            </a:r>
-          </a:p>
-        </p:txBody>
-      </p:sp>
-    </p:spTree>
-  </p:cSld>
-  <p:clrMapOvr>
-    <a:masterClrMapping/>
-  </p:clrMapOvr>
-</p:sld>
-</file>
-
-<file path=ppt/slides/slide23.xml><?xml version="1.0" encoding="utf-8"?>
-<p:sld xmlns:a="http://schemas.openxmlformats.org/drawingml/2006/main" xmlns:r="http://schemas.openxmlformats.org/officeDocument/2006/relationships" xmlns:p="http://schemas.openxmlformats.org/presentationml/2006/main">
-  <p:cSld>
-    <p:bg>
-      <p:bgPr>
-        <a:solidFill>
-          <a:srgbClr val="1F4E79"/>
-        </a:solidFill>
-        <a:effectLst/>
-      </p:bgPr>
-    </p:bg>
-    <p:spTree>
-      <p:nvGrpSpPr>
-        <p:cNvPr id="1" name=""/>
-        <p:cNvGrpSpPr/>
-        <p:nvPr/>
-      </p:nvGrpSpPr>
-      <p:grpSpPr>
-        <a:xfrm>
-          <a:off x="0" y="0"/>
-          <a:ext cx="0" cy="0"/>
-          <a:chOff x="0" y="0"/>
-          <a:chExt cx="0" cy="0"/>
-        </a:xfrm>
-      </p:grpSpPr>
-      <p:sp>
-        <p:nvSpPr>
-          <p:cNvPr id="2" name="TextBox 1"/>
-          <p:cNvSpPr txBox="1"/>
-          <p:nvPr/>
-        </p:nvSpPr>
-        <p:spPr>
-          <a:xfrm>
-            <a:off x="914400" y="2286000"/>
-            <a:ext cx="7315200" cy="1938992"/>
-          </a:xfrm>
-          <a:prstGeom prst="rect">
-            <a:avLst/>
-          </a:prstGeom>
-          <a:noFill/>
-        </p:spPr>
-        <p:txBody>
-          <a:bodyPr wrap="square">
-            <a:spAutoFit/>
-          </a:bodyPr>
-          <a:lstStyle/>
-          <a:p>
-            <a:pPr algn="ctr">
-              <a:defRPr sz="3200" b="1" i="1">
-                <a:solidFill>
-                  <a:srgbClr val="ED7D31"/>
-                </a:solidFill>
-              </a:defRPr>
-            </a:pPr>
-            <a:r>
-              <a:rPr sz="4000" dirty="0"/>
-              <a:t>The numbers never lie.</a:t>
-            </a:r>
-            <a:br>
-              <a:rPr sz="4000" dirty="0"/>
-            </a:br>
-            <a:r>
-              <a:rPr sz="4000" dirty="0"/>
-              <a:t>But incomplete numbers hide the truth.</a:t>
-            </a:r>
-          </a:p>
-        </p:txBody>
-      </p:sp>
-      <p:sp>
-        <p:nvSpPr>
-          <p:cNvPr id="3" name="TextBox 2"/>
-          <p:cNvSpPr txBox="1"/>
-          <p:nvPr/>
-        </p:nvSpPr>
-        <p:spPr>
-          <a:xfrm>
-            <a:off x="914400" y="4754880"/>
-            <a:ext cx="7315200" cy="914400"/>
-          </a:xfrm>
-          <a:prstGeom prst="rect">
-            <a:avLst/>
-          </a:prstGeom>
-          <a:noFill/>
-        </p:spPr>
-        <p:txBody>
-          <a:bodyPr wrap="none">
-            <a:spAutoFit/>
-          </a:bodyPr>
-          <a:lstStyle/>
-          <a:p>
-            <a:pPr algn="ctr">
-              <a:defRPr sz="2000">
-                <a:solidFill>
-                  <a:srgbClr val="FFFFFF"/>
-                </a:solidFill>
-              </a:defRPr>
-            </a:pPr>
-            <a:r>
-              <a:t>FINAL INSIGHT: What You Measure is What You Manage</a:t>
-            </a:r>
-          </a:p>
-        </p:txBody>
-      </p:sp>
-    </p:spTree>
-  </p:cSld>
-  <p:clrMapOvr>
-    <a:masterClrMapping/>
-  </p:clrMapOvr>
-</p:sld>
-</file>
-
-<file path=ppt/slides/slide24.xml><?xml version="1.0" encoding="utf-8"?>
-<p:sld xmlns:a="http://schemas.openxmlformats.org/drawingml/2006/main" xmlns:r="http://schemas.openxmlformats.org/officeDocument/2006/relationships" xmlns:p="http://schemas.openxmlformats.org/presentationml/2006/main">
-  <p:cSld>
-    <p:bg>
-      <p:bgPr>
-        <a:solidFill>
-          <a:srgbClr val="FFFFFF"/>
-        </a:solidFill>
-        <a:effectLst/>
-      </p:bgPr>
-    </p:bg>
-    <p:spTree>
-      <p:nvGrpSpPr>
-        <p:cNvPr id="1" name=""/>
-        <p:cNvGrpSpPr/>
-        <p:nvPr/>
-      </p:nvGrpSpPr>
-      <p:grpSpPr>
-        <a:xfrm>
-          <a:off x="0" y="0"/>
-          <a:ext cx="0" cy="0"/>
-          <a:chOff x="0" y="0"/>
-          <a:chExt cx="0" cy="0"/>
-        </a:xfrm>
-      </p:grpSpPr>
+      <p:grpSpPr/>
       <p:sp>
         <p:nvSpPr>
           <p:cNvPr id="2" name="Rectangle 1"/>
@@ -6459,7 +5047,7 @@
               </a:defRPr>
             </a:pPr>
             <a:r>
-              <a:t>This Analysis</a:t>
+              <a:t>The Problem: Official Baskets are Incomplete</a:t>
             </a:r>
           </a:p>
         </p:txBody>
@@ -6500,253 +5088,163 @@
               </a:defRPr>
             </a:pPr>
             <a:r>
-              <a:t>Dataset: 2,163 synthetic price observations (Apr 2025 - Apr 2026)</a:t>
-            </a:r>
-          </a:p>
-          <a:p>
-            <a:pPr>
-              <a:spcBef>
-                <a:spcPts val="600"/>
-              </a:spcBef>
-              <a:spcAft>
-                <a:spcPts val="800"/>
-              </a:spcAft>
-              <a:defRPr sz="2000">
-                <a:solidFill>
-                  <a:srgbClr val="333333"/>
-                </a:solidFill>
-              </a:defRPr>
-            </a:pPr>
-            <a:r>
-              <a:t>From Snipper Tool captures in Paris Auchan and Carrefour stores</a:t>
-            </a:r>
-          </a:p>
-          <a:p>
-            <a:pPr>
-              <a:spcBef>
-                <a:spcPts val="600"/>
-              </a:spcBef>
-              <a:spcAft>
-                <a:spcPts val="800"/>
-              </a:spcAft>
-              <a:defRPr sz="2000">
-                <a:solidFill>
-                  <a:srgbClr val="333333"/>
-                </a:solidFill>
-              </a:defRPr>
-            </a:pPr>
-            <a:endParaRPr/>
-          </a:p>
-          <a:p>
-            <a:pPr>
-              <a:spcBef>
-                <a:spcPts val="600"/>
-              </a:spcBef>
-              <a:spcAft>
-                <a:spcPts val="800"/>
-              </a:spcAft>
-              <a:defRPr sz="2000">
-                <a:solidFill>
-                  <a:srgbClr val="333333"/>
-                </a:solidFill>
-              </a:defRPr>
-            </a:pPr>
-            <a:r>
-              <a:t>Compared THREE basket types:</a:t>
-            </a:r>
-          </a:p>
-          <a:p>
-            <a:pPr>
-              <a:spcBef>
-                <a:spcPts val="600"/>
-              </a:spcBef>
-              <a:spcAft>
-                <a:spcPts val="800"/>
-              </a:spcAft>
-              <a:defRPr sz="2000">
-                <a:solidFill>
-                  <a:srgbClr val="333333"/>
-                </a:solidFill>
-              </a:defRPr>
-            </a:pPr>
-            <a:r>
-              <a:t>  1. Official INSEE Minimal Basket</a:t>
-            </a:r>
-          </a:p>
-          <a:p>
-            <a:pPr>
-              <a:spcBef>
-                <a:spcPts val="600"/>
-              </a:spcBef>
-              <a:spcAft>
-                <a:spcPts val="800"/>
-              </a:spcAft>
-              <a:defRPr sz="2000">
-                <a:solidFill>
-                  <a:srgbClr val="333333"/>
-                </a:solidFill>
-              </a:defRPr>
-            </a:pPr>
-            <a:r>
-              <a:t>  2. Real Complete Living Basket (includes complementary items)</a:t>
-            </a:r>
-          </a:p>
-          <a:p>
-            <a:pPr>
-              <a:spcBef>
-                <a:spcPts val="600"/>
-              </a:spcBef>
-              <a:spcAft>
-                <a:spcPts val="800"/>
-              </a:spcAft>
-              <a:defRPr sz="2000">
-                <a:solidFill>
-                  <a:srgbClr val="333333"/>
-                </a:solidFill>
-              </a:defRPr>
-            </a:pPr>
-            <a:r>
-              <a:t>  3. Healthy Complete Basket (for nutritional wellness)</a:t>
-            </a:r>
-          </a:p>
-          <a:p>
-            <a:pPr>
-              <a:spcBef>
-                <a:spcPts val="600"/>
-              </a:spcBef>
-              <a:spcAft>
-                <a:spcPts val="800"/>
-              </a:spcAft>
-              <a:defRPr sz="2000">
-                <a:solidFill>
-                  <a:srgbClr val="333333"/>
-                </a:solidFill>
-              </a:defRPr>
-            </a:pPr>
-            <a:endParaRPr/>
-          </a:p>
-          <a:p>
-            <a:pPr>
-              <a:spcBef>
-                <a:spcPts val="600"/>
-              </a:spcBef>
-              <a:spcAft>
-                <a:spcPts val="800"/>
-              </a:spcAft>
-              <a:defRPr sz="2000">
-                <a:solidFill>
-                  <a:srgbClr val="333333"/>
-                </a:solidFill>
-              </a:defRPr>
-            </a:pPr>
-            <a:r>
-              <a:t>Against PARIS HOUSEHOLD INCOMES:</a:t>
-            </a:r>
-          </a:p>
-          <a:p>
-            <a:pPr>
-              <a:spcBef>
-                <a:spcPts val="600"/>
-              </a:spcBef>
-              <a:spcAft>
-                <a:spcPts val="800"/>
-              </a:spcAft>
-              <a:defRPr sz="2000">
-                <a:solidFill>
-                  <a:srgbClr val="333333"/>
-                </a:solidFill>
-              </a:defRPr>
-            </a:pPr>
-            <a:r>
-              <a:t>  • SMIC (minimum wage): 21,000 EUR/year</a:t>
-            </a:r>
-          </a:p>
-          <a:p>
-            <a:pPr>
-              <a:spcBef>
-                <a:spcPts val="600"/>
-              </a:spcBef>
-              <a:spcAft>
-                <a:spcPts val="800"/>
-              </a:spcAft>
-              <a:defRPr sz="2000">
-                <a:solidFill>
-                  <a:srgbClr val="333333"/>
-                </a:solidFill>
-              </a:defRPr>
-            </a:pPr>
-            <a:r>
-              <a:t>  • Low income: 28,000 EUR/year</a:t>
-            </a:r>
-          </a:p>
-          <a:p>
-            <a:pPr>
-              <a:spcBef>
-                <a:spcPts val="600"/>
-              </a:spcBef>
-              <a:spcAft>
-                <a:spcPts val="800"/>
-              </a:spcAft>
-              <a:defRPr sz="2000">
-                <a:solidFill>
-                  <a:srgbClr val="333333"/>
-                </a:solidFill>
-              </a:defRPr>
-            </a:pPr>
-            <a:r>
-              <a:t>  • Median: 42,000 EUR/year</a:t>
-            </a:r>
-          </a:p>
-          <a:p>
-            <a:pPr>
-              <a:spcBef>
-                <a:spcPts val="600"/>
-              </a:spcBef>
-              <a:spcAft>
-                <a:spcPts val="800"/>
-              </a:spcAft>
-              <a:defRPr sz="2000">
-                <a:solidFill>
-                  <a:srgbClr val="333333"/>
-                </a:solidFill>
-              </a:defRPr>
-            </a:pPr>
-            <a:r>
-              <a:t>  • Upper middle: 65,000 EUR/year</a:t>
-            </a:r>
-          </a:p>
-          <a:p>
-            <a:pPr>
-              <a:spcBef>
-                <a:spcPts val="600"/>
-              </a:spcBef>
-              <a:spcAft>
-                <a:spcPts val="800"/>
-              </a:spcAft>
-              <a:defRPr sz="2000">
-                <a:solidFill>
-                  <a:srgbClr val="333333"/>
-                </a:solidFill>
-              </a:defRPr>
-            </a:pPr>
-            <a:endParaRPr/>
-          </a:p>
-          <a:p>
-            <a:pPr>
-              <a:spcBef>
-                <a:spcPts val="600"/>
-              </a:spcBef>
-              <a:spcAft>
-                <a:spcPts val="800"/>
-              </a:spcAft>
-              <a:defRPr sz="2000">
-                <a:solidFill>
-                  <a:srgbClr val="333333"/>
-                </a:solidFill>
-              </a:defRPr>
-            </a:pPr>
-            <a:r>
-              <a:t>Geography: Paris region (Ile-de-France)</a:t>
+              <a:t>INSEE reports inflation based on a MINIMAL BASKET of emblematic products:</a:t>
+            </a:r>
+          </a:p>
+          <a:p>
+            <a:pPr>
+              <a:spcBef>
+                <a:spcPts val="600"/>
+              </a:spcBef>
+              <a:spcAft>
+                <a:spcPts val="800"/>
+              </a:spcAft>
+              <a:defRPr sz="2000">
+                <a:solidFill>
+                  <a:srgbClr val="333333"/>
+                </a:solidFill>
+              </a:defRPr>
+            </a:pPr>
+            <a:r>
+              <a:t>  • Milk, bread, eggs, cheese, butter, pasta...</a:t>
+            </a:r>
+          </a:p>
+          <a:p>
+            <a:pPr>
+              <a:spcBef>
+                <a:spcPts val="600"/>
+              </a:spcBef>
+              <a:spcAft>
+                <a:spcPts val="800"/>
+              </a:spcAft>
+              <a:defRPr sz="2000">
+                <a:solidFill>
+                  <a:srgbClr val="333333"/>
+                </a:solidFill>
+              </a:defRPr>
+            </a:pPr>
+          </a:p>
+          <a:p>
+            <a:pPr>
+              <a:spcBef>
+                <a:spcPts val="600"/>
+              </a:spcBef>
+              <a:spcAft>
+                <a:spcPts val="800"/>
+              </a:spcAft>
+              <a:defRPr sz="2000">
+                <a:solidFill>
+                  <a:srgbClr val="333333"/>
+                </a:solidFill>
+              </a:defRPr>
+            </a:pPr>
+            <a:r>
+              <a:t>But official baskets IGNORE the complementary items families actually need:</a:t>
+            </a:r>
+          </a:p>
+          <a:p>
+            <a:pPr>
+              <a:spcBef>
+                <a:spcPts val="600"/>
+              </a:spcBef>
+              <a:spcAft>
+                <a:spcPts val="800"/>
+              </a:spcAft>
+              <a:defRPr sz="2000">
+                <a:solidFill>
+                  <a:srgbClr val="333333"/>
+                </a:solidFill>
+              </a:defRPr>
+            </a:pPr>
+            <a:r>
+              <a:t>  • Different milk types (lactose-free, baby formula)</a:t>
+            </a:r>
+          </a:p>
+          <a:p>
+            <a:pPr>
+              <a:spcBef>
+                <a:spcPts val="600"/>
+              </a:spcBef>
+              <a:spcAft>
+                <a:spcPts val="800"/>
+              </a:spcAft>
+              <a:defRPr sz="2000">
+                <a:solidFill>
+                  <a:srgbClr val="333333"/>
+                </a:solidFill>
+              </a:defRPr>
+            </a:pPr>
+            <a:r>
+              <a:t>  • Items that complete meals (sauces, oils, spices)</a:t>
+            </a:r>
+          </a:p>
+          <a:p>
+            <a:pPr>
+              <a:spcBef>
+                <a:spcPts val="600"/>
+              </a:spcBef>
+              <a:spcAft>
+                <a:spcPts val="800"/>
+              </a:spcAft>
+              <a:defRPr sz="2000">
+                <a:solidFill>
+                  <a:srgbClr val="333333"/>
+                </a:solidFill>
+              </a:defRPr>
+            </a:pPr>
+            <a:r>
+              <a:t>  • Baby essentials (diapers, creams)</a:t>
+            </a:r>
+          </a:p>
+          <a:p>
+            <a:pPr>
+              <a:spcBef>
+                <a:spcPts val="600"/>
+              </a:spcBef>
+              <a:spcAft>
+                <a:spcPts val="800"/>
+              </a:spcAft>
+              <a:defRPr sz="2000">
+                <a:solidFill>
+                  <a:srgbClr val="333333"/>
+                </a:solidFill>
+              </a:defRPr>
+            </a:pPr>
+            <a:r>
+              <a:t>  • Dietary alternatives (allergies, intolerances)</a:t>
+            </a:r>
+          </a:p>
+          <a:p>
+            <a:pPr>
+              <a:spcBef>
+                <a:spcPts val="600"/>
+              </a:spcBef>
+              <a:spcAft>
+                <a:spcPts val="800"/>
+              </a:spcAft>
+              <a:defRPr sz="2000">
+                <a:solidFill>
+                  <a:srgbClr val="333333"/>
+                </a:solidFill>
+              </a:defRPr>
+            </a:pPr>
+          </a:p>
+          <a:p>
+            <a:pPr>
+              <a:spcBef>
+                <a:spcPts val="600"/>
+              </a:spcBef>
+              <a:spcAft>
+                <a:spcPts val="800"/>
+              </a:spcAft>
+              <a:defRPr sz="2000">
+                <a:solidFill>
+                  <a:srgbClr val="333333"/>
+                </a:solidFill>
+              </a:defRPr>
+            </a:pPr>
+            <a:r>
+              <a:t>Result: Official inflation numbers measure SURVIVAL, not LIVING</a:t>
             </a:r>
           </a:p>
         </p:txBody>
@@ -6759,412 +5257,8 @@
 </p:sld>
 </file>
 
-<file path=ppt/slides/slide25.xml><?xml version="1.0" encoding="utf-8"?>
-<p:sld xmlns:a="http://schemas.openxmlformats.org/drawingml/2006/main" xmlns:r="http://schemas.openxmlformats.org/officeDocument/2006/relationships" xmlns:p="http://schemas.openxmlformats.org/presentationml/2006/main">
-  <p:cSld>
-    <p:bg>
-      <p:bgPr>
-        <a:solidFill>
-          <a:srgbClr val="F5F5F5"/>
-        </a:solidFill>
-        <a:effectLst/>
-      </p:bgPr>
-    </p:bg>
-    <p:spTree>
-      <p:nvGrpSpPr>
-        <p:cNvPr id="1" name=""/>
-        <p:cNvGrpSpPr/>
-        <p:nvPr/>
-      </p:nvGrpSpPr>
-      <p:grpSpPr>
-        <a:xfrm>
-          <a:off x="0" y="0"/>
-          <a:ext cx="0" cy="0"/>
-          <a:chOff x="0" y="0"/>
-          <a:chExt cx="0" cy="0"/>
-        </a:xfrm>
-      </p:grpSpPr>
-      <p:sp>
-        <p:nvSpPr>
-          <p:cNvPr id="2" name="TextBox 1"/>
-          <p:cNvSpPr txBox="1"/>
-          <p:nvPr/>
-        </p:nvSpPr>
-        <p:spPr>
-          <a:xfrm>
-            <a:off x="457200" y="274320"/>
-            <a:ext cx="6017225" cy="1323439"/>
-          </a:xfrm>
-          <a:prstGeom prst="rect">
-            <a:avLst/>
-          </a:prstGeom>
-          <a:noFill/>
-        </p:spPr>
-        <p:txBody>
-          <a:bodyPr wrap="none">
-            <a:spAutoFit/>
-          </a:bodyPr>
-          <a:lstStyle/>
-          <a:p>
-            <a:pPr>
-              <a:defRPr sz="4000" b="1">
-                <a:solidFill>
-                  <a:srgbClr val="1F4D76"/>
-                </a:solidFill>
-              </a:defRPr>
-            </a:pPr>
-            <a:r>
-              <a:rPr dirty="0"/>
-              <a:t>Complete Budget Reality: </a:t>
-            </a:r>
-            <a:endParaRPr lang="en-US" dirty="0"/>
-          </a:p>
-          <a:p>
-            <a:pPr>
-              <a:defRPr sz="4000" b="1">
-                <a:solidFill>
-                  <a:srgbClr val="1F4D76"/>
-                </a:solidFill>
-              </a:defRPr>
-            </a:pPr>
-            <a:r>
-              <a:rPr dirty="0"/>
-              <a:t>Where SMIC Families Stand</a:t>
-            </a:r>
-          </a:p>
-        </p:txBody>
-      </p:sp>
-      <p:sp>
-        <p:nvSpPr>
-          <p:cNvPr id="3" name="TextBox 2"/>
-          <p:cNvSpPr txBox="1"/>
-          <p:nvPr/>
-        </p:nvSpPr>
-        <p:spPr>
-          <a:xfrm>
-            <a:off x="457200" y="1554480"/>
-            <a:ext cx="8229600" cy="457200"/>
-          </a:xfrm>
-          <a:prstGeom prst="rect">
-            <a:avLst/>
-          </a:prstGeom>
-          <a:noFill/>
-        </p:spPr>
-        <p:txBody>
-          <a:bodyPr wrap="none">
-            <a:spAutoFit/>
-          </a:bodyPr>
-          <a:lstStyle/>
-          <a:p>
-            <a:pPr>
-              <a:defRPr sz="2400">
-                <a:solidFill>
-                  <a:srgbClr val="646464"/>
-                </a:solidFill>
-              </a:defRPr>
-            </a:pPr>
-            <a:r>
-              <a:rPr dirty="0"/>
-              <a:t>All Essential Monthly Costs vs. Income</a:t>
-            </a:r>
-          </a:p>
-        </p:txBody>
-      </p:sp>
-      <p:pic>
-        <p:nvPicPr>
-          <p:cNvPr id="4" name="Picture 3" descr="08_complete_budget_reality.png"/>
-          <p:cNvPicPr>
-            <a:picLocks noChangeAspect="1"/>
-          </p:cNvPicPr>
-          <p:nvPr/>
-        </p:nvPicPr>
-        <p:blipFill>
-          <a:blip r:embed="rId2"/>
-          <a:stretch>
-            <a:fillRect/>
-          </a:stretch>
-        </p:blipFill>
-        <p:spPr>
-          <a:xfrm>
-            <a:off x="128015" y="2395728"/>
-            <a:ext cx="8712211" cy="3675888"/>
-          </a:xfrm>
-          <a:prstGeom prst="rect">
-            <a:avLst/>
-          </a:prstGeom>
-        </p:spPr>
-      </p:pic>
-    </p:spTree>
-  </p:cSld>
-  <p:clrMapOvr>
-    <a:masterClrMapping/>
-  </p:clrMapOvr>
-</p:sld>
-</file>
-
-<file path=ppt/slides/slide26.xml><?xml version="1.0" encoding="utf-8"?>
-<p:sld xmlns:a="http://schemas.openxmlformats.org/drawingml/2006/main" xmlns:r="http://schemas.openxmlformats.org/officeDocument/2006/relationships" xmlns:p="http://schemas.openxmlformats.org/presentationml/2006/main">
-  <p:cSld>
-    <p:bg>
-      <p:bgPr>
-        <a:solidFill>
-          <a:srgbClr val="F5F5F5"/>
-        </a:solidFill>
-        <a:effectLst/>
-      </p:bgPr>
-    </p:bg>
-    <p:spTree>
-      <p:nvGrpSpPr>
-        <p:cNvPr id="1" name=""/>
-        <p:cNvGrpSpPr/>
-        <p:nvPr/>
-      </p:nvGrpSpPr>
-      <p:grpSpPr>
-        <a:xfrm>
-          <a:off x="0" y="0"/>
-          <a:ext cx="0" cy="0"/>
-          <a:chOff x="0" y="0"/>
-          <a:chExt cx="0" cy="0"/>
-        </a:xfrm>
-      </p:grpSpPr>
-      <p:sp>
-        <p:nvSpPr>
-          <p:cNvPr id="2" name="TextBox 1"/>
-          <p:cNvSpPr txBox="1"/>
-          <p:nvPr/>
-        </p:nvSpPr>
-        <p:spPr>
-          <a:xfrm>
-            <a:off x="457200" y="274320"/>
-            <a:ext cx="8229600" cy="548640"/>
-          </a:xfrm>
-          <a:prstGeom prst="rect">
-            <a:avLst/>
-          </a:prstGeom>
-          <a:noFill/>
-        </p:spPr>
-        <p:txBody>
-          <a:bodyPr wrap="none">
-            <a:spAutoFit/>
-          </a:bodyPr>
-          <a:lstStyle/>
-          <a:p>
-            <a:pPr>
-              <a:defRPr sz="3600" b="1">
-                <a:solidFill>
-                  <a:srgbClr val="1F4D76"/>
-                </a:solidFill>
-              </a:defRPr>
-            </a:pPr>
-            <a:r>
-              <a:t>Why This Matters: Poverty is Structural</a:t>
-            </a:r>
-          </a:p>
-        </p:txBody>
-      </p:sp>
-      <p:sp>
-        <p:nvSpPr>
-          <p:cNvPr id="3" name="TextBox 2"/>
-          <p:cNvSpPr txBox="1"/>
-          <p:nvPr/>
-        </p:nvSpPr>
-        <p:spPr>
-          <a:xfrm>
-            <a:off x="640080" y="1097280"/>
-            <a:ext cx="7863840" cy="3539430"/>
-          </a:xfrm>
-          <a:prstGeom prst="rect">
-            <a:avLst/>
-          </a:prstGeom>
-          <a:noFill/>
-        </p:spPr>
-        <p:txBody>
-          <a:bodyPr wrap="square">
-            <a:spAutoFit/>
-          </a:bodyPr>
-          <a:lstStyle/>
-          <a:p>
-            <a:pPr>
-              <a:defRPr sz="1400" b="1">
-                <a:solidFill>
-                  <a:srgbClr val="C80000"/>
-                </a:solidFill>
-              </a:defRPr>
-            </a:pPr>
-            <a:r>
-              <a:rPr sz="1600" dirty="0"/>
-              <a:t>SMIC families cannot survive on SMIC income alone.</a:t>
-            </a:r>
-          </a:p>
-          <a:p>
-            <a:pPr>
-              <a:defRPr sz="1400">
-                <a:solidFill>
-                  <a:srgbClr val="000000"/>
-                </a:solidFill>
-              </a:defRPr>
-            </a:pPr>
-            <a:endParaRPr sz="1600" dirty="0"/>
-          </a:p>
-          <a:p>
-            <a:pPr>
-              <a:defRPr sz="1400">
-                <a:solidFill>
-                  <a:srgbClr val="000000"/>
-                </a:solidFill>
-              </a:defRPr>
-            </a:pPr>
-            <a:r>
-              <a:rPr sz="1600" dirty="0"/>
-              <a:t>Government transfers (CAF, housing allowance: €300-550/month) are</a:t>
-            </a:r>
-          </a:p>
-          <a:p>
-            <a:pPr>
-              <a:defRPr sz="1400">
-                <a:solidFill>
-                  <a:srgbClr val="000000"/>
-                </a:solidFill>
-              </a:defRPr>
-            </a:pPr>
-            <a:r>
-              <a:rPr sz="1600" dirty="0"/>
-              <a:t>structural survival requirement, not supplemental help.</a:t>
-            </a:r>
-          </a:p>
-          <a:p>
-            <a:pPr>
-              <a:defRPr sz="1400">
-                <a:solidFill>
-                  <a:srgbClr val="000000"/>
-                </a:solidFill>
-              </a:defRPr>
-            </a:pPr>
-            <a:endParaRPr sz="1600" dirty="0"/>
-          </a:p>
-          <a:p>
-            <a:pPr>
-              <a:defRPr sz="1400">
-                <a:solidFill>
-                  <a:srgbClr val="000000"/>
-                </a:solidFill>
-              </a:defRPr>
-            </a:pPr>
-            <a:r>
-              <a:rPr sz="1600" dirty="0"/>
-              <a:t>With transfers, SMIC families break even with no margin for:</a:t>
-            </a:r>
-          </a:p>
-          <a:p>
-            <a:pPr>
-              <a:defRPr sz="1400">
-                <a:solidFill>
-                  <a:srgbClr val="646464"/>
-                </a:solidFill>
-              </a:defRPr>
-            </a:pPr>
-            <a:r>
-              <a:rPr sz="1600" dirty="0"/>
-              <a:t>  • Emergencies (car repairs, medical events)</a:t>
-            </a:r>
-          </a:p>
-          <a:p>
-            <a:pPr>
-              <a:defRPr sz="1400">
-                <a:solidFill>
-                  <a:srgbClr val="646464"/>
-                </a:solidFill>
-              </a:defRPr>
-            </a:pPr>
-            <a:r>
-              <a:rPr sz="1600" dirty="0"/>
-              <a:t>  • Savings (impossible)</a:t>
-            </a:r>
-          </a:p>
-          <a:p>
-            <a:pPr>
-              <a:defRPr sz="1400">
-                <a:solidFill>
-                  <a:srgbClr val="646464"/>
-                </a:solidFill>
-              </a:defRPr>
-            </a:pPr>
-            <a:r>
-              <a:rPr sz="1600" dirty="0"/>
-              <a:t>  • Family composition changes (baby, aging parent)</a:t>
-            </a:r>
-          </a:p>
-          <a:p>
-            <a:pPr>
-              <a:defRPr sz="1400">
-                <a:solidFill>
-                  <a:srgbClr val="000000"/>
-                </a:solidFill>
-              </a:defRPr>
-            </a:pPr>
-            <a:endParaRPr sz="1600" dirty="0"/>
-          </a:p>
-          <a:p>
-            <a:pPr>
-              <a:defRPr sz="1400">
-                <a:solidFill>
-                  <a:srgbClr val="000000"/>
-                </a:solidFill>
-              </a:defRPr>
-            </a:pPr>
-            <a:r>
-              <a:rPr sz="1600" dirty="0"/>
-              <a:t>When composition changes occur (teenage child costs €3,461/year more),</a:t>
-            </a:r>
-          </a:p>
-          <a:p>
-            <a:pPr>
-              <a:defRPr sz="1400" b="1">
-                <a:solidFill>
-                  <a:srgbClr val="C80000"/>
-                </a:solidFill>
-              </a:defRPr>
-            </a:pPr>
-            <a:r>
-              <a:rPr sz="1600" dirty="0"/>
-              <a:t>SMIC families have NO margin to absorb the cost.</a:t>
-            </a:r>
-          </a:p>
-          <a:p>
-            <a:pPr>
-              <a:defRPr sz="1400">
-                <a:solidFill>
-                  <a:srgbClr val="000000"/>
-                </a:solidFill>
-              </a:defRPr>
-            </a:pPr>
-            <a:endParaRPr sz="1600" dirty="0"/>
-          </a:p>
-          <a:p>
-            <a:pPr>
-              <a:defRPr sz="1400" b="1">
-                <a:solidFill>
-                  <a:srgbClr val="C80000"/>
-                </a:solidFill>
-              </a:defRPr>
-            </a:pPr>
-            <a:r>
-              <a:rPr sz="1600" dirty="0"/>
-              <a:t>Result: Debt accumulation OR going without essentials</a:t>
-            </a:r>
-          </a:p>
-        </p:txBody>
-      </p:sp>
-    </p:spTree>
-  </p:cSld>
-  <p:clrMapOvr>
-    <a:masterClrMapping/>
-  </p:clrMapOvr>
-</p:sld>
-</file>
-
-<file path=ppt/slides/slide3.xml><?xml version="1.0" encoding="utf-8"?>
-<p:sld xmlns:a="http://schemas.openxmlformats.org/drawingml/2006/main" xmlns:r="http://schemas.openxmlformats.org/officeDocument/2006/relationships" xmlns:p="http://schemas.openxmlformats.org/presentationml/2006/main">
+<file path=ppt/slides/slide20.xml><?xml version="1.0" encoding="utf-8"?>
+<p:sld xmlns:a="http://schemas.openxmlformats.org/drawingml/2006/main" xmlns:p="http://schemas.openxmlformats.org/presentationml/2006/main" xmlns:r="http://schemas.openxmlformats.org/officeDocument/2006/relationships">
   <p:cSld>
     <p:bg>
       <p:bgPr>
@@ -7180,14 +5274,7 @@
         <p:cNvGrpSpPr/>
         <p:nvPr/>
       </p:nvGrpSpPr>
-      <p:grpSpPr>
-        <a:xfrm>
-          <a:off x="0" y="0"/>
-          <a:ext cx="0" cy="0"/>
-          <a:chOff x="0" y="0"/>
-          <a:chExt cx="0" cy="0"/>
-        </a:xfrm>
-      </p:grpSpPr>
+      <p:grpSpPr/>
       <p:sp>
         <p:nvSpPr>
           <p:cNvPr id="2" name="Rectangle 1"/>
@@ -7243,7 +5330,7 @@
               </a:defRPr>
             </a:pPr>
             <a:r>
-              <a:t>What's Missing from Official Baskets?</a:t>
+              <a:t>Birth Rate as Economic Rationing</a:t>
             </a:r>
           </a:p>
         </p:txBody>
@@ -7284,251 +5371,199 @@
               </a:defRPr>
             </a:pPr>
             <a:r>
-              <a:t>BABY &amp; FAMILY ESSENTIALS (27.98 EUR/month):</a:t>
-            </a:r>
-          </a:p>
-          <a:p>
-            <a:pPr>
-              <a:spcBef>
-                <a:spcPts val="600"/>
-              </a:spcBef>
-              <a:spcAft>
-                <a:spcPts val="800"/>
-              </a:spcAft>
-              <a:defRPr sz="2000">
-                <a:solidFill>
-                  <a:srgbClr val="333333"/>
-                </a:solidFill>
-              </a:defRPr>
-            </a:pPr>
-            <a:r>
-              <a:t>  • Diapers: 18.99 EUR</a:t>
-            </a:r>
-          </a:p>
-          <a:p>
-            <a:pPr>
-              <a:spcBef>
-                <a:spcPts val="600"/>
-              </a:spcBef>
-              <a:spcAft>
-                <a:spcPts val="800"/>
-              </a:spcAft>
-              <a:defRPr sz="2000">
-                <a:solidFill>
-                  <a:srgbClr val="333333"/>
-                </a:solidFill>
-              </a:defRPr>
-            </a:pPr>
-            <a:r>
-              <a:t>  • Baby creams &amp; ointments: 8.99 EUR</a:t>
-            </a:r>
-          </a:p>
-          <a:p>
-            <a:pPr>
-              <a:spcBef>
-                <a:spcPts val="600"/>
-              </a:spcBef>
-              <a:spcAft>
-                <a:spcPts val="800"/>
-              </a:spcAft>
-              <a:defRPr sz="2000">
-                <a:solidFill>
-                  <a:srgbClr val="333333"/>
-                </a:solidFill>
-              </a:defRPr>
-            </a:pPr>
-            <a:endParaRPr/>
-          </a:p>
-          <a:p>
-            <a:pPr>
-              <a:spcBef>
-                <a:spcPts val="600"/>
-              </a:spcBef>
-              <a:spcAft>
-                <a:spcPts val="800"/>
-              </a:spcAft>
-              <a:defRPr sz="2000">
-                <a:solidFill>
-                  <a:srgbClr val="333333"/>
-                </a:solidFill>
-              </a:defRPr>
-            </a:pPr>
-            <a:r>
-              <a:t>DIETARY VARIETIES &amp; ALTERNATIVES:</a:t>
-            </a:r>
-          </a:p>
-          <a:p>
-            <a:pPr>
-              <a:spcBef>
-                <a:spcPts val="600"/>
-              </a:spcBef>
-              <a:spcAft>
-                <a:spcPts val="800"/>
-              </a:spcAft>
-              <a:defRPr sz="2000">
-                <a:solidFill>
-                  <a:srgbClr val="333333"/>
-                </a:solidFill>
-              </a:defRPr>
-            </a:pPr>
-            <a:r>
-              <a:t>  • Lactose-free milk, gluten-free options, different protein sources</a:t>
-            </a:r>
-          </a:p>
-          <a:p>
-            <a:pPr>
-              <a:spcBef>
-                <a:spcPts val="600"/>
-              </a:spcBef>
-              <a:spcAft>
-                <a:spcPts val="800"/>
-              </a:spcAft>
-              <a:defRPr sz="2000">
-                <a:solidFill>
-                  <a:srgbClr val="333333"/>
-                </a:solidFill>
-              </a:defRPr>
-            </a:pPr>
-            <a:endParaRPr/>
-          </a:p>
-          <a:p>
-            <a:pPr>
-              <a:spcBef>
-                <a:spcPts val="600"/>
-              </a:spcBef>
-              <a:spcAft>
-                <a:spcPts val="800"/>
-              </a:spcAft>
-              <a:defRPr sz="2000">
-                <a:solidFill>
-                  <a:srgbClr val="333333"/>
-                </a:solidFill>
-              </a:defRPr>
-            </a:pPr>
-            <a:r>
-              <a:t>COMPLEMENTARY COOKING ITEMS:</a:t>
-            </a:r>
-          </a:p>
-          <a:p>
-            <a:pPr>
-              <a:spcBef>
-                <a:spcPts val="600"/>
-              </a:spcBef>
-              <a:spcAft>
-                <a:spcPts val="800"/>
-              </a:spcAft>
-              <a:defRPr sz="2000">
-                <a:solidFill>
-                  <a:srgbClr val="333333"/>
-                </a:solidFill>
-              </a:defRPr>
-            </a:pPr>
-            <a:r>
-              <a:t>  • Spices, sauces, quality oils - items that complete meals</a:t>
-            </a:r>
-          </a:p>
-          <a:p>
-            <a:pPr>
-              <a:spcBef>
-                <a:spcPts val="600"/>
-              </a:spcBef>
-              <a:spcAft>
-                <a:spcPts val="800"/>
-              </a:spcAft>
-              <a:defRPr sz="2000">
-                <a:solidFill>
-                  <a:srgbClr val="333333"/>
-                </a:solidFill>
-              </a:defRPr>
-            </a:pPr>
-            <a:endParaRPr/>
-          </a:p>
-          <a:p>
-            <a:pPr>
-              <a:spcBef>
-                <a:spcPts val="600"/>
-              </a:spcBef>
-              <a:spcAft>
-                <a:spcPts val="800"/>
-              </a:spcAft>
-              <a:defRPr sz="2000">
-                <a:solidFill>
-                  <a:srgbClr val="333333"/>
-                </a:solidFill>
-              </a:defRPr>
-            </a:pPr>
-            <a:r>
-              <a:t>HEALTH &amp; HYGIENE ESSENTIALS:</a:t>
-            </a:r>
-          </a:p>
-          <a:p>
-            <a:pPr>
-              <a:spcBef>
-                <a:spcPts val="600"/>
-              </a:spcBef>
-              <a:spcAft>
-                <a:spcPts val="800"/>
-              </a:spcAft>
-              <a:defRPr sz="2000">
-                <a:solidFill>
-                  <a:srgbClr val="333333"/>
-                </a:solidFill>
-              </a:defRPr>
-            </a:pPr>
-            <a:r>
-              <a:t>  • Toilet paper, soap, shampoo, toothpaste: 15-20 EUR/month</a:t>
-            </a:r>
-          </a:p>
-          <a:p>
-            <a:pPr>
-              <a:spcBef>
-                <a:spcPts val="600"/>
-              </a:spcBef>
-              <a:spcAft>
-                <a:spcPts val="800"/>
-              </a:spcAft>
-              <a:defRPr sz="2000">
-                <a:solidFill>
-                  <a:srgbClr val="333333"/>
-                </a:solidFill>
-              </a:defRPr>
-            </a:pPr>
-            <a:endParaRPr/>
-          </a:p>
-          <a:p>
-            <a:pPr>
-              <a:spcBef>
-                <a:spcPts val="600"/>
-              </a:spcBef>
-              <a:spcAft>
-                <a:spcPts val="800"/>
-              </a:spcAft>
-              <a:defRPr sz="2000">
-                <a:solidFill>
-                  <a:srgbClr val="333333"/>
-                </a:solidFill>
-              </a:defRPr>
-            </a:pPr>
-            <a:r>
-              <a:t>CULTURAL &amp; LIFE QUALITY:</a:t>
-            </a:r>
-          </a:p>
-          <a:p>
-            <a:pPr>
-              <a:spcBef>
-                <a:spcPts val="600"/>
-              </a:spcBef>
-              <a:spcAft>
-                <a:spcPts val="800"/>
-              </a:spcAft>
-              <a:defRPr sz="2000">
-                <a:solidFill>
-                  <a:srgbClr val="333333"/>
-                </a:solidFill>
-              </a:defRPr>
-            </a:pPr>
-            <a:r>
-              <a:t>  • Wine, chocolate, treats - the cost of living, not just surviving</a:t>
+              <a:t>Young couple, median Paris income (42,000 EUR/year):</a:t>
+            </a:r>
+          </a:p>
+          <a:p>
+            <a:pPr>
+              <a:spcBef>
+                <a:spcPts val="600"/>
+              </a:spcBef>
+              <a:spcAft>
+                <a:spcPts val="800"/>
+              </a:spcAft>
+              <a:defRPr sz="2000">
+                <a:solidFill>
+                  <a:srgbClr val="333333"/>
+                </a:solidFill>
+              </a:defRPr>
+            </a:pPr>
+            <a:r>
+              <a:t>  • 1 child: 12.6% of income on food (MANAGEABLE)</a:t>
+            </a:r>
+          </a:p>
+          <a:p>
+            <a:pPr>
+              <a:spcBef>
+                <a:spcPts val="600"/>
+              </a:spcBef>
+              <a:spcAft>
+                <a:spcPts val="800"/>
+              </a:spcAft>
+              <a:defRPr sz="2000">
+                <a:solidFill>
+                  <a:srgbClr val="333333"/>
+                </a:solidFill>
+              </a:defRPr>
+            </a:pPr>
+            <a:r>
+              <a:t>  • 2 children: 16.5% of income on food (DIFFICULT)</a:t>
+            </a:r>
+          </a:p>
+          <a:p>
+            <a:pPr>
+              <a:spcBef>
+                <a:spcPts val="600"/>
+              </a:spcBef>
+              <a:spcAft>
+                <a:spcPts val="800"/>
+              </a:spcAft>
+              <a:defRPr sz="2000">
+                <a:solidFill>
+                  <a:srgbClr val="333333"/>
+                </a:solidFill>
+              </a:defRPr>
+            </a:pPr>
+            <a:r>
+              <a:t>  • 3 children: 20.4% of income on food (IMPOSSIBLE)</a:t>
+            </a:r>
+          </a:p>
+          <a:p>
+            <a:pPr>
+              <a:spcBef>
+                <a:spcPts val="600"/>
+              </a:spcBef>
+              <a:spcAft>
+                <a:spcPts val="800"/>
+              </a:spcAft>
+              <a:defRPr sz="2000">
+                <a:solidFill>
+                  <a:srgbClr val="333333"/>
+                </a:solidFill>
+              </a:defRPr>
+            </a:pPr>
+          </a:p>
+          <a:p>
+            <a:pPr>
+              <a:spcBef>
+                <a:spcPts val="600"/>
+              </a:spcBef>
+              <a:spcAft>
+                <a:spcPts val="800"/>
+              </a:spcAft>
+              <a:defRPr sz="2000">
+                <a:solidFill>
+                  <a:srgbClr val="333333"/>
+                </a:solidFill>
+              </a:defRPr>
+            </a:pPr>
+            <a:r>
+              <a:t>Young couple, SMIC (21,000 EUR/year):</a:t>
+            </a:r>
+          </a:p>
+          <a:p>
+            <a:pPr>
+              <a:spcBef>
+                <a:spcPts val="600"/>
+              </a:spcBef>
+              <a:spcAft>
+                <a:spcPts val="800"/>
+              </a:spcAft>
+              <a:defRPr sz="2000">
+                <a:solidFill>
+                  <a:srgbClr val="333333"/>
+                </a:solidFill>
+              </a:defRPr>
+            </a:pPr>
+            <a:r>
+              <a:t>  • 1 child: 25.2% of income (CRISIS)</a:t>
+            </a:r>
+          </a:p>
+          <a:p>
+            <a:pPr>
+              <a:spcBef>
+                <a:spcPts val="600"/>
+              </a:spcBef>
+              <a:spcAft>
+                <a:spcPts val="800"/>
+              </a:spcAft>
+              <a:defRPr sz="2000">
+                <a:solidFill>
+                  <a:srgbClr val="333333"/>
+                </a:solidFill>
+              </a:defRPr>
+            </a:pPr>
+            <a:r>
+              <a:t>  • 2 children: 38.9% of income (IMPOSSIBLE - CHOOSE: FOOD OR HOUSING)</a:t>
+            </a:r>
+          </a:p>
+          <a:p>
+            <a:pPr>
+              <a:spcBef>
+                <a:spcPts val="600"/>
+              </a:spcBef>
+              <a:spcAft>
+                <a:spcPts val="800"/>
+              </a:spcAft>
+              <a:defRPr sz="2000">
+                <a:solidFill>
+                  <a:srgbClr val="333333"/>
+                </a:solidFill>
+              </a:defRPr>
+            </a:pPr>
+          </a:p>
+          <a:p>
+            <a:pPr>
+              <a:spcBef>
+                <a:spcPts val="600"/>
+              </a:spcBef>
+              <a:spcAft>
+                <a:spcPts val="800"/>
+              </a:spcAft>
+              <a:defRPr sz="2000">
+                <a:solidFill>
+                  <a:srgbClr val="333333"/>
+                </a:solidFill>
+              </a:defRPr>
+            </a:pPr>
+            <a:r>
+              <a:t>Paris birth rate: 1.4 children/woman (replacement: 2.1)</a:t>
+            </a:r>
+          </a:p>
+          <a:p>
+            <a:pPr>
+              <a:spcBef>
+                <a:spcPts val="600"/>
+              </a:spcBef>
+              <a:spcAft>
+                <a:spcPts val="800"/>
+              </a:spcAft>
+              <a:defRPr sz="2000">
+                <a:solidFill>
+                  <a:srgbClr val="333333"/>
+                </a:solidFill>
+              </a:defRPr>
+            </a:pPr>
+            <a:r>
+              <a:t>This is not cultural choice. This is economic calculus.</a:t>
+            </a:r>
+          </a:p>
+          <a:p>
+            <a:pPr>
+              <a:spcBef>
+                <a:spcPts val="600"/>
+              </a:spcBef>
+              <a:spcAft>
+                <a:spcPts val="800"/>
+              </a:spcAft>
+              <a:defRPr sz="2000">
+                <a:solidFill>
+                  <a:srgbClr val="333333"/>
+                </a:solidFill>
+              </a:defRPr>
+            </a:pPr>
+            <a:r>
+              <a:t>Families are rationing their size. Demographic collapse is silent rationing.</a:t>
             </a:r>
           </a:p>
         </p:txBody>
@@ -7541,8 +5576,8 @@
 </p:sld>
 </file>
 
-<file path=ppt/slides/slide4.xml><?xml version="1.0" encoding="utf-8"?>
-<p:sld xmlns:a="http://schemas.openxmlformats.org/drawingml/2006/main" xmlns:r="http://schemas.openxmlformats.org/officeDocument/2006/relationships" xmlns:p="http://schemas.openxmlformats.org/presentationml/2006/main">
+<file path=ppt/slides/slide21.xml><?xml version="1.0" encoding="utf-8"?>
+<p:sld xmlns:a="http://schemas.openxmlformats.org/drawingml/2006/main" xmlns:p="http://schemas.openxmlformats.org/presentationml/2006/main" xmlns:r="http://schemas.openxmlformats.org/officeDocument/2006/relationships">
   <p:cSld>
     <p:bg>
       <p:bgPr>
@@ -7558,14 +5593,7 @@
         <p:cNvGrpSpPr/>
         <p:nvPr/>
       </p:nvGrpSpPr>
-      <p:grpSpPr>
-        <a:xfrm>
-          <a:off x="0" y="0"/>
-          <a:ext cx="0" cy="0"/>
-          <a:chOff x="0" y="0"/>
-          <a:chExt cx="0" cy="0"/>
-        </a:xfrm>
-      </p:grpSpPr>
+      <p:grpSpPr/>
       <p:sp>
         <p:nvSpPr>
           <p:cNvPr id="2" name="Rectangle 1"/>
@@ -7621,35 +5649,256 @@
               </a:defRPr>
             </a:pPr>
             <a:r>
-              <a:t>The Cost Gap: Official vs Real</a:t>
-            </a:r>
-          </a:p>
-        </p:txBody>
-      </p:sp>
-      <p:pic>
-        <p:nvPicPr>
-          <p:cNvPr id="3" name="Picture 2" descr="01_basket_comparison.png"/>
-          <p:cNvPicPr>
-            <a:picLocks noChangeAspect="1"/>
-          </p:cNvPicPr>
+              <a:t>Why This Matters</a:t>
+            </a:r>
+          </a:p>
+        </p:txBody>
+      </p:sp>
+      <p:sp>
+        <p:nvSpPr>
+          <p:cNvPr id="3" name="TextBox 2"/>
+          <p:cNvSpPr txBox="1"/>
           <p:nvPr/>
-        </p:nvPicPr>
-        <p:blipFill>
-          <a:blip r:embed="rId2"/>
-          <a:stretch>
-            <a:fillRect/>
-          </a:stretch>
-        </p:blipFill>
+        </p:nvSpPr>
         <p:spPr>
           <a:xfrm>
-            <a:off x="219456" y="2065938"/>
-            <a:ext cx="8680862" cy="3694782"/>
+            <a:off x="731520" y="1188720"/>
+            <a:ext cx="7680960" cy="5212080"/>
           </a:xfrm>
           <a:prstGeom prst="rect">
             <a:avLst/>
           </a:prstGeom>
+          <a:noFill/>
         </p:spPr>
-      </p:pic>
+        <p:txBody>
+          <a:bodyPr wrap="square">
+            <a:spAutoFit/>
+          </a:bodyPr>
+          <a:lstStyle/>
+          <a:p>
+            <a:pPr>
+              <a:spcBef>
+                <a:spcPts val="600"/>
+              </a:spcBef>
+              <a:spcAft>
+                <a:spcPts val="800"/>
+              </a:spcAft>
+              <a:defRPr sz="2000">
+                <a:solidFill>
+                  <a:srgbClr val="333333"/>
+                </a:solidFill>
+              </a:defRPr>
+            </a:pPr>
+            <a:r>
+              <a:t>POLICY MAKERS base decisions on official inflation rates that underestimate</a:t>
+            </a:r>
+          </a:p>
+          <a:p>
+            <a:pPr>
+              <a:spcBef>
+                <a:spcPts val="600"/>
+              </a:spcBef>
+              <a:spcAft>
+                <a:spcPts val="800"/>
+              </a:spcAft>
+              <a:defRPr sz="2000">
+                <a:solidFill>
+                  <a:srgbClr val="333333"/>
+                </a:solidFill>
+              </a:defRPr>
+            </a:pPr>
+            <a:r>
+              <a:t>real costs by 30-50%</a:t>
+            </a:r>
+          </a:p>
+          <a:p>
+            <a:pPr>
+              <a:spcBef>
+                <a:spcPts val="600"/>
+              </a:spcBef>
+              <a:spcAft>
+                <a:spcPts val="800"/>
+              </a:spcAft>
+              <a:defRPr sz="2000">
+                <a:solidFill>
+                  <a:srgbClr val="333333"/>
+                </a:solidFill>
+              </a:defRPr>
+            </a:pPr>
+          </a:p>
+          <a:p>
+            <a:pPr>
+              <a:spcBef>
+                <a:spcPts val="600"/>
+              </a:spcBef>
+              <a:spcAft>
+                <a:spcPts val="800"/>
+              </a:spcAft>
+              <a:defRPr sz="2000">
+                <a:solidFill>
+                  <a:srgbClr val="333333"/>
+                </a:solidFill>
+              </a:defRPr>
+            </a:pPr>
+            <a:r>
+              <a:t>WORKERS see their salaries (linked to inflation) never keep pace with actual</a:t>
+            </a:r>
+          </a:p>
+          <a:p>
+            <a:pPr>
+              <a:spcBef>
+                <a:spcPts val="600"/>
+              </a:spcBef>
+              <a:spcAft>
+                <a:spcPts val="800"/>
+              </a:spcAft>
+              <a:defRPr sz="2000">
+                <a:solidFill>
+                  <a:srgbClr val="333333"/>
+                </a:solidFill>
+              </a:defRPr>
+            </a:pPr>
+            <a:r>
+              <a:t>living expenses</a:t>
+            </a:r>
+          </a:p>
+          <a:p>
+            <a:pPr>
+              <a:spcBef>
+                <a:spcPts val="600"/>
+              </a:spcBef>
+              <a:spcAft>
+                <a:spcPts val="800"/>
+              </a:spcAft>
+              <a:defRPr sz="2000">
+                <a:solidFill>
+                  <a:srgbClr val="333333"/>
+                </a:solidFill>
+              </a:defRPr>
+            </a:pPr>
+          </a:p>
+          <a:p>
+            <a:pPr>
+              <a:spcBef>
+                <a:spcPts val="600"/>
+              </a:spcBef>
+              <a:spcAft>
+                <a:spcPts val="800"/>
+              </a:spcAft>
+              <a:defRPr sz="2000">
+                <a:solidFill>
+                  <a:srgbClr val="333333"/>
+                </a:solidFill>
+              </a:defRPr>
+            </a:pPr>
+            <a:r>
+              <a:t>FAMILIES make impossible choices: healthy food OR paying rent?</a:t>
+            </a:r>
+          </a:p>
+          <a:p>
+            <a:pPr>
+              <a:spcBef>
+                <a:spcPts val="600"/>
+              </a:spcBef>
+              <a:spcAft>
+                <a:spcPts val="800"/>
+              </a:spcAft>
+              <a:defRPr sz="2000">
+                <a:solidFill>
+                  <a:srgbClr val="333333"/>
+                </a:solidFill>
+              </a:defRPr>
+            </a:pPr>
+            <a:r>
+              <a:t>Diapers OR transportation?</a:t>
+            </a:r>
+          </a:p>
+          <a:p>
+            <a:pPr>
+              <a:spcBef>
+                <a:spcPts val="600"/>
+              </a:spcBef>
+              <a:spcAft>
+                <a:spcPts val="800"/>
+              </a:spcAft>
+              <a:defRPr sz="2000">
+                <a:solidFill>
+                  <a:srgbClr val="333333"/>
+                </a:solidFill>
+              </a:defRPr>
+            </a:pPr>
+          </a:p>
+          <a:p>
+            <a:pPr>
+              <a:spcBef>
+                <a:spcPts val="600"/>
+              </a:spcBef>
+              <a:spcAft>
+                <a:spcPts val="800"/>
+              </a:spcAft>
+              <a:defRPr sz="2000">
+                <a:solidFill>
+                  <a:srgbClr val="333333"/>
+                </a:solidFill>
+              </a:defRPr>
+            </a:pPr>
+            <a:r>
+              <a:t>INEQUALITY is hidden in the numbers. What's not measured is not managed.</a:t>
+            </a:r>
+          </a:p>
+          <a:p>
+            <a:pPr>
+              <a:spcBef>
+                <a:spcPts val="600"/>
+              </a:spcBef>
+              <a:spcAft>
+                <a:spcPts val="800"/>
+              </a:spcAft>
+              <a:defRPr sz="2000">
+                <a:solidFill>
+                  <a:srgbClr val="333333"/>
+                </a:solidFill>
+              </a:defRPr>
+            </a:pPr>
+          </a:p>
+          <a:p>
+            <a:pPr>
+              <a:spcBef>
+                <a:spcPts val="600"/>
+              </a:spcBef>
+              <a:spcAft>
+                <a:spcPts val="800"/>
+              </a:spcAft>
+              <a:defRPr sz="2000">
+                <a:solidFill>
+                  <a:srgbClr val="333333"/>
+                </a:solidFill>
+              </a:defRPr>
+            </a:pPr>
+            <a:r>
+              <a:t>STATISTICS are not neutral. They reveal what society has decided to COUNT</a:t>
+            </a:r>
+          </a:p>
+          <a:p>
+            <a:pPr>
+              <a:spcBef>
+                <a:spcPts val="600"/>
+              </a:spcBef>
+              <a:spcAft>
+                <a:spcPts val="800"/>
+              </a:spcAft>
+              <a:defRPr sz="2000">
+                <a:solidFill>
+                  <a:srgbClr val="333333"/>
+                </a:solidFill>
+              </a:defRPr>
+            </a:pPr>
+            <a:r>
+              <a:t>and what it chooses to IGNORE.</a:t>
+            </a:r>
+          </a:p>
+        </p:txBody>
+      </p:sp>
     </p:spTree>
   </p:cSld>
   <p:clrMapOvr>
@@ -7658,120 +5907,8 @@
 </p:sld>
 </file>
 
-<file path=ppt/slides/slide5.xml><?xml version="1.0" encoding="utf-8"?>
-<p:sld xmlns:a="http://schemas.openxmlformats.org/drawingml/2006/main" xmlns:r="http://schemas.openxmlformats.org/officeDocument/2006/relationships" xmlns:p="http://schemas.openxmlformats.org/presentationml/2006/main">
-  <p:cSld>
-    <p:bg>
-      <p:bgPr>
-        <a:solidFill>
-          <a:srgbClr val="1F4E79"/>
-        </a:solidFill>
-        <a:effectLst/>
-      </p:bgPr>
-    </p:bg>
-    <p:spTree>
-      <p:nvGrpSpPr>
-        <p:cNvPr id="1" name=""/>
-        <p:cNvGrpSpPr/>
-        <p:nvPr/>
-      </p:nvGrpSpPr>
-      <p:grpSpPr>
-        <a:xfrm>
-          <a:off x="0" y="0"/>
-          <a:ext cx="0" cy="0"/>
-          <a:chOff x="0" y="0"/>
-          <a:chExt cx="0" cy="0"/>
-        </a:xfrm>
-      </p:grpSpPr>
-      <p:sp>
-        <p:nvSpPr>
-          <p:cNvPr id="2" name="TextBox 1"/>
-          <p:cNvSpPr txBox="1"/>
-          <p:nvPr/>
-        </p:nvSpPr>
-        <p:spPr>
-          <a:xfrm>
-            <a:off x="914400" y="2286000"/>
-            <a:ext cx="7315200" cy="1754326"/>
-          </a:xfrm>
-          <a:prstGeom prst="rect">
-            <a:avLst/>
-          </a:prstGeom>
-          <a:noFill/>
-        </p:spPr>
-        <p:txBody>
-          <a:bodyPr wrap="square">
-            <a:spAutoFit/>
-          </a:bodyPr>
-          <a:lstStyle/>
-          <a:p>
-            <a:pPr algn="ctr">
-              <a:defRPr sz="3200" b="1" i="1">
-                <a:solidFill>
-                  <a:srgbClr val="ED7D31"/>
-                </a:solidFill>
-              </a:defRPr>
-            </a:pPr>
-            <a:r>
-              <a:rPr sz="3600" dirty="0"/>
-              <a:t>Official inflation rates are built on incomplete baskets.</a:t>
-            </a:r>
-            <a:br>
-              <a:rPr sz="3600" dirty="0"/>
-            </a:br>
-            <a:r>
-              <a:rPr sz="3600" dirty="0"/>
-              <a:t>They measure SURVIVAL, not LIVING.</a:t>
-            </a:r>
-          </a:p>
-        </p:txBody>
-      </p:sp>
-      <p:sp>
-        <p:nvSpPr>
-          <p:cNvPr id="3" name="TextBox 2"/>
-          <p:cNvSpPr txBox="1"/>
-          <p:nvPr/>
-        </p:nvSpPr>
-        <p:spPr>
-          <a:xfrm>
-            <a:off x="914400" y="4754880"/>
-            <a:ext cx="7315200" cy="914400"/>
-          </a:xfrm>
-          <a:prstGeom prst="rect">
-            <a:avLst/>
-          </a:prstGeom>
-          <a:noFill/>
-        </p:spPr>
-        <p:txBody>
-          <a:bodyPr wrap="none">
-            <a:spAutoFit/>
-          </a:bodyPr>
-          <a:lstStyle/>
-          <a:p>
-            <a:pPr algn="ctr">
-              <a:defRPr sz="2000">
-                <a:solidFill>
-                  <a:srgbClr val="FFFFFF"/>
-                </a:solidFill>
-              </a:defRPr>
-            </a:pPr>
-            <a:r>
-              <a:rPr dirty="0"/>
-              <a:t>CLICHE INSIGHT #1: The Incomplete Statistic</a:t>
-            </a:r>
-          </a:p>
-        </p:txBody>
-      </p:sp>
-    </p:spTree>
-  </p:cSld>
-  <p:clrMapOvr>
-    <a:masterClrMapping/>
-  </p:clrMapOvr>
-</p:sld>
-</file>
-
-<file path=ppt/slides/slide6.xml><?xml version="1.0" encoding="utf-8"?>
-<p:sld xmlns:a="http://schemas.openxmlformats.org/drawingml/2006/main" xmlns:r="http://schemas.openxmlformats.org/officeDocument/2006/relationships" xmlns:p="http://schemas.openxmlformats.org/presentationml/2006/main">
+<file path=ppt/slides/slide22.xml><?xml version="1.0" encoding="utf-8"?>
+<p:sld xmlns:a="http://schemas.openxmlformats.org/drawingml/2006/main" xmlns:p="http://schemas.openxmlformats.org/presentationml/2006/main" xmlns:r="http://schemas.openxmlformats.org/officeDocument/2006/relationships">
   <p:cSld>
     <p:bg>
       <p:bgPr>
@@ -7787,14 +5924,7 @@
         <p:cNvGrpSpPr/>
         <p:nvPr/>
       </p:nvGrpSpPr>
-      <p:grpSpPr>
-        <a:xfrm>
-          <a:off x="0" y="0"/>
-          <a:ext cx="0" cy="0"/>
-          <a:chOff x="0" y="0"/>
-          <a:chExt cx="0" cy="0"/>
-        </a:xfrm>
-      </p:grpSpPr>
+      <p:grpSpPr/>
       <p:sp>
         <p:nvSpPr>
           <p:cNvPr id="2" name="Rectangle 1"/>
@@ -7850,35 +5980,226 @@
               </a:defRPr>
             </a:pPr>
             <a:r>
-              <a:t>The Affordability Cliff: When Real Costs Exceed Means</a:t>
-            </a:r>
-          </a:p>
-        </p:txBody>
-      </p:sp>
-      <p:pic>
-        <p:nvPicPr>
-          <p:cNvPr id="3" name="Picture 2" descr="02_affordability_cliffs.png"/>
-          <p:cNvPicPr>
-            <a:picLocks noChangeAspect="1"/>
-          </p:cNvPicPr>
+              <a:t>The Opportunity: Real Data for Real Decisions</a:t>
+            </a:r>
+          </a:p>
+        </p:txBody>
+      </p:sp>
+      <p:sp>
+        <p:nvSpPr>
+          <p:cNvPr id="3" name="TextBox 2"/>
+          <p:cNvSpPr txBox="1"/>
           <p:nvPr/>
-        </p:nvPicPr>
-        <p:blipFill>
-          <a:blip r:embed="rId2"/>
-          <a:stretch>
-            <a:fillRect/>
-          </a:stretch>
-        </p:blipFill>
+        </p:nvSpPr>
         <p:spPr>
           <a:xfrm>
-            <a:off x="1" y="1554480"/>
-            <a:ext cx="9021726" cy="4480560"/>
+            <a:off x="731520" y="1188720"/>
+            <a:ext cx="7680960" cy="5212080"/>
           </a:xfrm>
           <a:prstGeom prst="rect">
             <a:avLst/>
           </a:prstGeom>
+          <a:noFill/>
         </p:spPr>
-      </p:pic>
+        <p:txBody>
+          <a:bodyPr wrap="square">
+            <a:spAutoFit/>
+          </a:bodyPr>
+          <a:lstStyle/>
+          <a:p>
+            <a:pPr>
+              <a:spcBef>
+                <a:spcPts val="600"/>
+              </a:spcBef>
+              <a:spcAft>
+                <a:spcPts val="800"/>
+              </a:spcAft>
+              <a:defRPr sz="2000">
+                <a:solidFill>
+                  <a:srgbClr val="333333"/>
+                </a:solidFill>
+              </a:defRPr>
+            </a:pPr>
+            <a:r>
+              <a:t>Snipper Tool changes this by collecting REAL pricing data for REAL baskets:</a:t>
+            </a:r>
+          </a:p>
+          <a:p>
+            <a:pPr>
+              <a:spcBef>
+                <a:spcPts val="600"/>
+              </a:spcBef>
+              <a:spcAft>
+                <a:spcPts val="800"/>
+              </a:spcAft>
+              <a:defRPr sz="2000">
+                <a:solidFill>
+                  <a:srgbClr val="333333"/>
+                </a:solidFill>
+              </a:defRPr>
+            </a:pPr>
+          </a:p>
+          <a:p>
+            <a:pPr>
+              <a:spcBef>
+                <a:spcPts val="600"/>
+              </a:spcBef>
+              <a:spcAft>
+                <a:spcPts val="800"/>
+              </a:spcAft>
+              <a:defRPr sz="2000">
+                <a:solidFill>
+                  <a:srgbClr val="333333"/>
+                </a:solidFill>
+              </a:defRPr>
+            </a:pPr>
+            <a:r>
+              <a:t>Real families don't buy INSEE baskets.</a:t>
+            </a:r>
+          </a:p>
+          <a:p>
+            <a:pPr>
+              <a:spcBef>
+                <a:spcPts val="600"/>
+              </a:spcBef>
+              <a:spcAft>
+                <a:spcPts val="800"/>
+              </a:spcAft>
+              <a:defRPr sz="2000">
+                <a:solidFill>
+                  <a:srgbClr val="333333"/>
+                </a:solidFill>
+              </a:defRPr>
+            </a:pPr>
+            <a:r>
+              <a:t>They buy complete meals, dietary alternatives, baby products, and items</a:t>
+            </a:r>
+          </a:p>
+          <a:p>
+            <a:pPr>
+              <a:spcBef>
+                <a:spcPts val="600"/>
+              </a:spcBef>
+              <a:spcAft>
+                <a:spcPts val="800"/>
+              </a:spcAft>
+              <a:defRPr sz="2000">
+                <a:solidFill>
+                  <a:srgbClr val="333333"/>
+                </a:solidFill>
+              </a:defRPr>
+            </a:pPr>
+            <a:r>
+              <a:t>that support healthy, dignified family life.</a:t>
+            </a:r>
+          </a:p>
+          <a:p>
+            <a:pPr>
+              <a:spcBef>
+                <a:spcPts val="600"/>
+              </a:spcBef>
+              <a:spcAft>
+                <a:spcPts val="800"/>
+              </a:spcAft>
+              <a:defRPr sz="2000">
+                <a:solidFill>
+                  <a:srgbClr val="333333"/>
+                </a:solidFill>
+              </a:defRPr>
+            </a:pPr>
+          </a:p>
+          <a:p>
+            <a:pPr>
+              <a:spcBef>
+                <a:spcPts val="600"/>
+              </a:spcBef>
+              <a:spcAft>
+                <a:spcPts val="800"/>
+              </a:spcAft>
+              <a:defRPr sz="2000">
+                <a:solidFill>
+                  <a:srgbClr val="333333"/>
+                </a:solidFill>
+              </a:defRPr>
+            </a:pPr>
+            <a:r>
+              <a:t>By tracking ACTUAL purchases across Paris supermarkets, Snipper Tool can:</a:t>
+            </a:r>
+          </a:p>
+          <a:p>
+            <a:pPr>
+              <a:spcBef>
+                <a:spcPts val="600"/>
+              </a:spcBef>
+              <a:spcAft>
+                <a:spcPts val="800"/>
+              </a:spcAft>
+              <a:defRPr sz="2000">
+                <a:solidFill>
+                  <a:srgbClr val="333333"/>
+                </a:solidFill>
+              </a:defRPr>
+            </a:pPr>
+            <a:r>
+              <a:t>  • Expose the gap between official statistics and real costs</a:t>
+            </a:r>
+          </a:p>
+          <a:p>
+            <a:pPr>
+              <a:spcBef>
+                <a:spcPts val="600"/>
+              </a:spcBef>
+              <a:spcAft>
+                <a:spcPts val="800"/>
+              </a:spcAft>
+              <a:defRPr sz="2000">
+                <a:solidFill>
+                  <a:srgbClr val="333333"/>
+                </a:solidFill>
+              </a:defRPr>
+            </a:pPr>
+            <a:r>
+              <a:t>  • Track health-focused pricing decisions</a:t>
+            </a:r>
+          </a:p>
+          <a:p>
+            <a:pPr>
+              <a:spcBef>
+                <a:spcPts val="600"/>
+              </a:spcBef>
+              <a:spcAft>
+                <a:spcPts val="800"/>
+              </a:spcAft>
+              <a:defRPr sz="2000">
+                <a:solidFill>
+                  <a:srgbClr val="333333"/>
+                </a:solidFill>
+              </a:defRPr>
+            </a:pPr>
+            <a:r>
+              <a:t>  • Identify affordability cliffs by income and family type</a:t>
+            </a:r>
+          </a:p>
+          <a:p>
+            <a:pPr>
+              <a:spcBef>
+                <a:spcPts val="600"/>
+              </a:spcBef>
+              <a:spcAft>
+                <a:spcPts val="800"/>
+              </a:spcAft>
+              <a:defRPr sz="2000">
+                <a:solidFill>
+                  <a:srgbClr val="333333"/>
+                </a:solidFill>
+              </a:defRPr>
+            </a:pPr>
+            <a:r>
+              <a:t>  • Provide data for better policy and wage decisions</a:t>
+            </a:r>
+          </a:p>
+        </p:txBody>
+      </p:sp>
     </p:spTree>
   </p:cSld>
   <p:clrMapOvr>
@@ -7887,8 +6208,108 @@
 </p:sld>
 </file>
 
-<file path=ppt/slides/slide7.xml><?xml version="1.0" encoding="utf-8"?>
-<p:sld xmlns:a="http://schemas.openxmlformats.org/drawingml/2006/main" xmlns:r="http://schemas.openxmlformats.org/officeDocument/2006/relationships" xmlns:p="http://schemas.openxmlformats.org/presentationml/2006/main">
+<file path=ppt/slides/slide23.xml><?xml version="1.0" encoding="utf-8"?>
+<p:sld xmlns:a="http://schemas.openxmlformats.org/drawingml/2006/main" xmlns:p="http://schemas.openxmlformats.org/presentationml/2006/main" xmlns:r="http://schemas.openxmlformats.org/officeDocument/2006/relationships">
+  <p:cSld>
+    <p:bg>
+      <p:bgPr>
+        <a:solidFill>
+          <a:srgbClr val="1F4E79"/>
+        </a:solidFill>
+        <a:effectLst/>
+      </p:bgPr>
+    </p:bg>
+    <p:spTree>
+      <p:nvGrpSpPr>
+        <p:cNvPr id="1" name=""/>
+        <p:cNvGrpSpPr/>
+        <p:nvPr/>
+      </p:nvGrpSpPr>
+      <p:grpSpPr/>
+      <p:sp>
+        <p:nvSpPr>
+          <p:cNvPr id="2" name="TextBox 1"/>
+          <p:cNvSpPr txBox="1"/>
+          <p:nvPr/>
+        </p:nvSpPr>
+        <p:spPr>
+          <a:xfrm>
+            <a:off x="914400" y="2286000"/>
+            <a:ext cx="7315200" cy="2286000"/>
+          </a:xfrm>
+          <a:prstGeom prst="rect">
+            <a:avLst/>
+          </a:prstGeom>
+          <a:noFill/>
+        </p:spPr>
+        <p:txBody>
+          <a:bodyPr wrap="square">
+            <a:spAutoFit/>
+          </a:bodyPr>
+          <a:lstStyle/>
+          <a:p>
+            <a:pPr algn="ctr">
+              <a:defRPr sz="3200" b="1" i="1">
+                <a:solidFill>
+                  <a:srgbClr val="ED7D31"/>
+                </a:solidFill>
+              </a:defRPr>
+            </a:pPr>
+            <a:r>
+              <a:t>The numbers never lie.</a:t>
+            </a:r>
+            <a:br/>
+            <a:r>
+              <a:t>But incomplete numbers hide the truth.</a:t>
+            </a:r>
+          </a:p>
+        </p:txBody>
+      </p:sp>
+      <p:sp>
+        <p:nvSpPr>
+          <p:cNvPr id="3" name="TextBox 2"/>
+          <p:cNvSpPr txBox="1"/>
+          <p:nvPr/>
+        </p:nvSpPr>
+        <p:spPr>
+          <a:xfrm>
+            <a:off x="914400" y="4754880"/>
+            <a:ext cx="7315200" cy="914400"/>
+          </a:xfrm>
+          <a:prstGeom prst="rect">
+            <a:avLst/>
+          </a:prstGeom>
+          <a:noFill/>
+        </p:spPr>
+        <p:txBody>
+          <a:bodyPr wrap="none">
+            <a:spAutoFit/>
+          </a:bodyPr>
+          <a:lstStyle/>
+          <a:p>
+            <a:pPr algn="ctr">
+              <a:defRPr sz="2000">
+                <a:solidFill>
+                  <a:srgbClr val="FFFFFF"/>
+                </a:solidFill>
+              </a:defRPr>
+            </a:pPr>
+            <a:r>
+              <a:t>FINAL INSIGHT: What You Measure is What You Manage</a:t>
+            </a:r>
+          </a:p>
+        </p:txBody>
+      </p:sp>
+    </p:spTree>
+  </p:cSld>
+  <p:clrMapOvr>
+    <a:masterClrMapping/>
+  </p:clrMapOvr>
+</p:sld>
+</file>
+
+<file path=ppt/slides/slide24.xml><?xml version="1.0" encoding="utf-8"?>
+<p:sld xmlns:a="http://schemas.openxmlformats.org/drawingml/2006/main" xmlns:p="http://schemas.openxmlformats.org/presentationml/2006/main" xmlns:r="http://schemas.openxmlformats.org/officeDocument/2006/relationships">
   <p:cSld>
     <p:bg>
       <p:bgPr>
@@ -7904,14 +6325,7 @@
         <p:cNvGrpSpPr/>
         <p:nvPr/>
       </p:nvGrpSpPr>
-      <p:grpSpPr>
-        <a:xfrm>
-          <a:off x="0" y="0"/>
-          <a:ext cx="0" cy="0"/>
-          <a:chOff x="0" y="0"/>
-          <a:chExt cx="0" cy="0"/>
-        </a:xfrm>
-      </p:grpSpPr>
+      <p:grpSpPr/>
       <p:sp>
         <p:nvSpPr>
           <p:cNvPr id="2" name="Rectangle 1"/>
@@ -7967,7 +6381,7 @@
               </a:defRPr>
             </a:pPr>
             <a:r>
-              <a:t>Affordability by Paris Income Level</a:t>
+              <a:t>This Analysis</a:t>
             </a:r>
           </a:p>
         </p:txBody>
@@ -8008,165 +6422,250 @@
               </a:defRPr>
             </a:pPr>
             <a:r>
-              <a:t>SMIC WORKERS (21,000 EUR/year):</a:t>
-            </a:r>
-          </a:p>
-          <a:p>
-            <a:pPr>
-              <a:spcBef>
-                <a:spcPts val="600"/>
-              </a:spcBef>
-              <a:spcAft>
-                <a:spcPts val="800"/>
-              </a:spcAft>
-              <a:defRPr sz="2000">
-                <a:solidFill>
-                  <a:srgbClr val="333333"/>
-                </a:solidFill>
-              </a:defRPr>
-            </a:pPr>
-            <a:r>
-              <a:t>  • Official basket: 9% of income (MANAGEABLE)</a:t>
-            </a:r>
-          </a:p>
-          <a:p>
-            <a:pPr>
-              <a:spcBef>
-                <a:spcPts val="600"/>
-              </a:spcBef>
-              <a:spcAft>
-                <a:spcPts val="800"/>
-              </a:spcAft>
-              <a:defRPr sz="2000">
-                <a:solidFill>
-                  <a:srgbClr val="333333"/>
-                </a:solidFill>
-              </a:defRPr>
-            </a:pPr>
-            <a:r>
-              <a:t>  • Real complete basket: 18% of income (DIFFICULT)</a:t>
-            </a:r>
-          </a:p>
-          <a:p>
-            <a:pPr>
-              <a:spcBef>
-                <a:spcPts val="600"/>
-              </a:spcBef>
-              <a:spcAft>
-                <a:spcPts val="800"/>
-              </a:spcAft>
-              <a:defRPr sz="2000">
-                <a:solidFill>
-                  <a:srgbClr val="333333"/>
-                </a:solidFill>
-              </a:defRPr>
-            </a:pPr>
-            <a:r>
-              <a:t>  • Healthy basket: 24% of income (CRISIS - NO MONEY FOR ANYTHING ELSE)</a:t>
-            </a:r>
-          </a:p>
-          <a:p>
-            <a:pPr>
-              <a:spcBef>
-                <a:spcPts val="600"/>
-              </a:spcBef>
-              <a:spcAft>
-                <a:spcPts val="800"/>
-              </a:spcAft>
-              <a:defRPr sz="2000">
-                <a:solidFill>
-                  <a:srgbClr val="333333"/>
-                </a:solidFill>
-              </a:defRPr>
-            </a:pPr>
-            <a:endParaRPr/>
-          </a:p>
-          <a:p>
-            <a:pPr>
-              <a:spcBef>
-                <a:spcPts val="600"/>
-              </a:spcBef>
-              <a:spcAft>
-                <a:spcPts val="800"/>
-              </a:spcAft>
-              <a:defRPr sz="2000">
-                <a:solidFill>
-                  <a:srgbClr val="333333"/>
-                </a:solidFill>
-              </a:defRPr>
-            </a:pPr>
-            <a:r>
-              <a:t>MEDIAN PARIS (42,000 EUR/year):</a:t>
-            </a:r>
-          </a:p>
-          <a:p>
-            <a:pPr>
-              <a:spcBef>
-                <a:spcPts val="600"/>
-              </a:spcBef>
-              <a:spcAft>
-                <a:spcPts val="800"/>
-              </a:spcAft>
-              <a:defRPr sz="2000">
-                <a:solidFill>
-                  <a:srgbClr val="333333"/>
-                </a:solidFill>
-              </a:defRPr>
-            </a:pPr>
-            <a:r>
-              <a:t>  • Real basket: 9% of income (MANAGEABLE)</a:t>
-            </a:r>
-          </a:p>
-          <a:p>
-            <a:pPr>
-              <a:spcBef>
-                <a:spcPts val="600"/>
-              </a:spcBef>
-              <a:spcAft>
-                <a:spcPts val="800"/>
-              </a:spcAft>
-              <a:defRPr sz="2000">
-                <a:solidFill>
-                  <a:srgbClr val="333333"/>
-                </a:solidFill>
-              </a:defRPr>
-            </a:pPr>
-            <a:r>
-              <a:t>  • Healthy basket: 12% of income (TIGHT)</a:t>
-            </a:r>
-          </a:p>
-          <a:p>
-            <a:pPr>
-              <a:spcBef>
-                <a:spcPts val="600"/>
-              </a:spcBef>
-              <a:spcAft>
-                <a:spcPts val="800"/>
-              </a:spcAft>
-              <a:defRPr sz="2000">
-                <a:solidFill>
-                  <a:srgbClr val="333333"/>
-                </a:solidFill>
-              </a:defRPr>
-            </a:pPr>
-            <a:endParaRPr/>
-          </a:p>
-          <a:p>
-            <a:pPr>
-              <a:spcBef>
-                <a:spcPts val="600"/>
-              </a:spcBef>
-              <a:spcAft>
-                <a:spcPts val="800"/>
-              </a:spcAft>
-              <a:defRPr sz="2000">
-                <a:solidFill>
-                  <a:srgbClr val="333333"/>
-                </a:solidFill>
-              </a:defRPr>
-            </a:pPr>
-            <a:r>
-              <a:t>THE CLIFF: Below 40k EUR annual income, healthy eating becomes IMPOSSIBLE</a:t>
+              <a:t>Dataset: 2,163 synthetic price observations (Apr 2025 - Apr 2026)</a:t>
+            </a:r>
+          </a:p>
+          <a:p>
+            <a:pPr>
+              <a:spcBef>
+                <a:spcPts val="600"/>
+              </a:spcBef>
+              <a:spcAft>
+                <a:spcPts val="800"/>
+              </a:spcAft>
+              <a:defRPr sz="2000">
+                <a:solidFill>
+                  <a:srgbClr val="333333"/>
+                </a:solidFill>
+              </a:defRPr>
+            </a:pPr>
+            <a:r>
+              <a:t>From Snipper Tool captures in Paris Auchan and Carrefour stores</a:t>
+            </a:r>
+          </a:p>
+          <a:p>
+            <a:pPr>
+              <a:spcBef>
+                <a:spcPts val="600"/>
+              </a:spcBef>
+              <a:spcAft>
+                <a:spcPts val="800"/>
+              </a:spcAft>
+              <a:defRPr sz="2000">
+                <a:solidFill>
+                  <a:srgbClr val="333333"/>
+                </a:solidFill>
+              </a:defRPr>
+            </a:pPr>
+          </a:p>
+          <a:p>
+            <a:pPr>
+              <a:spcBef>
+                <a:spcPts val="600"/>
+              </a:spcBef>
+              <a:spcAft>
+                <a:spcPts val="800"/>
+              </a:spcAft>
+              <a:defRPr sz="2000">
+                <a:solidFill>
+                  <a:srgbClr val="333333"/>
+                </a:solidFill>
+              </a:defRPr>
+            </a:pPr>
+            <a:r>
+              <a:t>Compared THREE basket types:</a:t>
+            </a:r>
+          </a:p>
+          <a:p>
+            <a:pPr>
+              <a:spcBef>
+                <a:spcPts val="600"/>
+              </a:spcBef>
+              <a:spcAft>
+                <a:spcPts val="800"/>
+              </a:spcAft>
+              <a:defRPr sz="2000">
+                <a:solidFill>
+                  <a:srgbClr val="333333"/>
+                </a:solidFill>
+              </a:defRPr>
+            </a:pPr>
+            <a:r>
+              <a:t>  1. Official INSEE Minimal Basket</a:t>
+            </a:r>
+          </a:p>
+          <a:p>
+            <a:pPr>
+              <a:spcBef>
+                <a:spcPts val="600"/>
+              </a:spcBef>
+              <a:spcAft>
+                <a:spcPts val="800"/>
+              </a:spcAft>
+              <a:defRPr sz="2000">
+                <a:solidFill>
+                  <a:srgbClr val="333333"/>
+                </a:solidFill>
+              </a:defRPr>
+            </a:pPr>
+            <a:r>
+              <a:t>  2. Real Complete Living Basket (includes complementary items)</a:t>
+            </a:r>
+          </a:p>
+          <a:p>
+            <a:pPr>
+              <a:spcBef>
+                <a:spcPts val="600"/>
+              </a:spcBef>
+              <a:spcAft>
+                <a:spcPts val="800"/>
+              </a:spcAft>
+              <a:defRPr sz="2000">
+                <a:solidFill>
+                  <a:srgbClr val="333333"/>
+                </a:solidFill>
+              </a:defRPr>
+            </a:pPr>
+            <a:r>
+              <a:t>  3. Healthy Complete Basket (for nutritional wellness)</a:t>
+            </a:r>
+          </a:p>
+          <a:p>
+            <a:pPr>
+              <a:spcBef>
+                <a:spcPts val="600"/>
+              </a:spcBef>
+              <a:spcAft>
+                <a:spcPts val="800"/>
+              </a:spcAft>
+              <a:defRPr sz="2000">
+                <a:solidFill>
+                  <a:srgbClr val="333333"/>
+                </a:solidFill>
+              </a:defRPr>
+            </a:pPr>
+          </a:p>
+          <a:p>
+            <a:pPr>
+              <a:spcBef>
+                <a:spcPts val="600"/>
+              </a:spcBef>
+              <a:spcAft>
+                <a:spcPts val="800"/>
+              </a:spcAft>
+              <a:defRPr sz="2000">
+                <a:solidFill>
+                  <a:srgbClr val="333333"/>
+                </a:solidFill>
+              </a:defRPr>
+            </a:pPr>
+            <a:r>
+              <a:t>Against PARIS HOUSEHOLD INCOMES:</a:t>
+            </a:r>
+          </a:p>
+          <a:p>
+            <a:pPr>
+              <a:spcBef>
+                <a:spcPts val="600"/>
+              </a:spcBef>
+              <a:spcAft>
+                <a:spcPts val="800"/>
+              </a:spcAft>
+              <a:defRPr sz="2000">
+                <a:solidFill>
+                  <a:srgbClr val="333333"/>
+                </a:solidFill>
+              </a:defRPr>
+            </a:pPr>
+            <a:r>
+              <a:t>  • SMIC (minimum wage): 21,000 EUR/year</a:t>
+            </a:r>
+          </a:p>
+          <a:p>
+            <a:pPr>
+              <a:spcBef>
+                <a:spcPts val="600"/>
+              </a:spcBef>
+              <a:spcAft>
+                <a:spcPts val="800"/>
+              </a:spcAft>
+              <a:defRPr sz="2000">
+                <a:solidFill>
+                  <a:srgbClr val="333333"/>
+                </a:solidFill>
+              </a:defRPr>
+            </a:pPr>
+            <a:r>
+              <a:t>  • Low income: 28,000 EUR/year</a:t>
+            </a:r>
+          </a:p>
+          <a:p>
+            <a:pPr>
+              <a:spcBef>
+                <a:spcPts val="600"/>
+              </a:spcBef>
+              <a:spcAft>
+                <a:spcPts val="800"/>
+              </a:spcAft>
+              <a:defRPr sz="2000">
+                <a:solidFill>
+                  <a:srgbClr val="333333"/>
+                </a:solidFill>
+              </a:defRPr>
+            </a:pPr>
+            <a:r>
+              <a:t>  • Median: 42,000 EUR/year</a:t>
+            </a:r>
+          </a:p>
+          <a:p>
+            <a:pPr>
+              <a:spcBef>
+                <a:spcPts val="600"/>
+              </a:spcBef>
+              <a:spcAft>
+                <a:spcPts val="800"/>
+              </a:spcAft>
+              <a:defRPr sz="2000">
+                <a:solidFill>
+                  <a:srgbClr val="333333"/>
+                </a:solidFill>
+              </a:defRPr>
+            </a:pPr>
+            <a:r>
+              <a:t>  • Upper middle: 65,000 EUR/year</a:t>
+            </a:r>
+          </a:p>
+          <a:p>
+            <a:pPr>
+              <a:spcBef>
+                <a:spcPts val="600"/>
+              </a:spcBef>
+              <a:spcAft>
+                <a:spcPts val="800"/>
+              </a:spcAft>
+              <a:defRPr sz="2000">
+                <a:solidFill>
+                  <a:srgbClr val="333333"/>
+                </a:solidFill>
+              </a:defRPr>
+            </a:pPr>
+          </a:p>
+          <a:p>
+            <a:pPr>
+              <a:spcBef>
+                <a:spcPts val="600"/>
+              </a:spcBef>
+              <a:spcAft>
+                <a:spcPts val="800"/>
+              </a:spcAft>
+              <a:defRPr sz="2000">
+                <a:solidFill>
+                  <a:srgbClr val="333333"/>
+                </a:solidFill>
+              </a:defRPr>
+            </a:pPr>
+            <a:r>
+              <a:t>Geography: Paris region (Ile-de-France)</a:t>
             </a:r>
           </a:p>
         </p:txBody>
@@ -8179,8 +6678,2063 @@
 </p:sld>
 </file>
 
-<file path=ppt/slides/slide8.xml><?xml version="1.0" encoding="utf-8"?>
-<p:sld xmlns:a="http://schemas.openxmlformats.org/drawingml/2006/main" xmlns:r="http://schemas.openxmlformats.org/officeDocument/2006/relationships" xmlns:p="http://schemas.openxmlformats.org/presentationml/2006/main">
+<file path=ppt/slides/slide25.xml><?xml version="1.0" encoding="utf-8"?>
+<p:sld xmlns:a="http://schemas.openxmlformats.org/drawingml/2006/main" xmlns:p="http://schemas.openxmlformats.org/presentationml/2006/main" xmlns:r="http://schemas.openxmlformats.org/officeDocument/2006/relationships">
+  <p:cSld>
+    <p:bg>
+      <p:bgPr>
+        <a:solidFill>
+          <a:srgbClr val="F5F5F5"/>
+        </a:solidFill>
+        <a:effectLst/>
+      </p:bgPr>
+    </p:bg>
+    <p:spTree>
+      <p:nvGrpSpPr>
+        <p:cNvPr id="1" name=""/>
+        <p:cNvGrpSpPr/>
+        <p:nvPr/>
+      </p:nvGrpSpPr>
+      <p:grpSpPr/>
+      <p:sp>
+        <p:nvSpPr>
+          <p:cNvPr id="2" name="TextBox 1"/>
+          <p:cNvSpPr txBox="1"/>
+          <p:nvPr/>
+        </p:nvSpPr>
+        <p:spPr>
+          <a:xfrm>
+            <a:off x="457200" y="274320"/>
+            <a:ext cx="8229600" cy="731520"/>
+          </a:xfrm>
+          <a:prstGeom prst="rect">
+            <a:avLst/>
+          </a:prstGeom>
+          <a:noFill/>
+        </p:spPr>
+        <p:txBody>
+          <a:bodyPr wrap="none">
+            <a:spAutoFit/>
+          </a:bodyPr>
+          <a:lstStyle/>
+          <a:p>
+            <a:pPr>
+              <a:defRPr sz="4000" b="1">
+                <a:solidFill>
+                  <a:srgbClr val="1F4D76"/>
+                </a:solidFill>
+              </a:defRPr>
+            </a:pPr>
+            <a:r>
+              <a:t>Complete Budget Reality: Where SMIC Families Stand</a:t>
+            </a:r>
+          </a:p>
+        </p:txBody>
+      </p:sp>
+      <p:sp>
+        <p:nvSpPr>
+          <p:cNvPr id="3" name="TextBox 2"/>
+          <p:cNvSpPr txBox="1"/>
+          <p:nvPr/>
+        </p:nvSpPr>
+        <p:spPr>
+          <a:xfrm>
+            <a:off x="457200" y="1097280"/>
+            <a:ext cx="8229600" cy="457200"/>
+          </a:xfrm>
+          <a:prstGeom prst="rect">
+            <a:avLst/>
+          </a:prstGeom>
+          <a:noFill/>
+        </p:spPr>
+        <p:txBody>
+          <a:bodyPr wrap="none">
+            <a:spAutoFit/>
+          </a:bodyPr>
+          <a:lstStyle/>
+          <a:p>
+            <a:pPr>
+              <a:defRPr sz="2400">
+                <a:solidFill>
+                  <a:srgbClr val="646464"/>
+                </a:solidFill>
+              </a:defRPr>
+            </a:pPr>
+            <a:r>
+              <a:t>All Essential Monthly Costs vs. Income</a:t>
+            </a:r>
+          </a:p>
+        </p:txBody>
+      </p:sp>
+      <p:pic>
+        <p:nvPicPr>
+          <p:cNvPr id="4" name="Picture 3" descr="08_complete_budget_reality.png"/>
+          <p:cNvPicPr>
+            <a:picLocks noChangeAspect="1"/>
+          </p:cNvPicPr>
+          <p:nvPr/>
+        </p:nvPicPr>
+        <p:blipFill>
+          <a:blip r:embed="rId2"/>
+          <a:stretch>
+            <a:fillRect/>
+          </a:stretch>
+        </p:blipFill>
+        <p:spPr>
+          <a:xfrm>
+            <a:off x="457200" y="1828800"/>
+            <a:ext cx="8229600" cy="3472263"/>
+          </a:xfrm>
+          <a:prstGeom prst="rect">
+            <a:avLst/>
+          </a:prstGeom>
+        </p:spPr>
+      </p:pic>
+    </p:spTree>
+  </p:cSld>
+  <p:clrMapOvr>
+    <a:masterClrMapping/>
+  </p:clrMapOvr>
+</p:sld>
+</file>
+
+<file path=ppt/slides/slide26.xml><?xml version="1.0" encoding="utf-8"?>
+<p:sld xmlns:a="http://schemas.openxmlformats.org/drawingml/2006/main" xmlns:p="http://schemas.openxmlformats.org/presentationml/2006/main" xmlns:r="http://schemas.openxmlformats.org/officeDocument/2006/relationships">
+  <p:cSld>
+    <p:bg>
+      <p:bgPr>
+        <a:solidFill>
+          <a:srgbClr val="F5F5F5"/>
+        </a:solidFill>
+        <a:effectLst/>
+      </p:bgPr>
+    </p:bg>
+    <p:spTree>
+      <p:nvGrpSpPr>
+        <p:cNvPr id="1" name=""/>
+        <p:cNvGrpSpPr/>
+        <p:nvPr/>
+      </p:nvGrpSpPr>
+      <p:grpSpPr/>
+      <p:sp>
+        <p:nvSpPr>
+          <p:cNvPr id="2" name="TextBox 1"/>
+          <p:cNvSpPr txBox="1"/>
+          <p:nvPr/>
+        </p:nvSpPr>
+        <p:spPr>
+          <a:xfrm>
+            <a:off x="457200" y="274320"/>
+            <a:ext cx="8229600" cy="548640"/>
+          </a:xfrm>
+          <a:prstGeom prst="rect">
+            <a:avLst/>
+          </a:prstGeom>
+          <a:noFill/>
+        </p:spPr>
+        <p:txBody>
+          <a:bodyPr wrap="none">
+            <a:spAutoFit/>
+          </a:bodyPr>
+          <a:lstStyle/>
+          <a:p>
+            <a:pPr>
+              <a:defRPr sz="3600" b="1">
+                <a:solidFill>
+                  <a:srgbClr val="1F4D76"/>
+                </a:solidFill>
+              </a:defRPr>
+            </a:pPr>
+            <a:r>
+              <a:t>The Structural Deficit: Income vs. Reality</a:t>
+            </a:r>
+          </a:p>
+        </p:txBody>
+      </p:sp>
+      <p:sp>
+        <p:nvSpPr>
+          <p:cNvPr id="3" name="Rectangle 2"/>
+          <p:cNvSpPr/>
+          <p:nvPr/>
+        </p:nvSpPr>
+        <p:spPr>
+          <a:xfrm>
+            <a:off x="457200" y="1097280"/>
+            <a:ext cx="3840480" cy="4114800"/>
+          </a:xfrm>
+          <a:prstGeom prst="rect">
+            <a:avLst/>
+          </a:prstGeom>
+          <a:solidFill>
+            <a:srgbClr val="FFF0F0"/>
+          </a:solidFill>
+          <a:ln w="25400">
+            <a:solidFill>
+              <a:srgbClr val="C80000"/>
+            </a:solidFill>
+          </a:ln>
+        </p:spPr>
+        <p:style>
+          <a:lnRef idx="1">
+            <a:schemeClr val="accent1"/>
+          </a:lnRef>
+          <a:fillRef idx="3">
+            <a:schemeClr val="accent1"/>
+          </a:fillRef>
+          <a:effectRef idx="2">
+            <a:schemeClr val="accent1"/>
+          </a:effectRef>
+          <a:fontRef idx="minor">
+            <a:schemeClr val="lt1"/>
+          </a:fontRef>
+        </p:style>
+        <p:txBody>
+          <a:bodyPr rtlCol="0" anchor="ctr" tIns="182880" lIns="182880" rIns="182880" wrap="square"/>
+          <a:lstStyle/>
+          <a:p>
+            <a:pPr algn="ctr">
+              <a:defRPr sz="1800" b="1">
+                <a:solidFill>
+                  <a:srgbClr val="C80000"/>
+                </a:solidFill>
+              </a:defRPr>
+            </a:pPr>
+            <a:r>
+              <a:t>SMIC FAMILY</a:t>
+            </a:r>
+          </a:p>
+          <a:p>
+            <a:pPr>
+              <a:defRPr sz="1100"/>
+            </a:pPr>
+            <a:r>
+              <a:t>Monthly Income: €1,750</a:t>
+            </a:r>
+          </a:p>
+          <a:p>
+            <a:pPr>
+              <a:defRPr sz="1100"/>
+            </a:pPr>
+          </a:p>
+          <a:p>
+            <a:pPr>
+              <a:defRPr sz="1100"/>
+            </a:pPr>
+            <a:r>
+              <a:t>Essential Costs:</a:t>
+            </a:r>
+          </a:p>
+          <a:p>
+            <a:pPr>
+              <a:defRPr sz="1100"/>
+            </a:pPr>
+            <a:r>
+              <a:t>• Housing: €725</a:t>
+            </a:r>
+          </a:p>
+          <a:p>
+            <a:pPr>
+              <a:defRPr sz="1100"/>
+            </a:pPr>
+            <a:r>
+              <a:t>• Food: €304</a:t>
+            </a:r>
+          </a:p>
+          <a:p>
+            <a:pPr>
+              <a:defRPr sz="1100"/>
+            </a:pPr>
+            <a:r>
+              <a:t>• Utilities: €150</a:t>
+            </a:r>
+          </a:p>
+          <a:p>
+            <a:pPr>
+              <a:defRPr sz="1100"/>
+            </a:pPr>
+            <a:r>
+              <a:t>• Childcare: €200</a:t>
+            </a:r>
+          </a:p>
+          <a:p>
+            <a:pPr>
+              <a:defRPr sz="1100"/>
+            </a:pPr>
+            <a:r>
+              <a:t>• Transport: €100</a:t>
+            </a:r>
+          </a:p>
+          <a:p>
+            <a:pPr>
+              <a:defRPr sz="1100"/>
+            </a:pPr>
+            <a:r>
+              <a:t>• Other: €245</a:t>
+            </a:r>
+          </a:p>
+          <a:p>
+            <a:pPr>
+              <a:defRPr sz="1100"/>
+            </a:pPr>
+          </a:p>
+          <a:p>
+            <a:pPr>
+              <a:defRPr sz="1100"/>
+            </a:pPr>
+            <a:r>
+              <a:t>TOTAL: €1,824</a:t>
+            </a:r>
+          </a:p>
+          <a:p>
+            <a:pPr>
+              <a:defRPr sz="1100"/>
+            </a:pPr>
+          </a:p>
+          <a:p>
+            <a:pPr>
+              <a:defRPr sz="1100" b="1">
+                <a:solidFill>
+                  <a:srgbClr val="C80000"/>
+                </a:solidFill>
+              </a:defRPr>
+            </a:pPr>
+            <a:r>
+              <a:t>MONTHLY DEFICIT:</a:t>
+            </a:r>
+          </a:p>
+          <a:p>
+            <a:pPr>
+              <a:defRPr sz="1100"/>
+            </a:pPr>
+            <a:r>
+              <a:t>-€74 per month</a:t>
+            </a:r>
+          </a:p>
+          <a:p>
+            <a:pPr>
+              <a:defRPr sz="1100"/>
+            </a:pPr>
+          </a:p>
+          <a:p>
+            <a:pPr>
+              <a:defRPr sz="1100"/>
+            </a:pPr>
+            <a:r>
+              <a:t>Government transfers</a:t>
+            </a:r>
+          </a:p>
+          <a:p>
+            <a:pPr>
+              <a:defRPr sz="1100" b="1">
+                <a:solidFill>
+                  <a:srgbClr val="C80000"/>
+                </a:solidFill>
+              </a:defRPr>
+            </a:pPr>
+            <a:r>
+              <a:t>required to break even</a:t>
+            </a:r>
+          </a:p>
+        </p:txBody>
+      </p:sp>
+      <p:sp>
+        <p:nvSpPr>
+          <p:cNvPr id="4" name="Rectangle 3"/>
+          <p:cNvSpPr/>
+          <p:nvPr/>
+        </p:nvSpPr>
+        <p:spPr>
+          <a:xfrm>
+            <a:off x="4846320" y="1097280"/>
+            <a:ext cx="3840480" cy="4114800"/>
+          </a:xfrm>
+          <a:prstGeom prst="rect">
+            <a:avLst/>
+          </a:prstGeom>
+          <a:solidFill>
+            <a:srgbClr val="F0FFF0"/>
+          </a:solidFill>
+          <a:ln w="25400">
+            <a:solidFill>
+              <a:srgbClr val="009600"/>
+            </a:solidFill>
+          </a:ln>
+        </p:spPr>
+        <p:style>
+          <a:lnRef idx="1">
+            <a:schemeClr val="accent1"/>
+          </a:lnRef>
+          <a:fillRef idx="3">
+            <a:schemeClr val="accent1"/>
+          </a:fillRef>
+          <a:effectRef idx="2">
+            <a:schemeClr val="accent1"/>
+          </a:effectRef>
+          <a:fontRef idx="minor">
+            <a:schemeClr val="lt1"/>
+          </a:fontRef>
+        </p:style>
+        <p:txBody>
+          <a:bodyPr rtlCol="0" anchor="ctr" tIns="182880" lIns="182880" rIns="182880" wrap="square"/>
+          <a:lstStyle/>
+          <a:p>
+            <a:pPr algn="ctr">
+              <a:defRPr sz="1800" b="1">
+                <a:solidFill>
+                  <a:srgbClr val="009600"/>
+                </a:solidFill>
+              </a:defRPr>
+            </a:pPr>
+            <a:r>
+              <a:t>MEDIAN FAMILY</a:t>
+            </a:r>
+          </a:p>
+          <a:p>
+            <a:pPr>
+              <a:defRPr sz="1100"/>
+            </a:pPr>
+            <a:r>
+              <a:t>Monthly Income: €3,500</a:t>
+            </a:r>
+          </a:p>
+          <a:p>
+            <a:pPr>
+              <a:defRPr sz="1100"/>
+            </a:pPr>
+          </a:p>
+          <a:p>
+            <a:pPr>
+              <a:defRPr sz="1100"/>
+            </a:pPr>
+            <a:r>
+              <a:t>Essential Costs:</a:t>
+            </a:r>
+          </a:p>
+          <a:p>
+            <a:pPr>
+              <a:defRPr sz="1100"/>
+            </a:pPr>
+            <a:r>
+              <a:t>• Housing: €1,150</a:t>
+            </a:r>
+          </a:p>
+          <a:p>
+            <a:pPr>
+              <a:defRPr sz="1100"/>
+            </a:pPr>
+            <a:r>
+              <a:t>• Food: €304</a:t>
+            </a:r>
+          </a:p>
+          <a:p>
+            <a:pPr>
+              <a:defRPr sz="1100"/>
+            </a:pPr>
+            <a:r>
+              <a:t>• Utilities: €150</a:t>
+            </a:r>
+          </a:p>
+          <a:p>
+            <a:pPr>
+              <a:defRPr sz="1100"/>
+            </a:pPr>
+            <a:r>
+              <a:t>• Childcare: €200</a:t>
+            </a:r>
+          </a:p>
+          <a:p>
+            <a:pPr>
+              <a:defRPr sz="1100"/>
+            </a:pPr>
+            <a:r>
+              <a:t>• Transport: €100</a:t>
+            </a:r>
+          </a:p>
+          <a:p>
+            <a:pPr>
+              <a:defRPr sz="1100"/>
+            </a:pPr>
+            <a:r>
+              <a:t>• Other: €245</a:t>
+            </a:r>
+          </a:p>
+          <a:p>
+            <a:pPr>
+              <a:defRPr sz="1100"/>
+            </a:pPr>
+          </a:p>
+          <a:p>
+            <a:pPr>
+              <a:defRPr sz="1100"/>
+            </a:pPr>
+            <a:r>
+              <a:t>TOTAL: €2,249</a:t>
+            </a:r>
+          </a:p>
+          <a:p>
+            <a:pPr>
+              <a:defRPr sz="1100"/>
+            </a:pPr>
+          </a:p>
+          <a:p>
+            <a:pPr>
+              <a:defRPr sz="1100" b="1">
+                <a:solidFill>
+                  <a:srgbClr val="009600"/>
+                </a:solidFill>
+              </a:defRPr>
+            </a:pPr>
+            <a:r>
+              <a:t>MONTHLY SURPLUS:</a:t>
+            </a:r>
+          </a:p>
+          <a:p>
+            <a:pPr>
+              <a:defRPr sz="1100"/>
+            </a:pPr>
+            <a:r>
+              <a:t>+€1,251 per month</a:t>
+            </a:r>
+          </a:p>
+          <a:p>
+            <a:pPr>
+              <a:defRPr sz="1100"/>
+            </a:pPr>
+          </a:p>
+          <a:p>
+            <a:pPr>
+              <a:defRPr sz="1100"/>
+            </a:pPr>
+            <a:r>
+              <a:t>Can save, invest,</a:t>
+            </a:r>
+          </a:p>
+          <a:p>
+            <a:pPr>
+              <a:defRPr sz="1100"/>
+            </a:pPr>
+            <a:r>
+              <a:t>handle emergencies</a:t>
+            </a:r>
+          </a:p>
+        </p:txBody>
+      </p:sp>
+    </p:spTree>
+  </p:cSld>
+  <p:clrMapOvr>
+    <a:masterClrMapping/>
+  </p:clrMapOvr>
+</p:sld>
+</file>
+
+<file path=ppt/slides/slide27.xml><?xml version="1.0" encoding="utf-8"?>
+<p:sld xmlns:a="http://schemas.openxmlformats.org/drawingml/2006/main" xmlns:p="http://schemas.openxmlformats.org/presentationml/2006/main" xmlns:r="http://schemas.openxmlformats.org/officeDocument/2006/relationships">
+  <p:cSld>
+    <p:bg>
+      <p:bgPr>
+        <a:solidFill>
+          <a:srgbClr val="F5F5F5"/>
+        </a:solidFill>
+        <a:effectLst/>
+      </p:bgPr>
+    </p:bg>
+    <p:spTree>
+      <p:nvGrpSpPr>
+        <p:cNvPr id="1" name=""/>
+        <p:cNvGrpSpPr/>
+        <p:nvPr/>
+      </p:nvGrpSpPr>
+      <p:grpSpPr/>
+      <p:sp>
+        <p:nvSpPr>
+          <p:cNvPr id="2" name="TextBox 1"/>
+          <p:cNvSpPr txBox="1"/>
+          <p:nvPr/>
+        </p:nvSpPr>
+        <p:spPr>
+          <a:xfrm>
+            <a:off x="457200" y="274320"/>
+            <a:ext cx="8229600" cy="548640"/>
+          </a:xfrm>
+          <a:prstGeom prst="rect">
+            <a:avLst/>
+          </a:prstGeom>
+          <a:noFill/>
+        </p:spPr>
+        <p:txBody>
+          <a:bodyPr wrap="none">
+            <a:spAutoFit/>
+          </a:bodyPr>
+          <a:lstStyle/>
+          <a:p>
+            <a:pPr>
+              <a:defRPr sz="3600" b="1">
+                <a:solidFill>
+                  <a:srgbClr val="1F4D76"/>
+                </a:solidFill>
+              </a:defRPr>
+            </a:pPr>
+            <a:r>
+              <a:t>Why This Matters: Poverty is Structural</a:t>
+            </a:r>
+          </a:p>
+        </p:txBody>
+      </p:sp>
+      <p:sp>
+        <p:nvSpPr>
+          <p:cNvPr id="3" name="TextBox 2"/>
+          <p:cNvSpPr txBox="1"/>
+          <p:nvPr/>
+        </p:nvSpPr>
+        <p:spPr>
+          <a:xfrm>
+            <a:off x="640080" y="1097280"/>
+            <a:ext cx="7863840" cy="4389120"/>
+          </a:xfrm>
+          <a:prstGeom prst="rect">
+            <a:avLst/>
+          </a:prstGeom>
+          <a:noFill/>
+        </p:spPr>
+        <p:txBody>
+          <a:bodyPr wrap="square">
+            <a:spAutoFit/>
+          </a:bodyPr>
+          <a:lstStyle/>
+          <a:p>
+            <a:pPr>
+              <a:defRPr sz="1400" b="1">
+                <a:solidFill>
+                  <a:srgbClr val="C80000"/>
+                </a:solidFill>
+              </a:defRPr>
+            </a:pPr>
+            <a:r>
+              <a:t>SMIC families cannot survive on SMIC income alone.</a:t>
+            </a:r>
+          </a:p>
+          <a:p>
+            <a:pPr>
+              <a:defRPr sz="1400">
+                <a:solidFill>
+                  <a:srgbClr val="000000"/>
+                </a:solidFill>
+              </a:defRPr>
+            </a:pPr>
+          </a:p>
+          <a:p>
+            <a:pPr>
+              <a:defRPr sz="1400">
+                <a:solidFill>
+                  <a:srgbClr val="000000"/>
+                </a:solidFill>
+              </a:defRPr>
+            </a:pPr>
+            <a:r>
+              <a:t>Government transfers (CAF, housing allowance: €300-550/month) are</a:t>
+            </a:r>
+          </a:p>
+          <a:p>
+            <a:pPr>
+              <a:defRPr sz="1400">
+                <a:solidFill>
+                  <a:srgbClr val="000000"/>
+                </a:solidFill>
+              </a:defRPr>
+            </a:pPr>
+            <a:r>
+              <a:t>structural survival requirement, not supplemental help.</a:t>
+            </a:r>
+          </a:p>
+          <a:p>
+            <a:pPr>
+              <a:defRPr sz="1400">
+                <a:solidFill>
+                  <a:srgbClr val="000000"/>
+                </a:solidFill>
+              </a:defRPr>
+            </a:pPr>
+          </a:p>
+          <a:p>
+            <a:pPr>
+              <a:defRPr sz="1400">
+                <a:solidFill>
+                  <a:srgbClr val="000000"/>
+                </a:solidFill>
+              </a:defRPr>
+            </a:pPr>
+            <a:r>
+              <a:t>With transfers, SMIC families break even with no margin for:</a:t>
+            </a:r>
+          </a:p>
+          <a:p>
+            <a:pPr>
+              <a:defRPr sz="1400">
+                <a:solidFill>
+                  <a:srgbClr val="646464"/>
+                </a:solidFill>
+              </a:defRPr>
+            </a:pPr>
+            <a:r>
+              <a:t>  • Emergencies (car repairs, medical events)</a:t>
+            </a:r>
+          </a:p>
+          <a:p>
+            <a:pPr>
+              <a:defRPr sz="1400">
+                <a:solidFill>
+                  <a:srgbClr val="646464"/>
+                </a:solidFill>
+              </a:defRPr>
+            </a:pPr>
+            <a:r>
+              <a:t>  • Savings (impossible)</a:t>
+            </a:r>
+          </a:p>
+          <a:p>
+            <a:pPr>
+              <a:defRPr sz="1400">
+                <a:solidFill>
+                  <a:srgbClr val="646464"/>
+                </a:solidFill>
+              </a:defRPr>
+            </a:pPr>
+            <a:r>
+              <a:t>  • Family composition changes (baby, aging parent)</a:t>
+            </a:r>
+          </a:p>
+          <a:p>
+            <a:pPr>
+              <a:defRPr sz="1400">
+                <a:solidFill>
+                  <a:srgbClr val="000000"/>
+                </a:solidFill>
+              </a:defRPr>
+            </a:pPr>
+          </a:p>
+          <a:p>
+            <a:pPr>
+              <a:defRPr sz="1400">
+                <a:solidFill>
+                  <a:srgbClr val="000000"/>
+                </a:solidFill>
+              </a:defRPr>
+            </a:pPr>
+            <a:r>
+              <a:t>When composition changes occur (teenage child costs €3,461/year more),</a:t>
+            </a:r>
+          </a:p>
+          <a:p>
+            <a:pPr>
+              <a:defRPr sz="1400" b="1">
+                <a:solidFill>
+                  <a:srgbClr val="C80000"/>
+                </a:solidFill>
+              </a:defRPr>
+            </a:pPr>
+            <a:r>
+              <a:t>SMIC families have NO margin to absorb the cost.</a:t>
+            </a:r>
+          </a:p>
+          <a:p>
+            <a:pPr>
+              <a:defRPr sz="1400">
+                <a:solidFill>
+                  <a:srgbClr val="000000"/>
+                </a:solidFill>
+              </a:defRPr>
+            </a:pPr>
+          </a:p>
+          <a:p>
+            <a:pPr>
+              <a:defRPr sz="1400" b="1">
+                <a:solidFill>
+                  <a:srgbClr val="C80000"/>
+                </a:solidFill>
+              </a:defRPr>
+            </a:pPr>
+            <a:r>
+              <a:t>Result: Debt accumulation OR going without essentials</a:t>
+            </a:r>
+          </a:p>
+        </p:txBody>
+      </p:sp>
+    </p:spTree>
+  </p:cSld>
+  <p:clrMapOvr>
+    <a:masterClrMapping/>
+  </p:clrMapOvr>
+</p:sld>
+</file>
+
+<file path=ppt/slides/slide28.xml><?xml version="1.0" encoding="utf-8"?>
+<p:sld xmlns:a="http://schemas.openxmlformats.org/drawingml/2006/main" xmlns:p="http://schemas.openxmlformats.org/presentationml/2006/main" xmlns:r="http://schemas.openxmlformats.org/officeDocument/2006/relationships">
+  <p:cSld>
+    <p:bg>
+      <p:bgPr>
+        <a:solidFill>
+          <a:srgbClr val="F5F5F5"/>
+        </a:solidFill>
+        <a:effectLst/>
+      </p:bgPr>
+    </p:bg>
+    <p:spTree>
+      <p:nvGrpSpPr>
+        <p:cNvPr id="1" name=""/>
+        <p:cNvGrpSpPr/>
+        <p:nvPr/>
+      </p:nvGrpSpPr>
+      <p:grpSpPr/>
+      <p:sp>
+        <p:nvSpPr>
+          <p:cNvPr id="2" name="TextBox 1"/>
+          <p:cNvSpPr txBox="1"/>
+          <p:nvPr/>
+        </p:nvSpPr>
+        <p:spPr>
+          <a:xfrm>
+            <a:off x="457200" y="274320"/>
+            <a:ext cx="8229600" cy="731520"/>
+          </a:xfrm>
+          <a:prstGeom prst="rect">
+            <a:avLst/>
+          </a:prstGeom>
+          <a:noFill/>
+        </p:spPr>
+        <p:txBody>
+          <a:bodyPr wrap="none">
+            <a:spAutoFit/>
+          </a:bodyPr>
+          <a:lstStyle/>
+          <a:p>
+            <a:pPr>
+              <a:defRPr sz="4000" b="1">
+                <a:solidFill>
+                  <a:srgbClr val="1F4D76"/>
+                </a:solidFill>
+              </a:defRPr>
+            </a:pPr>
+            <a:r>
+              <a:t>Complete Budget Reality: Where SMIC Families Stand</a:t>
+            </a:r>
+          </a:p>
+        </p:txBody>
+      </p:sp>
+      <p:sp>
+        <p:nvSpPr>
+          <p:cNvPr id="3" name="TextBox 2"/>
+          <p:cNvSpPr txBox="1"/>
+          <p:nvPr/>
+        </p:nvSpPr>
+        <p:spPr>
+          <a:xfrm>
+            <a:off x="457200" y="1097280"/>
+            <a:ext cx="8229600" cy="457200"/>
+          </a:xfrm>
+          <a:prstGeom prst="rect">
+            <a:avLst/>
+          </a:prstGeom>
+          <a:noFill/>
+        </p:spPr>
+        <p:txBody>
+          <a:bodyPr wrap="none">
+            <a:spAutoFit/>
+          </a:bodyPr>
+          <a:lstStyle/>
+          <a:p>
+            <a:pPr>
+              <a:defRPr sz="2400">
+                <a:solidFill>
+                  <a:srgbClr val="646464"/>
+                </a:solidFill>
+              </a:defRPr>
+            </a:pPr>
+            <a:r>
+              <a:t>All Essential Monthly Costs vs. Income</a:t>
+            </a:r>
+          </a:p>
+        </p:txBody>
+      </p:sp>
+      <p:pic>
+        <p:nvPicPr>
+          <p:cNvPr id="4" name="Picture 3" descr="image.png"/>
+          <p:cNvPicPr>
+            <a:picLocks noChangeAspect="1"/>
+          </p:cNvPicPr>
+          <p:nvPr/>
+        </p:nvPicPr>
+        <p:blipFill>
+          <a:blip r:embed="rId2"/>
+          <a:stretch>
+            <a:fillRect/>
+          </a:stretch>
+        </p:blipFill>
+        <p:spPr>
+          <a:xfrm>
+            <a:off x="457200" y="1828800"/>
+            <a:ext cx="8229600" cy="3472263"/>
+          </a:xfrm>
+          <a:prstGeom prst="rect">
+            <a:avLst/>
+          </a:prstGeom>
+        </p:spPr>
+      </p:pic>
+    </p:spTree>
+  </p:cSld>
+  <p:clrMapOvr>
+    <a:masterClrMapping/>
+  </p:clrMapOvr>
+</p:sld>
+</file>
+
+<file path=ppt/slides/slide29.xml><?xml version="1.0" encoding="utf-8"?>
+<p:sld xmlns:a="http://schemas.openxmlformats.org/drawingml/2006/main" xmlns:p="http://schemas.openxmlformats.org/presentationml/2006/main" xmlns:r="http://schemas.openxmlformats.org/officeDocument/2006/relationships">
+  <p:cSld>
+    <p:bg>
+      <p:bgPr>
+        <a:solidFill>
+          <a:srgbClr val="F5F5F5"/>
+        </a:solidFill>
+        <a:effectLst/>
+      </p:bgPr>
+    </p:bg>
+    <p:spTree>
+      <p:nvGrpSpPr>
+        <p:cNvPr id="1" name=""/>
+        <p:cNvGrpSpPr/>
+        <p:nvPr/>
+      </p:nvGrpSpPr>
+      <p:grpSpPr/>
+      <p:sp>
+        <p:nvSpPr>
+          <p:cNvPr id="2" name="TextBox 1"/>
+          <p:cNvSpPr txBox="1"/>
+          <p:nvPr/>
+        </p:nvSpPr>
+        <p:spPr>
+          <a:xfrm>
+            <a:off x="457200" y="274320"/>
+            <a:ext cx="8229600" cy="548640"/>
+          </a:xfrm>
+          <a:prstGeom prst="rect">
+            <a:avLst/>
+          </a:prstGeom>
+          <a:noFill/>
+        </p:spPr>
+        <p:txBody>
+          <a:bodyPr wrap="none">
+            <a:spAutoFit/>
+          </a:bodyPr>
+          <a:lstStyle/>
+          <a:p>
+            <a:pPr>
+              <a:defRPr sz="3600" b="1">
+                <a:solidFill>
+                  <a:srgbClr val="1F4D76"/>
+                </a:solidFill>
+              </a:defRPr>
+            </a:pPr>
+            <a:r>
+              <a:t>The Structural Deficit: Income vs. Reality</a:t>
+            </a:r>
+          </a:p>
+        </p:txBody>
+      </p:sp>
+      <p:sp>
+        <p:nvSpPr>
+          <p:cNvPr id="3" name="Rectangle 2"/>
+          <p:cNvSpPr/>
+          <p:nvPr/>
+        </p:nvSpPr>
+        <p:spPr>
+          <a:xfrm>
+            <a:off x="457200" y="1097280"/>
+            <a:ext cx="3840480" cy="4114800"/>
+          </a:xfrm>
+          <a:prstGeom prst="rect">
+            <a:avLst/>
+          </a:prstGeom>
+          <a:solidFill>
+            <a:srgbClr val="FFF0F0"/>
+          </a:solidFill>
+          <a:ln w="25400">
+            <a:solidFill>
+              <a:srgbClr val="C80000"/>
+            </a:solidFill>
+          </a:ln>
+        </p:spPr>
+        <p:style>
+          <a:lnRef idx="1">
+            <a:schemeClr val="accent1"/>
+          </a:lnRef>
+          <a:fillRef idx="3">
+            <a:schemeClr val="accent1"/>
+          </a:fillRef>
+          <a:effectRef idx="2">
+            <a:schemeClr val="accent1"/>
+          </a:effectRef>
+          <a:fontRef idx="minor">
+            <a:schemeClr val="lt1"/>
+          </a:fontRef>
+        </p:style>
+        <p:txBody>
+          <a:bodyPr rtlCol="0" anchor="ctr" tIns="182880" lIns="182880" rIns="182880" wrap="square"/>
+          <a:lstStyle/>
+          <a:p>
+            <a:pPr algn="ctr">
+              <a:defRPr sz="1800" b="1">
+                <a:solidFill>
+                  <a:srgbClr val="C80000"/>
+                </a:solidFill>
+              </a:defRPr>
+            </a:pPr>
+            <a:r>
+              <a:t>SMIC FAMILY</a:t>
+            </a:r>
+          </a:p>
+          <a:p>
+            <a:pPr>
+              <a:defRPr sz="1100"/>
+            </a:pPr>
+            <a:r>
+              <a:t>Monthly Income: €1,750</a:t>
+            </a:r>
+          </a:p>
+          <a:p>
+            <a:pPr>
+              <a:defRPr sz="1100"/>
+            </a:pPr>
+          </a:p>
+          <a:p>
+            <a:pPr>
+              <a:defRPr sz="1100"/>
+            </a:pPr>
+            <a:r>
+              <a:t>Essential Costs:</a:t>
+            </a:r>
+          </a:p>
+          <a:p>
+            <a:pPr>
+              <a:defRPr sz="1100"/>
+            </a:pPr>
+            <a:r>
+              <a:t>• Housing: €725</a:t>
+            </a:r>
+          </a:p>
+          <a:p>
+            <a:pPr>
+              <a:defRPr sz="1100"/>
+            </a:pPr>
+            <a:r>
+              <a:t>• Food: €304</a:t>
+            </a:r>
+          </a:p>
+          <a:p>
+            <a:pPr>
+              <a:defRPr sz="1100"/>
+            </a:pPr>
+            <a:r>
+              <a:t>• Utilities: €150</a:t>
+            </a:r>
+          </a:p>
+          <a:p>
+            <a:pPr>
+              <a:defRPr sz="1100"/>
+            </a:pPr>
+            <a:r>
+              <a:t>• Childcare: €200</a:t>
+            </a:r>
+          </a:p>
+          <a:p>
+            <a:pPr>
+              <a:defRPr sz="1100"/>
+            </a:pPr>
+            <a:r>
+              <a:t>• Transport: €100</a:t>
+            </a:r>
+          </a:p>
+          <a:p>
+            <a:pPr>
+              <a:defRPr sz="1100"/>
+            </a:pPr>
+            <a:r>
+              <a:t>• Other: €245</a:t>
+            </a:r>
+          </a:p>
+          <a:p>
+            <a:pPr>
+              <a:defRPr sz="1100"/>
+            </a:pPr>
+          </a:p>
+          <a:p>
+            <a:pPr>
+              <a:defRPr sz="1100"/>
+            </a:pPr>
+            <a:r>
+              <a:t>TOTAL: €1,824</a:t>
+            </a:r>
+          </a:p>
+          <a:p>
+            <a:pPr>
+              <a:defRPr sz="1100"/>
+            </a:pPr>
+          </a:p>
+          <a:p>
+            <a:pPr>
+              <a:defRPr sz="1100" b="1">
+                <a:solidFill>
+                  <a:srgbClr val="C80000"/>
+                </a:solidFill>
+              </a:defRPr>
+            </a:pPr>
+            <a:r>
+              <a:t>MONTHLY DEFICIT:</a:t>
+            </a:r>
+          </a:p>
+          <a:p>
+            <a:pPr>
+              <a:defRPr sz="1100"/>
+            </a:pPr>
+            <a:r>
+              <a:t>-€74 per month</a:t>
+            </a:r>
+          </a:p>
+          <a:p>
+            <a:pPr>
+              <a:defRPr sz="1100"/>
+            </a:pPr>
+          </a:p>
+          <a:p>
+            <a:pPr>
+              <a:defRPr sz="1100"/>
+            </a:pPr>
+            <a:r>
+              <a:t>Government transfers</a:t>
+            </a:r>
+          </a:p>
+          <a:p>
+            <a:pPr>
+              <a:defRPr sz="1100" b="1">
+                <a:solidFill>
+                  <a:srgbClr val="C80000"/>
+                </a:solidFill>
+              </a:defRPr>
+            </a:pPr>
+            <a:r>
+              <a:t>required to break even</a:t>
+            </a:r>
+          </a:p>
+        </p:txBody>
+      </p:sp>
+      <p:sp>
+        <p:nvSpPr>
+          <p:cNvPr id="4" name="Rectangle 3"/>
+          <p:cNvSpPr/>
+          <p:nvPr/>
+        </p:nvSpPr>
+        <p:spPr>
+          <a:xfrm>
+            <a:off x="4846320" y="1097280"/>
+            <a:ext cx="3840480" cy="4114800"/>
+          </a:xfrm>
+          <a:prstGeom prst="rect">
+            <a:avLst/>
+          </a:prstGeom>
+          <a:solidFill>
+            <a:srgbClr val="F0FFF0"/>
+          </a:solidFill>
+          <a:ln w="25400">
+            <a:solidFill>
+              <a:srgbClr val="009600"/>
+            </a:solidFill>
+          </a:ln>
+        </p:spPr>
+        <p:style>
+          <a:lnRef idx="1">
+            <a:schemeClr val="accent1"/>
+          </a:lnRef>
+          <a:fillRef idx="3">
+            <a:schemeClr val="accent1"/>
+          </a:fillRef>
+          <a:effectRef idx="2">
+            <a:schemeClr val="accent1"/>
+          </a:effectRef>
+          <a:fontRef idx="minor">
+            <a:schemeClr val="lt1"/>
+          </a:fontRef>
+        </p:style>
+        <p:txBody>
+          <a:bodyPr rtlCol="0" anchor="ctr" tIns="182880" lIns="182880" rIns="182880" wrap="square"/>
+          <a:lstStyle/>
+          <a:p>
+            <a:pPr algn="ctr">
+              <a:defRPr sz="1800" b="1">
+                <a:solidFill>
+                  <a:srgbClr val="009600"/>
+                </a:solidFill>
+              </a:defRPr>
+            </a:pPr>
+            <a:r>
+              <a:t>MEDIAN FAMILY</a:t>
+            </a:r>
+          </a:p>
+          <a:p>
+            <a:pPr>
+              <a:defRPr sz="1100"/>
+            </a:pPr>
+            <a:r>
+              <a:t>Monthly Income: €3,500</a:t>
+            </a:r>
+          </a:p>
+          <a:p>
+            <a:pPr>
+              <a:defRPr sz="1100"/>
+            </a:pPr>
+          </a:p>
+          <a:p>
+            <a:pPr>
+              <a:defRPr sz="1100"/>
+            </a:pPr>
+            <a:r>
+              <a:t>Essential Costs:</a:t>
+            </a:r>
+          </a:p>
+          <a:p>
+            <a:pPr>
+              <a:defRPr sz="1100"/>
+            </a:pPr>
+            <a:r>
+              <a:t>• Housing: €1,150</a:t>
+            </a:r>
+          </a:p>
+          <a:p>
+            <a:pPr>
+              <a:defRPr sz="1100"/>
+            </a:pPr>
+            <a:r>
+              <a:t>• Food: €304</a:t>
+            </a:r>
+          </a:p>
+          <a:p>
+            <a:pPr>
+              <a:defRPr sz="1100"/>
+            </a:pPr>
+            <a:r>
+              <a:t>• Utilities: €150</a:t>
+            </a:r>
+          </a:p>
+          <a:p>
+            <a:pPr>
+              <a:defRPr sz="1100"/>
+            </a:pPr>
+            <a:r>
+              <a:t>• Childcare: €200</a:t>
+            </a:r>
+          </a:p>
+          <a:p>
+            <a:pPr>
+              <a:defRPr sz="1100"/>
+            </a:pPr>
+            <a:r>
+              <a:t>• Transport: €100</a:t>
+            </a:r>
+          </a:p>
+          <a:p>
+            <a:pPr>
+              <a:defRPr sz="1100"/>
+            </a:pPr>
+            <a:r>
+              <a:t>• Other: €245</a:t>
+            </a:r>
+          </a:p>
+          <a:p>
+            <a:pPr>
+              <a:defRPr sz="1100"/>
+            </a:pPr>
+          </a:p>
+          <a:p>
+            <a:pPr>
+              <a:defRPr sz="1100"/>
+            </a:pPr>
+            <a:r>
+              <a:t>TOTAL: €2,249</a:t>
+            </a:r>
+          </a:p>
+          <a:p>
+            <a:pPr>
+              <a:defRPr sz="1100"/>
+            </a:pPr>
+          </a:p>
+          <a:p>
+            <a:pPr>
+              <a:defRPr sz="1100" b="1">
+                <a:solidFill>
+                  <a:srgbClr val="009600"/>
+                </a:solidFill>
+              </a:defRPr>
+            </a:pPr>
+            <a:r>
+              <a:t>MONTHLY SURPLUS:</a:t>
+            </a:r>
+          </a:p>
+          <a:p>
+            <a:pPr>
+              <a:defRPr sz="1100"/>
+            </a:pPr>
+            <a:r>
+              <a:t>+€1,251 per month</a:t>
+            </a:r>
+          </a:p>
+          <a:p>
+            <a:pPr>
+              <a:defRPr sz="1100"/>
+            </a:pPr>
+          </a:p>
+          <a:p>
+            <a:pPr>
+              <a:defRPr sz="1100"/>
+            </a:pPr>
+            <a:r>
+              <a:t>Can save, invest,</a:t>
+            </a:r>
+          </a:p>
+          <a:p>
+            <a:pPr>
+              <a:defRPr sz="1100"/>
+            </a:pPr>
+            <a:r>
+              <a:t>handle emergencies</a:t>
+            </a:r>
+          </a:p>
+        </p:txBody>
+      </p:sp>
+    </p:spTree>
+  </p:cSld>
+  <p:clrMapOvr>
+    <a:masterClrMapping/>
+  </p:clrMapOvr>
+</p:sld>
+</file>
+
+<file path=ppt/slides/slide3.xml><?xml version="1.0" encoding="utf-8"?>
+<p:sld xmlns:a="http://schemas.openxmlformats.org/drawingml/2006/main" xmlns:p="http://schemas.openxmlformats.org/presentationml/2006/main" xmlns:r="http://schemas.openxmlformats.org/officeDocument/2006/relationships">
+  <p:cSld>
+    <p:bg>
+      <p:bgPr>
+        <a:solidFill>
+          <a:srgbClr val="FFFFFF"/>
+        </a:solidFill>
+        <a:effectLst/>
+      </p:bgPr>
+    </p:bg>
+    <p:spTree>
+      <p:nvGrpSpPr>
+        <p:cNvPr id="1" name=""/>
+        <p:cNvGrpSpPr/>
+        <p:nvPr/>
+      </p:nvGrpSpPr>
+      <p:grpSpPr/>
+      <p:sp>
+        <p:nvSpPr>
+          <p:cNvPr id="2" name="Rectangle 1"/>
+          <p:cNvSpPr/>
+          <p:nvPr/>
+        </p:nvSpPr>
+        <p:spPr>
+          <a:xfrm>
+            <a:off x="0" y="0"/>
+            <a:ext cx="9144000" cy="822960"/>
+          </a:xfrm>
+          <a:prstGeom prst="rect">
+            <a:avLst/>
+          </a:prstGeom>
+          <a:solidFill>
+            <a:srgbClr val="1F4E79"/>
+          </a:solidFill>
+          <a:ln>
+            <a:solidFill>
+              <a:srgbClr val="1F4E79"/>
+            </a:solidFill>
+          </a:ln>
+        </p:spPr>
+        <p:style>
+          <a:lnRef idx="1">
+            <a:schemeClr val="accent1"/>
+          </a:lnRef>
+          <a:fillRef idx="3">
+            <a:schemeClr val="accent1"/>
+          </a:fillRef>
+          <a:effectRef idx="2">
+            <a:schemeClr val="accent1"/>
+          </a:effectRef>
+          <a:fontRef idx="minor">
+            <a:schemeClr val="lt1"/>
+          </a:fontRef>
+        </p:style>
+        <p:txBody>
+          <a:bodyPr rtlCol="0" anchor="ctr"/>
+          <a:lstStyle/>
+          <a:p>
+            <a:pPr algn="ctr">
+              <a:spcBef>
+                <a:spcPts val="1200"/>
+              </a:spcBef>
+              <a:spcAft>
+                <a:spcPts val="1200"/>
+              </a:spcAft>
+              <a:defRPr sz="4400" b="1">
+                <a:solidFill>
+                  <a:srgbClr val="FFFFFF"/>
+                </a:solidFill>
+              </a:defRPr>
+            </a:pPr>
+            <a:r>
+              <a:t>What's Missing from Official Baskets?</a:t>
+            </a:r>
+          </a:p>
+        </p:txBody>
+      </p:sp>
+      <p:sp>
+        <p:nvSpPr>
+          <p:cNvPr id="3" name="TextBox 2"/>
+          <p:cNvSpPr txBox="1"/>
+          <p:nvPr/>
+        </p:nvSpPr>
+        <p:spPr>
+          <a:xfrm>
+            <a:off x="731520" y="1188720"/>
+            <a:ext cx="7680960" cy="5212080"/>
+          </a:xfrm>
+          <a:prstGeom prst="rect">
+            <a:avLst/>
+          </a:prstGeom>
+          <a:noFill/>
+        </p:spPr>
+        <p:txBody>
+          <a:bodyPr wrap="square">
+            <a:spAutoFit/>
+          </a:bodyPr>
+          <a:lstStyle/>
+          <a:p>
+            <a:pPr>
+              <a:spcBef>
+                <a:spcPts val="600"/>
+              </a:spcBef>
+              <a:spcAft>
+                <a:spcPts val="800"/>
+              </a:spcAft>
+              <a:defRPr sz="2000">
+                <a:solidFill>
+                  <a:srgbClr val="333333"/>
+                </a:solidFill>
+              </a:defRPr>
+            </a:pPr>
+            <a:r>
+              <a:t>BABY &amp; FAMILY ESSENTIALS (27.98 EUR/month):</a:t>
+            </a:r>
+          </a:p>
+          <a:p>
+            <a:pPr>
+              <a:spcBef>
+                <a:spcPts val="600"/>
+              </a:spcBef>
+              <a:spcAft>
+                <a:spcPts val="800"/>
+              </a:spcAft>
+              <a:defRPr sz="2000">
+                <a:solidFill>
+                  <a:srgbClr val="333333"/>
+                </a:solidFill>
+              </a:defRPr>
+            </a:pPr>
+            <a:r>
+              <a:t>  • Diapers: 18.99 EUR</a:t>
+            </a:r>
+          </a:p>
+          <a:p>
+            <a:pPr>
+              <a:spcBef>
+                <a:spcPts val="600"/>
+              </a:spcBef>
+              <a:spcAft>
+                <a:spcPts val="800"/>
+              </a:spcAft>
+              <a:defRPr sz="2000">
+                <a:solidFill>
+                  <a:srgbClr val="333333"/>
+                </a:solidFill>
+              </a:defRPr>
+            </a:pPr>
+            <a:r>
+              <a:t>  • Baby creams &amp; ointments: 8.99 EUR</a:t>
+            </a:r>
+          </a:p>
+          <a:p>
+            <a:pPr>
+              <a:spcBef>
+                <a:spcPts val="600"/>
+              </a:spcBef>
+              <a:spcAft>
+                <a:spcPts val="800"/>
+              </a:spcAft>
+              <a:defRPr sz="2000">
+                <a:solidFill>
+                  <a:srgbClr val="333333"/>
+                </a:solidFill>
+              </a:defRPr>
+            </a:pPr>
+          </a:p>
+          <a:p>
+            <a:pPr>
+              <a:spcBef>
+                <a:spcPts val="600"/>
+              </a:spcBef>
+              <a:spcAft>
+                <a:spcPts val="800"/>
+              </a:spcAft>
+              <a:defRPr sz="2000">
+                <a:solidFill>
+                  <a:srgbClr val="333333"/>
+                </a:solidFill>
+              </a:defRPr>
+            </a:pPr>
+            <a:r>
+              <a:t>DIETARY VARIETIES &amp; ALTERNATIVES:</a:t>
+            </a:r>
+          </a:p>
+          <a:p>
+            <a:pPr>
+              <a:spcBef>
+                <a:spcPts val="600"/>
+              </a:spcBef>
+              <a:spcAft>
+                <a:spcPts val="800"/>
+              </a:spcAft>
+              <a:defRPr sz="2000">
+                <a:solidFill>
+                  <a:srgbClr val="333333"/>
+                </a:solidFill>
+              </a:defRPr>
+            </a:pPr>
+            <a:r>
+              <a:t>  • Lactose-free milk, gluten-free options, different protein sources</a:t>
+            </a:r>
+          </a:p>
+          <a:p>
+            <a:pPr>
+              <a:spcBef>
+                <a:spcPts val="600"/>
+              </a:spcBef>
+              <a:spcAft>
+                <a:spcPts val="800"/>
+              </a:spcAft>
+              <a:defRPr sz="2000">
+                <a:solidFill>
+                  <a:srgbClr val="333333"/>
+                </a:solidFill>
+              </a:defRPr>
+            </a:pPr>
+          </a:p>
+          <a:p>
+            <a:pPr>
+              <a:spcBef>
+                <a:spcPts val="600"/>
+              </a:spcBef>
+              <a:spcAft>
+                <a:spcPts val="800"/>
+              </a:spcAft>
+              <a:defRPr sz="2000">
+                <a:solidFill>
+                  <a:srgbClr val="333333"/>
+                </a:solidFill>
+              </a:defRPr>
+            </a:pPr>
+            <a:r>
+              <a:t>COMPLEMENTARY COOKING ITEMS:</a:t>
+            </a:r>
+          </a:p>
+          <a:p>
+            <a:pPr>
+              <a:spcBef>
+                <a:spcPts val="600"/>
+              </a:spcBef>
+              <a:spcAft>
+                <a:spcPts val="800"/>
+              </a:spcAft>
+              <a:defRPr sz="2000">
+                <a:solidFill>
+                  <a:srgbClr val="333333"/>
+                </a:solidFill>
+              </a:defRPr>
+            </a:pPr>
+            <a:r>
+              <a:t>  • Spices, sauces, quality oils - items that complete meals</a:t>
+            </a:r>
+          </a:p>
+          <a:p>
+            <a:pPr>
+              <a:spcBef>
+                <a:spcPts val="600"/>
+              </a:spcBef>
+              <a:spcAft>
+                <a:spcPts val="800"/>
+              </a:spcAft>
+              <a:defRPr sz="2000">
+                <a:solidFill>
+                  <a:srgbClr val="333333"/>
+                </a:solidFill>
+              </a:defRPr>
+            </a:pPr>
+          </a:p>
+          <a:p>
+            <a:pPr>
+              <a:spcBef>
+                <a:spcPts val="600"/>
+              </a:spcBef>
+              <a:spcAft>
+                <a:spcPts val="800"/>
+              </a:spcAft>
+              <a:defRPr sz="2000">
+                <a:solidFill>
+                  <a:srgbClr val="333333"/>
+                </a:solidFill>
+              </a:defRPr>
+            </a:pPr>
+            <a:r>
+              <a:t>HEALTH &amp; HYGIENE ESSENTIALS:</a:t>
+            </a:r>
+          </a:p>
+          <a:p>
+            <a:pPr>
+              <a:spcBef>
+                <a:spcPts val="600"/>
+              </a:spcBef>
+              <a:spcAft>
+                <a:spcPts val="800"/>
+              </a:spcAft>
+              <a:defRPr sz="2000">
+                <a:solidFill>
+                  <a:srgbClr val="333333"/>
+                </a:solidFill>
+              </a:defRPr>
+            </a:pPr>
+            <a:r>
+              <a:t>  • Toilet paper, soap, shampoo, toothpaste: 15-20 EUR/month</a:t>
+            </a:r>
+          </a:p>
+          <a:p>
+            <a:pPr>
+              <a:spcBef>
+                <a:spcPts val="600"/>
+              </a:spcBef>
+              <a:spcAft>
+                <a:spcPts val="800"/>
+              </a:spcAft>
+              <a:defRPr sz="2000">
+                <a:solidFill>
+                  <a:srgbClr val="333333"/>
+                </a:solidFill>
+              </a:defRPr>
+            </a:pPr>
+          </a:p>
+          <a:p>
+            <a:pPr>
+              <a:spcBef>
+                <a:spcPts val="600"/>
+              </a:spcBef>
+              <a:spcAft>
+                <a:spcPts val="800"/>
+              </a:spcAft>
+              <a:defRPr sz="2000">
+                <a:solidFill>
+                  <a:srgbClr val="333333"/>
+                </a:solidFill>
+              </a:defRPr>
+            </a:pPr>
+            <a:r>
+              <a:t>CULTURAL &amp; LIFE QUALITY:</a:t>
+            </a:r>
+          </a:p>
+          <a:p>
+            <a:pPr>
+              <a:spcBef>
+                <a:spcPts val="600"/>
+              </a:spcBef>
+              <a:spcAft>
+                <a:spcPts val="800"/>
+              </a:spcAft>
+              <a:defRPr sz="2000">
+                <a:solidFill>
+                  <a:srgbClr val="333333"/>
+                </a:solidFill>
+              </a:defRPr>
+            </a:pPr>
+            <a:r>
+              <a:t>  • Wine, chocolate, treats - the cost of living, not just surviving</a:t>
+            </a:r>
+          </a:p>
+        </p:txBody>
+      </p:sp>
+    </p:spTree>
+  </p:cSld>
+  <p:clrMapOvr>
+    <a:masterClrMapping/>
+  </p:clrMapOvr>
+</p:sld>
+</file>
+
+<file path=ppt/slides/slide30.xml><?xml version="1.0" encoding="utf-8"?>
+<p:sld xmlns:a="http://schemas.openxmlformats.org/drawingml/2006/main" xmlns:p="http://schemas.openxmlformats.org/presentationml/2006/main" xmlns:r="http://schemas.openxmlformats.org/officeDocument/2006/relationships">
+  <p:cSld>
+    <p:bg>
+      <p:bgPr>
+        <a:solidFill>
+          <a:srgbClr val="F5F5F5"/>
+        </a:solidFill>
+        <a:effectLst/>
+      </p:bgPr>
+    </p:bg>
+    <p:spTree>
+      <p:nvGrpSpPr>
+        <p:cNvPr id="1" name=""/>
+        <p:cNvGrpSpPr/>
+        <p:nvPr/>
+      </p:nvGrpSpPr>
+      <p:grpSpPr/>
+      <p:sp>
+        <p:nvSpPr>
+          <p:cNvPr id="2" name="TextBox 1"/>
+          <p:cNvSpPr txBox="1"/>
+          <p:nvPr/>
+        </p:nvSpPr>
+        <p:spPr>
+          <a:xfrm>
+            <a:off x="457200" y="274320"/>
+            <a:ext cx="8229600" cy="548640"/>
+          </a:xfrm>
+          <a:prstGeom prst="rect">
+            <a:avLst/>
+          </a:prstGeom>
+          <a:noFill/>
+        </p:spPr>
+        <p:txBody>
+          <a:bodyPr wrap="none">
+            <a:spAutoFit/>
+          </a:bodyPr>
+          <a:lstStyle/>
+          <a:p>
+            <a:pPr>
+              <a:defRPr sz="3600" b="1">
+                <a:solidFill>
+                  <a:srgbClr val="1F4D76"/>
+                </a:solidFill>
+              </a:defRPr>
+            </a:pPr>
+            <a:r>
+              <a:t>Why This Matters: Poverty is Structural</a:t>
+            </a:r>
+          </a:p>
+        </p:txBody>
+      </p:sp>
+      <p:sp>
+        <p:nvSpPr>
+          <p:cNvPr id="3" name="TextBox 2"/>
+          <p:cNvSpPr txBox="1"/>
+          <p:nvPr/>
+        </p:nvSpPr>
+        <p:spPr>
+          <a:xfrm>
+            <a:off x="640080" y="1097280"/>
+            <a:ext cx="7863840" cy="4389120"/>
+          </a:xfrm>
+          <a:prstGeom prst="rect">
+            <a:avLst/>
+          </a:prstGeom>
+          <a:noFill/>
+        </p:spPr>
+        <p:txBody>
+          <a:bodyPr wrap="square">
+            <a:spAutoFit/>
+          </a:bodyPr>
+          <a:lstStyle/>
+          <a:p>
+            <a:pPr>
+              <a:defRPr sz="1400" b="1">
+                <a:solidFill>
+                  <a:srgbClr val="C80000"/>
+                </a:solidFill>
+              </a:defRPr>
+            </a:pPr>
+            <a:r>
+              <a:t>SMIC families cannot survive on SMIC income alone.</a:t>
+            </a:r>
+          </a:p>
+          <a:p>
+            <a:pPr>
+              <a:defRPr sz="1400">
+                <a:solidFill>
+                  <a:srgbClr val="000000"/>
+                </a:solidFill>
+              </a:defRPr>
+            </a:pPr>
+          </a:p>
+          <a:p>
+            <a:pPr>
+              <a:defRPr sz="1400">
+                <a:solidFill>
+                  <a:srgbClr val="000000"/>
+                </a:solidFill>
+              </a:defRPr>
+            </a:pPr>
+            <a:r>
+              <a:t>Government transfers (CAF, housing allowance: €300-550/month) are</a:t>
+            </a:r>
+          </a:p>
+          <a:p>
+            <a:pPr>
+              <a:defRPr sz="1400">
+                <a:solidFill>
+                  <a:srgbClr val="000000"/>
+                </a:solidFill>
+              </a:defRPr>
+            </a:pPr>
+            <a:r>
+              <a:t>structural survival requirement, not supplemental help.</a:t>
+            </a:r>
+          </a:p>
+          <a:p>
+            <a:pPr>
+              <a:defRPr sz="1400">
+                <a:solidFill>
+                  <a:srgbClr val="000000"/>
+                </a:solidFill>
+              </a:defRPr>
+            </a:pPr>
+          </a:p>
+          <a:p>
+            <a:pPr>
+              <a:defRPr sz="1400">
+                <a:solidFill>
+                  <a:srgbClr val="000000"/>
+                </a:solidFill>
+              </a:defRPr>
+            </a:pPr>
+            <a:r>
+              <a:t>With transfers, SMIC families break even with no margin for:</a:t>
+            </a:r>
+          </a:p>
+          <a:p>
+            <a:pPr>
+              <a:defRPr sz="1400">
+                <a:solidFill>
+                  <a:srgbClr val="646464"/>
+                </a:solidFill>
+              </a:defRPr>
+            </a:pPr>
+            <a:r>
+              <a:t>  • Emergencies (car repairs, medical events)</a:t>
+            </a:r>
+          </a:p>
+          <a:p>
+            <a:pPr>
+              <a:defRPr sz="1400">
+                <a:solidFill>
+                  <a:srgbClr val="646464"/>
+                </a:solidFill>
+              </a:defRPr>
+            </a:pPr>
+            <a:r>
+              <a:t>  • Savings (impossible)</a:t>
+            </a:r>
+          </a:p>
+          <a:p>
+            <a:pPr>
+              <a:defRPr sz="1400">
+                <a:solidFill>
+                  <a:srgbClr val="646464"/>
+                </a:solidFill>
+              </a:defRPr>
+            </a:pPr>
+            <a:r>
+              <a:t>  • Family composition changes (baby, aging parent)</a:t>
+            </a:r>
+          </a:p>
+          <a:p>
+            <a:pPr>
+              <a:defRPr sz="1400">
+                <a:solidFill>
+                  <a:srgbClr val="000000"/>
+                </a:solidFill>
+              </a:defRPr>
+            </a:pPr>
+          </a:p>
+          <a:p>
+            <a:pPr>
+              <a:defRPr sz="1400">
+                <a:solidFill>
+                  <a:srgbClr val="000000"/>
+                </a:solidFill>
+              </a:defRPr>
+            </a:pPr>
+            <a:r>
+              <a:t>When composition changes occur (teenage child costs €3,461/year more),</a:t>
+            </a:r>
+          </a:p>
+          <a:p>
+            <a:pPr>
+              <a:defRPr sz="1400" b="1">
+                <a:solidFill>
+                  <a:srgbClr val="C80000"/>
+                </a:solidFill>
+              </a:defRPr>
+            </a:pPr>
+            <a:r>
+              <a:t>SMIC families have NO margin to absorb the cost.</a:t>
+            </a:r>
+          </a:p>
+          <a:p>
+            <a:pPr>
+              <a:defRPr sz="1400">
+                <a:solidFill>
+                  <a:srgbClr val="000000"/>
+                </a:solidFill>
+              </a:defRPr>
+            </a:pPr>
+          </a:p>
+          <a:p>
+            <a:pPr>
+              <a:defRPr sz="1400" b="1">
+                <a:solidFill>
+                  <a:srgbClr val="C80000"/>
+                </a:solidFill>
+              </a:defRPr>
+            </a:pPr>
+            <a:r>
+              <a:t>Result: Debt accumulation OR going without essentials</a:t>
+            </a:r>
+          </a:p>
+        </p:txBody>
+      </p:sp>
+    </p:spTree>
+  </p:cSld>
+  <p:clrMapOvr>
+    <a:masterClrMapping/>
+  </p:clrMapOvr>
+</p:sld>
+</file>
+
+<file path=ppt/slides/slide4.xml><?xml version="1.0" encoding="utf-8"?>
+<p:sld xmlns:a="http://schemas.openxmlformats.org/drawingml/2006/main" xmlns:p="http://schemas.openxmlformats.org/presentationml/2006/main" xmlns:r="http://schemas.openxmlformats.org/officeDocument/2006/relationships">
+  <p:cSld>
+    <p:bg>
+      <p:bgPr>
+        <a:solidFill>
+          <a:srgbClr val="FFFFFF"/>
+        </a:solidFill>
+        <a:effectLst/>
+      </p:bgPr>
+    </p:bg>
+    <p:spTree>
+      <p:nvGrpSpPr>
+        <p:cNvPr id="1" name=""/>
+        <p:cNvGrpSpPr/>
+        <p:nvPr/>
+      </p:nvGrpSpPr>
+      <p:grpSpPr/>
+      <p:sp>
+        <p:nvSpPr>
+          <p:cNvPr id="2" name="Rectangle 1"/>
+          <p:cNvSpPr/>
+          <p:nvPr/>
+        </p:nvSpPr>
+        <p:spPr>
+          <a:xfrm>
+            <a:off x="0" y="0"/>
+            <a:ext cx="9144000" cy="822960"/>
+          </a:xfrm>
+          <a:prstGeom prst="rect">
+            <a:avLst/>
+          </a:prstGeom>
+          <a:solidFill>
+            <a:srgbClr val="1F4E79"/>
+          </a:solidFill>
+          <a:ln>
+            <a:solidFill>
+              <a:srgbClr val="1F4E79"/>
+            </a:solidFill>
+          </a:ln>
+        </p:spPr>
+        <p:style>
+          <a:lnRef idx="1">
+            <a:schemeClr val="accent1"/>
+          </a:lnRef>
+          <a:fillRef idx="3">
+            <a:schemeClr val="accent1"/>
+          </a:fillRef>
+          <a:effectRef idx="2">
+            <a:schemeClr val="accent1"/>
+          </a:effectRef>
+          <a:fontRef idx="minor">
+            <a:schemeClr val="lt1"/>
+          </a:fontRef>
+        </p:style>
+        <p:txBody>
+          <a:bodyPr rtlCol="0" anchor="ctr"/>
+          <a:lstStyle/>
+          <a:p>
+            <a:pPr algn="ctr">
+              <a:spcBef>
+                <a:spcPts val="1200"/>
+              </a:spcBef>
+              <a:spcAft>
+                <a:spcPts val="1200"/>
+              </a:spcAft>
+              <a:defRPr sz="4400" b="1">
+                <a:solidFill>
+                  <a:srgbClr val="FFFFFF"/>
+                </a:solidFill>
+              </a:defRPr>
+            </a:pPr>
+            <a:r>
+              <a:t>The Cost Gap: Official vs Real</a:t>
+            </a:r>
+          </a:p>
+        </p:txBody>
+      </p:sp>
+      <p:pic>
+        <p:nvPicPr>
+          <p:cNvPr id="3" name="Picture 2" descr="01_basket_comparison.png"/>
+          <p:cNvPicPr>
+            <a:picLocks noChangeAspect="1"/>
+          </p:cNvPicPr>
+          <p:nvPr/>
+        </p:nvPicPr>
+        <p:blipFill>
+          <a:blip r:embed="rId2"/>
+          <a:stretch>
+            <a:fillRect/>
+          </a:stretch>
+        </p:blipFill>
+        <p:spPr>
+          <a:xfrm>
+            <a:off x="457200" y="1188720"/>
+            <a:ext cx="11171556" cy="4754880"/>
+          </a:xfrm>
+          <a:prstGeom prst="rect">
+            <a:avLst/>
+          </a:prstGeom>
+        </p:spPr>
+      </p:pic>
+    </p:spTree>
+  </p:cSld>
+  <p:clrMapOvr>
+    <a:masterClrMapping/>
+  </p:clrMapOvr>
+</p:sld>
+</file>
+
+<file path=ppt/slides/slide5.xml><?xml version="1.0" encoding="utf-8"?>
+<p:sld xmlns:a="http://schemas.openxmlformats.org/drawingml/2006/main" xmlns:p="http://schemas.openxmlformats.org/presentationml/2006/main" xmlns:r="http://schemas.openxmlformats.org/officeDocument/2006/relationships">
   <p:cSld>
     <p:bg>
       <p:bgPr>
@@ -8196,14 +8750,7 @@
         <p:cNvGrpSpPr/>
         <p:nvPr/>
       </p:nvGrpSpPr>
-      <p:grpSpPr>
-        <a:xfrm>
-          <a:off x="0" y="0"/>
-          <a:ext cx="0" cy="0"/>
-          <a:chOff x="0" y="0"/>
-          <a:chExt cx="0" cy="0"/>
-        </a:xfrm>
-      </p:grpSpPr>
+      <p:grpSpPr/>
       <p:sp>
         <p:nvSpPr>
           <p:cNvPr id="2" name="TextBox 1"/>
@@ -8213,7 +8760,7 @@
         <p:spPr>
           <a:xfrm>
             <a:off x="914400" y="2286000"/>
-            <a:ext cx="7315200" cy="1754326"/>
+            <a:ext cx="7315200" cy="2286000"/>
           </a:xfrm>
           <a:prstGeom prst="rect">
             <a:avLst/>
@@ -8234,22 +8781,11 @@
               </a:defRPr>
             </a:pPr>
             <a:r>
-              <a:rPr sz="3600" dirty="0"/>
-              <a:t>Healthy eating is a luxury.</a:t>
-            </a:r>
-            <a:br>
-              <a:rPr sz="3600" dirty="0"/>
-            </a:br>
-            <a:r>
-              <a:rPr sz="3600" dirty="0"/>
-              <a:t>The poor must eat cheap (unhealthy).</a:t>
-            </a:r>
-            <a:br>
-              <a:rPr sz="3600" dirty="0"/>
-            </a:br>
-            <a:r>
-              <a:rPr sz="3600" dirty="0"/>
-              <a:t>The wealthy eat well.</a:t>
+              <a:t>Official inflation rates are built on incomplete baskets.</a:t>
+            </a:r>
+            <a:br/>
+            <a:r>
+              <a:t>They measure SURVIVAL, not LIVING.</a:t>
             </a:r>
           </a:p>
         </p:txBody>
@@ -8284,8 +8820,7 @@
               </a:defRPr>
             </a:pPr>
             <a:r>
-              <a:rPr dirty="0"/>
-              <a:t>CLICHE INSIGHT #2: Health as Inequality</a:t>
+              <a:t>CLICHE INSIGHT #1: The Incomplete Statistic</a:t>
             </a:r>
           </a:p>
         </p:txBody>
@@ -8298,8 +8833,8 @@
 </p:sld>
 </file>
 
-<file path=ppt/slides/slide9.xml><?xml version="1.0" encoding="utf-8"?>
-<p:sld xmlns:a="http://schemas.openxmlformats.org/drawingml/2006/main" xmlns:r="http://schemas.openxmlformats.org/officeDocument/2006/relationships" xmlns:p="http://schemas.openxmlformats.org/presentationml/2006/main">
+<file path=ppt/slides/slide6.xml><?xml version="1.0" encoding="utf-8"?>
+<p:sld xmlns:a="http://schemas.openxmlformats.org/drawingml/2006/main" xmlns:p="http://schemas.openxmlformats.org/presentationml/2006/main" xmlns:r="http://schemas.openxmlformats.org/officeDocument/2006/relationships">
   <p:cSld>
     <p:bg>
       <p:bgPr>
@@ -8315,14 +8850,504 @@
         <p:cNvGrpSpPr/>
         <p:nvPr/>
       </p:nvGrpSpPr>
-      <p:grpSpPr>
-        <a:xfrm>
-          <a:off x="0" y="0"/>
-          <a:ext cx="0" cy="0"/>
-          <a:chOff x="0" y="0"/>
-          <a:chExt cx="0" cy="0"/>
-        </a:xfrm>
-      </p:grpSpPr>
+      <p:grpSpPr/>
+      <p:sp>
+        <p:nvSpPr>
+          <p:cNvPr id="2" name="Rectangle 1"/>
+          <p:cNvSpPr/>
+          <p:nvPr/>
+        </p:nvSpPr>
+        <p:spPr>
+          <a:xfrm>
+            <a:off x="0" y="0"/>
+            <a:ext cx="9144000" cy="822960"/>
+          </a:xfrm>
+          <a:prstGeom prst="rect">
+            <a:avLst/>
+          </a:prstGeom>
+          <a:solidFill>
+            <a:srgbClr val="1F4E79"/>
+          </a:solidFill>
+          <a:ln>
+            <a:solidFill>
+              <a:srgbClr val="1F4E79"/>
+            </a:solidFill>
+          </a:ln>
+        </p:spPr>
+        <p:style>
+          <a:lnRef idx="1">
+            <a:schemeClr val="accent1"/>
+          </a:lnRef>
+          <a:fillRef idx="3">
+            <a:schemeClr val="accent1"/>
+          </a:fillRef>
+          <a:effectRef idx="2">
+            <a:schemeClr val="accent1"/>
+          </a:effectRef>
+          <a:fontRef idx="minor">
+            <a:schemeClr val="lt1"/>
+          </a:fontRef>
+        </p:style>
+        <p:txBody>
+          <a:bodyPr rtlCol="0" anchor="ctr"/>
+          <a:lstStyle/>
+          <a:p>
+            <a:pPr algn="ctr">
+              <a:spcBef>
+                <a:spcPts val="1200"/>
+              </a:spcBef>
+              <a:spcAft>
+                <a:spcPts val="1200"/>
+              </a:spcAft>
+              <a:defRPr sz="4400" b="1">
+                <a:solidFill>
+                  <a:srgbClr val="FFFFFF"/>
+                </a:solidFill>
+              </a:defRPr>
+            </a:pPr>
+            <a:r>
+              <a:t>The Affordability Cliff: When Real Costs Exceed Means</a:t>
+            </a:r>
+          </a:p>
+        </p:txBody>
+      </p:sp>
+      <p:pic>
+        <p:nvPicPr>
+          <p:cNvPr id="3" name="Picture 2" descr="02_affordability_cliffs.png"/>
+          <p:cNvPicPr>
+            <a:picLocks noChangeAspect="1"/>
+          </p:cNvPicPr>
+          <p:nvPr/>
+        </p:nvPicPr>
+        <p:blipFill>
+          <a:blip r:embed="rId2"/>
+          <a:stretch>
+            <a:fillRect/>
+          </a:stretch>
+        </p:blipFill>
+        <p:spPr>
+          <a:xfrm>
+            <a:off x="457200" y="1188720"/>
+            <a:ext cx="9758194" cy="4846320"/>
+          </a:xfrm>
+          <a:prstGeom prst="rect">
+            <a:avLst/>
+          </a:prstGeom>
+        </p:spPr>
+      </p:pic>
+    </p:spTree>
+  </p:cSld>
+  <p:clrMapOvr>
+    <a:masterClrMapping/>
+  </p:clrMapOvr>
+</p:sld>
+</file>
+
+<file path=ppt/slides/slide7.xml><?xml version="1.0" encoding="utf-8"?>
+<p:sld xmlns:a="http://schemas.openxmlformats.org/drawingml/2006/main" xmlns:p="http://schemas.openxmlformats.org/presentationml/2006/main" xmlns:r="http://schemas.openxmlformats.org/officeDocument/2006/relationships">
+  <p:cSld>
+    <p:bg>
+      <p:bgPr>
+        <a:solidFill>
+          <a:srgbClr val="FFFFFF"/>
+        </a:solidFill>
+        <a:effectLst/>
+      </p:bgPr>
+    </p:bg>
+    <p:spTree>
+      <p:nvGrpSpPr>
+        <p:cNvPr id="1" name=""/>
+        <p:cNvGrpSpPr/>
+        <p:nvPr/>
+      </p:nvGrpSpPr>
+      <p:grpSpPr/>
+      <p:sp>
+        <p:nvSpPr>
+          <p:cNvPr id="2" name="Rectangle 1"/>
+          <p:cNvSpPr/>
+          <p:nvPr/>
+        </p:nvSpPr>
+        <p:spPr>
+          <a:xfrm>
+            <a:off x="0" y="0"/>
+            <a:ext cx="9144000" cy="822960"/>
+          </a:xfrm>
+          <a:prstGeom prst="rect">
+            <a:avLst/>
+          </a:prstGeom>
+          <a:solidFill>
+            <a:srgbClr val="1F4E79"/>
+          </a:solidFill>
+          <a:ln>
+            <a:solidFill>
+              <a:srgbClr val="1F4E79"/>
+            </a:solidFill>
+          </a:ln>
+        </p:spPr>
+        <p:style>
+          <a:lnRef idx="1">
+            <a:schemeClr val="accent1"/>
+          </a:lnRef>
+          <a:fillRef idx="3">
+            <a:schemeClr val="accent1"/>
+          </a:fillRef>
+          <a:effectRef idx="2">
+            <a:schemeClr val="accent1"/>
+          </a:effectRef>
+          <a:fontRef idx="minor">
+            <a:schemeClr val="lt1"/>
+          </a:fontRef>
+        </p:style>
+        <p:txBody>
+          <a:bodyPr rtlCol="0" anchor="ctr"/>
+          <a:lstStyle/>
+          <a:p>
+            <a:pPr algn="ctr">
+              <a:spcBef>
+                <a:spcPts val="1200"/>
+              </a:spcBef>
+              <a:spcAft>
+                <a:spcPts val="1200"/>
+              </a:spcAft>
+              <a:defRPr sz="4400" b="1">
+                <a:solidFill>
+                  <a:srgbClr val="FFFFFF"/>
+                </a:solidFill>
+              </a:defRPr>
+            </a:pPr>
+            <a:r>
+              <a:t>Affordability by Paris Income Level</a:t>
+            </a:r>
+          </a:p>
+        </p:txBody>
+      </p:sp>
+      <p:sp>
+        <p:nvSpPr>
+          <p:cNvPr id="3" name="TextBox 2"/>
+          <p:cNvSpPr txBox="1"/>
+          <p:nvPr/>
+        </p:nvSpPr>
+        <p:spPr>
+          <a:xfrm>
+            <a:off x="731520" y="1188720"/>
+            <a:ext cx="7680960" cy="5212080"/>
+          </a:xfrm>
+          <a:prstGeom prst="rect">
+            <a:avLst/>
+          </a:prstGeom>
+          <a:noFill/>
+        </p:spPr>
+        <p:txBody>
+          <a:bodyPr wrap="square">
+            <a:spAutoFit/>
+          </a:bodyPr>
+          <a:lstStyle/>
+          <a:p>
+            <a:pPr>
+              <a:spcBef>
+                <a:spcPts val="600"/>
+              </a:spcBef>
+              <a:spcAft>
+                <a:spcPts val="800"/>
+              </a:spcAft>
+              <a:defRPr sz="2000">
+                <a:solidFill>
+                  <a:srgbClr val="333333"/>
+                </a:solidFill>
+              </a:defRPr>
+            </a:pPr>
+            <a:r>
+              <a:t>SMIC WORKERS (21,000 EUR/year):</a:t>
+            </a:r>
+          </a:p>
+          <a:p>
+            <a:pPr>
+              <a:spcBef>
+                <a:spcPts val="600"/>
+              </a:spcBef>
+              <a:spcAft>
+                <a:spcPts val="800"/>
+              </a:spcAft>
+              <a:defRPr sz="2000">
+                <a:solidFill>
+                  <a:srgbClr val="333333"/>
+                </a:solidFill>
+              </a:defRPr>
+            </a:pPr>
+            <a:r>
+              <a:t>  • Official basket: 9% of income (MANAGEABLE)</a:t>
+            </a:r>
+          </a:p>
+          <a:p>
+            <a:pPr>
+              <a:spcBef>
+                <a:spcPts val="600"/>
+              </a:spcBef>
+              <a:spcAft>
+                <a:spcPts val="800"/>
+              </a:spcAft>
+              <a:defRPr sz="2000">
+                <a:solidFill>
+                  <a:srgbClr val="333333"/>
+                </a:solidFill>
+              </a:defRPr>
+            </a:pPr>
+            <a:r>
+              <a:t>  • Real complete basket: 18% of income (DIFFICULT)</a:t>
+            </a:r>
+          </a:p>
+          <a:p>
+            <a:pPr>
+              <a:spcBef>
+                <a:spcPts val="600"/>
+              </a:spcBef>
+              <a:spcAft>
+                <a:spcPts val="800"/>
+              </a:spcAft>
+              <a:defRPr sz="2000">
+                <a:solidFill>
+                  <a:srgbClr val="333333"/>
+                </a:solidFill>
+              </a:defRPr>
+            </a:pPr>
+            <a:r>
+              <a:t>  • Healthy basket: 24% of income (CRISIS - NO MONEY FOR ANYTHING ELSE)</a:t>
+            </a:r>
+          </a:p>
+          <a:p>
+            <a:pPr>
+              <a:spcBef>
+                <a:spcPts val="600"/>
+              </a:spcBef>
+              <a:spcAft>
+                <a:spcPts val="800"/>
+              </a:spcAft>
+              <a:defRPr sz="2000">
+                <a:solidFill>
+                  <a:srgbClr val="333333"/>
+                </a:solidFill>
+              </a:defRPr>
+            </a:pPr>
+          </a:p>
+          <a:p>
+            <a:pPr>
+              <a:spcBef>
+                <a:spcPts val="600"/>
+              </a:spcBef>
+              <a:spcAft>
+                <a:spcPts val="800"/>
+              </a:spcAft>
+              <a:defRPr sz="2000">
+                <a:solidFill>
+                  <a:srgbClr val="333333"/>
+                </a:solidFill>
+              </a:defRPr>
+            </a:pPr>
+            <a:r>
+              <a:t>MEDIAN PARIS (42,000 EUR/year):</a:t>
+            </a:r>
+          </a:p>
+          <a:p>
+            <a:pPr>
+              <a:spcBef>
+                <a:spcPts val="600"/>
+              </a:spcBef>
+              <a:spcAft>
+                <a:spcPts val="800"/>
+              </a:spcAft>
+              <a:defRPr sz="2000">
+                <a:solidFill>
+                  <a:srgbClr val="333333"/>
+                </a:solidFill>
+              </a:defRPr>
+            </a:pPr>
+            <a:r>
+              <a:t>  • Real basket: 9% of income (MANAGEABLE)</a:t>
+            </a:r>
+          </a:p>
+          <a:p>
+            <a:pPr>
+              <a:spcBef>
+                <a:spcPts val="600"/>
+              </a:spcBef>
+              <a:spcAft>
+                <a:spcPts val="800"/>
+              </a:spcAft>
+              <a:defRPr sz="2000">
+                <a:solidFill>
+                  <a:srgbClr val="333333"/>
+                </a:solidFill>
+              </a:defRPr>
+            </a:pPr>
+            <a:r>
+              <a:t>  • Healthy basket: 12% of income (TIGHT)</a:t>
+            </a:r>
+          </a:p>
+          <a:p>
+            <a:pPr>
+              <a:spcBef>
+                <a:spcPts val="600"/>
+              </a:spcBef>
+              <a:spcAft>
+                <a:spcPts val="800"/>
+              </a:spcAft>
+              <a:defRPr sz="2000">
+                <a:solidFill>
+                  <a:srgbClr val="333333"/>
+                </a:solidFill>
+              </a:defRPr>
+            </a:pPr>
+          </a:p>
+          <a:p>
+            <a:pPr>
+              <a:spcBef>
+                <a:spcPts val="600"/>
+              </a:spcBef>
+              <a:spcAft>
+                <a:spcPts val="800"/>
+              </a:spcAft>
+              <a:defRPr sz="2000">
+                <a:solidFill>
+                  <a:srgbClr val="333333"/>
+                </a:solidFill>
+              </a:defRPr>
+            </a:pPr>
+            <a:r>
+              <a:t>THE CLIFF: Below 40k EUR annual income, healthy eating becomes IMPOSSIBLE</a:t>
+            </a:r>
+          </a:p>
+        </p:txBody>
+      </p:sp>
+    </p:spTree>
+  </p:cSld>
+  <p:clrMapOvr>
+    <a:masterClrMapping/>
+  </p:clrMapOvr>
+</p:sld>
+</file>
+
+<file path=ppt/slides/slide8.xml><?xml version="1.0" encoding="utf-8"?>
+<p:sld xmlns:a="http://schemas.openxmlformats.org/drawingml/2006/main" xmlns:p="http://schemas.openxmlformats.org/presentationml/2006/main" xmlns:r="http://schemas.openxmlformats.org/officeDocument/2006/relationships">
+  <p:cSld>
+    <p:bg>
+      <p:bgPr>
+        <a:solidFill>
+          <a:srgbClr val="1F4E79"/>
+        </a:solidFill>
+        <a:effectLst/>
+      </p:bgPr>
+    </p:bg>
+    <p:spTree>
+      <p:nvGrpSpPr>
+        <p:cNvPr id="1" name=""/>
+        <p:cNvGrpSpPr/>
+        <p:nvPr/>
+      </p:nvGrpSpPr>
+      <p:grpSpPr/>
+      <p:sp>
+        <p:nvSpPr>
+          <p:cNvPr id="2" name="TextBox 1"/>
+          <p:cNvSpPr txBox="1"/>
+          <p:nvPr/>
+        </p:nvSpPr>
+        <p:spPr>
+          <a:xfrm>
+            <a:off x="914400" y="2286000"/>
+            <a:ext cx="7315200" cy="2286000"/>
+          </a:xfrm>
+          <a:prstGeom prst="rect">
+            <a:avLst/>
+          </a:prstGeom>
+          <a:noFill/>
+        </p:spPr>
+        <p:txBody>
+          <a:bodyPr wrap="square">
+            <a:spAutoFit/>
+          </a:bodyPr>
+          <a:lstStyle/>
+          <a:p>
+            <a:pPr algn="ctr">
+              <a:defRPr sz="3200" b="1" i="1">
+                <a:solidFill>
+                  <a:srgbClr val="ED7D31"/>
+                </a:solidFill>
+              </a:defRPr>
+            </a:pPr>
+            <a:r>
+              <a:t>Healthy eating is a luxury.</a:t>
+            </a:r>
+            <a:br/>
+            <a:r>
+              <a:t>The poor must eat cheap (unhealthy).</a:t>
+            </a:r>
+            <a:br/>
+            <a:r>
+              <a:t>The wealthy eat well.</a:t>
+            </a:r>
+          </a:p>
+        </p:txBody>
+      </p:sp>
+      <p:sp>
+        <p:nvSpPr>
+          <p:cNvPr id="3" name="TextBox 2"/>
+          <p:cNvSpPr txBox="1"/>
+          <p:nvPr/>
+        </p:nvSpPr>
+        <p:spPr>
+          <a:xfrm>
+            <a:off x="914400" y="4754880"/>
+            <a:ext cx="7315200" cy="914400"/>
+          </a:xfrm>
+          <a:prstGeom prst="rect">
+            <a:avLst/>
+          </a:prstGeom>
+          <a:noFill/>
+        </p:spPr>
+        <p:txBody>
+          <a:bodyPr wrap="none">
+            <a:spAutoFit/>
+          </a:bodyPr>
+          <a:lstStyle/>
+          <a:p>
+            <a:pPr algn="ctr">
+              <a:defRPr sz="2000">
+                <a:solidFill>
+                  <a:srgbClr val="FFFFFF"/>
+                </a:solidFill>
+              </a:defRPr>
+            </a:pPr>
+            <a:r>
+              <a:t>CLICHE INSIGHT #2: Health as Inequality</a:t>
+            </a:r>
+          </a:p>
+        </p:txBody>
+      </p:sp>
+    </p:spTree>
+  </p:cSld>
+  <p:clrMapOvr>
+    <a:masterClrMapping/>
+  </p:clrMapOvr>
+</p:sld>
+</file>
+
+<file path=ppt/slides/slide9.xml><?xml version="1.0" encoding="utf-8"?>
+<p:sld xmlns:a="http://schemas.openxmlformats.org/drawingml/2006/main" xmlns:p="http://schemas.openxmlformats.org/presentationml/2006/main" xmlns:r="http://schemas.openxmlformats.org/officeDocument/2006/relationships">
+  <p:cSld>
+    <p:bg>
+      <p:bgPr>
+        <a:solidFill>
+          <a:srgbClr val="FFFFFF"/>
+        </a:solidFill>
+        <a:effectLst/>
+      </p:bgPr>
+    </p:bg>
+    <p:spTree>
+      <p:nvGrpSpPr>
+        <p:cNvPr id="1" name=""/>
+        <p:cNvGrpSpPr/>
+        <p:nvPr/>
+      </p:nvGrpSpPr>
+      <p:grpSpPr/>
       <p:sp>
         <p:nvSpPr>
           <p:cNvPr id="2" name="Rectangle 1"/>
